--- a/docs/report/CA3_Presentation_Geometric_Consistency.pptx
+++ b/docs/report/CA3_Presentation_Geometric_Consistency.pptx
@@ -24,6 +24,7 @@
     <p:sldId id="272" r:id="rId24"/>
     <p:sldId id="273" r:id="rId25"/>
     <p:sldId id="274" r:id="rId26"/>
+    <p:sldId id="275" r:id="rId27"/>
   </p:sldIdLst>
   <p:sldSz cx="12191695" cy="6858000" type="screen4x3"/>
   <p:notesSz cx="6858000" cy="9144000"/>
@@ -1010,7 +1011,7 @@
           <a:lstStyle/>
           <a:p>
             <a:r>
-              <a:t>Have two images ready: one real photograph that passes, one generated image that fails.</a:t>
+              <a:t>If asked why frontier models are missing: no API access was available; the design anticipates them and the prompts are already content-matched.</a:t>
             </a:r>
           </a:p>
         </p:txBody>
@@ -1080,7 +1081,7 @@
           <a:lstStyle/>
           <a:p>
             <a:r>
-              <a:t>If asked for one sentence, use the line at the bottom.</a:t>
+              <a:t>Have two images ready: one real photograph that passes, one generated image that fails.</a:t>
             </a:r>
           </a:p>
         </p:txBody>
@@ -1150,7 +1151,7 @@
           <a:lstStyle/>
           <a:p>
             <a:r>
-              <a:t>Frontier models are the highest-value next step and need no new code.</a:t>
+              <a:t>If asked for one sentence, use the line at the bottom.</a:t>
             </a:r>
           </a:p>
         </p:txBody>
@@ -1220,7 +1221,7 @@
           <a:lstStyle/>
           <a:p>
             <a:r>
-              <a:t>Verify all reference details against publisher records before submission.</a:t>
+              <a:t>Frontier models are the highest-value next step and need no new code.</a:t>
             </a:r>
           </a:p>
         </p:txBody>
@@ -1291,6 +1292,76 @@
           <a:p>
             <a:r>
               <a:t>Emphasise that these are consequences of projective geometry, not statistical tendencies.</a:t>
+            </a:r>
+          </a:p>
+        </p:txBody>
+      </p:sp>
+      <p:sp>
+        <p:nvSpPr>
+          <p:cNvPr id="4" name="Slide Number Placeholder 3"/>
+          <p:cNvSpPr>
+            <a:spLocks noGrp="1"/>
+          </p:cNvSpPr>
+          <p:nvPr>
+            <p:ph type="sldNum" idx="5" sz="quarter"/>
+          </p:nvPr>
+        </p:nvSpPr>
+        <p:spPr/>
+      </p:sp>
+    </p:spTree>
+  </p:cSld>
+  <p:clrMapOvr>
+    <a:masterClrMapping/>
+  </p:clrMapOvr>
+</p:notes>
+</file>
+
+<file path=ppt/notesSlides/notesSlide20.xml><?xml version="1.0" encoding="utf-8"?>
+<p:notes xmlns:a="http://schemas.openxmlformats.org/drawingml/2006/main" xmlns:p="http://schemas.openxmlformats.org/presentationml/2006/main" xmlns:r="http://schemas.openxmlformats.org/officeDocument/2006/relationships">
+  <p:cSld>
+    <p:spTree>
+      <p:nvGrpSpPr>
+        <p:cNvPr id="1" name=""/>
+        <p:cNvGrpSpPr/>
+        <p:nvPr/>
+      </p:nvGrpSpPr>
+      <p:grpSpPr>
+        <a:xfrm>
+          <a:off x="0" y="0"/>
+          <a:ext cx="0" cy="0"/>
+          <a:chOff x="0" y="0"/>
+          <a:chExt cx="0" cy="0"/>
+        </a:xfrm>
+      </p:grpSpPr>
+      <p:sp>
+        <p:nvSpPr>
+          <p:cNvPr id="2" name="Slide Image Placeholder 1"/>
+          <p:cNvSpPr>
+            <a:spLocks noGrp="1"/>
+          </p:cNvSpPr>
+          <p:nvPr>
+            <p:ph type="sldImg" idx="2"/>
+          </p:nvPr>
+        </p:nvSpPr>
+        <p:spPr/>
+      </p:sp>
+      <p:sp>
+        <p:nvSpPr>
+          <p:cNvPr id="3" name="Notes Placeholder 2"/>
+          <p:cNvSpPr>
+            <a:spLocks noGrp="1"/>
+          </p:cNvSpPr>
+          <p:nvPr>
+            <p:ph type="body" idx="3" sz="quarter"/>
+          </p:nvPr>
+        </p:nvSpPr>
+        <p:spPr/>
+        <p:txBody>
+          <a:bodyPr/>
+          <a:lstStyle/>
+          <a:p>
+            <a:r>
+              <a:t>Verify all reference details against publisher records before submission.</a:t>
             </a:r>
           </a:p>
         </p:txBody>
@@ -7105,7 +7176,7 @@
         </p:nvGraphicFramePr>
         <p:xfrm>
           <a:off x="640080" y="1828800"/>
-          <a:ext cx="10908791" cy="2011680"/>
+          <a:ext cx="10908792" cy="2011680"/>
         </p:xfrm>
         <a:graphic>
           <a:graphicData uri="http://schemas.openxmlformats.org/drawingml/2006/table">
@@ -7114,11 +7185,13 @@
                 <a:tableStyleId>{5C22544A-7EE6-4342-B048-85BDC9FD1C3A}</a:tableStyleId>
               </a:tblPr>
               <a:tblGrid>
-                <a:gridCol w="3017520"/>
-                <a:gridCol w="2103120"/>
-                <a:gridCol w="2103120"/>
-                <a:gridCol w="1828800"/>
-                <a:gridCol w="1856231"/>
+                <a:gridCol w="2514600"/>
+                <a:gridCol w="1508760"/>
+                <a:gridCol w="1508760"/>
+                <a:gridCol w="1417320"/>
+                <a:gridCol w="1417320"/>
+                <a:gridCol w="1271016"/>
+                <a:gridCol w="1271016"/>
               </a:tblGrid>
               <a:tr h="502920">
                 <a:tc>
@@ -7127,7 +7200,7 @@
                     <a:lstStyle/>
                     <a:p>
                       <a:r>
-                        <a:rPr sz="1150" b="1">
+                        <a:rPr sz="1000" b="1">
                           <a:solidFill>
                             <a:srgbClr val="FFFFFF"/>
                           </a:solidFill>
@@ -7149,7 +7222,7 @@
                     <a:lstStyle/>
                     <a:p>
                       <a:r>
-                        <a:rPr sz="1150" b="1">
+                        <a:rPr sz="1000" b="1">
                           <a:solidFill>
                             <a:srgbClr val="FFFFFF"/>
                           </a:solidFill>
@@ -7171,7 +7244,7 @@
                     <a:lstStyle/>
                     <a:p>
                       <a:r>
-                        <a:rPr sz="1150" b="1">
+                        <a:rPr sz="1000" b="1">
                           <a:solidFill>
                             <a:srgbClr val="FFFFFF"/>
                           </a:solidFill>
@@ -7193,7 +7266,7 @@
                     <a:lstStyle/>
                     <a:p>
                       <a:r>
-                        <a:rPr sz="1150" b="1">
+                        <a:rPr sz="1000" b="1">
                           <a:solidFill>
                             <a:srgbClr val="FFFFFF"/>
                           </a:solidFill>
@@ -7215,13 +7288,57 @@
                     <a:lstStyle/>
                     <a:p>
                       <a:r>
-                        <a:rPr sz="1150" b="1">
+                        <a:rPr sz="1000" b="1">
                           <a:solidFill>
                             <a:srgbClr val="FFFFFF"/>
                           </a:solidFill>
                           <a:latin typeface="Calibri"/>
                         </a:rPr>
                         <a:t>SDXL</a:t>
+                      </a:r>
+                    </a:p>
+                  </a:txBody>
+                  <a:tcPr anchor="ctr">
+                    <a:solidFill>
+                      <a:srgbClr val="12263A"/>
+                    </a:solidFill>
+                  </a:tcPr>
+                </a:tc>
+                <a:tc>
+                  <a:txBody>
+                    <a:bodyPr/>
+                    <a:lstStyle/>
+                    <a:p>
+                      <a:r>
+                        <a:rPr sz="1000" b="1">
+                          <a:solidFill>
+                            <a:srgbClr val="FFFFFF"/>
+                          </a:solidFill>
+                          <a:latin typeface="Calibri"/>
+                        </a:rPr>
+                        <a:t>Gemini</a:t>
+                      </a:r>
+                    </a:p>
+                  </a:txBody>
+                  <a:tcPr anchor="ctr">
+                    <a:solidFill>
+                      <a:srgbClr val="12263A"/>
+                    </a:solidFill>
+                  </a:tcPr>
+                </a:tc>
+                <a:tc>
+                  <a:txBody>
+                    <a:bodyPr/>
+                    <a:lstStyle/>
+                    <a:p>
+                      <a:r>
+                        <a:rPr sz="1000" b="1">
+                          <a:solidFill>
+                            <a:srgbClr val="FFFFFF"/>
+                          </a:solidFill>
+                          <a:latin typeface="Calibri"/>
+                        </a:rPr>
+                        <a:t>GPT-image</a:t>
                       </a:r>
                     </a:p>
                   </a:txBody>
@@ -7239,7 +7356,7 @@
                     <a:lstStyle/>
                     <a:p>
                       <a:r>
-                        <a:rPr sz="1150">
+                        <a:rPr sz="1000">
                           <a:solidFill>
                             <a:srgbClr val="1A1A1A"/>
                           </a:solidFill>
@@ -7261,7 +7378,7 @@
                     <a:lstStyle/>
                     <a:p>
                       <a:r>
-                        <a:rPr sz="1150">
+                        <a:rPr sz="1000">
                           <a:solidFill>
                             <a:srgbClr val="1A1A1A"/>
                           </a:solidFill>
@@ -7283,7 +7400,7 @@
                     <a:lstStyle/>
                     <a:p>
                       <a:r>
-                        <a:rPr sz="1150">
+                        <a:rPr sz="1000">
                           <a:solidFill>
                             <a:srgbClr val="1A1A1A"/>
                           </a:solidFill>
@@ -7305,7 +7422,7 @@
                     <a:lstStyle/>
                     <a:p>
                       <a:r>
-                        <a:rPr sz="1150">
+                        <a:rPr sz="1000">
                           <a:solidFill>
                             <a:srgbClr val="1A1A1A"/>
                           </a:solidFill>
@@ -7327,13 +7444,57 @@
                     <a:lstStyle/>
                     <a:p>
                       <a:r>
-                        <a:rPr sz="1150">
+                        <a:rPr sz="1000">
                           <a:solidFill>
                             <a:srgbClr val="1A1A1A"/>
                           </a:solidFill>
                           <a:latin typeface="Calibri"/>
                         </a:rPr>
                         <a:t>112</a:t>
+                      </a:r>
+                    </a:p>
+                  </a:txBody>
+                  <a:tcPr anchor="ctr">
+                    <a:solidFill>
+                      <a:srgbClr val="FFFFFF"/>
+                    </a:solidFill>
+                  </a:tcPr>
+                </a:tc>
+                <a:tc>
+                  <a:txBody>
+                    <a:bodyPr/>
+                    <a:lstStyle/>
+                    <a:p>
+                      <a:r>
+                        <a:rPr sz="1000">
+                          <a:solidFill>
+                            <a:srgbClr val="1A1A1A"/>
+                          </a:solidFill>
+                          <a:latin typeface="Calibri"/>
+                        </a:rPr>
+                        <a:t>—</a:t>
+                      </a:r>
+                    </a:p>
+                  </a:txBody>
+                  <a:tcPr anchor="ctr">
+                    <a:solidFill>
+                      <a:srgbClr val="FFFFFF"/>
+                    </a:solidFill>
+                  </a:tcPr>
+                </a:tc>
+                <a:tc>
+                  <a:txBody>
+                    <a:bodyPr/>
+                    <a:lstStyle/>
+                    <a:p>
+                      <a:r>
+                        <a:rPr sz="1000">
+                          <a:solidFill>
+                            <a:srgbClr val="1A1A1A"/>
+                          </a:solidFill>
+                          <a:latin typeface="Calibri"/>
+                        </a:rPr>
+                        <a:t>—</a:t>
                       </a:r>
                     </a:p>
                   </a:txBody>
@@ -7351,7 +7512,7 @@
                     <a:lstStyle/>
                     <a:p>
                       <a:r>
-                        <a:rPr sz="1150">
+                        <a:rPr sz="1000">
                           <a:solidFill>
                             <a:srgbClr val="1A1A1A"/>
                           </a:solidFill>
@@ -7373,7 +7534,7 @@
                     <a:lstStyle/>
                     <a:p>
                       <a:r>
-                        <a:rPr sz="1150">
+                        <a:rPr sz="1000">
                           <a:solidFill>
                             <a:srgbClr val="1A1A1A"/>
                           </a:solidFill>
@@ -7395,7 +7556,7 @@
                     <a:lstStyle/>
                     <a:p>
                       <a:r>
-                        <a:rPr sz="1150">
+                        <a:rPr sz="1000">
                           <a:solidFill>
                             <a:srgbClr val="1A1A1A"/>
                           </a:solidFill>
@@ -7417,7 +7578,7 @@
                     <a:lstStyle/>
                     <a:p>
                       <a:r>
-                        <a:rPr sz="1150">
+                        <a:rPr sz="1000">
                           <a:solidFill>
                             <a:srgbClr val="1A1A1A"/>
                           </a:solidFill>
@@ -7439,13 +7600,57 @@
                     <a:lstStyle/>
                     <a:p>
                       <a:r>
-                        <a:rPr sz="1150">
+                        <a:rPr sz="1000">
                           <a:solidFill>
                             <a:srgbClr val="1A1A1A"/>
                           </a:solidFill>
                           <a:latin typeface="Calibri"/>
                         </a:rPr>
                         <a:t>0.355 [0.272, 0.529]</a:t>
+                      </a:r>
+                    </a:p>
+                  </a:txBody>
+                  <a:tcPr anchor="ctr">
+                    <a:solidFill>
+                      <a:srgbClr val="F4F6F8"/>
+                    </a:solidFill>
+                  </a:tcPr>
+                </a:tc>
+                <a:tc>
+                  <a:txBody>
+                    <a:bodyPr/>
+                    <a:lstStyle/>
+                    <a:p>
+                      <a:r>
+                        <a:rPr sz="1000">
+                          <a:solidFill>
+                            <a:srgbClr val="1A1A1A"/>
+                          </a:solidFill>
+                          <a:latin typeface="Calibri"/>
+                        </a:rPr>
+                        <a:t>pending</a:t>
+                      </a:r>
+                    </a:p>
+                  </a:txBody>
+                  <a:tcPr anchor="ctr">
+                    <a:solidFill>
+                      <a:srgbClr val="F4F6F8"/>
+                    </a:solidFill>
+                  </a:tcPr>
+                </a:tc>
+                <a:tc>
+                  <a:txBody>
+                    <a:bodyPr/>
+                    <a:lstStyle/>
+                    <a:p>
+                      <a:r>
+                        <a:rPr sz="1000">
+                          <a:solidFill>
+                            <a:srgbClr val="1A1A1A"/>
+                          </a:solidFill>
+                          <a:latin typeface="Calibri"/>
+                        </a:rPr>
+                        <a:t>pending</a:t>
                       </a:r>
                     </a:p>
                   </a:txBody>
@@ -7463,7 +7668,7 @@
                     <a:lstStyle/>
                     <a:p>
                       <a:r>
-                        <a:rPr sz="1150">
+                        <a:rPr sz="1000">
                           <a:solidFill>
                             <a:srgbClr val="1A1A1A"/>
                           </a:solidFill>
@@ -7485,7 +7690,7 @@
                     <a:lstStyle/>
                     <a:p>
                       <a:r>
-                        <a:rPr sz="1150">
+                        <a:rPr sz="1000">
                           <a:solidFill>
                             <a:srgbClr val="1A1A1A"/>
                           </a:solidFill>
@@ -7507,7 +7712,7 @@
                     <a:lstStyle/>
                     <a:p>
                       <a:r>
-                        <a:rPr sz="1150">
+                        <a:rPr sz="1000">
                           <a:solidFill>
                             <a:srgbClr val="1A1A1A"/>
                           </a:solidFill>
@@ -7529,7 +7734,7 @@
                     <a:lstStyle/>
                     <a:p>
                       <a:r>
-                        <a:rPr sz="1150">
+                        <a:rPr sz="1000">
                           <a:solidFill>
                             <a:srgbClr val="1A1A1A"/>
                           </a:solidFill>
@@ -7551,7 +7756,7 @@
                     <a:lstStyle/>
                     <a:p>
                       <a:r>
-                        <a:rPr sz="1150">
+                        <a:rPr sz="1000">
                           <a:solidFill>
                             <a:srgbClr val="1A1A1A"/>
                           </a:solidFill>
@@ -7567,6 +7772,50 @@
                     </a:solidFill>
                   </a:tcPr>
                 </a:tc>
+                <a:tc>
+                  <a:txBody>
+                    <a:bodyPr/>
+                    <a:lstStyle/>
+                    <a:p>
+                      <a:r>
+                        <a:rPr sz="1000">
+                          <a:solidFill>
+                            <a:srgbClr val="1A1A1A"/>
+                          </a:solidFill>
+                          <a:latin typeface="Calibri"/>
+                        </a:rPr>
+                        <a:t>pending</a:t>
+                      </a:r>
+                    </a:p>
+                  </a:txBody>
+                  <a:tcPr anchor="ctr">
+                    <a:solidFill>
+                      <a:srgbClr val="FFFFFF"/>
+                    </a:solidFill>
+                  </a:tcPr>
+                </a:tc>
+                <a:tc>
+                  <a:txBody>
+                    <a:bodyPr/>
+                    <a:lstStyle/>
+                    <a:p>
+                      <a:r>
+                        <a:rPr sz="1000">
+                          <a:solidFill>
+                            <a:srgbClr val="1A1A1A"/>
+                          </a:solidFill>
+                          <a:latin typeface="Calibri"/>
+                        </a:rPr>
+                        <a:t>pending</a:t>
+                      </a:r>
+                    </a:p>
+                  </a:txBody>
+                  <a:tcPr anchor="ctr">
+                    <a:solidFill>
+                      <a:srgbClr val="FFFFFF"/>
+                    </a:solidFill>
+                  </a:tcPr>
+                </a:tc>
               </a:tr>
             </a:tbl>
           </a:graphicData>
@@ -7574,14 +7823,53 @@
       </p:graphicFrame>
       <p:sp>
         <p:nvSpPr>
-          <p:cNvPr id="6" name="Rounded Rectangle 5"/>
+          <p:cNvPr id="6" name="TextBox 5"/>
+          <p:cNvSpPr txBox="1"/>
+          <p:nvPr/>
+        </p:nvSpPr>
+        <p:spPr>
+          <a:xfrm>
+            <a:off x="640080" y="3858768"/>
+            <a:ext cx="10908792" cy="274320"/>
+          </a:xfrm>
+          <a:prstGeom prst="rect">
+            <a:avLst/>
+          </a:prstGeom>
+          <a:noFill/>
+        </p:spPr>
+        <p:txBody>
+          <a:bodyPr wrap="square" lIns="0" rIns="0" tIns="0" bIns="0" anchor="t">
+            <a:spAutoFit/>
+          </a:bodyPr>
+          <a:lstStyle/>
+          <a:p>
+            <a:pPr algn="l">
+              <a:spcAft>
+                <a:spcPts val="600"/>
+              </a:spcAft>
+            </a:pPr>
+            <a:r>
+              <a:rPr sz="1100" b="0" i="1">
+                <a:solidFill>
+                  <a:srgbClr val="E8A33D"/>
+                </a:solidFill>
+                <a:latin typeface="Calibri"/>
+              </a:rPr>
+              <a:t>Right-hand columns reserved for closed frontier models — same prompts, same pipeline, see the next slide.</a:t>
+            </a:r>
+          </a:p>
+        </p:txBody>
+      </p:sp>
+      <p:sp>
+        <p:nvSpPr>
+          <p:cNvPr id="7" name="Rounded Rectangle 6"/>
           <p:cNvSpPr/>
           <p:nvPr/>
         </p:nvSpPr>
         <p:spPr>
           <a:xfrm>
-            <a:off x="640080" y="4069080"/>
-            <a:ext cx="10908792" cy="1051560"/>
+            <a:off x="640080" y="4224528"/>
+            <a:ext cx="10908792" cy="1005840"/>
           </a:xfrm>
           <a:prstGeom prst="roundRect">
             <a:avLst>
@@ -7620,14 +7908,14 @@
       </p:sp>
       <p:sp>
         <p:nvSpPr>
-          <p:cNvPr id="7" name="TextBox 6"/>
+          <p:cNvPr id="8" name="TextBox 7"/>
           <p:cNvSpPr txBox="1"/>
           <p:nvPr/>
         </p:nvSpPr>
         <p:spPr>
           <a:xfrm>
-            <a:off x="914400" y="4224528"/>
-            <a:ext cx="10332720" cy="822960"/>
+            <a:off x="914400" y="4370832"/>
+            <a:ext cx="10332720" cy="777240"/>
           </a:xfrm>
           <a:prstGeom prst="rect">
             <a:avLst/>
@@ -7659,14 +7947,14 @@
       </p:sp>
       <p:sp>
         <p:nvSpPr>
-          <p:cNvPr id="8" name="TextBox 7"/>
+          <p:cNvPr id="9" name="TextBox 8"/>
           <p:cNvSpPr txBox="1"/>
           <p:nvPr/>
         </p:nvSpPr>
         <p:spPr>
           <a:xfrm>
-            <a:off x="640080" y="5349240"/>
-            <a:ext cx="10908792" cy="1188720"/>
+            <a:off x="640080" y="5440680"/>
+            <a:ext cx="10908792" cy="1097280"/>
           </a:xfrm>
           <a:prstGeom prst="rect">
             <a:avLst/>
@@ -8729,7 +9017,7 @@
                 </a:solidFill>
                 <a:latin typeface="Cambria"/>
               </a:rPr>
-              <a:t>Demonstration</a:t>
+              <a:t>Results 6: Frontier Models</a:t>
             </a:r>
           </a:p>
         </p:txBody>
@@ -8768,7 +9056,7 @@
                 </a:solidFill>
                 <a:latin typeface="Calibri"/>
               </a:rPr>
-              <a:t>Live: one image in, a diagnosed failure out</a:t>
+              <a:t>Reserved — the direct test of “has the geometric tell disappeared?”</a:t>
             </a:r>
           </a:p>
         </p:txBody>
@@ -8782,7 +9070,7 @@
         <p:spPr>
           <a:xfrm>
             <a:off x="640080" y="1828800"/>
-            <a:ext cx="5394960" cy="3931920"/>
+            <a:ext cx="5394960" cy="3749039"/>
           </a:xfrm>
           <a:prstGeom prst="roundRect">
             <a:avLst>
@@ -8828,7 +9116,7 @@
         <p:spPr>
           <a:xfrm>
             <a:off x="914400" y="2057400"/>
-            <a:ext cx="4846320" cy="411480"/>
+            <a:ext cx="4846320" cy="365760"/>
           </a:xfrm>
           <a:prstGeom prst="rect">
             <a:avLst/>
@@ -8853,7 +9141,7 @@
                 </a:solidFill>
                 <a:latin typeface="Calibri"/>
               </a:rPr>
-              <a:t>COMMAND</a:t>
+              <a:t>WHY THIS SLOT EXISTS</a:t>
             </a:r>
           </a:p>
         </p:txBody>
@@ -8867,7 +9155,7 @@
         <p:spPr>
           <a:xfrm>
             <a:off x="914400" y="2514600"/>
-            <a:ext cx="4846320" cy="457200"/>
+            <a:ext cx="4846320" cy="2834640"/>
           </a:xfrm>
           <a:prstGeom prst="rect">
             <a:avLst/>
@@ -8882,31 +9170,141 @@
           <a:p>
             <a:pPr algn="l">
               <a:spcAft>
-                <a:spcPts val="600"/>
-              </a:spcAft>
-            </a:pPr>
-            <a:r>
-              <a:rPr sz="1250" b="0" i="0">
-                <a:solidFill>
-                  <a:srgbClr val="1C7293"/>
-                </a:solidFill>
-                <a:latin typeface="Courier New"/>
-              </a:rPr>
-              <a:t>python scripts/analyze_image.py &lt;image&gt; --out outputs/</a:t>
-            </a:r>
-          </a:p>
-        </p:txBody>
-      </p:sp>
-      <p:sp>
-        <p:nvSpPr>
-          <p:cNvPr id="8" name="TextBox 7"/>
+                <a:spcPts val="400"/>
+              </a:spcAft>
+            </a:pPr>
+            <a:r>
+              <a:rPr sz="1300" b="0" i="0">
+                <a:solidFill>
+                  <a:srgbClr val="1A1A1A"/>
+                </a:solidFill>
+                <a:latin typeface="Calibri"/>
+              </a:rPr>
+              <a:t>SD 1.5 and SDXL are separated by about two years of model development. Across that gap orientation improves and camera coherence does not.</a:t>
+            </a:r>
+          </a:p>
+          <a:p>
+            <a:pPr algn="l">
+              <a:spcAft>
+                <a:spcPts val="400"/>
+              </a:spcAft>
+            </a:pPr>
+            <a:r>
+              <a:rPr sz="1300" b="0" i="0">
+                <a:solidFill>
+                  <a:srgbClr val="1A1A1A"/>
+                </a:solidFill>
+                <a:latin typeface="Calibri"/>
+              </a:rPr>
+              <a:t/>
+            </a:r>
+          </a:p>
+          <a:p>
+            <a:pPr algn="l">
+              <a:spcAft>
+                <a:spcPts val="400"/>
+              </a:spcAft>
+            </a:pPr>
+            <a:r>
+              <a:rPr sz="1300" b="0" i="0">
+                <a:solidFill>
+                  <a:srgbClr val="1A1A1A"/>
+                </a:solidFill>
+                <a:latin typeface="Calibri"/>
+              </a:rPr>
+              <a:t>A current frontier model is therefore the decisive test of the 2026 claim that the geometric tell is gone.</a:t>
+            </a:r>
+          </a:p>
+          <a:p>
+            <a:pPr algn="l">
+              <a:spcAft>
+                <a:spcPts val="400"/>
+              </a:spcAft>
+            </a:pPr>
+            <a:r>
+              <a:rPr sz="1300" b="0" i="0">
+                <a:solidFill>
+                  <a:srgbClr val="1A1A1A"/>
+                </a:solidFill>
+                <a:latin typeface="Calibri"/>
+              </a:rPr>
+              <a:t/>
+            </a:r>
+          </a:p>
+          <a:p>
+            <a:pPr algn="l">
+              <a:spcAft>
+                <a:spcPts val="400"/>
+              </a:spcAft>
+            </a:pPr>
+            <a:r>
+              <a:rPr sz="1300" b="0" i="0">
+                <a:solidFill>
+                  <a:srgbClr val="1A1A1A"/>
+                </a:solidFill>
+                <a:latin typeface="Calibri"/>
+              </a:rPr>
+              <a:t>The pipeline is model-agnostic: no code changes are needed to accept these images.</a:t>
+            </a:r>
+          </a:p>
+        </p:txBody>
+      </p:sp>
+      <p:sp>
+        <p:nvSpPr>
+          <p:cNvPr id="8" name="Rounded Rectangle 7"/>
+          <p:cNvSpPr/>
+          <p:nvPr/>
+        </p:nvSpPr>
+        <p:spPr>
+          <a:xfrm>
+            <a:off x="6245352" y="1828800"/>
+            <a:ext cx="5303520" cy="3749039"/>
+          </a:xfrm>
+          <a:prstGeom prst="roundRect">
+            <a:avLst>
+              <a:gd name="adj" fmla="val 6000"/>
+            </a:avLst>
+          </a:prstGeom>
+          <a:solidFill>
+            <a:srgbClr val="12263A"/>
+          </a:solidFill>
+          <a:ln>
+            <a:noFill/>
+          </a:ln>
+          <a:effectLst/>
+        </p:spPr>
+        <p:style>
+          <a:lnRef idx="1">
+            <a:schemeClr val="accent1"/>
+          </a:lnRef>
+          <a:fillRef idx="3">
+            <a:schemeClr val="accent1"/>
+          </a:fillRef>
+          <a:effectRef idx="2">
+            <a:schemeClr val="accent1"/>
+          </a:effectRef>
+          <a:fontRef idx="minor">
+            <a:schemeClr val="lt1"/>
+          </a:fontRef>
+        </p:style>
+        <p:txBody>
+          <a:bodyPr rtlCol="0" anchor="ctr"/>
+          <a:lstStyle/>
+          <a:p>
+            <a:pPr algn="ctr"/>
+          </a:p>
+        </p:txBody>
+      </p:sp>
+      <p:sp>
+        <p:nvSpPr>
+          <p:cNvPr id="9" name="TextBox 8"/>
           <p:cNvSpPr txBox="1"/>
           <p:nvPr/>
         </p:nvSpPr>
         <p:spPr>
           <a:xfrm>
-            <a:off x="914400" y="3108960"/>
-            <a:ext cx="4846320" cy="411480"/>
+            <a:off x="6519672" y="2057400"/>
+            <a:ext cx="4754880" cy="365760"/>
           </a:xfrm>
           <a:prstGeom prst="rect">
             <a:avLst/>
@@ -8927,25 +9325,25 @@
             <a:r>
               <a:rPr sz="1200" b="1" i="0">
                 <a:solidFill>
-                  <a:srgbClr val="12263A"/>
+                  <a:srgbClr val="E8A33D"/>
                 </a:solidFill>
                 <a:latin typeface="Calibri"/>
               </a:rPr>
-              <a:t>OUTPUT</a:t>
-            </a:r>
-          </a:p>
-        </p:txBody>
-      </p:sp>
-      <p:sp>
-        <p:nvSpPr>
-          <p:cNvPr id="9" name="TextBox 8"/>
+              <a:t>PROCEDURE</a:t>
+            </a:r>
+          </a:p>
+        </p:txBody>
+      </p:sp>
+      <p:sp>
+        <p:nvSpPr>
+          <p:cNvPr id="10" name="TextBox 9"/>
           <p:cNvSpPr txBox="1"/>
           <p:nvPr/>
         </p:nvSpPr>
         <p:spPr>
           <a:xfrm>
-            <a:off x="914400" y="3520440"/>
-            <a:ext cx="4846320" cy="2011680"/>
+            <a:off x="6519672" y="2514600"/>
+            <a:ext cx="4754880" cy="2926080"/>
           </a:xfrm>
           <a:prstGeom prst="rect">
             <a:avLst/>
@@ -8960,63 +9358,95 @@
           <a:p>
             <a:pPr>
               <a:spcAft>
-                <a:spcPts val="700"/>
-              </a:spcAft>
-            </a:pPr>
-            <a:r>
-              <a:rPr sz="1250" b="0">
-                <a:solidFill>
-                  <a:srgbClr val="1A1A1A"/>
+                <a:spcPts val="600"/>
+              </a:spcAft>
+            </a:pPr>
+            <a:r>
+              <a:rPr sz="1200" b="0">
+                <a:solidFill>
+                  <a:srgbClr val="FFFFFF"/>
                 </a:solidFill>
                 <a:latin typeface="Calibri"/>
               </a:rPr>
-              <a:t>•  Overlay: segments coloured by VP cluster</a:t>
+              <a:t>•  Same 200 prompts, already exported to data/generated/prompts.txt</a:t>
             </a:r>
           </a:p>
           <a:p>
             <a:pPr>
               <a:spcAft>
-                <a:spcPts val="700"/>
-              </a:spcAft>
-            </a:pPr>
-            <a:r>
-              <a:rPr sz="1250" b="0">
-                <a:solidFill>
-                  <a:srgbClr val="1A1A1A"/>
+                <a:spcPts val="600"/>
+              </a:spcAft>
+            </a:pPr>
+            <a:r>
+              <a:rPr sz="1200" b="0">
+                <a:solidFill>
+                  <a:srgbClr val="FFFFFF"/>
                 </a:solidFill>
                 <a:latin typeface="Calibri"/>
               </a:rPr>
-              <a:t>•  Vanishing points and the orthocentre vs image centre</a:t>
+              <a:t>•  Save as 0000.png, 0001.png … keeping the prompt index, into data/generated/gemini/ and data/generated/gptimage/</a:t>
             </a:r>
           </a:p>
           <a:p>
             <a:pPr>
               <a:spcAft>
-                <a:spcPts val="700"/>
-              </a:spcAft>
-            </a:pPr>
-            <a:r>
-              <a:rPr sz="1250" b="0">
-                <a:solidFill>
-                  <a:srgbClr val="1A1A1A"/>
+                <a:spcPts val="600"/>
+              </a:spcAft>
+            </a:pPr>
+            <a:r>
+              <a:rPr sz="1200" b="0">
+                <a:solidFill>
+                  <a:srgbClr val="FFFFFF"/>
                 </a:solidFill>
                 <a:latin typeface="Calibri"/>
               </a:rPr>
-              <a:t>•  JSON of every residual, and a CSV summary row</a:t>
-            </a:r>
-          </a:p>
-        </p:txBody>
-      </p:sp>
-      <p:sp>
-        <p:nvSpPr>
-          <p:cNvPr id="10" name="Rounded Rectangle 9"/>
+              <a:t>•  Record model version and date in a README.txt per folder</a:t>
+            </a:r>
+          </a:p>
+          <a:p>
+            <a:pPr>
+              <a:spcAft>
+                <a:spcPts val="600"/>
+              </a:spcAft>
+            </a:pPr>
+            <a:r>
+              <a:rPr sz="1200" b="0">
+                <a:solidFill>
+                  <a:srgbClr val="FFFFFF"/>
+                </a:solidFill>
+                <a:latin typeface="Calibri"/>
+              </a:rPr>
+              <a:t>•  Run scripts/atlanta_compare.py with the new folders appended to --gen</a:t>
+            </a:r>
+          </a:p>
+          <a:p>
+            <a:pPr>
+              <a:spcAft>
+                <a:spcPts val="600"/>
+              </a:spcAft>
+            </a:pPr>
+            <a:r>
+              <a:rPr sz="1200" b="0">
+                <a:solidFill>
+                  <a:srgbClr val="FFFFFF"/>
+                </a:solidFill>
+                <a:latin typeface="Calibri"/>
+              </a:rPr>
+              <a:t>•  30–50 images per model is enough for the median and its interval</a:t>
+            </a:r>
+          </a:p>
+        </p:txBody>
+      </p:sp>
+      <p:sp>
+        <p:nvSpPr>
+          <p:cNvPr id="11" name="Rounded Rectangle 10"/>
           <p:cNvSpPr/>
           <p:nvPr/>
         </p:nvSpPr>
         <p:spPr>
           <a:xfrm>
-            <a:off x="6309360" y="1828800"/>
-            <a:ext cx="5239512" cy="1828800"/>
+            <a:off x="640080" y="5715000"/>
+            <a:ext cx="10908792" cy="914400"/>
           </a:xfrm>
           <a:prstGeom prst="roundRect">
             <a:avLst>
@@ -9057,14 +9487,14 @@
       </p:sp>
       <p:sp>
         <p:nvSpPr>
-          <p:cNvPr id="11" name="TextBox 10"/>
+          <p:cNvPr id="12" name="TextBox 11"/>
           <p:cNvSpPr txBox="1"/>
           <p:nvPr/>
         </p:nvSpPr>
         <p:spPr>
           <a:xfrm>
-            <a:off x="6537960" y="2029968"/>
-            <a:ext cx="4782312" cy="1426464"/>
+            <a:off x="868680" y="5916168"/>
+            <a:ext cx="10451592" cy="512064"/>
           </a:xfrm>
           <a:prstGeom prst="rect">
             <a:avLst/>
@@ -9089,70 +9519,7 @@
                 </a:solidFill>
                 <a:latin typeface="Calibri"/>
               </a:rPr>
-              <a:t>[TO ADD] Screenshot of the terminal running analyze_image.py on one generated image, showing the printed residuals.</a:t>
-            </a:r>
-          </a:p>
-        </p:txBody>
-      </p:sp>
-      <p:pic>
-        <p:nvPicPr>
-          <p:cNvPr id="12" name="Picture 11" descr="example_sdxl_0010_three_cameras.png"/>
-          <p:cNvPicPr>
-            <a:picLocks noChangeAspect="1"/>
-          </p:cNvPicPr>
-          <p:nvPr/>
-        </p:nvPicPr>
-        <p:blipFill>
-          <a:blip r:embed="rId2"/>
-          <a:stretch>
-            <a:fillRect/>
-          </a:stretch>
-        </p:blipFill>
-        <p:spPr>
-          <a:xfrm>
-            <a:off x="7360920" y="3840480"/>
-            <a:ext cx="2326005" cy="1691640"/>
-          </a:xfrm>
-          <a:prstGeom prst="rect">
-            <a:avLst/>
-          </a:prstGeom>
-        </p:spPr>
-      </p:pic>
-      <p:sp>
-        <p:nvSpPr>
-          <p:cNvPr id="13" name="TextBox 12"/>
-          <p:cNvSpPr txBox="1"/>
-          <p:nvPr/>
-        </p:nvSpPr>
-        <p:spPr>
-          <a:xfrm>
-            <a:off x="6309360" y="5669280"/>
-            <a:ext cx="5239512" cy="640080"/>
-          </a:xfrm>
-          <a:prstGeom prst="rect">
-            <a:avLst/>
-          </a:prstGeom>
-          <a:noFill/>
-        </p:spPr>
-        <p:txBody>
-          <a:bodyPr wrap="square" lIns="0" rIns="0" tIns="0" bIns="0" anchor="t">
-            <a:spAutoFit/>
-          </a:bodyPr>
-          <a:lstStyle/>
-          <a:p>
-            <a:pPr algn="l">
-              <a:spcAft>
-                <a:spcPts val="600"/>
-              </a:spcAft>
-            </a:pPr>
-            <a:r>
-              <a:rPr sz="1150" b="0" i="1">
-                <a:solidFill>
-                  <a:srgbClr val="5A6672"/>
-                </a:solidFill>
-                <a:latin typeface="Calibri"/>
-              </a:rPr>
-              <a:t>A generated street scene whose three VP pairs imply focal lengths of 1626, 321 and 951 px — three different cameras in one image.</a:t>
+              <a:t>[TO ADD] Once the images exist, paste the two new columns into the Results 3 table and replace this slide with the comparison figure produced by atlanta_compare.py.</a:t>
             </a:r>
           </a:p>
         </p:txBody>
@@ -9190,7 +9557,7 @@
             <a:avLst/>
           </a:prstGeom>
           <a:solidFill>
-            <a:srgbClr val="12263A"/>
+            <a:srgbClr val="FFFFFF"/>
           </a:solidFill>
           <a:ln>
             <a:noFill/>
@@ -9249,31 +9616,72 @@
             <a:r>
               <a:rPr sz="3200" b="1" i="0">
                 <a:solidFill>
-                  <a:srgbClr val="FFFFFF"/>
+                  <a:srgbClr val="12263A"/>
                 </a:solidFill>
                 <a:latin typeface="Cambria"/>
               </a:rPr>
-              <a:t>Conclusion</a:t>
-            </a:r>
-          </a:p>
-        </p:txBody>
-      </p:sp>
-      <p:sp>
-        <p:nvSpPr>
-          <p:cNvPr id="4" name="Oval 3"/>
+              <a:t>Demonstration</a:t>
+            </a:r>
+          </a:p>
+        </p:txBody>
+      </p:sp>
+      <p:sp>
+        <p:nvSpPr>
+          <p:cNvPr id="4" name="TextBox 3"/>
+          <p:cNvSpPr txBox="1"/>
+          <p:nvPr/>
+        </p:nvSpPr>
+        <p:spPr>
+          <a:xfrm>
+            <a:off x="640080" y="1207008"/>
+            <a:ext cx="10911535" cy="411480"/>
+          </a:xfrm>
+          <a:prstGeom prst="rect">
+            <a:avLst/>
+          </a:prstGeom>
+          <a:noFill/>
+        </p:spPr>
+        <p:txBody>
+          <a:bodyPr wrap="square" lIns="0" rIns="0" tIns="0" bIns="0" anchor="t">
+            <a:spAutoFit/>
+          </a:bodyPr>
+          <a:lstStyle/>
+          <a:p>
+            <a:pPr algn="l">
+              <a:spcAft>
+                <a:spcPts val="600"/>
+              </a:spcAft>
+            </a:pPr>
+            <a:r>
+              <a:rPr sz="1400" b="0" i="1">
+                <a:solidFill>
+                  <a:srgbClr val="5A6672"/>
+                </a:solidFill>
+                <a:latin typeface="Calibri"/>
+              </a:rPr>
+              <a:t>Live: one image in, a diagnosed failure out</a:t>
+            </a:r>
+          </a:p>
+        </p:txBody>
+      </p:sp>
+      <p:sp>
+        <p:nvSpPr>
+          <p:cNvPr id="5" name="Rounded Rectangle 4"/>
           <p:cNvSpPr/>
           <p:nvPr/>
         </p:nvSpPr>
         <p:spPr>
           <a:xfrm>
-            <a:off x="685800" y="1984248"/>
-            <a:ext cx="274320" cy="274320"/>
-          </a:xfrm>
-          <a:prstGeom prst="ellipse">
-            <a:avLst/>
+            <a:off x="640080" y="1828800"/>
+            <a:ext cx="5394960" cy="3931920"/>
+          </a:xfrm>
+          <a:prstGeom prst="roundRect">
+            <a:avLst>
+              <a:gd name="adj" fmla="val 6000"/>
+            </a:avLst>
           </a:prstGeom>
           <a:solidFill>
-            <a:srgbClr val="E8A33D"/>
+            <a:srgbClr val="F4F6F8"/>
           </a:solidFill>
           <a:ln>
             <a:noFill/>
@@ -9304,14 +9712,14 @@
       </p:sp>
       <p:sp>
         <p:nvSpPr>
-          <p:cNvPr id="5" name="TextBox 4"/>
+          <p:cNvPr id="6" name="TextBox 5"/>
           <p:cNvSpPr txBox="1"/>
           <p:nvPr/>
         </p:nvSpPr>
         <p:spPr>
           <a:xfrm>
-            <a:off x="1188720" y="1874519"/>
-            <a:ext cx="10332720" cy="411480"/>
+            <a:off x="914400" y="2057400"/>
+            <a:ext cx="4846320" cy="411480"/>
           </a:xfrm>
           <a:prstGeom prst="rect">
             <a:avLst/>
@@ -9330,27 +9738,27 @@
               </a:spcAft>
             </a:pPr>
             <a:r>
-              <a:rPr sz="1700" b="1" i="0">
-                <a:solidFill>
-                  <a:srgbClr val="FFFFFF"/>
-                </a:solidFill>
-                <a:latin typeface="Cambria"/>
-              </a:rPr>
-              <a:t>Generators reproduce orientation, not the camera</a:t>
-            </a:r>
-          </a:p>
-        </p:txBody>
-      </p:sp>
-      <p:sp>
-        <p:nvSpPr>
-          <p:cNvPr id="6" name="TextBox 5"/>
+              <a:rPr sz="1200" b="1" i="0">
+                <a:solidFill>
+                  <a:srgbClr val="12263A"/>
+                </a:solidFill>
+                <a:latin typeface="Calibri"/>
+              </a:rPr>
+              <a:t>COMMAND</a:t>
+            </a:r>
+          </a:p>
+        </p:txBody>
+      </p:sp>
+      <p:sp>
+        <p:nvSpPr>
+          <p:cNvPr id="7" name="TextBox 6"/>
           <p:cNvSpPr txBox="1"/>
           <p:nvPr/>
         </p:nvSpPr>
         <p:spPr>
           <a:xfrm>
-            <a:off x="1188720" y="2331720"/>
-            <a:ext cx="10332720" cy="594360"/>
+            <a:off x="914400" y="2514600"/>
+            <a:ext cx="4846320" cy="457200"/>
           </a:xfrm>
           <a:prstGeom prst="rect">
             <a:avLst/>
@@ -9369,36 +9777,150 @@
               </a:spcAft>
             </a:pPr>
             <a:r>
-              <a:rPr sz="1300" b="0" i="0">
-                <a:solidFill>
-                  <a:srgbClr val="B9CDDA"/>
+              <a:rPr sz="1250" b="0" i="0">
+                <a:solidFill>
+                  <a:srgbClr val="1C7293"/>
+                </a:solidFill>
+                <a:latin typeface="Courier New"/>
+              </a:rPr>
+              <a:t>python scripts/analyze_image.py &lt;image&gt; --out outputs/</a:t>
+            </a:r>
+          </a:p>
+        </p:txBody>
+      </p:sp>
+      <p:sp>
+        <p:nvSpPr>
+          <p:cNvPr id="8" name="TextBox 7"/>
+          <p:cNvSpPr txBox="1"/>
+          <p:nvPr/>
+        </p:nvSpPr>
+        <p:spPr>
+          <a:xfrm>
+            <a:off x="914400" y="3108960"/>
+            <a:ext cx="4846320" cy="411480"/>
+          </a:xfrm>
+          <a:prstGeom prst="rect">
+            <a:avLst/>
+          </a:prstGeom>
+          <a:noFill/>
+        </p:spPr>
+        <p:txBody>
+          <a:bodyPr wrap="square" lIns="0" rIns="0" tIns="0" bIns="0" anchor="t">
+            <a:spAutoFit/>
+          </a:bodyPr>
+          <a:lstStyle/>
+          <a:p>
+            <a:pPr algn="l">
+              <a:spcAft>
+                <a:spcPts val="600"/>
+              </a:spcAft>
+            </a:pPr>
+            <a:r>
+              <a:rPr sz="1200" b="1" i="0">
+                <a:solidFill>
+                  <a:srgbClr val="12263A"/>
                 </a:solidFill>
                 <a:latin typeface="Calibri"/>
               </a:rPr>
-              <a:t>Manhattan orthogonality is comparable to real photographs after control; focal and principal-point coherence is 2.5-3× worse.</a:t>
-            </a:r>
-          </a:p>
-        </p:txBody>
-      </p:sp>
-      <p:sp>
-        <p:nvSpPr>
-          <p:cNvPr id="7" name="Oval 6"/>
+              <a:t>OUTPUT</a:t>
+            </a:r>
+          </a:p>
+        </p:txBody>
+      </p:sp>
+      <p:sp>
+        <p:nvSpPr>
+          <p:cNvPr id="9" name="TextBox 8"/>
+          <p:cNvSpPr txBox="1"/>
+          <p:nvPr/>
+        </p:nvSpPr>
+        <p:spPr>
+          <a:xfrm>
+            <a:off x="914400" y="3520440"/>
+            <a:ext cx="4846320" cy="2011680"/>
+          </a:xfrm>
+          <a:prstGeom prst="rect">
+            <a:avLst/>
+          </a:prstGeom>
+          <a:noFill/>
+        </p:spPr>
+        <p:txBody>
+          <a:bodyPr wrap="square" lIns="0" rIns="0" tIns="0" bIns="0">
+            <a:spAutoFit/>
+          </a:bodyPr>
+          <a:lstStyle/>
+          <a:p>
+            <a:pPr>
+              <a:spcAft>
+                <a:spcPts val="700"/>
+              </a:spcAft>
+            </a:pPr>
+            <a:r>
+              <a:rPr sz="1250" b="0">
+                <a:solidFill>
+                  <a:srgbClr val="1A1A1A"/>
+                </a:solidFill>
+                <a:latin typeface="Calibri"/>
+              </a:rPr>
+              <a:t>•  Overlay: segments coloured by VP cluster</a:t>
+            </a:r>
+          </a:p>
+          <a:p>
+            <a:pPr>
+              <a:spcAft>
+                <a:spcPts val="700"/>
+              </a:spcAft>
+            </a:pPr>
+            <a:r>
+              <a:rPr sz="1250" b="0">
+                <a:solidFill>
+                  <a:srgbClr val="1A1A1A"/>
+                </a:solidFill>
+                <a:latin typeface="Calibri"/>
+              </a:rPr>
+              <a:t>•  Vanishing points and the orthocentre vs image centre</a:t>
+            </a:r>
+          </a:p>
+          <a:p>
+            <a:pPr>
+              <a:spcAft>
+                <a:spcPts val="700"/>
+              </a:spcAft>
+            </a:pPr>
+            <a:r>
+              <a:rPr sz="1250" b="0">
+                <a:solidFill>
+                  <a:srgbClr val="1A1A1A"/>
+                </a:solidFill>
+                <a:latin typeface="Calibri"/>
+              </a:rPr>
+              <a:t>•  JSON of every residual, and a CSV summary row</a:t>
+            </a:r>
+          </a:p>
+        </p:txBody>
+      </p:sp>
+      <p:sp>
+        <p:nvSpPr>
+          <p:cNvPr id="10" name="Rounded Rectangle 9"/>
           <p:cNvSpPr/>
           <p:nvPr/>
         </p:nvSpPr>
         <p:spPr>
           <a:xfrm>
-            <a:off x="685800" y="3099815"/>
-            <a:ext cx="274320" cy="274320"/>
-          </a:xfrm>
-          <a:prstGeom prst="ellipse">
-            <a:avLst/>
+            <a:off x="6309360" y="1828800"/>
+            <a:ext cx="5239512" cy="1828800"/>
+          </a:xfrm>
+          <a:prstGeom prst="roundRect">
+            <a:avLst>
+              <a:gd name="adj" fmla="val 6000"/>
+            </a:avLst>
           </a:prstGeom>
           <a:solidFill>
-            <a:srgbClr val="E8A33D"/>
+            <a:srgbClr val="FDF3E2"/>
           </a:solidFill>
-          <a:ln>
-            <a:noFill/>
+          <a:ln w="15875">
+            <a:solidFill>
+              <a:srgbClr val="E8A33D"/>
+            </a:solidFill>
           </a:ln>
           <a:effectLst/>
         </p:spPr>
@@ -9426,14 +9948,14 @@
       </p:sp>
       <p:sp>
         <p:nvSpPr>
-          <p:cNvPr id="8" name="TextBox 7"/>
+          <p:cNvPr id="11" name="TextBox 10"/>
           <p:cNvSpPr txBox="1"/>
           <p:nvPr/>
         </p:nvSpPr>
         <p:spPr>
           <a:xfrm>
-            <a:off x="1188720" y="2990087"/>
-            <a:ext cx="10332720" cy="411480"/>
+            <a:off x="6537960" y="2029968"/>
+            <a:ext cx="4782312" cy="1426464"/>
           </a:xfrm>
           <a:prstGeom prst="rect">
             <a:avLst/>
@@ -9452,27 +9974,51 @@
               </a:spcAft>
             </a:pPr>
             <a:r>
-              <a:rPr sz="1700" b="1" i="0">
-                <a:solidFill>
-                  <a:srgbClr val="FFFFFF"/>
-                </a:solidFill>
-                <a:latin typeface="Cambria"/>
-              </a:rPr>
-              <a:t>The result is robust to the real reference</a:t>
-            </a:r>
-          </a:p>
-        </p:txBody>
-      </p:sp>
-      <p:sp>
-        <p:nvSpPr>
-          <p:cNvPr id="9" name="TextBox 8"/>
+              <a:rPr sz="1200" b="0" i="1">
+                <a:solidFill>
+                  <a:srgbClr val="8A5A12"/>
+                </a:solidFill>
+                <a:latin typeface="Calibri"/>
+              </a:rPr>
+              <a:t>[TO ADD] Screenshot of the terminal running analyze_image.py on one generated image, showing the printed residuals.</a:t>
+            </a:r>
+          </a:p>
+        </p:txBody>
+      </p:sp>
+      <p:pic>
+        <p:nvPicPr>
+          <p:cNvPr id="12" name="Picture 11" descr="example_sdxl_0010_three_cameras.png"/>
+          <p:cNvPicPr>
+            <a:picLocks noChangeAspect="1"/>
+          </p:cNvPicPr>
+          <p:nvPr/>
+        </p:nvPicPr>
+        <p:blipFill>
+          <a:blip r:embed="rId2"/>
+          <a:stretch>
+            <a:fillRect/>
+          </a:stretch>
+        </p:blipFill>
+        <p:spPr>
+          <a:xfrm>
+            <a:off x="7360920" y="3840480"/>
+            <a:ext cx="2326005" cy="1691640"/>
+          </a:xfrm>
+          <a:prstGeom prst="rect">
+            <a:avLst/>
+          </a:prstGeom>
+        </p:spPr>
+      </p:pic>
+      <p:sp>
+        <p:nvSpPr>
+          <p:cNvPr id="13" name="TextBox 12"/>
           <p:cNvSpPr txBox="1"/>
           <p:nvPr/>
         </p:nvSpPr>
         <p:spPr>
           <a:xfrm>
-            <a:off x="1188720" y="3447287"/>
-            <a:ext cx="10332720" cy="594360"/>
+            <a:off x="6309360" y="5669280"/>
+            <a:ext cx="5239512" cy="640080"/>
           </a:xfrm>
           <a:prstGeom prst="rect">
             <a:avLst/>
@@ -9491,296 +10037,13 @@
               </a:spcAft>
             </a:pPr>
             <a:r>
-              <a:rPr sz="1300" b="0" i="0">
-                <a:solidFill>
-                  <a:srgbClr val="B9CDDA"/>
+              <a:rPr sz="1150" b="0" i="1">
+                <a:solidFill>
+                  <a:srgbClr val="5A6672"/>
                 </a:solidFill>
                 <a:latin typeface="Calibri"/>
               </a:rPr>
-              <a:t>Both a curated benchmark and uncurated internet photographs give the same conclusion, with non-overlapping confidence intervals.</a:t>
-            </a:r>
-          </a:p>
-        </p:txBody>
-      </p:sp>
-      <p:sp>
-        <p:nvSpPr>
-          <p:cNvPr id="10" name="Oval 9"/>
-          <p:cNvSpPr/>
-          <p:nvPr/>
-        </p:nvSpPr>
-        <p:spPr>
-          <a:xfrm>
-            <a:off x="685800" y="4215384"/>
-            <a:ext cx="274320" cy="274320"/>
-          </a:xfrm>
-          <a:prstGeom prst="ellipse">
-            <a:avLst/>
-          </a:prstGeom>
-          <a:solidFill>
-            <a:srgbClr val="E8A33D"/>
-          </a:solidFill>
-          <a:ln>
-            <a:noFill/>
-          </a:ln>
-          <a:effectLst/>
-        </p:spPr>
-        <p:style>
-          <a:lnRef idx="1">
-            <a:schemeClr val="accent1"/>
-          </a:lnRef>
-          <a:fillRef idx="3">
-            <a:schemeClr val="accent1"/>
-          </a:fillRef>
-          <a:effectRef idx="2">
-            <a:schemeClr val="accent1"/>
-          </a:effectRef>
-          <a:fontRef idx="minor">
-            <a:schemeClr val="lt1"/>
-          </a:fontRef>
-        </p:style>
-        <p:txBody>
-          <a:bodyPr rtlCol="0" anchor="ctr"/>
-          <a:lstStyle/>
-          <a:p>
-            <a:pPr algn="ctr"/>
-          </a:p>
-        </p:txBody>
-      </p:sp>
-      <p:sp>
-        <p:nvSpPr>
-          <p:cNvPr id="11" name="TextBox 10"/>
-          <p:cNvSpPr txBox="1"/>
-          <p:nvPr/>
-        </p:nvSpPr>
-        <p:spPr>
-          <a:xfrm>
-            <a:off x="1188720" y="4105656"/>
-            <a:ext cx="10332720" cy="411480"/>
-          </a:xfrm>
-          <a:prstGeom prst="rect">
-            <a:avLst/>
-          </a:prstGeom>
-          <a:noFill/>
-        </p:spPr>
-        <p:txBody>
-          <a:bodyPr wrap="square" lIns="0" rIns="0" tIns="0" bIns="0" anchor="t">
-            <a:spAutoFit/>
-          </a:bodyPr>
-          <a:lstStyle/>
-          <a:p>
-            <a:pPr algn="l">
-              <a:spcAft>
-                <a:spcPts val="600"/>
-              </a:spcAft>
-            </a:pPr>
-            <a:r>
-              <a:rPr sz="1700" b="1" i="0">
-                <a:solidFill>
-                  <a:srgbClr val="FFFFFF"/>
-                </a:solidFill>
-                <a:latin typeface="Cambria"/>
-              </a:rPr>
-              <a:t>Scale is not closing the gap</a:t>
-            </a:r>
-          </a:p>
-        </p:txBody>
-      </p:sp>
-      <p:sp>
-        <p:nvSpPr>
-          <p:cNvPr id="12" name="TextBox 11"/>
-          <p:cNvSpPr txBox="1"/>
-          <p:nvPr/>
-        </p:nvSpPr>
-        <p:spPr>
-          <a:xfrm>
-            <a:off x="1188720" y="4562856"/>
-            <a:ext cx="10332720" cy="594360"/>
-          </a:xfrm>
-          <a:prstGeom prst="rect">
-            <a:avLst/>
-          </a:prstGeom>
-          <a:noFill/>
-        </p:spPr>
-        <p:txBody>
-          <a:bodyPr wrap="square" lIns="0" rIns="0" tIns="0" bIns="0" anchor="t">
-            <a:spAutoFit/>
-          </a:bodyPr>
-          <a:lstStyle/>
-          <a:p>
-            <a:pPr algn="l">
-              <a:spcAft>
-                <a:spcPts val="600"/>
-              </a:spcAft>
-            </a:pPr>
-            <a:r>
-              <a:rPr sz="1300" b="0" i="0">
-                <a:solidFill>
-                  <a:srgbClr val="B9CDDA"/>
-                </a:solidFill>
-                <a:latin typeface="Calibri"/>
-              </a:rPr>
-              <a:t>SD 1.5 → SDXL improves orientation significantly and leaves camera coherence unchanged.</a:t>
-            </a:r>
-          </a:p>
-        </p:txBody>
-      </p:sp>
-      <p:sp>
-        <p:nvSpPr>
-          <p:cNvPr id="13" name="Oval 12"/>
-          <p:cNvSpPr/>
-          <p:nvPr/>
-        </p:nvSpPr>
-        <p:spPr>
-          <a:xfrm>
-            <a:off x="685800" y="5330952"/>
-            <a:ext cx="274320" cy="274320"/>
-          </a:xfrm>
-          <a:prstGeom prst="ellipse">
-            <a:avLst/>
-          </a:prstGeom>
-          <a:solidFill>
-            <a:srgbClr val="E8A33D"/>
-          </a:solidFill>
-          <a:ln>
-            <a:noFill/>
-          </a:ln>
-          <a:effectLst/>
-        </p:spPr>
-        <p:style>
-          <a:lnRef idx="1">
-            <a:schemeClr val="accent1"/>
-          </a:lnRef>
-          <a:fillRef idx="3">
-            <a:schemeClr val="accent1"/>
-          </a:fillRef>
-          <a:effectRef idx="2">
-            <a:schemeClr val="accent1"/>
-          </a:effectRef>
-          <a:fontRef idx="minor">
-            <a:schemeClr val="lt1"/>
-          </a:fontRef>
-        </p:style>
-        <p:txBody>
-          <a:bodyPr rtlCol="0" anchor="ctr"/>
-          <a:lstStyle/>
-          <a:p>
-            <a:pPr algn="ctr"/>
-          </a:p>
-        </p:txBody>
-      </p:sp>
-      <p:sp>
-        <p:nvSpPr>
-          <p:cNvPr id="14" name="TextBox 13"/>
-          <p:cNvSpPr txBox="1"/>
-          <p:nvPr/>
-        </p:nvSpPr>
-        <p:spPr>
-          <a:xfrm>
-            <a:off x="1188720" y="5221224"/>
-            <a:ext cx="10332720" cy="411480"/>
-          </a:xfrm>
-          <a:prstGeom prst="rect">
-            <a:avLst/>
-          </a:prstGeom>
-          <a:noFill/>
-        </p:spPr>
-        <p:txBody>
-          <a:bodyPr wrap="square" lIns="0" rIns="0" tIns="0" bIns="0" anchor="t">
-            <a:spAutoFit/>
-          </a:bodyPr>
-          <a:lstStyle/>
-          <a:p>
-            <a:pPr algn="l">
-              <a:spcAft>
-                <a:spcPts val="600"/>
-              </a:spcAft>
-            </a:pPr>
-            <a:r>
-              <a:rPr sz="1700" b="1" i="0">
-                <a:solidFill>
-                  <a:srgbClr val="FFFFFF"/>
-                </a:solidFill>
-                <a:latin typeface="Cambria"/>
-              </a:rPr>
-              <a:t>Applicability must be tested, not assumed</a:t>
-            </a:r>
-          </a:p>
-        </p:txBody>
-      </p:sp>
-      <p:sp>
-        <p:nvSpPr>
-          <p:cNvPr id="15" name="TextBox 14"/>
-          <p:cNvSpPr txBox="1"/>
-          <p:nvPr/>
-        </p:nvSpPr>
-        <p:spPr>
-          <a:xfrm>
-            <a:off x="1188720" y="5678424"/>
-            <a:ext cx="10332720" cy="594360"/>
-          </a:xfrm>
-          <a:prstGeom prst="rect">
-            <a:avLst/>
-          </a:prstGeom>
-          <a:noFill/>
-        </p:spPr>
-        <p:txBody>
-          <a:bodyPr wrap="square" lIns="0" rIns="0" tIns="0" bIns="0" anchor="t">
-            <a:spAutoFit/>
-          </a:bodyPr>
-          <a:lstStyle/>
-          <a:p>
-            <a:pPr algn="l">
-              <a:spcAft>
-                <a:spcPts val="600"/>
-              </a:spcAft>
-            </a:pPr>
-            <a:r>
-              <a:rPr sz="1300" b="0" i="0">
-                <a:solidFill>
-                  <a:srgbClr val="B9CDDA"/>
-                </a:solidFill>
-                <a:latin typeface="Calibri"/>
-              </a:rPr>
-              <a:t>The three-VP test is undefined for non-Manhattan scenes; ignoring this reverses the verdict.</a:t>
-            </a:r>
-          </a:p>
-        </p:txBody>
-      </p:sp>
-      <p:sp>
-        <p:nvSpPr>
-          <p:cNvPr id="16" name="TextBox 15"/>
-          <p:cNvSpPr txBox="1"/>
-          <p:nvPr/>
-        </p:nvSpPr>
-        <p:spPr>
-          <a:xfrm>
-            <a:off x="685800" y="6355080"/>
-            <a:ext cx="10908792" cy="365760"/>
-          </a:xfrm>
-          <a:prstGeom prst="rect">
-            <a:avLst/>
-          </a:prstGeom>
-          <a:noFill/>
-        </p:spPr>
-        <p:txBody>
-          <a:bodyPr wrap="square" lIns="0" rIns="0" tIns="0" bIns="0" anchor="t">
-            <a:spAutoFit/>
-          </a:bodyPr>
-          <a:lstStyle/>
-          <a:p>
-            <a:pPr algn="l">
-              <a:spcAft>
-                <a:spcPts val="600"/>
-              </a:spcAft>
-            </a:pPr>
-            <a:r>
-              <a:rPr sz="1400" b="1" i="1">
-                <a:solidFill>
-                  <a:srgbClr val="E8A33D"/>
-                </a:solidFill>
-                <a:latin typeface="Calibri"/>
-              </a:rPr>
-              <a:t>Thesis: a generated image is locally photographic but has no single camera behind it.</a:t>
+              <a:t>A generated street scene whose three VP pairs imply focal lengths of 1626, 321 and 951 px — three different cameras in one image.</a:t>
             </a:r>
           </a:p>
         </p:txBody>
@@ -9818,303 +10081,6 @@
             <a:avLst/>
           </a:prstGeom>
           <a:solidFill>
-            <a:srgbClr val="FFFFFF"/>
-          </a:solidFill>
-          <a:ln>
-            <a:noFill/>
-          </a:ln>
-          <a:effectLst/>
-        </p:spPr>
-        <p:style>
-          <a:lnRef idx="1">
-            <a:schemeClr val="accent1"/>
-          </a:lnRef>
-          <a:fillRef idx="3">
-            <a:schemeClr val="accent1"/>
-          </a:fillRef>
-          <a:effectRef idx="2">
-            <a:schemeClr val="accent1"/>
-          </a:effectRef>
-          <a:fontRef idx="minor">
-            <a:schemeClr val="lt1"/>
-          </a:fontRef>
-        </p:style>
-        <p:txBody>
-          <a:bodyPr rtlCol="0" anchor="ctr"/>
-          <a:lstStyle/>
-          <a:p>
-            <a:pPr algn="ctr"/>
-          </a:p>
-        </p:txBody>
-      </p:sp>
-      <p:sp>
-        <p:nvSpPr>
-          <p:cNvPr id="3" name="TextBox 2"/>
-          <p:cNvSpPr txBox="1"/>
-          <p:nvPr/>
-        </p:nvSpPr>
-        <p:spPr>
-          <a:xfrm>
-            <a:off x="640080" y="457200"/>
-            <a:ext cx="10911535" cy="822960"/>
-          </a:xfrm>
-          <a:prstGeom prst="rect">
-            <a:avLst/>
-          </a:prstGeom>
-          <a:noFill/>
-        </p:spPr>
-        <p:txBody>
-          <a:bodyPr wrap="square" lIns="0" rIns="0" tIns="0" bIns="0" anchor="t">
-            <a:spAutoFit/>
-          </a:bodyPr>
-          <a:lstStyle/>
-          <a:p>
-            <a:pPr algn="l">
-              <a:spcAft>
-                <a:spcPts val="600"/>
-              </a:spcAft>
-            </a:pPr>
-            <a:r>
-              <a:rPr sz="3200" b="1" i="0">
-                <a:solidFill>
-                  <a:srgbClr val="12263A"/>
-                </a:solidFill>
-                <a:latin typeface="Cambria"/>
-              </a:rPr>
-              <a:t>Future Scope</a:t>
-            </a:r>
-          </a:p>
-        </p:txBody>
-      </p:sp>
-      <p:sp>
-        <p:nvSpPr>
-          <p:cNvPr id="4" name="Rounded Rectangle 3"/>
-          <p:cNvSpPr/>
-          <p:nvPr/>
-        </p:nvSpPr>
-        <p:spPr>
-          <a:xfrm>
-            <a:off x="640080" y="1920240"/>
-            <a:ext cx="3520440" cy="1874519"/>
-          </a:xfrm>
-          <a:prstGeom prst="roundRect">
-            <a:avLst>
-              <a:gd name="adj" fmla="val 6000"/>
-            </a:avLst>
-          </a:prstGeom>
-          <a:solidFill>
-            <a:srgbClr val="F4F6F8"/>
-          </a:solidFill>
-          <a:ln>
-            <a:noFill/>
-          </a:ln>
-          <a:effectLst/>
-        </p:spPr>
-        <p:style>
-          <a:lnRef idx="1">
-            <a:schemeClr val="accent1"/>
-          </a:lnRef>
-          <a:fillRef idx="3">
-            <a:schemeClr val="accent1"/>
-          </a:fillRef>
-          <a:effectRef idx="2">
-            <a:schemeClr val="accent1"/>
-          </a:effectRef>
-          <a:fontRef idx="minor">
-            <a:schemeClr val="lt1"/>
-          </a:fontRef>
-        </p:style>
-        <p:txBody>
-          <a:bodyPr rtlCol="0" anchor="ctr"/>
-          <a:lstStyle/>
-          <a:p>
-            <a:pPr algn="ctr"/>
-          </a:p>
-        </p:txBody>
-      </p:sp>
-      <p:sp>
-        <p:nvSpPr>
-          <p:cNvPr id="5" name="Oval 4"/>
-          <p:cNvSpPr/>
-          <p:nvPr/>
-        </p:nvSpPr>
-        <p:spPr>
-          <a:xfrm>
-            <a:off x="914400" y="2176272"/>
-            <a:ext cx="329184" cy="329184"/>
-          </a:xfrm>
-          <a:prstGeom prst="ellipse">
-            <a:avLst/>
-          </a:prstGeom>
-          <a:solidFill>
-            <a:srgbClr val="1C7293"/>
-          </a:solidFill>
-          <a:ln>
-            <a:noFill/>
-          </a:ln>
-          <a:effectLst/>
-        </p:spPr>
-        <p:style>
-          <a:lnRef idx="1">
-            <a:schemeClr val="accent1"/>
-          </a:lnRef>
-          <a:fillRef idx="3">
-            <a:schemeClr val="accent1"/>
-          </a:fillRef>
-          <a:effectRef idx="2">
-            <a:schemeClr val="accent1"/>
-          </a:effectRef>
-          <a:fontRef idx="minor">
-            <a:schemeClr val="lt1"/>
-          </a:fontRef>
-        </p:style>
-        <p:txBody>
-          <a:bodyPr rtlCol="0" anchor="ctr"/>
-          <a:lstStyle/>
-          <a:p>
-            <a:pPr algn="ctr"/>
-          </a:p>
-        </p:txBody>
-      </p:sp>
-      <p:sp>
-        <p:nvSpPr>
-          <p:cNvPr id="6" name="TextBox 5"/>
-          <p:cNvSpPr txBox="1"/>
-          <p:nvPr/>
-        </p:nvSpPr>
-        <p:spPr>
-          <a:xfrm>
-            <a:off x="1389888" y="2194560"/>
-            <a:ext cx="2560320" cy="365760"/>
-          </a:xfrm>
-          <a:prstGeom prst="rect">
-            <a:avLst/>
-          </a:prstGeom>
-          <a:noFill/>
-        </p:spPr>
-        <p:txBody>
-          <a:bodyPr wrap="square" lIns="0" rIns="0" tIns="0" bIns="0" anchor="t">
-            <a:spAutoFit/>
-          </a:bodyPr>
-          <a:lstStyle/>
-          <a:p>
-            <a:pPr algn="l">
-              <a:spcAft>
-                <a:spcPts val="600"/>
-              </a:spcAft>
-            </a:pPr>
-            <a:r>
-              <a:rPr sz="1450" b="1" i="0">
-                <a:solidFill>
-                  <a:srgbClr val="12263A"/>
-                </a:solidFill>
-                <a:latin typeface="Cambria"/>
-              </a:rPr>
-              <a:t>Frontier models</a:t>
-            </a:r>
-          </a:p>
-        </p:txBody>
-      </p:sp>
-      <p:sp>
-        <p:nvSpPr>
-          <p:cNvPr id="7" name="TextBox 6"/>
-          <p:cNvSpPr txBox="1"/>
-          <p:nvPr/>
-        </p:nvSpPr>
-        <p:spPr>
-          <a:xfrm>
-            <a:off x="914400" y="2697480"/>
-            <a:ext cx="2971800" cy="960120"/>
-          </a:xfrm>
-          <a:prstGeom prst="rect">
-            <a:avLst/>
-          </a:prstGeom>
-          <a:noFill/>
-        </p:spPr>
-        <p:txBody>
-          <a:bodyPr wrap="square" lIns="0" rIns="0" tIns="0" bIns="0" anchor="t">
-            <a:spAutoFit/>
-          </a:bodyPr>
-          <a:lstStyle/>
-          <a:p>
-            <a:pPr algn="l">
-              <a:spcAft>
-                <a:spcPts val="600"/>
-              </a:spcAft>
-            </a:pPr>
-            <a:r>
-              <a:rPr sz="1200" b="0" i="0">
-                <a:solidFill>
-                  <a:srgbClr val="5A6672"/>
-                </a:solidFill>
-                <a:latin typeface="Calibri"/>
-              </a:rPr>
-              <a:t>Gemini, GPT-image and FLUX on the same prompt set — prompts already exported and the analysis is model-agnostic.</a:t>
-            </a:r>
-          </a:p>
-        </p:txBody>
-      </p:sp>
-      <p:sp>
-        <p:nvSpPr>
-          <p:cNvPr id="8" name="Rounded Rectangle 7"/>
-          <p:cNvSpPr/>
-          <p:nvPr/>
-        </p:nvSpPr>
-        <p:spPr>
-          <a:xfrm>
-            <a:off x="4407408" y="1920240"/>
-            <a:ext cx="3520440" cy="1874519"/>
-          </a:xfrm>
-          <a:prstGeom prst="roundRect">
-            <a:avLst>
-              <a:gd name="adj" fmla="val 6000"/>
-            </a:avLst>
-          </a:prstGeom>
-          <a:solidFill>
-            <a:srgbClr val="F4F6F8"/>
-          </a:solidFill>
-          <a:ln>
-            <a:noFill/>
-          </a:ln>
-          <a:effectLst/>
-        </p:spPr>
-        <p:style>
-          <a:lnRef idx="1">
-            <a:schemeClr val="accent1"/>
-          </a:lnRef>
-          <a:fillRef idx="3">
-            <a:schemeClr val="accent1"/>
-          </a:fillRef>
-          <a:effectRef idx="2">
-            <a:schemeClr val="accent1"/>
-          </a:effectRef>
-          <a:fontRef idx="minor">
-            <a:schemeClr val="lt1"/>
-          </a:fontRef>
-        </p:style>
-        <p:txBody>
-          <a:bodyPr rtlCol="0" anchor="ctr"/>
-          <a:lstStyle/>
-          <a:p>
-            <a:pPr algn="ctr"/>
-          </a:p>
-        </p:txBody>
-      </p:sp>
-      <p:sp>
-        <p:nvSpPr>
-          <p:cNvPr id="9" name="Oval 8"/>
-          <p:cNvSpPr/>
-          <p:nvPr/>
-        </p:nvSpPr>
-        <p:spPr>
-          <a:xfrm>
-            <a:off x="4681728" y="2176272"/>
-            <a:ext cx="329184" cy="329184"/>
-          </a:xfrm>
-          <a:prstGeom prst="ellipse">
-            <a:avLst/>
-          </a:prstGeom>
-          <a:solidFill>
             <a:srgbClr val="12263A"/>
           </a:solidFill>
           <a:ln>
@@ -10146,14 +10112,14 @@
       </p:sp>
       <p:sp>
         <p:nvSpPr>
-          <p:cNvPr id="10" name="TextBox 9"/>
+          <p:cNvPr id="3" name="TextBox 2"/>
           <p:cNvSpPr txBox="1"/>
           <p:nvPr/>
         </p:nvSpPr>
         <p:spPr>
           <a:xfrm>
-            <a:off x="5157216" y="2194560"/>
-            <a:ext cx="2560320" cy="365760"/>
+            <a:off x="640080" y="457200"/>
+            <a:ext cx="10911535" cy="822960"/>
           </a:xfrm>
           <a:prstGeom prst="rect">
             <a:avLst/>
@@ -10172,280 +10138,27 @@
               </a:spcAft>
             </a:pPr>
             <a:r>
-              <a:rPr sz="1450" b="1" i="0">
-                <a:solidFill>
-                  <a:srgbClr val="12263A"/>
+              <a:rPr sz="3200" b="1" i="0">
+                <a:solidFill>
+                  <a:srgbClr val="FFFFFF"/>
                 </a:solidFill>
                 <a:latin typeface="Cambria"/>
               </a:rPr>
-              <a:t>Shadow association</a:t>
-            </a:r>
-          </a:p>
-        </p:txBody>
-      </p:sp>
-      <p:sp>
-        <p:nvSpPr>
-          <p:cNvPr id="11" name="TextBox 10"/>
-          <p:cNvSpPr txBox="1"/>
-          <p:nvPr/>
-        </p:nvSpPr>
-        <p:spPr>
-          <a:xfrm>
-            <a:off x="4681728" y="2697480"/>
-            <a:ext cx="2971800" cy="960120"/>
-          </a:xfrm>
-          <a:prstGeom prst="rect">
-            <a:avLst/>
-          </a:prstGeom>
-          <a:noFill/>
-        </p:spPr>
-        <p:txBody>
-          <a:bodyPr wrap="square" lIns="0" rIns="0" tIns="0" bIns="0" anchor="t">
-            <a:spAutoFit/>
-          </a:bodyPr>
-          <a:lstStyle/>
-          <a:p>
-            <a:pPr algn="l">
-              <a:spcAft>
-                <a:spcPts val="600"/>
-              </a:spcAft>
-            </a:pPr>
-            <a:r>
-              <a:rPr sz="1200" b="0" i="0">
-                <a:solidFill>
-                  <a:srgbClr val="5A6672"/>
-                </a:solidFill>
-                <a:latin typeface="Calibri"/>
-              </a:rPr>
-              <a:t>SSIS or SAM 2 for object-shadow pairs; the wedge LP above it is built and validated.</a:t>
-            </a:r>
-          </a:p>
-        </p:txBody>
-      </p:sp>
-      <p:sp>
-        <p:nvSpPr>
-          <p:cNvPr id="12" name="Rounded Rectangle 11"/>
+              <a:t>Conclusion</a:t>
+            </a:r>
+          </a:p>
+        </p:txBody>
+      </p:sp>
+      <p:sp>
+        <p:nvSpPr>
+          <p:cNvPr id="4" name="Oval 3"/>
           <p:cNvSpPr/>
           <p:nvPr/>
         </p:nvSpPr>
         <p:spPr>
           <a:xfrm>
-            <a:off x="8174736" y="1920240"/>
-            <a:ext cx="3520440" cy="1874519"/>
-          </a:xfrm>
-          <a:prstGeom prst="roundRect">
-            <a:avLst>
-              <a:gd name="adj" fmla="val 6000"/>
-            </a:avLst>
-          </a:prstGeom>
-          <a:solidFill>
-            <a:srgbClr val="F4F6F8"/>
-          </a:solidFill>
-          <a:ln>
-            <a:noFill/>
-          </a:ln>
-          <a:effectLst/>
-        </p:spPr>
-        <p:style>
-          <a:lnRef idx="1">
-            <a:schemeClr val="accent1"/>
-          </a:lnRef>
-          <a:fillRef idx="3">
-            <a:schemeClr val="accent1"/>
-          </a:fillRef>
-          <a:effectRef idx="2">
-            <a:schemeClr val="accent1"/>
-          </a:effectRef>
-          <a:fontRef idx="minor">
-            <a:schemeClr val="lt1"/>
-          </a:fontRef>
-        </p:style>
-        <p:txBody>
-          <a:bodyPr rtlCol="0" anchor="ctr"/>
-          <a:lstStyle/>
-          <a:p>
-            <a:pPr algn="ctr"/>
-          </a:p>
-        </p:txBody>
-      </p:sp>
-      <p:sp>
-        <p:nvSpPr>
-          <p:cNvPr id="13" name="Oval 12"/>
-          <p:cNvSpPr/>
-          <p:nvPr/>
-        </p:nvSpPr>
-        <p:spPr>
-          <a:xfrm>
-            <a:off x="8449056" y="2176272"/>
-            <a:ext cx="329184" cy="329184"/>
-          </a:xfrm>
-          <a:prstGeom prst="ellipse">
-            <a:avLst/>
-          </a:prstGeom>
-          <a:solidFill>
-            <a:srgbClr val="1C7293"/>
-          </a:solidFill>
-          <a:ln>
-            <a:noFill/>
-          </a:ln>
-          <a:effectLst/>
-        </p:spPr>
-        <p:style>
-          <a:lnRef idx="1">
-            <a:schemeClr val="accent1"/>
-          </a:lnRef>
-          <a:fillRef idx="3">
-            <a:schemeClr val="accent1"/>
-          </a:fillRef>
-          <a:effectRef idx="2">
-            <a:schemeClr val="accent1"/>
-          </a:effectRef>
-          <a:fontRef idx="minor">
-            <a:schemeClr val="lt1"/>
-          </a:fontRef>
-        </p:style>
-        <p:txBody>
-          <a:bodyPr rtlCol="0" anchor="ctr"/>
-          <a:lstStyle/>
-          <a:p>
-            <a:pPr algn="ctr"/>
-          </a:p>
-        </p:txBody>
-      </p:sp>
-      <p:sp>
-        <p:nvSpPr>
-          <p:cNvPr id="14" name="TextBox 13"/>
-          <p:cNvSpPr txBox="1"/>
-          <p:nvPr/>
-        </p:nvSpPr>
-        <p:spPr>
-          <a:xfrm>
-            <a:off x="8924544" y="2194560"/>
-            <a:ext cx="2560320" cy="365760"/>
-          </a:xfrm>
-          <a:prstGeom prst="rect">
-            <a:avLst/>
-          </a:prstGeom>
-          <a:noFill/>
-        </p:spPr>
-        <p:txBody>
-          <a:bodyPr wrap="square" lIns="0" rIns="0" tIns="0" bIns="0" anchor="t">
-            <a:spAutoFit/>
-          </a:bodyPr>
-          <a:lstStyle/>
-          <a:p>
-            <a:pPr algn="l">
-              <a:spcAft>
-                <a:spcPts val="600"/>
-              </a:spcAft>
-            </a:pPr>
-            <a:r>
-              <a:rPr sz="1450" b="1" i="0">
-                <a:solidFill>
-                  <a:srgbClr val="12263A"/>
-                </a:solidFill>
-                <a:latin typeface="Cambria"/>
-              </a:rPr>
-              <a:t>Remaining levels</a:t>
-            </a:r>
-          </a:p>
-        </p:txBody>
-      </p:sp>
-      <p:sp>
-        <p:nvSpPr>
-          <p:cNvPr id="15" name="TextBox 14"/>
-          <p:cNvSpPr txBox="1"/>
-          <p:nvPr/>
-        </p:nvSpPr>
-        <p:spPr>
-          <a:xfrm>
-            <a:off x="8449056" y="2697480"/>
-            <a:ext cx="2971800" cy="960120"/>
-          </a:xfrm>
-          <a:prstGeom prst="rect">
-            <a:avLst/>
-          </a:prstGeom>
-          <a:noFill/>
-        </p:spPr>
-        <p:txBody>
-          <a:bodyPr wrap="square" lIns="0" rIns="0" tIns="0" bIns="0" anchor="t">
-            <a:spAutoFit/>
-          </a:bodyPr>
-          <a:lstStyle/>
-          <a:p>
-            <a:pPr algn="l">
-              <a:spcAft>
-                <a:spcPts val="600"/>
-              </a:spcAft>
-            </a:pPr>
-            <a:r>
-              <a:rPr sz="1200" b="0" i="0">
-                <a:solidFill>
-                  <a:srgbClr val="5A6672"/>
-                </a:solidFill>
-                <a:latin typeface="Calibri"/>
-              </a:rPr>
-              <a:t>Cross-ratio, conics, reflections and cross-modal normal agreement.</a:t>
-            </a:r>
-          </a:p>
-        </p:txBody>
-      </p:sp>
-      <p:sp>
-        <p:nvSpPr>
-          <p:cNvPr id="16" name="Rounded Rectangle 15"/>
-          <p:cNvSpPr/>
-          <p:nvPr/>
-        </p:nvSpPr>
-        <p:spPr>
-          <a:xfrm>
-            <a:off x="640080" y="4114800"/>
-            <a:ext cx="3520440" cy="1874519"/>
-          </a:xfrm>
-          <a:prstGeom prst="roundRect">
-            <a:avLst>
-              <a:gd name="adj" fmla="val 6000"/>
-            </a:avLst>
-          </a:prstGeom>
-          <a:solidFill>
-            <a:srgbClr val="F4F6F8"/>
-          </a:solidFill>
-          <a:ln>
-            <a:noFill/>
-          </a:ln>
-          <a:effectLst/>
-        </p:spPr>
-        <p:style>
-          <a:lnRef idx="1">
-            <a:schemeClr val="accent1"/>
-          </a:lnRef>
-          <a:fillRef idx="3">
-            <a:schemeClr val="accent1"/>
-          </a:fillRef>
-          <a:effectRef idx="2">
-            <a:schemeClr val="accent1"/>
-          </a:effectRef>
-          <a:fontRef idx="minor">
-            <a:schemeClr val="lt1"/>
-          </a:fontRef>
-        </p:style>
-        <p:txBody>
-          <a:bodyPr rtlCol="0" anchor="ctr"/>
-          <a:lstStyle/>
-          <a:p>
-            <a:pPr algn="ctr"/>
-          </a:p>
-        </p:txBody>
-      </p:sp>
-      <p:sp>
-        <p:nvSpPr>
-          <p:cNvPr id="17" name="Oval 16"/>
-          <p:cNvSpPr/>
-          <p:nvPr/>
-        </p:nvSpPr>
-        <p:spPr>
-          <a:xfrm>
-            <a:off x="914400" y="4370832"/>
-            <a:ext cx="329184" cy="329184"/>
+            <a:off x="685800" y="1984248"/>
+            <a:ext cx="274320" cy="274320"/>
           </a:xfrm>
           <a:prstGeom prst="ellipse">
             <a:avLst/>
@@ -10482,14 +10195,14 @@
       </p:sp>
       <p:sp>
         <p:nvSpPr>
-          <p:cNvPr id="18" name="TextBox 17"/>
+          <p:cNvPr id="5" name="TextBox 4"/>
           <p:cNvSpPr txBox="1"/>
           <p:nvPr/>
         </p:nvSpPr>
         <p:spPr>
           <a:xfrm>
-            <a:off x="1389888" y="4389120"/>
-            <a:ext cx="2560320" cy="365760"/>
+            <a:off x="1188720" y="1874519"/>
+            <a:ext cx="10332720" cy="411480"/>
           </a:xfrm>
           <a:prstGeom prst="rect">
             <a:avLst/>
@@ -10508,27 +10221,27 @@
               </a:spcAft>
             </a:pPr>
             <a:r>
-              <a:rPr sz="1450" b="1" i="0">
-                <a:solidFill>
-                  <a:srgbClr val="12263A"/>
+              <a:rPr sz="1700" b="1" i="0">
+                <a:solidFill>
+                  <a:srgbClr val="FFFFFF"/>
                 </a:solidFill>
                 <a:latin typeface="Cambria"/>
               </a:rPr>
-              <a:t>Mechanism</a:t>
-            </a:r>
-          </a:p>
-        </p:txBody>
-      </p:sp>
-      <p:sp>
-        <p:nvSpPr>
-          <p:cNvPr id="19" name="TextBox 18"/>
+              <a:t>Generators reproduce orientation, not the camera</a:t>
+            </a:r>
+          </a:p>
+        </p:txBody>
+      </p:sp>
+      <p:sp>
+        <p:nvSpPr>
+          <p:cNvPr id="6" name="TextBox 5"/>
           <p:cNvSpPr txBox="1"/>
           <p:nvPr/>
         </p:nvSpPr>
         <p:spPr>
           <a:xfrm>
-            <a:off x="914400" y="4892040"/>
-            <a:ext cx="2971800" cy="960120"/>
+            <a:off x="1188720" y="2331720"/>
+            <a:ext cx="10332720" cy="594360"/>
           </a:xfrm>
           <a:prstGeom prst="rect">
             <a:avLst/>
@@ -10547,35 +10260,33 @@
               </a:spcAft>
             </a:pPr>
             <a:r>
-              <a:rPr sz="1200" b="0" i="0">
-                <a:solidFill>
-                  <a:srgbClr val="5A6672"/>
+              <a:rPr sz="1300" b="0" i="0">
+                <a:solidFill>
+                  <a:srgbClr val="B9CDDA"/>
                 </a:solidFill>
                 <a:latin typeface="Calibri"/>
               </a:rPr>
-              <a:t>Why does scale not fix camera coherence? Aspect ratio is ruled out; resolution and latent receptive field remain.</a:t>
-            </a:r>
-          </a:p>
-        </p:txBody>
-      </p:sp>
-      <p:sp>
-        <p:nvSpPr>
-          <p:cNvPr id="20" name="Rounded Rectangle 19"/>
+              <a:t>Manhattan orthogonality is comparable to real photographs after control; focal and principal-point coherence is 2.5-3× worse.</a:t>
+            </a:r>
+          </a:p>
+        </p:txBody>
+      </p:sp>
+      <p:sp>
+        <p:nvSpPr>
+          <p:cNvPr id="7" name="Oval 6"/>
           <p:cNvSpPr/>
           <p:nvPr/>
         </p:nvSpPr>
         <p:spPr>
           <a:xfrm>
-            <a:off x="4407408" y="4114800"/>
-            <a:ext cx="3520440" cy="1874519"/>
-          </a:xfrm>
-          <a:prstGeom prst="roundRect">
-            <a:avLst>
-              <a:gd name="adj" fmla="val 6000"/>
-            </a:avLst>
+            <a:off x="685800" y="3099815"/>
+            <a:ext cx="274320" cy="274320"/>
+          </a:xfrm>
+          <a:prstGeom prst="ellipse">
+            <a:avLst/>
           </a:prstGeom>
           <a:solidFill>
-            <a:srgbClr val="F4F6F8"/>
+            <a:srgbClr val="E8A33D"/>
           </a:solidFill>
           <a:ln>
             <a:noFill/>
@@ -10606,20 +10317,98 @@
       </p:sp>
       <p:sp>
         <p:nvSpPr>
-          <p:cNvPr id="21" name="Oval 20"/>
+          <p:cNvPr id="8" name="TextBox 7"/>
+          <p:cNvSpPr txBox="1"/>
+          <p:nvPr/>
+        </p:nvSpPr>
+        <p:spPr>
+          <a:xfrm>
+            <a:off x="1188720" y="2990087"/>
+            <a:ext cx="10332720" cy="411480"/>
+          </a:xfrm>
+          <a:prstGeom prst="rect">
+            <a:avLst/>
+          </a:prstGeom>
+          <a:noFill/>
+        </p:spPr>
+        <p:txBody>
+          <a:bodyPr wrap="square" lIns="0" rIns="0" tIns="0" bIns="0" anchor="t">
+            <a:spAutoFit/>
+          </a:bodyPr>
+          <a:lstStyle/>
+          <a:p>
+            <a:pPr algn="l">
+              <a:spcAft>
+                <a:spcPts val="600"/>
+              </a:spcAft>
+            </a:pPr>
+            <a:r>
+              <a:rPr sz="1700" b="1" i="0">
+                <a:solidFill>
+                  <a:srgbClr val="FFFFFF"/>
+                </a:solidFill>
+                <a:latin typeface="Cambria"/>
+              </a:rPr>
+              <a:t>The result is robust to the real reference</a:t>
+            </a:r>
+          </a:p>
+        </p:txBody>
+      </p:sp>
+      <p:sp>
+        <p:nvSpPr>
+          <p:cNvPr id="9" name="TextBox 8"/>
+          <p:cNvSpPr txBox="1"/>
+          <p:nvPr/>
+        </p:nvSpPr>
+        <p:spPr>
+          <a:xfrm>
+            <a:off x="1188720" y="3447287"/>
+            <a:ext cx="10332720" cy="594360"/>
+          </a:xfrm>
+          <a:prstGeom prst="rect">
+            <a:avLst/>
+          </a:prstGeom>
+          <a:noFill/>
+        </p:spPr>
+        <p:txBody>
+          <a:bodyPr wrap="square" lIns="0" rIns="0" tIns="0" bIns="0" anchor="t">
+            <a:spAutoFit/>
+          </a:bodyPr>
+          <a:lstStyle/>
+          <a:p>
+            <a:pPr algn="l">
+              <a:spcAft>
+                <a:spcPts val="600"/>
+              </a:spcAft>
+            </a:pPr>
+            <a:r>
+              <a:rPr sz="1300" b="0" i="0">
+                <a:solidFill>
+                  <a:srgbClr val="B9CDDA"/>
+                </a:solidFill>
+                <a:latin typeface="Calibri"/>
+              </a:rPr>
+              <a:t>Both a curated benchmark and uncurated internet photographs give the same conclusion, with non-overlapping confidence intervals.</a:t>
+            </a:r>
+          </a:p>
+        </p:txBody>
+      </p:sp>
+      <p:sp>
+        <p:nvSpPr>
+          <p:cNvPr id="10" name="Oval 9"/>
           <p:cNvSpPr/>
           <p:nvPr/>
         </p:nvSpPr>
         <p:spPr>
           <a:xfrm>
-            <a:off x="4681728" y="4370832"/>
-            <a:ext cx="329184" cy="329184"/>
+            <a:off x="685800" y="4215384"/>
+            <a:ext cx="274320" cy="274320"/>
           </a:xfrm>
           <a:prstGeom prst="ellipse">
             <a:avLst/>
           </a:prstGeom>
           <a:solidFill>
-            <a:srgbClr val="12263A"/>
+            <a:srgbClr val="E8A33D"/>
           </a:solidFill>
           <a:ln>
             <a:noFill/>
@@ -10650,14 +10439,14 @@
       </p:sp>
       <p:sp>
         <p:nvSpPr>
-          <p:cNvPr id="22" name="TextBox 21"/>
+          <p:cNvPr id="11" name="TextBox 10"/>
           <p:cNvSpPr txBox="1"/>
           <p:nvPr/>
         </p:nvSpPr>
         <p:spPr>
           <a:xfrm>
-            <a:off x="5157216" y="4389120"/>
-            <a:ext cx="2560320" cy="365760"/>
+            <a:off x="1188720" y="4105656"/>
+            <a:ext cx="10332720" cy="411480"/>
           </a:xfrm>
           <a:prstGeom prst="rect">
             <a:avLst/>
@@ -10676,27 +10465,27 @@
               </a:spcAft>
             </a:pPr>
             <a:r>
-              <a:rPr sz="1450" b="1" i="0">
-                <a:solidFill>
-                  <a:srgbClr val="12263A"/>
+              <a:rPr sz="1700" b="1" i="0">
+                <a:solidFill>
+                  <a:srgbClr val="FFFFFF"/>
                 </a:solidFill>
                 <a:latin typeface="Cambria"/>
               </a:rPr>
-              <a:t>Sheaf formalism</a:t>
-            </a:r>
-          </a:p>
-        </p:txBody>
-      </p:sp>
-      <p:sp>
-        <p:nvSpPr>
-          <p:cNvPr id="23" name="TextBox 22"/>
+              <a:t>Scale is not closing the gap</a:t>
+            </a:r>
+          </a:p>
+        </p:txBody>
+      </p:sp>
+      <p:sp>
+        <p:nvSpPr>
+          <p:cNvPr id="12" name="TextBox 11"/>
           <p:cNvSpPr txBox="1"/>
           <p:nvPr/>
         </p:nvSpPr>
         <p:spPr>
           <a:xfrm>
-            <a:off x="4681728" y="4892040"/>
-            <a:ext cx="2971800" cy="960120"/>
+            <a:off x="1188720" y="4562856"/>
+            <a:ext cx="10332720" cy="594360"/>
           </a:xfrm>
           <a:prstGeom prst="rect">
             <a:avLst/>
@@ -10715,35 +10504,33 @@
               </a:spcAft>
             </a:pPr>
             <a:r>
-              <a:rPr sz="1200" b="0" i="0">
-                <a:solidFill>
-                  <a:srgbClr val="5A6672"/>
+              <a:rPr sz="1300" b="0" i="0">
+                <a:solidFill>
+                  <a:srgbClr val="B9CDDA"/>
                 </a:solidFill>
                 <a:latin typeface="Calibri"/>
               </a:rPr>
-              <a:t>Consistency radius over a cover of local cameras as a principled local-to-global measure.</a:t>
-            </a:r>
-          </a:p>
-        </p:txBody>
-      </p:sp>
-      <p:sp>
-        <p:nvSpPr>
-          <p:cNvPr id="24" name="Rounded Rectangle 23"/>
+              <a:t>SD 1.5 → SDXL improves orientation significantly and leaves camera coherence unchanged.</a:t>
+            </a:r>
+          </a:p>
+        </p:txBody>
+      </p:sp>
+      <p:sp>
+        <p:nvSpPr>
+          <p:cNvPr id="13" name="Oval 12"/>
           <p:cNvSpPr/>
           <p:nvPr/>
         </p:nvSpPr>
         <p:spPr>
           <a:xfrm>
-            <a:off x="8174736" y="4114800"/>
-            <a:ext cx="3520440" cy="1874519"/>
-          </a:xfrm>
-          <a:prstGeom prst="roundRect">
-            <a:avLst>
-              <a:gd name="adj" fmla="val 6000"/>
-            </a:avLst>
+            <a:off x="685800" y="5330952"/>
+            <a:ext cx="274320" cy="274320"/>
+          </a:xfrm>
+          <a:prstGeom prst="ellipse">
+            <a:avLst/>
           </a:prstGeom>
           <a:solidFill>
-            <a:srgbClr val="F4F6F8"/>
+            <a:srgbClr val="E8A33D"/>
           </a:solidFill>
           <a:ln>
             <a:noFill/>
@@ -10774,58 +10561,14 @@
       </p:sp>
       <p:sp>
         <p:nvSpPr>
-          <p:cNvPr id="25" name="Oval 24"/>
-          <p:cNvSpPr/>
-          <p:nvPr/>
-        </p:nvSpPr>
-        <p:spPr>
-          <a:xfrm>
-            <a:off x="8449056" y="4370832"/>
-            <a:ext cx="329184" cy="329184"/>
-          </a:xfrm>
-          <a:prstGeom prst="ellipse">
-            <a:avLst/>
-          </a:prstGeom>
-          <a:solidFill>
-            <a:srgbClr val="1C7293"/>
-          </a:solidFill>
-          <a:ln>
-            <a:noFill/>
-          </a:ln>
-          <a:effectLst/>
-        </p:spPr>
-        <p:style>
-          <a:lnRef idx="1">
-            <a:schemeClr val="accent1"/>
-          </a:lnRef>
-          <a:fillRef idx="3">
-            <a:schemeClr val="accent1"/>
-          </a:fillRef>
-          <a:effectRef idx="2">
-            <a:schemeClr val="accent1"/>
-          </a:effectRef>
-          <a:fontRef idx="minor">
-            <a:schemeClr val="lt1"/>
-          </a:fontRef>
-        </p:style>
-        <p:txBody>
-          <a:bodyPr rtlCol="0" anchor="ctr"/>
-          <a:lstStyle/>
-          <a:p>
-            <a:pPr algn="ctr"/>
-          </a:p>
-        </p:txBody>
-      </p:sp>
-      <p:sp>
-        <p:nvSpPr>
-          <p:cNvPr id="26" name="TextBox 25"/>
+          <p:cNvPr id="14" name="TextBox 13"/>
           <p:cNvSpPr txBox="1"/>
           <p:nvPr/>
         </p:nvSpPr>
         <p:spPr>
           <a:xfrm>
-            <a:off x="8924544" y="4389120"/>
-            <a:ext cx="2560320" cy="365760"/>
+            <a:off x="1188720" y="5221224"/>
+            <a:ext cx="10332720" cy="411480"/>
           </a:xfrm>
           <a:prstGeom prst="rect">
             <a:avLst/>
@@ -10844,27 +10587,27 @@
               </a:spcAft>
             </a:pPr>
             <a:r>
-              <a:rPr sz="1450" b="1" i="0">
-                <a:solidFill>
-                  <a:srgbClr val="12263A"/>
+              <a:rPr sz="1700" b="1" i="0">
+                <a:solidFill>
+                  <a:srgbClr val="FFFFFF"/>
                 </a:solidFill>
                 <a:latin typeface="Cambria"/>
               </a:rPr>
-              <a:t>Perception study</a:t>
-            </a:r>
-          </a:p>
-        </p:txBody>
-      </p:sp>
-      <p:sp>
-        <p:nvSpPr>
-          <p:cNvPr id="27" name="TextBox 26"/>
+              <a:t>Applicability must be tested, not assumed</a:t>
+            </a:r>
+          </a:p>
+        </p:txBody>
+      </p:sp>
+      <p:sp>
+        <p:nvSpPr>
+          <p:cNvPr id="15" name="TextBox 14"/>
           <p:cNvSpPr txBox="1"/>
           <p:nvPr/>
         </p:nvSpPr>
         <p:spPr>
           <a:xfrm>
-            <a:off x="8449056" y="4892040"/>
-            <a:ext cx="2971800" cy="960120"/>
+            <a:off x="1188720" y="5678424"/>
+            <a:ext cx="10332720" cy="594360"/>
           </a:xfrm>
           <a:prstGeom prst="rect">
             <a:avLst/>
@@ -10883,13 +10626,52 @@
               </a:spcAft>
             </a:pPr>
             <a:r>
-              <a:rPr sz="1200" b="0" i="0">
-                <a:solidFill>
-                  <a:srgbClr val="5A6672"/>
+              <a:rPr sz="1300" b="0" i="0">
+                <a:solidFill>
+                  <a:srgbClr val="B9CDDA"/>
                 </a:solidFill>
                 <a:latin typeface="Calibri"/>
               </a:rPr>
-              <a:t>Which violations are mathematically severe but visually unnoticed.</a:t>
+              <a:t>The three-VP test is undefined for non-Manhattan scenes; ignoring this reverses the verdict.</a:t>
+            </a:r>
+          </a:p>
+        </p:txBody>
+      </p:sp>
+      <p:sp>
+        <p:nvSpPr>
+          <p:cNvPr id="16" name="TextBox 15"/>
+          <p:cNvSpPr txBox="1"/>
+          <p:nvPr/>
+        </p:nvSpPr>
+        <p:spPr>
+          <a:xfrm>
+            <a:off x="685800" y="6355080"/>
+            <a:ext cx="10908792" cy="365760"/>
+          </a:xfrm>
+          <a:prstGeom prst="rect">
+            <a:avLst/>
+          </a:prstGeom>
+          <a:noFill/>
+        </p:spPr>
+        <p:txBody>
+          <a:bodyPr wrap="square" lIns="0" rIns="0" tIns="0" bIns="0" anchor="t">
+            <a:spAutoFit/>
+          </a:bodyPr>
+          <a:lstStyle/>
+          <a:p>
+            <a:pPr algn="l">
+              <a:spcAft>
+                <a:spcPts val="600"/>
+              </a:spcAft>
+            </a:pPr>
+            <a:r>
+              <a:rPr sz="1400" b="1" i="1">
+                <a:solidFill>
+                  <a:srgbClr val="E8A33D"/>
+                </a:solidFill>
+                <a:latin typeface="Calibri"/>
+              </a:rPr>
+              <a:t>Thesis: a generated image is locally photographic but has no single camera behind it.</a:t>
             </a:r>
           </a:p>
         </p:txBody>
@@ -10990,220 +10772,111 @@
                 </a:solidFill>
                 <a:latin typeface="Cambria"/>
               </a:rPr>
-              <a:t>References</a:t>
-            </a:r>
-          </a:p>
-        </p:txBody>
-      </p:sp>
-      <p:sp>
-        <p:nvSpPr>
-          <p:cNvPr id="4" name="TextBox 3"/>
+              <a:t>Future Scope</a:t>
+            </a:r>
+          </a:p>
+        </p:txBody>
+      </p:sp>
+      <p:sp>
+        <p:nvSpPr>
+          <p:cNvPr id="4" name="Rounded Rectangle 3"/>
+          <p:cNvSpPr/>
+          <p:nvPr/>
+        </p:nvSpPr>
+        <p:spPr>
+          <a:xfrm>
+            <a:off x="640080" y="1920240"/>
+            <a:ext cx="3520440" cy="1874519"/>
+          </a:xfrm>
+          <a:prstGeom prst="roundRect">
+            <a:avLst>
+              <a:gd name="adj" fmla="val 6000"/>
+            </a:avLst>
+          </a:prstGeom>
+          <a:solidFill>
+            <a:srgbClr val="F4F6F8"/>
+          </a:solidFill>
+          <a:ln>
+            <a:noFill/>
+          </a:ln>
+          <a:effectLst/>
+        </p:spPr>
+        <p:style>
+          <a:lnRef idx="1">
+            <a:schemeClr val="accent1"/>
+          </a:lnRef>
+          <a:fillRef idx="3">
+            <a:schemeClr val="accent1"/>
+          </a:fillRef>
+          <a:effectRef idx="2">
+            <a:schemeClr val="accent1"/>
+          </a:effectRef>
+          <a:fontRef idx="minor">
+            <a:schemeClr val="lt1"/>
+          </a:fontRef>
+        </p:style>
+        <p:txBody>
+          <a:bodyPr rtlCol="0" anchor="ctr"/>
+          <a:lstStyle/>
+          <a:p>
+            <a:pPr algn="ctr"/>
+          </a:p>
+        </p:txBody>
+      </p:sp>
+      <p:sp>
+        <p:nvSpPr>
+          <p:cNvPr id="5" name="Oval 4"/>
+          <p:cNvSpPr/>
+          <p:nvPr/>
+        </p:nvSpPr>
+        <p:spPr>
+          <a:xfrm>
+            <a:off x="914400" y="2176272"/>
+            <a:ext cx="329184" cy="329184"/>
+          </a:xfrm>
+          <a:prstGeom prst="ellipse">
+            <a:avLst/>
+          </a:prstGeom>
+          <a:solidFill>
+            <a:srgbClr val="1C7293"/>
+          </a:solidFill>
+          <a:ln>
+            <a:noFill/>
+          </a:ln>
+          <a:effectLst/>
+        </p:spPr>
+        <p:style>
+          <a:lnRef idx="1">
+            <a:schemeClr val="accent1"/>
+          </a:lnRef>
+          <a:fillRef idx="3">
+            <a:schemeClr val="accent1"/>
+          </a:fillRef>
+          <a:effectRef idx="2">
+            <a:schemeClr val="accent1"/>
+          </a:effectRef>
+          <a:fontRef idx="minor">
+            <a:schemeClr val="lt1"/>
+          </a:fontRef>
+        </p:style>
+        <p:txBody>
+          <a:bodyPr rtlCol="0" anchor="ctr"/>
+          <a:lstStyle/>
+          <a:p>
+            <a:pPr algn="ctr"/>
+          </a:p>
+        </p:txBody>
+      </p:sp>
+      <p:sp>
+        <p:nvSpPr>
+          <p:cNvPr id="6" name="TextBox 5"/>
           <p:cNvSpPr txBox="1"/>
           <p:nvPr/>
         </p:nvSpPr>
         <p:spPr>
           <a:xfrm>
-            <a:off x="640080" y="1783080"/>
-            <a:ext cx="10908792" cy="4480560"/>
-          </a:xfrm>
-          <a:prstGeom prst="rect">
-            <a:avLst/>
-          </a:prstGeom>
-          <a:noFill/>
-        </p:spPr>
-        <p:txBody>
-          <a:bodyPr wrap="square" lIns="0" rIns="0">
-            <a:spAutoFit/>
-          </a:bodyPr>
-          <a:lstStyle/>
-          <a:p>
-            <a:pPr>
-              <a:spcAft>
-                <a:spcPts val="700"/>
-              </a:spcAft>
-            </a:pPr>
-            <a:r>
-              <a:rPr sz="1200">
-                <a:solidFill>
-                  <a:srgbClr val="1A1A1A"/>
-                </a:solidFill>
-                <a:latin typeface="Calibri"/>
-              </a:rPr>
-              <a:t>[1] A. Sarkar et al., “Shadows Don’t Lie and Lines Can’t Bend! Generative Models don’t know Projective Geometry…for now,” CVPR, 2024.</a:t>
-            </a:r>
-          </a:p>
-          <a:p>
-            <a:pPr>
-              <a:spcAft>
-                <a:spcPts val="700"/>
-              </a:spcAft>
-            </a:pPr>
-            <a:r>
-              <a:rPr sz="1200">
-                <a:solidFill>
-                  <a:srgbClr val="1A1A1A"/>
-                </a:solidFill>
-                <a:latin typeface="Calibri"/>
-              </a:rPr>
-              <a:t>[2] R. Hartley and A. Zisserman, Multiple View Geometry in Computer Vision, 2nd ed., Cambridge University Press, 2004.</a:t>
-            </a:r>
-          </a:p>
-          <a:p>
-            <a:pPr>
-              <a:spcAft>
-                <a:spcPts val="700"/>
-              </a:spcAft>
-            </a:pPr>
-            <a:r>
-              <a:rPr sz="1200">
-                <a:solidFill>
-                  <a:srgbClr val="1A1A1A"/>
-                </a:solidFill>
-                <a:latin typeface="Calibri"/>
-              </a:rPr>
-              <a:t>[3] E. Kee, J. F. O’Brien and H. Farid, “Exposing photo manipulation with inconsistent shadows,” ACM TOG, vol. 32, no. 3, 2013.</a:t>
-            </a:r>
-          </a:p>
-          <a:p>
-            <a:pPr>
-              <a:spcAft>
-                <a:spcPts val="700"/>
-              </a:spcAft>
-            </a:pPr>
-            <a:r>
-              <a:rPr sz="1200">
-                <a:solidFill>
-                  <a:srgbClr val="1A1A1A"/>
-                </a:solidFill>
-                <a:latin typeface="Calibri"/>
-              </a:rPr>
-              <a:t>[4] A. Criminisi, I. Reid and A. Zisserman, “Single view metrology,” IJCV, vol. 40, no. 2, pp. 123–148, 2000.</a:t>
-            </a:r>
-          </a:p>
-          <a:p>
-            <a:pPr>
-              <a:spcAft>
-                <a:spcPts val="700"/>
-              </a:spcAft>
-            </a:pPr>
-            <a:r>
-              <a:rPr sz="1200">
-                <a:solidFill>
-                  <a:srgbClr val="1A1A1A"/>
-                </a:solidFill>
-                <a:latin typeface="Calibri"/>
-              </a:rPr>
-              <a:t>[5] J. M. Coughlan and A. L. Yuille, “Manhattan world,” ICCV, 1999.</a:t>
-            </a:r>
-          </a:p>
-          <a:p>
-            <a:pPr>
-              <a:spcAft>
-                <a:spcPts val="700"/>
-              </a:spcAft>
-            </a:pPr>
-            <a:r>
-              <a:rPr sz="1200">
-                <a:solidFill>
-                  <a:srgbClr val="1A1A1A"/>
-                </a:solidFill>
-                <a:latin typeface="Calibri"/>
-              </a:rPr>
-              <a:t>[6] P. Denis, J. H. Elder and F. J. Estrada, “Efficient edge-based methods for estimating Manhattan frames in urban imagery,” ECCV, 2008.</a:t>
-            </a:r>
-          </a:p>
-          <a:p>
-            <a:pPr>
-              <a:spcAft>
-                <a:spcPts val="700"/>
-              </a:spcAft>
-            </a:pPr>
-            <a:r>
-              <a:rPr sz="1200">
-                <a:solidFill>
-                  <a:srgbClr val="1A1A1A"/>
-                </a:solidFill>
-                <a:latin typeface="Calibri"/>
-              </a:rPr>
-              <a:t>[7] R. Grompone von Gioi et al., “LSD: a fast line segment detector with a false detection control,” IEEE TPAMI, vol. 32, no. 4, 2010.</a:t>
-            </a:r>
-          </a:p>
-          <a:p>
-            <a:pPr>
-              <a:spcAft>
-                <a:spcPts val="700"/>
-              </a:spcAft>
-            </a:pPr>
-            <a:r>
-              <a:rPr sz="1200">
-                <a:solidFill>
-                  <a:srgbClr val="1A1A1A"/>
-                </a:solidFill>
-                <a:latin typeface="Calibri"/>
-              </a:rPr>
-              <a:t>[8] D. Hoiem, A. A. Efros and M. Hebert, “Putting objects in perspective,” IJCV, vol. 80, no. 1, 2008.</a:t>
-            </a:r>
-          </a:p>
-          <a:p>
-            <a:pPr>
-              <a:spcAft>
-                <a:spcPts val="700"/>
-              </a:spcAft>
-            </a:pPr>
-            <a:r>
-              <a:rPr sz="1200">
-                <a:solidFill>
-                  <a:srgbClr val="1A1A1A"/>
-                </a:solidFill>
-                <a:latin typeface="Calibri"/>
-              </a:rPr>
-              <a:t>[9] L. Jin et al., “Perspective fields for single image camera calibration,” CVPR, 2023.</a:t>
-            </a:r>
-          </a:p>
-          <a:p>
-            <a:pPr>
-              <a:spcAft>
-                <a:spcPts val="700"/>
-              </a:spcAft>
-            </a:pPr>
-            <a:r>
-              <a:rPr sz="1200">
-                <a:solidFill>
-                  <a:srgbClr val="1A1A1A"/>
-                </a:solidFill>
-                <a:latin typeface="Calibri"/>
-              </a:rPr>
-              <a:t>[10] D. Podell et al., “SDXL: improving latent diffusion models for high-resolution image synthesis,” ICLR, 2024.</a:t>
-            </a:r>
-          </a:p>
-          <a:p>
-            <a:pPr>
-              <a:spcAft>
-                <a:spcPts val="700"/>
-              </a:spcAft>
-            </a:pPr>
-            <a:r>
-              <a:rPr sz="1200">
-                <a:solidFill>
-                  <a:srgbClr val="1A1A1A"/>
-                </a:solidFill>
-                <a:latin typeface="Calibri"/>
-              </a:rPr>
-              <a:t>[11] R. Rombach et al., “High-resolution image synthesis with latent diffusion models,” CVPR, 2022.</a:t>
-            </a:r>
-          </a:p>
-        </p:txBody>
-      </p:sp>
-      <p:sp>
-        <p:nvSpPr>
-          <p:cNvPr id="5" name="TextBox 4"/>
-          <p:cNvSpPr txBox="1"/>
-          <p:nvPr/>
-        </p:nvSpPr>
-        <p:spPr>
-          <a:xfrm>
-            <a:off x="640080" y="6309360"/>
-            <a:ext cx="10908792" cy="365760"/>
+            <a:off x="1389888" y="2194560"/>
+            <a:ext cx="2560320" cy="365760"/>
           </a:xfrm>
           <a:prstGeom prst="rect">
             <a:avLst/>
@@ -11222,13 +10895,892 @@
               </a:spcAft>
             </a:pPr>
             <a:r>
-              <a:rPr sz="1100" b="0" i="1">
+              <a:rPr sz="1450" b="1" i="0">
+                <a:solidFill>
+                  <a:srgbClr val="12263A"/>
+                </a:solidFill>
+                <a:latin typeface="Cambria"/>
+              </a:rPr>
+              <a:t>Frontier models</a:t>
+            </a:r>
+          </a:p>
+        </p:txBody>
+      </p:sp>
+      <p:sp>
+        <p:nvSpPr>
+          <p:cNvPr id="7" name="TextBox 6"/>
+          <p:cNvSpPr txBox="1"/>
+          <p:nvPr/>
+        </p:nvSpPr>
+        <p:spPr>
+          <a:xfrm>
+            <a:off x="914400" y="2697480"/>
+            <a:ext cx="2971800" cy="960120"/>
+          </a:xfrm>
+          <a:prstGeom prst="rect">
+            <a:avLst/>
+          </a:prstGeom>
+          <a:noFill/>
+        </p:spPr>
+        <p:txBody>
+          <a:bodyPr wrap="square" lIns="0" rIns="0" tIns="0" bIns="0" anchor="t">
+            <a:spAutoFit/>
+          </a:bodyPr>
+          <a:lstStyle/>
+          <a:p>
+            <a:pPr algn="l">
+              <a:spcAft>
+                <a:spcPts val="600"/>
+              </a:spcAft>
+            </a:pPr>
+            <a:r>
+              <a:rPr sz="1200" b="0" i="0">
                 <a:solidFill>
                   <a:srgbClr val="5A6672"/>
                 </a:solidFill>
                 <a:latin typeface="Calibri"/>
               </a:rPr>
-              <a:t>Dataset credits: York Urban Database (Elder Laboratory, York University); Wikimedia Commons photographs under CC licences, per-image attribution in the project metadata.</a:t>
+              <a:t>Gemini, GPT-image and FLUX on the same prompt set. Slot reserved on the Results 6 slide; prompts already exported.</a:t>
+            </a:r>
+          </a:p>
+        </p:txBody>
+      </p:sp>
+      <p:sp>
+        <p:nvSpPr>
+          <p:cNvPr id="8" name="Rounded Rectangle 7"/>
+          <p:cNvSpPr/>
+          <p:nvPr/>
+        </p:nvSpPr>
+        <p:spPr>
+          <a:xfrm>
+            <a:off x="4407408" y="1920240"/>
+            <a:ext cx="3520440" cy="1874519"/>
+          </a:xfrm>
+          <a:prstGeom prst="roundRect">
+            <a:avLst>
+              <a:gd name="adj" fmla="val 6000"/>
+            </a:avLst>
+          </a:prstGeom>
+          <a:solidFill>
+            <a:srgbClr val="F4F6F8"/>
+          </a:solidFill>
+          <a:ln>
+            <a:noFill/>
+          </a:ln>
+          <a:effectLst/>
+        </p:spPr>
+        <p:style>
+          <a:lnRef idx="1">
+            <a:schemeClr val="accent1"/>
+          </a:lnRef>
+          <a:fillRef idx="3">
+            <a:schemeClr val="accent1"/>
+          </a:fillRef>
+          <a:effectRef idx="2">
+            <a:schemeClr val="accent1"/>
+          </a:effectRef>
+          <a:fontRef idx="minor">
+            <a:schemeClr val="lt1"/>
+          </a:fontRef>
+        </p:style>
+        <p:txBody>
+          <a:bodyPr rtlCol="0" anchor="ctr"/>
+          <a:lstStyle/>
+          <a:p>
+            <a:pPr algn="ctr"/>
+          </a:p>
+        </p:txBody>
+      </p:sp>
+      <p:sp>
+        <p:nvSpPr>
+          <p:cNvPr id="9" name="Oval 8"/>
+          <p:cNvSpPr/>
+          <p:nvPr/>
+        </p:nvSpPr>
+        <p:spPr>
+          <a:xfrm>
+            <a:off x="4681728" y="2176272"/>
+            <a:ext cx="329184" cy="329184"/>
+          </a:xfrm>
+          <a:prstGeom prst="ellipse">
+            <a:avLst/>
+          </a:prstGeom>
+          <a:solidFill>
+            <a:srgbClr val="12263A"/>
+          </a:solidFill>
+          <a:ln>
+            <a:noFill/>
+          </a:ln>
+          <a:effectLst/>
+        </p:spPr>
+        <p:style>
+          <a:lnRef idx="1">
+            <a:schemeClr val="accent1"/>
+          </a:lnRef>
+          <a:fillRef idx="3">
+            <a:schemeClr val="accent1"/>
+          </a:fillRef>
+          <a:effectRef idx="2">
+            <a:schemeClr val="accent1"/>
+          </a:effectRef>
+          <a:fontRef idx="minor">
+            <a:schemeClr val="lt1"/>
+          </a:fontRef>
+        </p:style>
+        <p:txBody>
+          <a:bodyPr rtlCol="0" anchor="ctr"/>
+          <a:lstStyle/>
+          <a:p>
+            <a:pPr algn="ctr"/>
+          </a:p>
+        </p:txBody>
+      </p:sp>
+      <p:sp>
+        <p:nvSpPr>
+          <p:cNvPr id="10" name="TextBox 9"/>
+          <p:cNvSpPr txBox="1"/>
+          <p:nvPr/>
+        </p:nvSpPr>
+        <p:spPr>
+          <a:xfrm>
+            <a:off x="5157216" y="2194560"/>
+            <a:ext cx="2560320" cy="365760"/>
+          </a:xfrm>
+          <a:prstGeom prst="rect">
+            <a:avLst/>
+          </a:prstGeom>
+          <a:noFill/>
+        </p:spPr>
+        <p:txBody>
+          <a:bodyPr wrap="square" lIns="0" rIns="0" tIns="0" bIns="0" anchor="t">
+            <a:spAutoFit/>
+          </a:bodyPr>
+          <a:lstStyle/>
+          <a:p>
+            <a:pPr algn="l">
+              <a:spcAft>
+                <a:spcPts val="600"/>
+              </a:spcAft>
+            </a:pPr>
+            <a:r>
+              <a:rPr sz="1450" b="1" i="0">
+                <a:solidFill>
+                  <a:srgbClr val="12263A"/>
+                </a:solidFill>
+                <a:latin typeface="Cambria"/>
+              </a:rPr>
+              <a:t>Shadow association</a:t>
+            </a:r>
+          </a:p>
+        </p:txBody>
+      </p:sp>
+      <p:sp>
+        <p:nvSpPr>
+          <p:cNvPr id="11" name="TextBox 10"/>
+          <p:cNvSpPr txBox="1"/>
+          <p:nvPr/>
+        </p:nvSpPr>
+        <p:spPr>
+          <a:xfrm>
+            <a:off x="4681728" y="2697480"/>
+            <a:ext cx="2971800" cy="960120"/>
+          </a:xfrm>
+          <a:prstGeom prst="rect">
+            <a:avLst/>
+          </a:prstGeom>
+          <a:noFill/>
+        </p:spPr>
+        <p:txBody>
+          <a:bodyPr wrap="square" lIns="0" rIns="0" tIns="0" bIns="0" anchor="t">
+            <a:spAutoFit/>
+          </a:bodyPr>
+          <a:lstStyle/>
+          <a:p>
+            <a:pPr algn="l">
+              <a:spcAft>
+                <a:spcPts val="600"/>
+              </a:spcAft>
+            </a:pPr>
+            <a:r>
+              <a:rPr sz="1200" b="0" i="0">
+                <a:solidFill>
+                  <a:srgbClr val="5A6672"/>
+                </a:solidFill>
+                <a:latin typeface="Calibri"/>
+              </a:rPr>
+              <a:t>SSIS or SAM 2 for object-shadow pairs; the wedge LP above it is built and validated.</a:t>
+            </a:r>
+          </a:p>
+        </p:txBody>
+      </p:sp>
+      <p:sp>
+        <p:nvSpPr>
+          <p:cNvPr id="12" name="Rounded Rectangle 11"/>
+          <p:cNvSpPr/>
+          <p:nvPr/>
+        </p:nvSpPr>
+        <p:spPr>
+          <a:xfrm>
+            <a:off x="8174736" y="1920240"/>
+            <a:ext cx="3520440" cy="1874519"/>
+          </a:xfrm>
+          <a:prstGeom prst="roundRect">
+            <a:avLst>
+              <a:gd name="adj" fmla="val 6000"/>
+            </a:avLst>
+          </a:prstGeom>
+          <a:solidFill>
+            <a:srgbClr val="F4F6F8"/>
+          </a:solidFill>
+          <a:ln>
+            <a:noFill/>
+          </a:ln>
+          <a:effectLst/>
+        </p:spPr>
+        <p:style>
+          <a:lnRef idx="1">
+            <a:schemeClr val="accent1"/>
+          </a:lnRef>
+          <a:fillRef idx="3">
+            <a:schemeClr val="accent1"/>
+          </a:fillRef>
+          <a:effectRef idx="2">
+            <a:schemeClr val="accent1"/>
+          </a:effectRef>
+          <a:fontRef idx="minor">
+            <a:schemeClr val="lt1"/>
+          </a:fontRef>
+        </p:style>
+        <p:txBody>
+          <a:bodyPr rtlCol="0" anchor="ctr"/>
+          <a:lstStyle/>
+          <a:p>
+            <a:pPr algn="ctr"/>
+          </a:p>
+        </p:txBody>
+      </p:sp>
+      <p:sp>
+        <p:nvSpPr>
+          <p:cNvPr id="13" name="Oval 12"/>
+          <p:cNvSpPr/>
+          <p:nvPr/>
+        </p:nvSpPr>
+        <p:spPr>
+          <a:xfrm>
+            <a:off x="8449056" y="2176272"/>
+            <a:ext cx="329184" cy="329184"/>
+          </a:xfrm>
+          <a:prstGeom prst="ellipse">
+            <a:avLst/>
+          </a:prstGeom>
+          <a:solidFill>
+            <a:srgbClr val="1C7293"/>
+          </a:solidFill>
+          <a:ln>
+            <a:noFill/>
+          </a:ln>
+          <a:effectLst/>
+        </p:spPr>
+        <p:style>
+          <a:lnRef idx="1">
+            <a:schemeClr val="accent1"/>
+          </a:lnRef>
+          <a:fillRef idx="3">
+            <a:schemeClr val="accent1"/>
+          </a:fillRef>
+          <a:effectRef idx="2">
+            <a:schemeClr val="accent1"/>
+          </a:effectRef>
+          <a:fontRef idx="minor">
+            <a:schemeClr val="lt1"/>
+          </a:fontRef>
+        </p:style>
+        <p:txBody>
+          <a:bodyPr rtlCol="0" anchor="ctr"/>
+          <a:lstStyle/>
+          <a:p>
+            <a:pPr algn="ctr"/>
+          </a:p>
+        </p:txBody>
+      </p:sp>
+      <p:sp>
+        <p:nvSpPr>
+          <p:cNvPr id="14" name="TextBox 13"/>
+          <p:cNvSpPr txBox="1"/>
+          <p:nvPr/>
+        </p:nvSpPr>
+        <p:spPr>
+          <a:xfrm>
+            <a:off x="8924544" y="2194560"/>
+            <a:ext cx="2560320" cy="365760"/>
+          </a:xfrm>
+          <a:prstGeom prst="rect">
+            <a:avLst/>
+          </a:prstGeom>
+          <a:noFill/>
+        </p:spPr>
+        <p:txBody>
+          <a:bodyPr wrap="square" lIns="0" rIns="0" tIns="0" bIns="0" anchor="t">
+            <a:spAutoFit/>
+          </a:bodyPr>
+          <a:lstStyle/>
+          <a:p>
+            <a:pPr algn="l">
+              <a:spcAft>
+                <a:spcPts val="600"/>
+              </a:spcAft>
+            </a:pPr>
+            <a:r>
+              <a:rPr sz="1450" b="1" i="0">
+                <a:solidFill>
+                  <a:srgbClr val="12263A"/>
+                </a:solidFill>
+                <a:latin typeface="Cambria"/>
+              </a:rPr>
+              <a:t>Remaining levels</a:t>
+            </a:r>
+          </a:p>
+        </p:txBody>
+      </p:sp>
+      <p:sp>
+        <p:nvSpPr>
+          <p:cNvPr id="15" name="TextBox 14"/>
+          <p:cNvSpPr txBox="1"/>
+          <p:nvPr/>
+        </p:nvSpPr>
+        <p:spPr>
+          <a:xfrm>
+            <a:off x="8449056" y="2697480"/>
+            <a:ext cx="2971800" cy="960120"/>
+          </a:xfrm>
+          <a:prstGeom prst="rect">
+            <a:avLst/>
+          </a:prstGeom>
+          <a:noFill/>
+        </p:spPr>
+        <p:txBody>
+          <a:bodyPr wrap="square" lIns="0" rIns="0" tIns="0" bIns="0" anchor="t">
+            <a:spAutoFit/>
+          </a:bodyPr>
+          <a:lstStyle/>
+          <a:p>
+            <a:pPr algn="l">
+              <a:spcAft>
+                <a:spcPts val="600"/>
+              </a:spcAft>
+            </a:pPr>
+            <a:r>
+              <a:rPr sz="1200" b="0" i="0">
+                <a:solidFill>
+                  <a:srgbClr val="5A6672"/>
+                </a:solidFill>
+                <a:latin typeface="Calibri"/>
+              </a:rPr>
+              <a:t>Cross-ratio, conics, reflections and cross-modal normal agreement.</a:t>
+            </a:r>
+          </a:p>
+        </p:txBody>
+      </p:sp>
+      <p:sp>
+        <p:nvSpPr>
+          <p:cNvPr id="16" name="Rounded Rectangle 15"/>
+          <p:cNvSpPr/>
+          <p:nvPr/>
+        </p:nvSpPr>
+        <p:spPr>
+          <a:xfrm>
+            <a:off x="640080" y="4114800"/>
+            <a:ext cx="3520440" cy="1874519"/>
+          </a:xfrm>
+          <a:prstGeom prst="roundRect">
+            <a:avLst>
+              <a:gd name="adj" fmla="val 6000"/>
+            </a:avLst>
+          </a:prstGeom>
+          <a:solidFill>
+            <a:srgbClr val="F4F6F8"/>
+          </a:solidFill>
+          <a:ln>
+            <a:noFill/>
+          </a:ln>
+          <a:effectLst/>
+        </p:spPr>
+        <p:style>
+          <a:lnRef idx="1">
+            <a:schemeClr val="accent1"/>
+          </a:lnRef>
+          <a:fillRef idx="3">
+            <a:schemeClr val="accent1"/>
+          </a:fillRef>
+          <a:effectRef idx="2">
+            <a:schemeClr val="accent1"/>
+          </a:effectRef>
+          <a:fontRef idx="minor">
+            <a:schemeClr val="lt1"/>
+          </a:fontRef>
+        </p:style>
+        <p:txBody>
+          <a:bodyPr rtlCol="0" anchor="ctr"/>
+          <a:lstStyle/>
+          <a:p>
+            <a:pPr algn="ctr"/>
+          </a:p>
+        </p:txBody>
+      </p:sp>
+      <p:sp>
+        <p:nvSpPr>
+          <p:cNvPr id="17" name="Oval 16"/>
+          <p:cNvSpPr/>
+          <p:nvPr/>
+        </p:nvSpPr>
+        <p:spPr>
+          <a:xfrm>
+            <a:off x="914400" y="4370832"/>
+            <a:ext cx="329184" cy="329184"/>
+          </a:xfrm>
+          <a:prstGeom prst="ellipse">
+            <a:avLst/>
+          </a:prstGeom>
+          <a:solidFill>
+            <a:srgbClr val="E8A33D"/>
+          </a:solidFill>
+          <a:ln>
+            <a:noFill/>
+          </a:ln>
+          <a:effectLst/>
+        </p:spPr>
+        <p:style>
+          <a:lnRef idx="1">
+            <a:schemeClr val="accent1"/>
+          </a:lnRef>
+          <a:fillRef idx="3">
+            <a:schemeClr val="accent1"/>
+          </a:fillRef>
+          <a:effectRef idx="2">
+            <a:schemeClr val="accent1"/>
+          </a:effectRef>
+          <a:fontRef idx="minor">
+            <a:schemeClr val="lt1"/>
+          </a:fontRef>
+        </p:style>
+        <p:txBody>
+          <a:bodyPr rtlCol="0" anchor="ctr"/>
+          <a:lstStyle/>
+          <a:p>
+            <a:pPr algn="ctr"/>
+          </a:p>
+        </p:txBody>
+      </p:sp>
+      <p:sp>
+        <p:nvSpPr>
+          <p:cNvPr id="18" name="TextBox 17"/>
+          <p:cNvSpPr txBox="1"/>
+          <p:nvPr/>
+        </p:nvSpPr>
+        <p:spPr>
+          <a:xfrm>
+            <a:off x="1389888" y="4389120"/>
+            <a:ext cx="2560320" cy="365760"/>
+          </a:xfrm>
+          <a:prstGeom prst="rect">
+            <a:avLst/>
+          </a:prstGeom>
+          <a:noFill/>
+        </p:spPr>
+        <p:txBody>
+          <a:bodyPr wrap="square" lIns="0" rIns="0" tIns="0" bIns="0" anchor="t">
+            <a:spAutoFit/>
+          </a:bodyPr>
+          <a:lstStyle/>
+          <a:p>
+            <a:pPr algn="l">
+              <a:spcAft>
+                <a:spcPts val="600"/>
+              </a:spcAft>
+            </a:pPr>
+            <a:r>
+              <a:rPr sz="1450" b="1" i="0">
+                <a:solidFill>
+                  <a:srgbClr val="12263A"/>
+                </a:solidFill>
+                <a:latin typeface="Cambria"/>
+              </a:rPr>
+              <a:t>Mechanism</a:t>
+            </a:r>
+          </a:p>
+        </p:txBody>
+      </p:sp>
+      <p:sp>
+        <p:nvSpPr>
+          <p:cNvPr id="19" name="TextBox 18"/>
+          <p:cNvSpPr txBox="1"/>
+          <p:nvPr/>
+        </p:nvSpPr>
+        <p:spPr>
+          <a:xfrm>
+            <a:off x="914400" y="4892040"/>
+            <a:ext cx="2971800" cy="960120"/>
+          </a:xfrm>
+          <a:prstGeom prst="rect">
+            <a:avLst/>
+          </a:prstGeom>
+          <a:noFill/>
+        </p:spPr>
+        <p:txBody>
+          <a:bodyPr wrap="square" lIns="0" rIns="0" tIns="0" bIns="0" anchor="t">
+            <a:spAutoFit/>
+          </a:bodyPr>
+          <a:lstStyle/>
+          <a:p>
+            <a:pPr algn="l">
+              <a:spcAft>
+                <a:spcPts val="600"/>
+              </a:spcAft>
+            </a:pPr>
+            <a:r>
+              <a:rPr sz="1200" b="0" i="0">
+                <a:solidFill>
+                  <a:srgbClr val="5A6672"/>
+                </a:solidFill>
+                <a:latin typeface="Calibri"/>
+              </a:rPr>
+              <a:t>Why does scale not fix camera coherence? Aspect ratio is ruled out; resolution and latent receptive field remain.</a:t>
+            </a:r>
+          </a:p>
+        </p:txBody>
+      </p:sp>
+      <p:sp>
+        <p:nvSpPr>
+          <p:cNvPr id="20" name="Rounded Rectangle 19"/>
+          <p:cNvSpPr/>
+          <p:nvPr/>
+        </p:nvSpPr>
+        <p:spPr>
+          <a:xfrm>
+            <a:off x="4407408" y="4114800"/>
+            <a:ext cx="3520440" cy="1874519"/>
+          </a:xfrm>
+          <a:prstGeom prst="roundRect">
+            <a:avLst>
+              <a:gd name="adj" fmla="val 6000"/>
+            </a:avLst>
+          </a:prstGeom>
+          <a:solidFill>
+            <a:srgbClr val="F4F6F8"/>
+          </a:solidFill>
+          <a:ln>
+            <a:noFill/>
+          </a:ln>
+          <a:effectLst/>
+        </p:spPr>
+        <p:style>
+          <a:lnRef idx="1">
+            <a:schemeClr val="accent1"/>
+          </a:lnRef>
+          <a:fillRef idx="3">
+            <a:schemeClr val="accent1"/>
+          </a:fillRef>
+          <a:effectRef idx="2">
+            <a:schemeClr val="accent1"/>
+          </a:effectRef>
+          <a:fontRef idx="minor">
+            <a:schemeClr val="lt1"/>
+          </a:fontRef>
+        </p:style>
+        <p:txBody>
+          <a:bodyPr rtlCol="0" anchor="ctr"/>
+          <a:lstStyle/>
+          <a:p>
+            <a:pPr algn="ctr"/>
+          </a:p>
+        </p:txBody>
+      </p:sp>
+      <p:sp>
+        <p:nvSpPr>
+          <p:cNvPr id="21" name="Oval 20"/>
+          <p:cNvSpPr/>
+          <p:nvPr/>
+        </p:nvSpPr>
+        <p:spPr>
+          <a:xfrm>
+            <a:off x="4681728" y="4370832"/>
+            <a:ext cx="329184" cy="329184"/>
+          </a:xfrm>
+          <a:prstGeom prst="ellipse">
+            <a:avLst/>
+          </a:prstGeom>
+          <a:solidFill>
+            <a:srgbClr val="12263A"/>
+          </a:solidFill>
+          <a:ln>
+            <a:noFill/>
+          </a:ln>
+          <a:effectLst/>
+        </p:spPr>
+        <p:style>
+          <a:lnRef idx="1">
+            <a:schemeClr val="accent1"/>
+          </a:lnRef>
+          <a:fillRef idx="3">
+            <a:schemeClr val="accent1"/>
+          </a:fillRef>
+          <a:effectRef idx="2">
+            <a:schemeClr val="accent1"/>
+          </a:effectRef>
+          <a:fontRef idx="minor">
+            <a:schemeClr val="lt1"/>
+          </a:fontRef>
+        </p:style>
+        <p:txBody>
+          <a:bodyPr rtlCol="0" anchor="ctr"/>
+          <a:lstStyle/>
+          <a:p>
+            <a:pPr algn="ctr"/>
+          </a:p>
+        </p:txBody>
+      </p:sp>
+      <p:sp>
+        <p:nvSpPr>
+          <p:cNvPr id="22" name="TextBox 21"/>
+          <p:cNvSpPr txBox="1"/>
+          <p:nvPr/>
+        </p:nvSpPr>
+        <p:spPr>
+          <a:xfrm>
+            <a:off x="5157216" y="4389120"/>
+            <a:ext cx="2560320" cy="365760"/>
+          </a:xfrm>
+          <a:prstGeom prst="rect">
+            <a:avLst/>
+          </a:prstGeom>
+          <a:noFill/>
+        </p:spPr>
+        <p:txBody>
+          <a:bodyPr wrap="square" lIns="0" rIns="0" tIns="0" bIns="0" anchor="t">
+            <a:spAutoFit/>
+          </a:bodyPr>
+          <a:lstStyle/>
+          <a:p>
+            <a:pPr algn="l">
+              <a:spcAft>
+                <a:spcPts val="600"/>
+              </a:spcAft>
+            </a:pPr>
+            <a:r>
+              <a:rPr sz="1450" b="1" i="0">
+                <a:solidFill>
+                  <a:srgbClr val="12263A"/>
+                </a:solidFill>
+                <a:latin typeface="Cambria"/>
+              </a:rPr>
+              <a:t>Sheaf formalism</a:t>
+            </a:r>
+          </a:p>
+        </p:txBody>
+      </p:sp>
+      <p:sp>
+        <p:nvSpPr>
+          <p:cNvPr id="23" name="TextBox 22"/>
+          <p:cNvSpPr txBox="1"/>
+          <p:nvPr/>
+        </p:nvSpPr>
+        <p:spPr>
+          <a:xfrm>
+            <a:off x="4681728" y="4892040"/>
+            <a:ext cx="2971800" cy="960120"/>
+          </a:xfrm>
+          <a:prstGeom prst="rect">
+            <a:avLst/>
+          </a:prstGeom>
+          <a:noFill/>
+        </p:spPr>
+        <p:txBody>
+          <a:bodyPr wrap="square" lIns="0" rIns="0" tIns="0" bIns="0" anchor="t">
+            <a:spAutoFit/>
+          </a:bodyPr>
+          <a:lstStyle/>
+          <a:p>
+            <a:pPr algn="l">
+              <a:spcAft>
+                <a:spcPts val="600"/>
+              </a:spcAft>
+            </a:pPr>
+            <a:r>
+              <a:rPr sz="1200" b="0" i="0">
+                <a:solidFill>
+                  <a:srgbClr val="5A6672"/>
+                </a:solidFill>
+                <a:latin typeface="Calibri"/>
+              </a:rPr>
+              <a:t>Consistency radius over a cover of local cameras as a principled local-to-global measure.</a:t>
+            </a:r>
+          </a:p>
+        </p:txBody>
+      </p:sp>
+      <p:sp>
+        <p:nvSpPr>
+          <p:cNvPr id="24" name="Rounded Rectangle 23"/>
+          <p:cNvSpPr/>
+          <p:nvPr/>
+        </p:nvSpPr>
+        <p:spPr>
+          <a:xfrm>
+            <a:off x="8174736" y="4114800"/>
+            <a:ext cx="3520440" cy="1874519"/>
+          </a:xfrm>
+          <a:prstGeom prst="roundRect">
+            <a:avLst>
+              <a:gd name="adj" fmla="val 6000"/>
+            </a:avLst>
+          </a:prstGeom>
+          <a:solidFill>
+            <a:srgbClr val="F4F6F8"/>
+          </a:solidFill>
+          <a:ln>
+            <a:noFill/>
+          </a:ln>
+          <a:effectLst/>
+        </p:spPr>
+        <p:style>
+          <a:lnRef idx="1">
+            <a:schemeClr val="accent1"/>
+          </a:lnRef>
+          <a:fillRef idx="3">
+            <a:schemeClr val="accent1"/>
+          </a:fillRef>
+          <a:effectRef idx="2">
+            <a:schemeClr val="accent1"/>
+          </a:effectRef>
+          <a:fontRef idx="minor">
+            <a:schemeClr val="lt1"/>
+          </a:fontRef>
+        </p:style>
+        <p:txBody>
+          <a:bodyPr rtlCol="0" anchor="ctr"/>
+          <a:lstStyle/>
+          <a:p>
+            <a:pPr algn="ctr"/>
+          </a:p>
+        </p:txBody>
+      </p:sp>
+      <p:sp>
+        <p:nvSpPr>
+          <p:cNvPr id="25" name="Oval 24"/>
+          <p:cNvSpPr/>
+          <p:nvPr/>
+        </p:nvSpPr>
+        <p:spPr>
+          <a:xfrm>
+            <a:off x="8449056" y="4370832"/>
+            <a:ext cx="329184" cy="329184"/>
+          </a:xfrm>
+          <a:prstGeom prst="ellipse">
+            <a:avLst/>
+          </a:prstGeom>
+          <a:solidFill>
+            <a:srgbClr val="1C7293"/>
+          </a:solidFill>
+          <a:ln>
+            <a:noFill/>
+          </a:ln>
+          <a:effectLst/>
+        </p:spPr>
+        <p:style>
+          <a:lnRef idx="1">
+            <a:schemeClr val="accent1"/>
+          </a:lnRef>
+          <a:fillRef idx="3">
+            <a:schemeClr val="accent1"/>
+          </a:fillRef>
+          <a:effectRef idx="2">
+            <a:schemeClr val="accent1"/>
+          </a:effectRef>
+          <a:fontRef idx="minor">
+            <a:schemeClr val="lt1"/>
+          </a:fontRef>
+        </p:style>
+        <p:txBody>
+          <a:bodyPr rtlCol="0" anchor="ctr"/>
+          <a:lstStyle/>
+          <a:p>
+            <a:pPr algn="ctr"/>
+          </a:p>
+        </p:txBody>
+      </p:sp>
+      <p:sp>
+        <p:nvSpPr>
+          <p:cNvPr id="26" name="TextBox 25"/>
+          <p:cNvSpPr txBox="1"/>
+          <p:nvPr/>
+        </p:nvSpPr>
+        <p:spPr>
+          <a:xfrm>
+            <a:off x="8924544" y="4389120"/>
+            <a:ext cx="2560320" cy="365760"/>
+          </a:xfrm>
+          <a:prstGeom prst="rect">
+            <a:avLst/>
+          </a:prstGeom>
+          <a:noFill/>
+        </p:spPr>
+        <p:txBody>
+          <a:bodyPr wrap="square" lIns="0" rIns="0" tIns="0" bIns="0" anchor="t">
+            <a:spAutoFit/>
+          </a:bodyPr>
+          <a:lstStyle/>
+          <a:p>
+            <a:pPr algn="l">
+              <a:spcAft>
+                <a:spcPts val="600"/>
+              </a:spcAft>
+            </a:pPr>
+            <a:r>
+              <a:rPr sz="1450" b="1" i="0">
+                <a:solidFill>
+                  <a:srgbClr val="12263A"/>
+                </a:solidFill>
+                <a:latin typeface="Cambria"/>
+              </a:rPr>
+              <a:t>Perception study</a:t>
+            </a:r>
+          </a:p>
+        </p:txBody>
+      </p:sp>
+      <p:sp>
+        <p:nvSpPr>
+          <p:cNvPr id="27" name="TextBox 26"/>
+          <p:cNvSpPr txBox="1"/>
+          <p:nvPr/>
+        </p:nvSpPr>
+        <p:spPr>
+          <a:xfrm>
+            <a:off x="8449056" y="4892040"/>
+            <a:ext cx="2971800" cy="960120"/>
+          </a:xfrm>
+          <a:prstGeom prst="rect">
+            <a:avLst/>
+          </a:prstGeom>
+          <a:noFill/>
+        </p:spPr>
+        <p:txBody>
+          <a:bodyPr wrap="square" lIns="0" rIns="0" tIns="0" bIns="0" anchor="t">
+            <a:spAutoFit/>
+          </a:bodyPr>
+          <a:lstStyle/>
+          <a:p>
+            <a:pPr algn="l">
+              <a:spcAft>
+                <a:spcPts val="600"/>
+              </a:spcAft>
+            </a:pPr>
+            <a:r>
+              <a:rPr sz="1200" b="0" i="0">
+                <a:solidFill>
+                  <a:srgbClr val="5A6672"/>
+                </a:solidFill>
+                <a:latin typeface="Calibri"/>
+              </a:rPr>
+              <a:t>Which violations are mathematically severe but visually unnoticed.</a:t>
             </a:r>
           </a:p>
         </p:txBody>
@@ -11706,6 +12258,345 @@
                 <a:latin typeface="Calibri"/>
               </a:rPr>
               <a:t>No real camera can break these.</a:t>
+            </a:r>
+          </a:p>
+        </p:txBody>
+      </p:sp>
+    </p:spTree>
+  </p:cSld>
+  <p:clrMapOvr>
+    <a:masterClrMapping/>
+  </p:clrMapOvr>
+</p:sld>
+</file>
+
+<file path=ppt/slides/slide20.xml><?xml version="1.0" encoding="utf-8"?>
+<p:sld xmlns:a="http://schemas.openxmlformats.org/drawingml/2006/main" xmlns:p="http://schemas.openxmlformats.org/presentationml/2006/main" xmlns:r="http://schemas.openxmlformats.org/officeDocument/2006/relationships">
+  <p:cSld>
+    <p:spTree>
+      <p:nvGrpSpPr>
+        <p:cNvPr id="1" name=""/>
+        <p:cNvGrpSpPr/>
+        <p:nvPr/>
+      </p:nvGrpSpPr>
+      <p:grpSpPr/>
+      <p:sp>
+        <p:nvSpPr>
+          <p:cNvPr id="2" name="Rectangle 1"/>
+          <p:cNvSpPr/>
+          <p:nvPr/>
+        </p:nvSpPr>
+        <p:spPr>
+          <a:xfrm>
+            <a:off x="0" y="0"/>
+            <a:ext cx="12191695" cy="6858000"/>
+          </a:xfrm>
+          <a:prstGeom prst="rect">
+            <a:avLst/>
+          </a:prstGeom>
+          <a:solidFill>
+            <a:srgbClr val="FFFFFF"/>
+          </a:solidFill>
+          <a:ln>
+            <a:noFill/>
+          </a:ln>
+          <a:effectLst/>
+        </p:spPr>
+        <p:style>
+          <a:lnRef idx="1">
+            <a:schemeClr val="accent1"/>
+          </a:lnRef>
+          <a:fillRef idx="3">
+            <a:schemeClr val="accent1"/>
+          </a:fillRef>
+          <a:effectRef idx="2">
+            <a:schemeClr val="accent1"/>
+          </a:effectRef>
+          <a:fontRef idx="minor">
+            <a:schemeClr val="lt1"/>
+          </a:fontRef>
+        </p:style>
+        <p:txBody>
+          <a:bodyPr rtlCol="0" anchor="ctr"/>
+          <a:lstStyle/>
+          <a:p>
+            <a:pPr algn="ctr"/>
+          </a:p>
+        </p:txBody>
+      </p:sp>
+      <p:sp>
+        <p:nvSpPr>
+          <p:cNvPr id="3" name="TextBox 2"/>
+          <p:cNvSpPr txBox="1"/>
+          <p:nvPr/>
+        </p:nvSpPr>
+        <p:spPr>
+          <a:xfrm>
+            <a:off x="640080" y="457200"/>
+            <a:ext cx="10911535" cy="822960"/>
+          </a:xfrm>
+          <a:prstGeom prst="rect">
+            <a:avLst/>
+          </a:prstGeom>
+          <a:noFill/>
+        </p:spPr>
+        <p:txBody>
+          <a:bodyPr wrap="square" lIns="0" rIns="0" tIns="0" bIns="0" anchor="t">
+            <a:spAutoFit/>
+          </a:bodyPr>
+          <a:lstStyle/>
+          <a:p>
+            <a:pPr algn="l">
+              <a:spcAft>
+                <a:spcPts val="600"/>
+              </a:spcAft>
+            </a:pPr>
+            <a:r>
+              <a:rPr sz="3200" b="1" i="0">
+                <a:solidFill>
+                  <a:srgbClr val="12263A"/>
+                </a:solidFill>
+                <a:latin typeface="Cambria"/>
+              </a:rPr>
+              <a:t>References</a:t>
+            </a:r>
+          </a:p>
+        </p:txBody>
+      </p:sp>
+      <p:sp>
+        <p:nvSpPr>
+          <p:cNvPr id="4" name="TextBox 3"/>
+          <p:cNvSpPr txBox="1"/>
+          <p:nvPr/>
+        </p:nvSpPr>
+        <p:spPr>
+          <a:xfrm>
+            <a:off x="640080" y="1783080"/>
+            <a:ext cx="10908792" cy="4480560"/>
+          </a:xfrm>
+          <a:prstGeom prst="rect">
+            <a:avLst/>
+          </a:prstGeom>
+          <a:noFill/>
+        </p:spPr>
+        <p:txBody>
+          <a:bodyPr wrap="square" lIns="0" rIns="0">
+            <a:spAutoFit/>
+          </a:bodyPr>
+          <a:lstStyle/>
+          <a:p>
+            <a:pPr>
+              <a:spcAft>
+                <a:spcPts val="700"/>
+              </a:spcAft>
+            </a:pPr>
+            <a:r>
+              <a:rPr sz="1200">
+                <a:solidFill>
+                  <a:srgbClr val="1A1A1A"/>
+                </a:solidFill>
+                <a:latin typeface="Calibri"/>
+              </a:rPr>
+              <a:t>[1] A. Sarkar et al., “Shadows Don’t Lie and Lines Can’t Bend! Generative Models don’t know Projective Geometry…for now,” CVPR, 2024.</a:t>
+            </a:r>
+          </a:p>
+          <a:p>
+            <a:pPr>
+              <a:spcAft>
+                <a:spcPts val="700"/>
+              </a:spcAft>
+            </a:pPr>
+            <a:r>
+              <a:rPr sz="1200">
+                <a:solidFill>
+                  <a:srgbClr val="1A1A1A"/>
+                </a:solidFill>
+                <a:latin typeface="Calibri"/>
+              </a:rPr>
+              <a:t>[2] R. Hartley and A. Zisserman, Multiple View Geometry in Computer Vision, 2nd ed., Cambridge University Press, 2004.</a:t>
+            </a:r>
+          </a:p>
+          <a:p>
+            <a:pPr>
+              <a:spcAft>
+                <a:spcPts val="700"/>
+              </a:spcAft>
+            </a:pPr>
+            <a:r>
+              <a:rPr sz="1200">
+                <a:solidFill>
+                  <a:srgbClr val="1A1A1A"/>
+                </a:solidFill>
+                <a:latin typeface="Calibri"/>
+              </a:rPr>
+              <a:t>[3] E. Kee, J. F. O’Brien and H. Farid, “Exposing photo manipulation with inconsistent shadows,” ACM TOG, vol. 32, no. 3, 2013.</a:t>
+            </a:r>
+          </a:p>
+          <a:p>
+            <a:pPr>
+              <a:spcAft>
+                <a:spcPts val="700"/>
+              </a:spcAft>
+            </a:pPr>
+            <a:r>
+              <a:rPr sz="1200">
+                <a:solidFill>
+                  <a:srgbClr val="1A1A1A"/>
+                </a:solidFill>
+                <a:latin typeface="Calibri"/>
+              </a:rPr>
+              <a:t>[4] A. Criminisi, I. Reid and A. Zisserman, “Single view metrology,” IJCV, vol. 40, no. 2, pp. 123–148, 2000.</a:t>
+            </a:r>
+          </a:p>
+          <a:p>
+            <a:pPr>
+              <a:spcAft>
+                <a:spcPts val="700"/>
+              </a:spcAft>
+            </a:pPr>
+            <a:r>
+              <a:rPr sz="1200">
+                <a:solidFill>
+                  <a:srgbClr val="1A1A1A"/>
+                </a:solidFill>
+                <a:latin typeface="Calibri"/>
+              </a:rPr>
+              <a:t>[5] J. M. Coughlan and A. L. Yuille, “Manhattan world,” ICCV, 1999.</a:t>
+            </a:r>
+          </a:p>
+          <a:p>
+            <a:pPr>
+              <a:spcAft>
+                <a:spcPts val="700"/>
+              </a:spcAft>
+            </a:pPr>
+            <a:r>
+              <a:rPr sz="1200">
+                <a:solidFill>
+                  <a:srgbClr val="1A1A1A"/>
+                </a:solidFill>
+                <a:latin typeface="Calibri"/>
+              </a:rPr>
+              <a:t>[6] P. Denis, J. H. Elder and F. J. Estrada, “Efficient edge-based methods for estimating Manhattan frames in urban imagery,” ECCV, 2008.</a:t>
+            </a:r>
+          </a:p>
+          <a:p>
+            <a:pPr>
+              <a:spcAft>
+                <a:spcPts val="700"/>
+              </a:spcAft>
+            </a:pPr>
+            <a:r>
+              <a:rPr sz="1200">
+                <a:solidFill>
+                  <a:srgbClr val="1A1A1A"/>
+                </a:solidFill>
+                <a:latin typeface="Calibri"/>
+              </a:rPr>
+              <a:t>[7] R. Grompone von Gioi et al., “LSD: a fast line segment detector with a false detection control,” IEEE TPAMI, vol. 32, no. 4, 2010.</a:t>
+            </a:r>
+          </a:p>
+          <a:p>
+            <a:pPr>
+              <a:spcAft>
+                <a:spcPts val="700"/>
+              </a:spcAft>
+            </a:pPr>
+            <a:r>
+              <a:rPr sz="1200">
+                <a:solidFill>
+                  <a:srgbClr val="1A1A1A"/>
+                </a:solidFill>
+                <a:latin typeface="Calibri"/>
+              </a:rPr>
+              <a:t>[8] D. Hoiem, A. A. Efros and M. Hebert, “Putting objects in perspective,” IJCV, vol. 80, no. 1, 2008.</a:t>
+            </a:r>
+          </a:p>
+          <a:p>
+            <a:pPr>
+              <a:spcAft>
+                <a:spcPts val="700"/>
+              </a:spcAft>
+            </a:pPr>
+            <a:r>
+              <a:rPr sz="1200">
+                <a:solidFill>
+                  <a:srgbClr val="1A1A1A"/>
+                </a:solidFill>
+                <a:latin typeface="Calibri"/>
+              </a:rPr>
+              <a:t>[9] L. Jin et al., “Perspective fields for single image camera calibration,” CVPR, 2023.</a:t>
+            </a:r>
+          </a:p>
+          <a:p>
+            <a:pPr>
+              <a:spcAft>
+                <a:spcPts val="700"/>
+              </a:spcAft>
+            </a:pPr>
+            <a:r>
+              <a:rPr sz="1200">
+                <a:solidFill>
+                  <a:srgbClr val="1A1A1A"/>
+                </a:solidFill>
+                <a:latin typeface="Calibri"/>
+              </a:rPr>
+              <a:t>[10] D. Podell et al., “SDXL: improving latent diffusion models for high-resolution image synthesis,” ICLR, 2024.</a:t>
+            </a:r>
+          </a:p>
+          <a:p>
+            <a:pPr>
+              <a:spcAft>
+                <a:spcPts val="700"/>
+              </a:spcAft>
+            </a:pPr>
+            <a:r>
+              <a:rPr sz="1200">
+                <a:solidFill>
+                  <a:srgbClr val="1A1A1A"/>
+                </a:solidFill>
+                <a:latin typeface="Calibri"/>
+              </a:rPr>
+              <a:t>[11] R. Rombach et al., “High-resolution image synthesis with latent diffusion models,” CVPR, 2022.</a:t>
+            </a:r>
+          </a:p>
+        </p:txBody>
+      </p:sp>
+      <p:sp>
+        <p:nvSpPr>
+          <p:cNvPr id="5" name="TextBox 4"/>
+          <p:cNvSpPr txBox="1"/>
+          <p:nvPr/>
+        </p:nvSpPr>
+        <p:spPr>
+          <a:xfrm>
+            <a:off x="640080" y="6309360"/>
+            <a:ext cx="10908792" cy="365760"/>
+          </a:xfrm>
+          <a:prstGeom prst="rect">
+            <a:avLst/>
+          </a:prstGeom>
+          <a:noFill/>
+        </p:spPr>
+        <p:txBody>
+          <a:bodyPr wrap="square" lIns="0" rIns="0" tIns="0" bIns="0" anchor="t">
+            <a:spAutoFit/>
+          </a:bodyPr>
+          <a:lstStyle/>
+          <a:p>
+            <a:pPr algn="l">
+              <a:spcAft>
+                <a:spcPts val="600"/>
+              </a:spcAft>
+            </a:pPr>
+            <a:r>
+              <a:rPr sz="1100" b="0" i="1">
+                <a:solidFill>
+                  <a:srgbClr val="5A6672"/>
+                </a:solidFill>
+                <a:latin typeface="Calibri"/>
+              </a:rPr>
+              <a:t>Dataset credits: York Urban Database (Elder Laboratory, York University); Wikimedia Commons photographs under CC licences, per-image attribution in the project metadata.</a:t>
             </a:r>
           </a:p>
         </p:txBody>

--- a/docs/report/CA3_Presentation_Geometric_Consistency.pptx
+++ b/docs/report/CA3_Presentation_Geometric_Consistency.pptx
@@ -25,6 +25,7 @@
     <p:sldId id="273" r:id="rId25"/>
     <p:sldId id="274" r:id="rId26"/>
     <p:sldId id="275" r:id="rId27"/>
+    <p:sldId id="276" r:id="rId28"/>
   </p:sldIdLst>
   <p:sldSz cx="12191695" cy="6858000" type="screen4x3"/>
   <p:notesSz cx="6858000" cy="9144000"/>
@@ -521,7 +522,7 @@
           <a:lstStyle/>
           <a:p>
             <a:r>
-              <a:t>State the one-line thesis: a photograph is made by a camera, a generated image is not, and that difference is measurable in degrees.</a:t>
+              <a:t>Open with the one-line idea: a real photo is made by one camera, an AI image is not, and that difference can be measured in degrees and pixels.</a:t>
             </a:r>
           </a:p>
         </p:txBody>
@@ -591,7 +592,7 @@
           <a:lstStyle/>
           <a:p>
             <a:r>
-              <a:t>The stratum-2 failure is a good example of diagnosing a negative result rather than discarding it.</a:t>
+              <a:t>Comparing a model on one prompt set against another model on a different set would mix up the model with the scene type, so we never do it.</a:t>
             </a:r>
           </a:p>
         </p:txBody>
@@ -661,7 +662,7 @@
           <a:lstStyle/>
           <a:p>
             <a:r>
-              <a:t>Without this slide, every later number is uninterpretable.</a:t>
+              <a:t>Without this slide every later number would be uninterpretable.</a:t>
             </a:r>
           </a:p>
         </p:txBody>
@@ -731,7 +732,7 @@
           <a:lstStyle/>
           <a:p>
             <a:r>
-              <a:t>This is the methodological heart of the project. Stress that no evidence-based filtering removes the tail: stricter support makes it worse, and 98% of those photos are uncropped.</a:t>
+              <a:t>This is the method lesson of the project. No filtering on evidence removes the tail: a stricter threshold makes it worse, and 98% of those photos are uncropped.</a:t>
             </a:r>
           </a:p>
         </p:txBody>
@@ -801,7 +802,7 @@
           <a:lstStyle/>
           <a:p>
             <a:r>
-              <a:t>This is the slide to defend. The CIs are bootstrap; the proportions use Wilson intervals.</a:t>
+              <a:t>This is the slide to defend. Intervals are bootstrap (2000 resamples); proportions use Wilson intervals; the test is Mann-Whitney. Line-rich prompt set.</a:t>
             </a:r>
           </a:p>
         </p:txBody>
@@ -871,7 +872,7 @@
           <a:lstStyle/>
           <a:p>
             <a:r>
-              <a:t>Be explicit that the focal result is a null, not a reversal — an earlier version of this claim was withdrawn.</a:t>
+              <a:t>Say clearly that the focal result is a null, not a reversal. An earlier claim that scaling made it worse was withdrawn after we found it used an invalid statistic.</a:t>
             </a:r>
           </a:p>
         </p:txBody>
@@ -941,7 +942,7 @@
           <a:lstStyle/>
           <a:p>
             <a:r>
-              <a:t>Six algorithms were run: logistic regression, decision tree, SVM, random forest, naive Bayes, kNN. Five-fold stratified cross-validation.</a:t>
+              <a:t>Both checks use only the position of the vertical vanishing point, never the focal length, so they cannot bias the test. Numbers are median log-focal spread, line-rich prompts.</a:t>
             </a:r>
           </a:p>
         </p:txBody>
@@ -1011,7 +1012,7 @@
           <a:lstStyle/>
           <a:p>
             <a:r>
-              <a:t>If asked why frontier models are missing: no API access was available; the design anticipates them and the prompts are already content-matched.</a:t>
+              <a:t>Six algorithms: logistic regression, decision tree, SVM, random forest, naive Bayes, kNN. Five-fold stratified cross-validation. The random forest was best in every task.</a:t>
             </a:r>
           </a:p>
         </p:txBody>
@@ -1081,7 +1082,7 @@
           <a:lstStyle/>
           <a:p>
             <a:r>
-              <a:t>Have two images ready: one real photograph that passes, one generated image that fails.</a:t>
+              <a:t>Gemini (nano banana, via Antigravity) and ChatGPT images were made in September 2026 from the first prompt set, so they are compared with the SD and SDXL images from that same set. Next step: 250 line-rich prompts per model at full resolution.</a:t>
             </a:r>
           </a:p>
         </p:txBody>
@@ -1151,7 +1152,7 @@
           <a:lstStyle/>
           <a:p>
             <a:r>
-              <a:t>If asked for one sentence, use the line at the bottom.</a:t>
+              <a:t>The app runs the same code as the report. Bookmark the examples link before presenting. If someone uploads a landscape or a portrait, it will say it cannot measure it: that is the applicability rule working, not a bug.</a:t>
             </a:r>
           </a:p>
         </p:txBody>
@@ -1221,7 +1222,7 @@
           <a:lstStyle/>
           <a:p>
             <a:r>
-              <a:t>Frontier models are the highest-value next step and need no new code.</a:t>
+              <a:t>If asked for one sentence, use the line at the bottom.</a:t>
             </a:r>
           </a:p>
         </p:txBody>
@@ -1291,7 +1292,7 @@
           <a:lstStyle/>
           <a:p>
             <a:r>
-              <a:t>Emphasise that these are consequences of projective geometry, not statistical tendencies.</a:t>
+              <a:t>These rules come from projective geometry, not from habits of photographers, so every real camera obeys them.</a:t>
             </a:r>
           </a:p>
         </p:txBody>
@@ -1361,7 +1362,77 @@
           <a:lstStyle/>
           <a:p>
             <a:r>
-              <a:t>Verify all reference details against publisher records before submission.</a:t>
+              <a:t>The powered frontier test is the highest-value next step and needs no new code.</a:t>
+            </a:r>
+          </a:p>
+        </p:txBody>
+      </p:sp>
+      <p:sp>
+        <p:nvSpPr>
+          <p:cNvPr id="4" name="Slide Number Placeholder 3"/>
+          <p:cNvSpPr>
+            <a:spLocks noGrp="1"/>
+          </p:cNvSpPr>
+          <p:nvPr>
+            <p:ph type="sldNum" idx="5" sz="quarter"/>
+          </p:nvPr>
+        </p:nvSpPr>
+        <p:spPr/>
+      </p:sp>
+    </p:spTree>
+  </p:cSld>
+  <p:clrMapOvr>
+    <a:masterClrMapping/>
+  </p:clrMapOvr>
+</p:notes>
+</file>
+
+<file path=ppt/notesSlides/notesSlide21.xml><?xml version="1.0" encoding="utf-8"?>
+<p:notes xmlns:a="http://schemas.openxmlformats.org/drawingml/2006/main" xmlns:p="http://schemas.openxmlformats.org/presentationml/2006/main" xmlns:r="http://schemas.openxmlformats.org/officeDocument/2006/relationships">
+  <p:cSld>
+    <p:spTree>
+      <p:nvGrpSpPr>
+        <p:cNvPr id="1" name=""/>
+        <p:cNvGrpSpPr/>
+        <p:nvPr/>
+      </p:nvGrpSpPr>
+      <p:grpSpPr>
+        <a:xfrm>
+          <a:off x="0" y="0"/>
+          <a:ext cx="0" cy="0"/>
+          <a:chOff x="0" y="0"/>
+          <a:chExt cx="0" cy="0"/>
+        </a:xfrm>
+      </p:grpSpPr>
+      <p:sp>
+        <p:nvSpPr>
+          <p:cNvPr id="2" name="Slide Image Placeholder 1"/>
+          <p:cNvSpPr>
+            <a:spLocks noGrp="1"/>
+          </p:cNvSpPr>
+          <p:nvPr>
+            <p:ph type="sldImg" idx="2"/>
+          </p:nvPr>
+        </p:nvSpPr>
+        <p:spPr/>
+      </p:sp>
+      <p:sp>
+        <p:nvSpPr>
+          <p:cNvPr id="3" name="Notes Placeholder 2"/>
+          <p:cNvSpPr>
+            <a:spLocks noGrp="1"/>
+          </p:cNvSpPr>
+          <p:nvPr>
+            <p:ph type="body" idx="3" sz="quarter"/>
+          </p:nvPr>
+        </p:nvSpPr>
+        <p:spPr/>
+        <p:txBody>
+          <a:bodyPr/>
+          <a:lstStyle/>
+          <a:p>
+            <a:r>
+              <a:t>The full list (26 references) is in the report. Check details against publisher records before submission.</a:t>
             </a:r>
           </a:p>
         </p:txBody>
@@ -1501,7 +1572,7 @@
           <a:lstStyle/>
           <a:p>
             <a:r>
-              <a:t>O4 is the one that separates this project from a naive implementation.</a:t>
+              <a:t>O4 is what separates this project from a naive implementation. O7 is the demo.</a:t>
             </a:r>
           </a:p>
         </p:txBody>
@@ -1571,7 +1642,7 @@
           <a:lstStyle/>
           <a:p>
             <a:r>
-              <a:t>Sarkar et al. is required reading; our work extends it from detection to diagnosis.</a:t>
+              <a:t>Sarkar et al. is the paper we extend: from detection to diagnosis.</a:t>
             </a:r>
           </a:p>
         </p:txBody>
@@ -1641,7 +1712,7 @@
           <a:lstStyle/>
           <a:p>
             <a:r>
-              <a:t>Gap 4 turned out to be the one that changes results the most.</a:t>
+              <a:t>Gap 4 turned out to change the results the most.</a:t>
             </a:r>
           </a:p>
         </p:txBody>
@@ -1711,7 +1782,7 @@
           <a:lstStyle/>
           <a:p>
             <a:r>
-              <a:t>If asked why L3b is primary: it is valid in Atlanta worlds, where L3 is not.</a:t>
+              <a:t>If asked why L3b is primary: it works in Atlanta worlds (angled streets), where L3 does not.</a:t>
             </a:r>
           </a:p>
         </p:txBody>
@@ -1781,7 +1852,7 @@
           <a:lstStyle/>
           <a:p>
             <a:r>
-              <a:t>The non-circularity test is the thing to stress if a reviewer asks whether we cherry-picked.</a:t>
+              <a:t>The non-circularity test is the answer if anyone asks whether we cherry-picked images.</a:t>
             </a:r>
           </a:p>
         </p:txBody>
@@ -1851,7 +1922,7 @@
           <a:lstStyle/>
           <a:p>
             <a:r>
-              <a:t>Mention the capped-mean fix: inlier RMS saturates, so it was replaced by an uncensored statistic verified monotone.</a:t>
+              <a:t>explain.py is the single implementation of the measurement: the report's numbers, the robustness checks and the app all call it, so they cannot disagree.</a:t>
             </a:r>
           </a:p>
         </p:txBody>
@@ -5020,51 +5091,7 @@
       </p:sp>
       <p:sp>
         <p:nvSpPr>
-          <p:cNvPr id="6" name="Rectangle 5"/>
-          <p:cNvSpPr/>
-          <p:nvPr/>
-        </p:nvSpPr>
-        <p:spPr>
-          <a:xfrm>
-            <a:off x="914400" y="4343400"/>
-            <a:ext cx="1463040" cy="38100"/>
-          </a:xfrm>
-          <a:prstGeom prst="rect">
-            <a:avLst/>
-          </a:prstGeom>
-          <a:solidFill>
-            <a:srgbClr val="E8A33D"/>
-          </a:solidFill>
-          <a:ln>
-            <a:noFill/>
-          </a:ln>
-          <a:effectLst/>
-        </p:spPr>
-        <p:style>
-          <a:lnRef idx="1">
-            <a:schemeClr val="accent1"/>
-          </a:lnRef>
-          <a:fillRef idx="3">
-            <a:schemeClr val="accent1"/>
-          </a:fillRef>
-          <a:effectRef idx="2">
-            <a:schemeClr val="accent1"/>
-          </a:effectRef>
-          <a:fontRef idx="minor">
-            <a:schemeClr val="lt1"/>
-          </a:fontRef>
-        </p:style>
-        <p:txBody>
-          <a:bodyPr rtlCol="0" anchor="ctr"/>
-          <a:lstStyle/>
-          <a:p>
-            <a:pPr algn="ctr"/>
-          </a:p>
-        </p:txBody>
-      </p:sp>
-      <p:sp>
-        <p:nvSpPr>
-          <p:cNvPr id="7" name="TextBox 6"/>
+          <p:cNvPr id="6" name="TextBox 5"/>
           <p:cNvSpPr txBox="1"/>
           <p:nvPr/>
         </p:nvSpPr>
@@ -5268,7 +5295,7 @@
                 </a:solidFill>
                 <a:latin typeface="Calibri"/>
               </a:rPr>
-              <a:t>Content-matched by construction; every parameter logged</a:t>
+              <a:t>Matched content by construction; every setting logged</a:t>
             </a:r>
           </a:p>
         </p:txBody>
@@ -5282,8 +5309,8 @@
           <p:nvPr/>
         </p:nvGraphicFramePr>
         <p:xfrm>
-          <a:off x="640080" y="1828800"/>
-          <a:ext cx="10908792" cy="2651760"/>
+          <a:off x="640080" y="1783080"/>
+          <a:ext cx="10908792" cy="3017520"/>
         </p:xfrm>
         <a:graphic>
           <a:graphicData uri="http://schemas.openxmlformats.org/drawingml/2006/table">
@@ -5292,11 +5319,11 @@
                 <a:tableStyleId>{5C22544A-7EE6-4342-B048-85BDC9FD1C3A}</a:tableStyleId>
               </a:tblPr>
               <a:tblGrid>
-                <a:gridCol w="2377440"/>
+                <a:gridCol w="2651760"/>
                 <a:gridCol w="2743200"/>
-                <a:gridCol w="5788152"/>
+                <a:gridCol w="5513832"/>
               </a:tblGrid>
-              <a:tr h="441960">
+              <a:tr h="377190">
                 <a:tc>
                   <a:txBody>
                     <a:bodyPr/>
@@ -5364,7 +5391,7 @@
                   </a:tcPr>
                 </a:tc>
               </a:tr>
-              <a:tr h="441960">
+              <a:tr h="377190">
                 <a:tc>
                   <a:txBody>
                     <a:bodyPr/>
@@ -5421,7 +5448,7 @@
                           </a:solidFill>
                           <a:latin typeface="Calibri"/>
                         </a:rPr>
-                        <a:t>Curated real reference with ground-truth vanishing points</a:t>
+                        <a:t>Hand-picked real reference with true vanishing points</a:t>
                       </a:r>
                     </a:p>
                   </a:txBody>
@@ -5432,7 +5459,7 @@
                   </a:tcPr>
                 </a:tc>
               </a:tr>
-              <a:tr h="441960">
+              <a:tr h="377190">
                 <a:tc>
                   <a:txBody>
                     <a:bodyPr/>
@@ -5489,7 +5516,7 @@
                           </a:solidFill>
                           <a:latin typeface="Calibri"/>
                         </a:rPr>
-                        <a:t>Uncurated real reference, diverse cameras, EXIF focal lengths</a:t>
+                        <a:t>Ordinary real photos, many cameras, EXIF focal lengths</a:t>
                       </a:r>
                     </a:p>
                   </a:txBody>
@@ -5500,7 +5527,7 @@
                   </a:tcPr>
                 </a:tc>
               </a:tr>
-              <a:tr h="441960">
+              <a:tr h="377190">
                 <a:tc>
                   <a:txBody>
                     <a:bodyPr/>
@@ -5557,7 +5584,7 @@
                           </a:solidFill>
                           <a:latin typeface="Calibri"/>
                         </a:rPr>
-                        <a:t>Older UNet diffusion baseline</a:t>
+                        <a:t>Older open model, run on our GPU</a:t>
                       </a:r>
                     </a:p>
                   </a:txBody>
@@ -5568,7 +5595,7 @@
                   </a:tcPr>
                 </a:tc>
               </a:tr>
-              <a:tr h="441960">
+              <a:tr h="377190">
                 <a:tc>
                   <a:txBody>
                     <a:bodyPr/>
@@ -5625,7 +5652,7 @@
                           </a:solidFill>
                           <a:latin typeface="Calibri"/>
                         </a:rPr>
-                        <a:t>Current-generation baseline, plus 1:1 and 16:9 variants</a:t>
+                        <a:t>Newer open model, plus 1:1 and 16:9 variants</a:t>
                       </a:r>
                     </a:p>
                   </a:txBody>
@@ -5636,7 +5663,143 @@
                   </a:tcPr>
                 </a:tc>
               </a:tr>
-              <a:tr h="441960">
+              <a:tr h="377190">
+                <a:tc>
+                  <a:txBody>
+                    <a:bodyPr/>
+                    <a:lstStyle/>
+                    <a:p>
+                      <a:r>
+                        <a:rPr sz="1150">
+                          <a:solidFill>
+                            <a:srgbClr val="1A1A1A"/>
+                          </a:solidFill>
+                          <a:latin typeface="Calibri"/>
+                        </a:rPr>
+                        <a:t>Gemini (“nano banana”)</a:t>
+                      </a:r>
+                    </a:p>
+                  </a:txBody>
+                  <a:tcPr anchor="ctr">
+                    <a:solidFill>
+                      <a:srgbClr val="FFFFFF"/>
+                    </a:solidFill>
+                  </a:tcPr>
+                </a:tc>
+                <a:tc>
+                  <a:txBody>
+                    <a:bodyPr/>
+                    <a:lstStyle/>
+                    <a:p>
+                      <a:r>
+                        <a:rPr sz="1150">
+                          <a:solidFill>
+                            <a:srgbClr val="1A1A1A"/>
+                          </a:solidFill>
+                          <a:latin typeface="Calibri"/>
+                        </a:rPr>
+                        <a:t>181 images</a:t>
+                      </a:r>
+                    </a:p>
+                  </a:txBody>
+                  <a:tcPr anchor="ctr">
+                    <a:solidFill>
+                      <a:srgbClr val="FFFFFF"/>
+                    </a:solidFill>
+                  </a:tcPr>
+                </a:tc>
+                <a:tc>
+                  <a:txBody>
+                    <a:bodyPr/>
+                    <a:lstStyle/>
+                    <a:p>
+                      <a:r>
+                        <a:rPr sz="1150">
+                          <a:solidFill>
+                            <a:srgbClr val="1A1A1A"/>
+                          </a:solidFill>
+                          <a:latin typeface="Calibri"/>
+                        </a:rPr>
+                        <a:t>Closed frontier model, September 2026</a:t>
+                      </a:r>
+                    </a:p>
+                  </a:txBody>
+                  <a:tcPr anchor="ctr">
+                    <a:solidFill>
+                      <a:srgbClr val="FFFFFF"/>
+                    </a:solidFill>
+                  </a:tcPr>
+                </a:tc>
+              </a:tr>
+              <a:tr h="377190">
+                <a:tc>
+                  <a:txBody>
+                    <a:bodyPr/>
+                    <a:lstStyle/>
+                    <a:p>
+                      <a:r>
+                        <a:rPr sz="1150">
+                          <a:solidFill>
+                            <a:srgbClr val="1A1A1A"/>
+                          </a:solidFill>
+                          <a:latin typeface="Calibri"/>
+                        </a:rPr>
+                        <a:t>ChatGPT image model</a:t>
+                      </a:r>
+                    </a:p>
+                  </a:txBody>
+                  <a:tcPr anchor="ctr">
+                    <a:solidFill>
+                      <a:srgbClr val="F4F6F8"/>
+                    </a:solidFill>
+                  </a:tcPr>
+                </a:tc>
+                <a:tc>
+                  <a:txBody>
+                    <a:bodyPr/>
+                    <a:lstStyle/>
+                    <a:p>
+                      <a:r>
+                        <a:rPr sz="1150">
+                          <a:solidFill>
+                            <a:srgbClr val="1A1A1A"/>
+                          </a:solidFill>
+                          <a:latin typeface="Calibri"/>
+                        </a:rPr>
+                        <a:t>51 images</a:t>
+                      </a:r>
+                    </a:p>
+                  </a:txBody>
+                  <a:tcPr anchor="ctr">
+                    <a:solidFill>
+                      <a:srgbClr val="F4F6F8"/>
+                    </a:solidFill>
+                  </a:tcPr>
+                </a:tc>
+                <a:tc>
+                  <a:txBody>
+                    <a:bodyPr/>
+                    <a:lstStyle/>
+                    <a:p>
+                      <a:r>
+                        <a:rPr sz="1150">
+                          <a:solidFill>
+                            <a:srgbClr val="1A1A1A"/>
+                          </a:solidFill>
+                          <a:latin typeface="Calibri"/>
+                        </a:rPr>
+                        <a:t>Closed frontier model, September 2026</a:t>
+                      </a:r>
+                    </a:p>
+                  </a:txBody>
+                  <a:tcPr anchor="ctr">
+                    <a:solidFill>
+                      <a:srgbClr val="F4F6F8"/>
+                    </a:solidFill>
+                  </a:tcPr>
+                </a:tc>
+              </a:tr>
+              <a:tr h="377190">
                 <a:tc>
                   <a:txBody>
                     <a:bodyPr/>
@@ -5693,7 +5856,7 @@
                           </a:solidFill>
                           <a:latin typeface="Calibri"/>
                         </a:rPr>
-                        <a:t>Ground truth for validation and violation injection</a:t>
+                        <a:t>Ground truth for testing</a:t>
                       </a:r>
                     </a:p>
                   </a:txBody>
@@ -5716,8 +5879,8 @@
         </p:nvSpPr>
         <p:spPr>
           <a:xfrm>
-            <a:off x="640080" y="4754880"/>
-            <a:ext cx="10908792" cy="1463040"/>
+            <a:off x="640080" y="4983480"/>
+            <a:ext cx="10908792" cy="1371600"/>
           </a:xfrm>
           <a:prstGeom prst="roundRect">
             <a:avLst>
@@ -5762,8 +5925,8 @@
         </p:nvSpPr>
         <p:spPr>
           <a:xfrm>
-            <a:off x="914400" y="4937760"/>
-            <a:ext cx="10332720" cy="1143000"/>
+            <a:off x="914400" y="5138928"/>
+            <a:ext cx="10332720" cy="1097280"/>
           </a:xfrm>
           <a:prstGeom prst="rect">
             <a:avLst/>
@@ -5782,13 +5945,13 @@
               </a:spcAft>
             </a:pPr>
             <a:r>
-              <a:rPr sz="1350" b="0" i="0">
+              <a:rPr sz="1300" b="0" i="0">
                 <a:solidFill>
                   <a:srgbClr val="1A1A1A"/>
                 </a:solidFill>
                 <a:latin typeface="Calibri"/>
               </a:rPr>
-              <a:t>Prompt strata evolved twice. Stratum 1: facades, streets, corridors. Stratum 2: corners, to guarantee three visible directions — but these scenes were line-SPARSE and the selection rate FELL from 40% to 30%. Stratum 3 adds repeating line-rich features (tiles, shelving, window grids, brick courses) and reaches 48%.</a:t>
+              <a:t>Three prompt sets. Set 1: building fronts, streets, corridors (also used for Gemini and ChatGPT). Set 2: corners, to guarantee three directions; too few lines, so selection fell from 40% to 30%. Set 3 adds repeating straight features (tiles, shelving, window grids) and reaches 48%. Every comparison uses a single prompt set.</a:t>
             </a:r>
           </a:p>
         </p:txBody>
@@ -5889,7 +6052,7 @@
                 </a:solidFill>
                 <a:latin typeface="Cambria"/>
               </a:rPr>
-              <a:t>Results 1: The Instrument Is Trustworthy</a:t>
+              <a:t>Results 1: The Tool Is Trustworthy</a:t>
             </a:r>
           </a:p>
         </p:txBody>
@@ -6162,7 +6325,7 @@
                 </a:solidFill>
                 <a:latin typeface="Calibri"/>
               </a:rPr>
-              <a:t>of York Urban ground-truth VPs recovered within 2° / 5°</a:t>
+              <a:t>of York Urban's true vanishing points found within 2° / 5°</a:t>
             </a:r>
           </a:p>
         </p:txBody>
@@ -6240,7 +6403,7 @@
                 </a:solidFill>
                 <a:latin typeface="Calibri"/>
               </a:rPr>
-              <a:t>median ratio of fitted to TRUE focal length (IQR 0.99-1.05)</a:t>
+              <a:t>median ratio of fitted to TRUE focal length (IQR 0.99 to 1.05)</a:t>
             </a:r>
           </a:p>
         </p:txBody>
@@ -6349,7 +6512,7 @@
                 </a:solidFill>
                 <a:latin typeface="Calibri"/>
               </a:rPr>
-              <a:t>The pipeline recovers the real camera of real photographs.</a:t>
+              <a:t>The pipeline finds the real camera in real photos.</a:t>
             </a:r>
           </a:p>
           <a:p>
@@ -6381,7 +6544,7 @@
                 </a:solidFill>
                 <a:latin typeface="Calibri"/>
               </a:rPr>
-              <a:t>Left: fitted focal length against EXIF focal length for photographs from 135 different camera models. Dashed lines mark a ±20% band.</a:t>
+              <a:t>Left: fitted focal length against EXIF focal length for photos from 135 camera models. Dashed lines mark a ±20% band.</a:t>
             </a:r>
           </a:p>
           <a:p>
@@ -6413,7 +6576,7 @@
                 </a:solidFill>
                 <a:latin typeface="Calibri"/>
               </a:rPr>
-              <a:t>This is the precondition for interpreting any residual measured on generated images.</a:t>
+              <a:t>We need this before trusting anything the tool says about AI images.</a:t>
             </a:r>
           </a:p>
         </p:txBody>
@@ -6599,7 +6762,7 @@
                 </a:solidFill>
                 <a:latin typeface="Calibri"/>
               </a:rPr>
-              <a:t>Measured naively, UNCURATED real photographs score 12.2° on the camera test — worse than SD 1.5 and far worse than SDXL.</a:t>
+              <a:t>Measured naively, ORDINARY real photos score 12.2° on the right-angle test: worse than SD 1.5 and far worse than SDXL.</a:t>
             </a:r>
           </a:p>
           <a:p>
@@ -6631,7 +6794,7 @@
                 </a:solidFill>
                 <a:latin typeface="Calibri"/>
               </a:rPr>
-              <a:t>Taken at face value: generated images look more camera-consistent than photographs.</a:t>
+              <a:t>Taken at face value, AI images would look more camera-consistent than photos.</a:t>
             </a:r>
           </a:p>
         </p:txBody>
@@ -6716,7 +6879,7 @@
                 </a:solidFill>
                 <a:latin typeface="Calibri"/>
               </a:rPr>
-              <a:t>Why: curved streets and oblique facades give three well-supported, distinct VP families that are simply NOT mutually orthogonal.</a:t>
+              <a:t>Why: angled streets and facades have three clear directions that are simply NOT at right angles.</a:t>
             </a:r>
           </a:p>
           <a:p>
@@ -6748,7 +6911,7 @@
                 </a:solidFill>
                 <a:latin typeface="Calibri"/>
               </a:rPr>
-              <a:t>These are Atlanta worlds. The test is undefined for them — an applicability failure, not photographic geometry.</a:t>
+              <a:t>These are Atlanta worlds. The right-angle test does not apply to them. The fault is in the test, not the photos.</a:t>
             </a:r>
           </a:p>
         </p:txBody>
@@ -6822,11 +6985,11 @@
             <a:r>
               <a:rPr sz="1150" b="0" i="0">
                 <a:solidFill>
-                  <a:srgbClr val="5A6672"/>
+                  <a:srgbClr val="B9CDDA"/>
                 </a:solidFill>
                 <a:latin typeface="Calibri"/>
               </a:rPr>
-              <a:t>uncurated real, no applicability rule</a:t>
+              <a:t>ordinary real photos, no applicability rule</a:t>
             </a:r>
           </a:p>
         </p:txBody>
@@ -6865,7 +7028,7 @@
                 </a:solidFill>
                 <a:latin typeface="Cambria"/>
               </a:rPr>
-              <a:t>2.19°</a:t>
+              <a:t>2.82°</a:t>
             </a:r>
           </a:p>
         </p:txBody>
@@ -6900,11 +7063,11 @@
             <a:r>
               <a:rPr sz="1150" b="0" i="0">
                 <a:solidFill>
-                  <a:srgbClr val="5A6672"/>
+                  <a:srgbClr val="B9CDDA"/>
                 </a:solidFill>
                 <a:latin typeface="Calibri"/>
               </a:rPr>
-              <a:t>same images, after the rule</a:t>
+              <a:t>same photos, after the rule</a:t>
             </a:r>
           </a:p>
         </p:txBody>
@@ -6978,11 +7141,11 @@
             <a:r>
               <a:rPr sz="1150" b="0" i="0">
                 <a:solidFill>
-                  <a:srgbClr val="5A6672"/>
+                  <a:srgbClr val="B9CDDA"/>
                 </a:solidFill>
                 <a:latin typeface="Calibri"/>
               </a:rPr>
-              <a:t>log-f spread, Atlanta residual</a:t>
+              <a:t>log-focal spread, Atlanta measure</a:t>
             </a:r>
           </a:p>
         </p:txBody>
@@ -7021,7 +7184,7 @@
                 </a:solidFill>
                 <a:latin typeface="Calibri"/>
               </a:rPr>
-              <a:t>Consequence: the primary statistic is changed from Manhattan orthogonality to Atlanta focal consistency, which is valid in both world models.</a:t>
+              <a:t>So the main measure became Atlanta focal consistency, which works on both kinds of scene.</a:t>
             </a:r>
           </a:p>
         </p:txBody>
@@ -7175,8 +7338,8 @@
           <p:nvPr/>
         </p:nvGraphicFramePr>
         <p:xfrm>
-          <a:off x="640080" y="1828800"/>
-          <a:ext cx="10908792" cy="2011680"/>
+          <a:off x="640080" y="1783080"/>
+          <a:ext cx="10908792" cy="2103120"/>
         </p:xfrm>
         <a:graphic>
           <a:graphicData uri="http://schemas.openxmlformats.org/drawingml/2006/table">
@@ -7185,22 +7348,20 @@
                 <a:tableStyleId>{5C22544A-7EE6-4342-B048-85BDC9FD1C3A}</a:tableStyleId>
               </a:tblPr>
               <a:tblGrid>
-                <a:gridCol w="2514600"/>
-                <a:gridCol w="1508760"/>
-                <a:gridCol w="1508760"/>
-                <a:gridCol w="1417320"/>
-                <a:gridCol w="1417320"/>
-                <a:gridCol w="1271016"/>
-                <a:gridCol w="1271016"/>
+                <a:gridCol w="3154680"/>
+                <a:gridCol w="1938528"/>
+                <a:gridCol w="1938528"/>
+                <a:gridCol w="1938528"/>
+                <a:gridCol w="1938528"/>
               </a:tblGrid>
-              <a:tr h="502920">
+              <a:tr h="420624">
                 <a:tc>
                   <a:txBody>
                     <a:bodyPr/>
                     <a:lstStyle/>
                     <a:p>
                       <a:r>
-                        <a:rPr sz="1000" b="1">
+                        <a:rPr sz="1100" b="1">
                           <a:solidFill>
                             <a:srgbClr val="FFFFFF"/>
                           </a:solidFill>
@@ -7222,7 +7383,7 @@
                     <a:lstStyle/>
                     <a:p>
                       <a:r>
-                        <a:rPr sz="1000" b="1">
+                        <a:rPr sz="1100" b="1">
                           <a:solidFill>
                             <a:srgbClr val="FFFFFF"/>
                           </a:solidFill>
@@ -7244,7 +7405,7 @@
                     <a:lstStyle/>
                     <a:p>
                       <a:r>
-                        <a:rPr sz="1000" b="1">
+                        <a:rPr sz="1100" b="1">
                           <a:solidFill>
                             <a:srgbClr val="FFFFFF"/>
                           </a:solidFill>
@@ -7266,7 +7427,7 @@
                     <a:lstStyle/>
                     <a:p>
                       <a:r>
-                        <a:rPr sz="1000" b="1">
+                        <a:rPr sz="1100" b="1">
                           <a:solidFill>
                             <a:srgbClr val="FFFFFF"/>
                           </a:solidFill>
@@ -7288,7 +7449,1573 @@
                     <a:lstStyle/>
                     <a:p>
                       <a:r>
-                        <a:rPr sz="1000" b="1">
+                        <a:rPr sz="1100" b="1">
+                          <a:solidFill>
+                            <a:srgbClr val="FFFFFF"/>
+                          </a:solidFill>
+                          <a:latin typeface="Calibri"/>
+                        </a:rPr>
+                        <a:t>SDXL</a:t>
+                      </a:r>
+                    </a:p>
+                  </a:txBody>
+                  <a:tcPr anchor="ctr">
+                    <a:solidFill>
+                      <a:srgbClr val="12263A"/>
+                    </a:solidFill>
+                  </a:tcPr>
+                </a:tc>
+              </a:tr>
+              <a:tr h="420624">
+                <a:tc>
+                  <a:txBody>
+                    <a:bodyPr/>
+                    <a:lstStyle/>
+                    <a:p>
+                      <a:r>
+                        <a:rPr sz="1100">
+                          <a:solidFill>
+                            <a:srgbClr val="1A1A1A"/>
+                          </a:solidFill>
+                          <a:latin typeface="Calibri"/>
+                        </a:rPr>
+                        <a:t>Images admitted by the rule</a:t>
+                      </a:r>
+                    </a:p>
+                  </a:txBody>
+                  <a:tcPr anchor="ctr">
+                    <a:solidFill>
+                      <a:srgbClr val="FFFFFF"/>
+                    </a:solidFill>
+                  </a:tcPr>
+                </a:tc>
+                <a:tc>
+                  <a:txBody>
+                    <a:bodyPr/>
+                    <a:lstStyle/>
+                    <a:p>
+                      <a:r>
+                        <a:rPr sz="1100">
+                          <a:solidFill>
+                            <a:srgbClr val="1A1A1A"/>
+                          </a:solidFill>
+                          <a:latin typeface="Calibri"/>
+                        </a:rPr>
+                        <a:t>72</a:t>
+                      </a:r>
+                    </a:p>
+                  </a:txBody>
+                  <a:tcPr anchor="ctr">
+                    <a:solidFill>
+                      <a:srgbClr val="FFFFFF"/>
+                    </a:solidFill>
+                  </a:tcPr>
+                </a:tc>
+                <a:tc>
+                  <a:txBody>
+                    <a:bodyPr/>
+                    <a:lstStyle/>
+                    <a:p>
+                      <a:r>
+                        <a:rPr sz="1100">
+                          <a:solidFill>
+                            <a:srgbClr val="1A1A1A"/>
+                          </a:solidFill>
+                          <a:latin typeface="Calibri"/>
+                        </a:rPr>
+                        <a:t>121</a:t>
+                      </a:r>
+                    </a:p>
+                  </a:txBody>
+                  <a:tcPr anchor="ctr">
+                    <a:solidFill>
+                      <a:srgbClr val="FFFFFF"/>
+                    </a:solidFill>
+                  </a:tcPr>
+                </a:tc>
+                <a:tc>
+                  <a:txBody>
+                    <a:bodyPr/>
+                    <a:lstStyle/>
+                    <a:p>
+                      <a:r>
+                        <a:rPr sz="1100">
+                          <a:solidFill>
+                            <a:srgbClr val="1A1A1A"/>
+                          </a:solidFill>
+                          <a:latin typeface="Calibri"/>
+                        </a:rPr>
+                        <a:t>92</a:t>
+                      </a:r>
+                    </a:p>
+                  </a:txBody>
+                  <a:tcPr anchor="ctr">
+                    <a:solidFill>
+                      <a:srgbClr val="FFFFFF"/>
+                    </a:solidFill>
+                  </a:tcPr>
+                </a:tc>
+                <a:tc>
+                  <a:txBody>
+                    <a:bodyPr/>
+                    <a:lstStyle/>
+                    <a:p>
+                      <a:r>
+                        <a:rPr sz="1100">
+                          <a:solidFill>
+                            <a:srgbClr val="1A1A1A"/>
+                          </a:solidFill>
+                          <a:latin typeface="Calibri"/>
+                        </a:rPr>
+                        <a:t>112</a:t>
+                      </a:r>
+                    </a:p>
+                  </a:txBody>
+                  <a:tcPr anchor="ctr">
+                    <a:solidFill>
+                      <a:srgbClr val="FFFFFF"/>
+                    </a:solidFill>
+                  </a:tcPr>
+                </a:tc>
+              </a:tr>
+              <a:tr h="420624">
+                <a:tc>
+                  <a:txBody>
+                    <a:bodyPr/>
+                    <a:lstStyle/>
+                    <a:p>
+                      <a:r>
+                        <a:rPr sz="1100">
+                          <a:solidFill>
+                            <a:srgbClr val="1A1A1A"/>
+                          </a:solidFill>
+                          <a:latin typeface="Calibri"/>
+                        </a:rPr>
+                        <a:t>Usable for log-focal spread</a:t>
+                      </a:r>
+                    </a:p>
+                  </a:txBody>
+                  <a:tcPr anchor="ctr">
+                    <a:solidFill>
+                      <a:srgbClr val="F4F6F8"/>
+                    </a:solidFill>
+                  </a:tcPr>
+                </a:tc>
+                <a:tc>
+                  <a:txBody>
+                    <a:bodyPr/>
+                    <a:lstStyle/>
+                    <a:p>
+                      <a:r>
+                        <a:rPr sz="1100">
+                          <a:solidFill>
+                            <a:srgbClr val="1A1A1A"/>
+                          </a:solidFill>
+                          <a:latin typeface="Calibri"/>
+                        </a:rPr>
+                        <a:t>65</a:t>
+                      </a:r>
+                    </a:p>
+                  </a:txBody>
+                  <a:tcPr anchor="ctr">
+                    <a:solidFill>
+                      <a:srgbClr val="F4F6F8"/>
+                    </a:solidFill>
+                  </a:tcPr>
+                </a:tc>
+                <a:tc>
+                  <a:txBody>
+                    <a:bodyPr/>
+                    <a:lstStyle/>
+                    <a:p>
+                      <a:r>
+                        <a:rPr sz="1100">
+                          <a:solidFill>
+                            <a:srgbClr val="1A1A1A"/>
+                          </a:solidFill>
+                          <a:latin typeface="Calibri"/>
+                        </a:rPr>
+                        <a:t>91</a:t>
+                      </a:r>
+                    </a:p>
+                  </a:txBody>
+                  <a:tcPr anchor="ctr">
+                    <a:solidFill>
+                      <a:srgbClr val="F4F6F8"/>
+                    </a:solidFill>
+                  </a:tcPr>
+                </a:tc>
+                <a:tc>
+                  <a:txBody>
+                    <a:bodyPr/>
+                    <a:lstStyle/>
+                    <a:p>
+                      <a:r>
+                        <a:rPr sz="1100">
+                          <a:solidFill>
+                            <a:srgbClr val="1A1A1A"/>
+                          </a:solidFill>
+                          <a:latin typeface="Calibri"/>
+                        </a:rPr>
+                        <a:t>53</a:t>
+                      </a:r>
+                    </a:p>
+                  </a:txBody>
+                  <a:tcPr anchor="ctr">
+                    <a:solidFill>
+                      <a:srgbClr val="F4F6F8"/>
+                    </a:solidFill>
+                  </a:tcPr>
+                </a:tc>
+                <a:tc>
+                  <a:txBody>
+                    <a:bodyPr/>
+                    <a:lstStyle/>
+                    <a:p>
+                      <a:r>
+                        <a:rPr sz="1100">
+                          <a:solidFill>
+                            <a:srgbClr val="1A1A1A"/>
+                          </a:solidFill>
+                          <a:latin typeface="Calibri"/>
+                        </a:rPr>
+                        <a:t>65</a:t>
+                      </a:r>
+                    </a:p>
+                  </a:txBody>
+                  <a:tcPr anchor="ctr">
+                    <a:solidFill>
+                      <a:srgbClr val="F4F6F8"/>
+                    </a:solidFill>
+                  </a:tcPr>
+                </a:tc>
+              </a:tr>
+              <a:tr h="420624">
+                <a:tc>
+                  <a:txBody>
+                    <a:bodyPr/>
+                    <a:lstStyle/>
+                    <a:p>
+                      <a:r>
+                        <a:rPr sz="1100">
+                          <a:solidFill>
+                            <a:srgbClr val="1A1A1A"/>
+                          </a:solidFill>
+                          <a:latin typeface="Calibri"/>
+                        </a:rPr>
+                        <a:t>Log-focal spread, median [95% CI]</a:t>
+                      </a:r>
+                    </a:p>
+                  </a:txBody>
+                  <a:tcPr anchor="ctr">
+                    <a:solidFill>
+                      <a:srgbClr val="FFFFFF"/>
+                    </a:solidFill>
+                  </a:tcPr>
+                </a:tc>
+                <a:tc>
+                  <a:txBody>
+                    <a:bodyPr/>
+                    <a:lstStyle/>
+                    <a:p>
+                      <a:r>
+                        <a:rPr sz="1100">
+                          <a:solidFill>
+                            <a:srgbClr val="1A1A1A"/>
+                          </a:solidFill>
+                          <a:latin typeface="Calibri"/>
+                        </a:rPr>
+                        <a:t>0.142 [0.106, 0.221]</a:t>
+                      </a:r>
+                    </a:p>
+                  </a:txBody>
+                  <a:tcPr anchor="ctr">
+                    <a:solidFill>
+                      <a:srgbClr val="FFFFFF"/>
+                    </a:solidFill>
+                  </a:tcPr>
+                </a:tc>
+                <a:tc>
+                  <a:txBody>
+                    <a:bodyPr/>
+                    <a:lstStyle/>
+                    <a:p>
+                      <a:r>
+                        <a:rPr sz="1100">
+                          <a:solidFill>
+                            <a:srgbClr val="1A1A1A"/>
+                          </a:solidFill>
+                          <a:latin typeface="Calibri"/>
+                        </a:rPr>
+                        <a:t>0.152 [0.093, 0.220]</a:t>
+                      </a:r>
+                    </a:p>
+                  </a:txBody>
+                  <a:tcPr anchor="ctr">
+                    <a:solidFill>
+                      <a:srgbClr val="FFFFFF"/>
+                    </a:solidFill>
+                  </a:tcPr>
+                </a:tc>
+                <a:tc>
+                  <a:txBody>
+                    <a:bodyPr/>
+                    <a:lstStyle/>
+                    <a:p>
+                      <a:r>
+                        <a:rPr sz="1100">
+                          <a:solidFill>
+                            <a:srgbClr val="1A1A1A"/>
+                          </a:solidFill>
+                          <a:latin typeface="Calibri"/>
+                        </a:rPr>
+                        <a:t>0.465 [0.324, 0.709]</a:t>
+                      </a:r>
+                    </a:p>
+                  </a:txBody>
+                  <a:tcPr anchor="ctr">
+                    <a:solidFill>
+                      <a:srgbClr val="FFFFFF"/>
+                    </a:solidFill>
+                  </a:tcPr>
+                </a:tc>
+                <a:tc>
+                  <a:txBody>
+                    <a:bodyPr/>
+                    <a:lstStyle/>
+                    <a:p>
+                      <a:r>
+                        <a:rPr sz="1100">
+                          <a:solidFill>
+                            <a:srgbClr val="1A1A1A"/>
+                          </a:solidFill>
+                          <a:latin typeface="Calibri"/>
+                        </a:rPr>
+                        <a:t>0.355 [0.272, 0.529]</a:t>
+                      </a:r>
+                    </a:p>
+                  </a:txBody>
+                  <a:tcPr anchor="ctr">
+                    <a:solidFill>
+                      <a:srgbClr val="FFFFFF"/>
+                    </a:solidFill>
+                  </a:tcPr>
+                </a:tc>
+              </a:tr>
+              <a:tr h="420624">
+                <a:tc>
+                  <a:txBody>
+                    <a:bodyPr/>
+                    <a:lstStyle/>
+                    <a:p>
+                      <a:r>
+                        <a:rPr sz="1100">
+                          <a:solidFill>
+                            <a:srgbClr val="1A1A1A"/>
+                          </a:solidFill>
+                          <a:latin typeface="Calibri"/>
+                        </a:rPr>
+                        <a:t>Images with an impossible pair</a:t>
+                      </a:r>
+                    </a:p>
+                  </a:txBody>
+                  <a:tcPr anchor="ctr">
+                    <a:solidFill>
+                      <a:srgbClr val="F4F6F8"/>
+                    </a:solidFill>
+                  </a:tcPr>
+                </a:tc>
+                <a:tc>
+                  <a:txBody>
+                    <a:bodyPr/>
+                    <a:lstStyle/>
+                    <a:p>
+                      <a:r>
+                        <a:rPr sz="1100">
+                          <a:solidFill>
+                            <a:srgbClr val="1A1A1A"/>
+                          </a:solidFill>
+                          <a:latin typeface="Calibri"/>
+                        </a:rPr>
+                        <a:t>28%</a:t>
+                      </a:r>
+                    </a:p>
+                  </a:txBody>
+                  <a:tcPr anchor="ctr">
+                    <a:solidFill>
+                      <a:srgbClr val="F4F6F8"/>
+                    </a:solidFill>
+                  </a:tcPr>
+                </a:tc>
+                <a:tc>
+                  <a:txBody>
+                    <a:bodyPr/>
+                    <a:lstStyle/>
+                    <a:p>
+                      <a:r>
+                        <a:rPr sz="1100">
+                          <a:solidFill>
+                            <a:srgbClr val="1A1A1A"/>
+                          </a:solidFill>
+                          <a:latin typeface="Calibri"/>
+                        </a:rPr>
+                        <a:t>44%</a:t>
+                      </a:r>
+                    </a:p>
+                  </a:txBody>
+                  <a:tcPr anchor="ctr">
+                    <a:solidFill>
+                      <a:srgbClr val="F4F6F8"/>
+                    </a:solidFill>
+                  </a:tcPr>
+                </a:tc>
+                <a:tc>
+                  <a:txBody>
+                    <a:bodyPr/>
+                    <a:lstStyle/>
+                    <a:p>
+                      <a:r>
+                        <a:rPr sz="1100">
+                          <a:solidFill>
+                            <a:srgbClr val="1A1A1A"/>
+                          </a:solidFill>
+                          <a:latin typeface="Calibri"/>
+                        </a:rPr>
+                        <a:t>68%</a:t>
+                      </a:r>
+                    </a:p>
+                  </a:txBody>
+                  <a:tcPr anchor="ctr">
+                    <a:solidFill>
+                      <a:srgbClr val="F4F6F8"/>
+                    </a:solidFill>
+                  </a:tcPr>
+                </a:tc>
+                <a:tc>
+                  <a:txBody>
+                    <a:bodyPr/>
+                    <a:lstStyle/>
+                    <a:p>
+                      <a:r>
+                        <a:rPr sz="1100">
+                          <a:solidFill>
+                            <a:srgbClr val="1A1A1A"/>
+                          </a:solidFill>
+                          <a:latin typeface="Calibri"/>
+                        </a:rPr>
+                        <a:t>58%</a:t>
+                      </a:r>
+                    </a:p>
+                  </a:txBody>
+                  <a:tcPr anchor="ctr">
+                    <a:solidFill>
+                      <a:srgbClr val="F4F6F8"/>
+                    </a:solidFill>
+                  </a:tcPr>
+                </a:tc>
+              </a:tr>
+            </a:tbl>
+          </a:graphicData>
+        </a:graphic>
+      </p:graphicFrame>
+      <p:sp>
+        <p:nvSpPr>
+          <p:cNvPr id="6" name="Rounded Rectangle 5"/>
+          <p:cNvSpPr/>
+          <p:nvPr/>
+        </p:nvSpPr>
+        <p:spPr>
+          <a:xfrm>
+            <a:off x="640080" y="4114800"/>
+            <a:ext cx="10908792" cy="1051560"/>
+          </a:xfrm>
+          <a:prstGeom prst="roundRect">
+            <a:avLst>
+              <a:gd name="adj" fmla="val 6000"/>
+            </a:avLst>
+          </a:prstGeom>
+          <a:solidFill>
+            <a:srgbClr val="12263A"/>
+          </a:solidFill>
+          <a:ln>
+            <a:noFill/>
+          </a:ln>
+          <a:effectLst/>
+        </p:spPr>
+        <p:style>
+          <a:lnRef idx="1">
+            <a:schemeClr val="accent1"/>
+          </a:lnRef>
+          <a:fillRef idx="3">
+            <a:schemeClr val="accent1"/>
+          </a:fillRef>
+          <a:effectRef idx="2">
+            <a:schemeClr val="accent1"/>
+          </a:effectRef>
+          <a:fontRef idx="minor">
+            <a:schemeClr val="lt1"/>
+          </a:fontRef>
+        </p:style>
+        <p:txBody>
+          <a:bodyPr rtlCol="0" anchor="ctr"/>
+          <a:lstStyle/>
+          <a:p>
+            <a:pPr algn="ctr"/>
+          </a:p>
+        </p:txBody>
+      </p:sp>
+      <p:sp>
+        <p:nvSpPr>
+          <p:cNvPr id="7" name="TextBox 6"/>
+          <p:cNvSpPr txBox="1"/>
+          <p:nvPr/>
+        </p:nvSpPr>
+        <p:spPr>
+          <a:xfrm>
+            <a:off x="914400" y="4279392"/>
+            <a:ext cx="10332720" cy="777240"/>
+          </a:xfrm>
+          <a:prstGeom prst="rect">
+            <a:avLst/>
+          </a:prstGeom>
+          <a:noFill/>
+        </p:spPr>
+        <p:txBody>
+          <a:bodyPr wrap="square" lIns="0" rIns="0" tIns="0" bIns="0" anchor="t">
+            <a:spAutoFit/>
+          </a:bodyPr>
+          <a:lstStyle/>
+          <a:p>
+            <a:pPr algn="l">
+              <a:spcAft>
+                <a:spcPts val="600"/>
+              </a:spcAft>
+            </a:pPr>
+            <a:r>
+              <a:rPr sz="1600" b="1" i="0">
+                <a:solidFill>
+                  <a:srgbClr val="FFFFFF"/>
+                </a:solidFill>
+                <a:latin typeface="Calibri"/>
+              </a:rPr>
+              <a:t>In a real photo the horizontal directions agree on ONE focal length to within about 15%. In AI images they disagree by 35 to 60%.  (p ≈ 3×10⁻⁵ against either real set)</a:t>
+            </a:r>
+          </a:p>
+        </p:txBody>
+      </p:sp>
+      <p:sp>
+        <p:nvSpPr>
+          <p:cNvPr id="8" name="TextBox 7"/>
+          <p:cNvSpPr txBox="1"/>
+          <p:nvPr/>
+        </p:nvSpPr>
+        <p:spPr>
+          <a:xfrm>
+            <a:off x="640080" y="5394960"/>
+            <a:ext cx="10908792" cy="1097280"/>
+          </a:xfrm>
+          <a:prstGeom prst="rect">
+            <a:avLst/>
+          </a:prstGeom>
+          <a:noFill/>
+        </p:spPr>
+        <p:txBody>
+          <a:bodyPr wrap="square" lIns="0" rIns="0" tIns="0" bIns="0">
+            <a:spAutoFit/>
+          </a:bodyPr>
+          <a:lstStyle/>
+          <a:p>
+            <a:pPr>
+              <a:spcAft>
+                <a:spcPts val="600"/>
+              </a:spcAft>
+            </a:pPr>
+            <a:r>
+              <a:rPr sz="1350" b="0">
+                <a:solidFill>
+                  <a:srgbClr val="1A1A1A"/>
+                </a:solidFill>
+                <a:latin typeface="Calibri"/>
+              </a:rPr>
+              <a:t>•  The two real sets agree with each other, so the result does not depend on which real photos are used.</a:t>
+            </a:r>
+          </a:p>
+          <a:p>
+            <a:pPr>
+              <a:spcAft>
+                <a:spcPts val="600"/>
+              </a:spcAft>
+            </a:pPr>
+            <a:r>
+              <a:rPr sz="1350" b="0">
+                <a:solidFill>
+                  <a:srgbClr val="1A1A1A"/>
+                </a:solidFill>
+                <a:latin typeface="Calibri"/>
+              </a:rPr>
+              <a:t>•  Both generators sit clearly above both real sets, with non-overlapping intervals.</a:t>
+            </a:r>
+          </a:p>
+        </p:txBody>
+      </p:sp>
+    </p:spTree>
+  </p:cSld>
+  <p:clrMapOvr>
+    <a:masterClrMapping/>
+  </p:clrMapOvr>
+</p:sld>
+</file>
+
+<file path=ppt/slides/slide14.xml><?xml version="1.0" encoding="utf-8"?>
+<p:sld xmlns:a="http://schemas.openxmlformats.org/drawingml/2006/main" xmlns:p="http://schemas.openxmlformats.org/presentationml/2006/main" xmlns:r="http://schemas.openxmlformats.org/officeDocument/2006/relationships">
+  <p:cSld>
+    <p:spTree>
+      <p:nvGrpSpPr>
+        <p:cNvPr id="1" name=""/>
+        <p:cNvGrpSpPr/>
+        <p:nvPr/>
+      </p:nvGrpSpPr>
+      <p:grpSpPr/>
+      <p:sp>
+        <p:nvSpPr>
+          <p:cNvPr id="2" name="Rectangle 1"/>
+          <p:cNvSpPr/>
+          <p:nvPr/>
+        </p:nvSpPr>
+        <p:spPr>
+          <a:xfrm>
+            <a:off x="0" y="0"/>
+            <a:ext cx="12191695" cy="6858000"/>
+          </a:xfrm>
+          <a:prstGeom prst="rect">
+            <a:avLst/>
+          </a:prstGeom>
+          <a:solidFill>
+            <a:srgbClr val="FFFFFF"/>
+          </a:solidFill>
+          <a:ln>
+            <a:noFill/>
+          </a:ln>
+          <a:effectLst/>
+        </p:spPr>
+        <p:style>
+          <a:lnRef idx="1">
+            <a:schemeClr val="accent1"/>
+          </a:lnRef>
+          <a:fillRef idx="3">
+            <a:schemeClr val="accent1"/>
+          </a:fillRef>
+          <a:effectRef idx="2">
+            <a:schemeClr val="accent1"/>
+          </a:effectRef>
+          <a:fontRef idx="minor">
+            <a:schemeClr val="lt1"/>
+          </a:fontRef>
+        </p:style>
+        <p:txBody>
+          <a:bodyPr rtlCol="0" anchor="ctr"/>
+          <a:lstStyle/>
+          <a:p>
+            <a:pPr algn="ctr"/>
+          </a:p>
+        </p:txBody>
+      </p:sp>
+      <p:sp>
+        <p:nvSpPr>
+          <p:cNvPr id="3" name="TextBox 2"/>
+          <p:cNvSpPr txBox="1"/>
+          <p:nvPr/>
+        </p:nvSpPr>
+        <p:spPr>
+          <a:xfrm>
+            <a:off x="640080" y="457200"/>
+            <a:ext cx="10911535" cy="822960"/>
+          </a:xfrm>
+          <a:prstGeom prst="rect">
+            <a:avLst/>
+          </a:prstGeom>
+          <a:noFill/>
+        </p:spPr>
+        <p:txBody>
+          <a:bodyPr wrap="square" lIns="0" rIns="0" tIns="0" bIns="0" anchor="t">
+            <a:spAutoFit/>
+          </a:bodyPr>
+          <a:lstStyle/>
+          <a:p>
+            <a:pPr algn="l">
+              <a:spcAft>
+                <a:spcPts val="600"/>
+              </a:spcAft>
+            </a:pPr>
+            <a:r>
+              <a:rPr sz="3200" b="1" i="0">
+                <a:solidFill>
+                  <a:srgbClr val="12263A"/>
+                </a:solidFill>
+                <a:latin typeface="Cambria"/>
+              </a:rPr>
+              <a:t>Results 4: Distributions and Scaling</a:t>
+            </a:r>
+          </a:p>
+        </p:txBody>
+      </p:sp>
+      <p:pic>
+        <p:nvPicPr>
+          <p:cNvPr id="4" name="Picture 3" descr="atlanta_dots_slide.png"/>
+          <p:cNvPicPr>
+            <a:picLocks noChangeAspect="1"/>
+          </p:cNvPicPr>
+          <p:nvPr/>
+        </p:nvPicPr>
+        <p:blipFill>
+          <a:blip r:embed="rId2"/>
+          <a:stretch>
+            <a:fillRect/>
+          </a:stretch>
+        </p:blipFill>
+        <p:spPr>
+          <a:xfrm>
+            <a:off x="640080" y="1783080"/>
+            <a:ext cx="6949440" cy="3438612"/>
+          </a:xfrm>
+          <a:prstGeom prst="rect">
+            <a:avLst/>
+          </a:prstGeom>
+        </p:spPr>
+      </p:pic>
+      <p:sp>
+        <p:nvSpPr>
+          <p:cNvPr id="5" name="TextBox 4"/>
+          <p:cNvSpPr txBox="1"/>
+          <p:nvPr/>
+        </p:nvSpPr>
+        <p:spPr>
+          <a:xfrm>
+            <a:off x="640080" y="5349240"/>
+            <a:ext cx="6949440" cy="640080"/>
+          </a:xfrm>
+          <a:prstGeom prst="rect">
+            <a:avLst/>
+          </a:prstGeom>
+          <a:noFill/>
+        </p:spPr>
+        <p:txBody>
+          <a:bodyPr wrap="square" lIns="0" rIns="0" tIns="0" bIns="0" anchor="t">
+            <a:spAutoFit/>
+          </a:bodyPr>
+          <a:lstStyle/>
+          <a:p>
+            <a:pPr algn="l">
+              <a:spcAft>
+                <a:spcPts val="600"/>
+              </a:spcAft>
+            </a:pPr>
+            <a:r>
+              <a:rPr sz="1150" b="0" i="1">
+                <a:solidFill>
+                  <a:srgbClr val="5A6672"/>
+                </a:solidFill>
+                <a:latin typeface="Calibri"/>
+              </a:rPr>
+              <a:t>Dots: medians. Lines: 95% intervals. Grey band: the range of the real-photo intervals. Left: focal disagreement. Right: share of images with a pair no camera could produce.</a:t>
+            </a:r>
+          </a:p>
+        </p:txBody>
+      </p:sp>
+      <p:sp>
+        <p:nvSpPr>
+          <p:cNvPr id="6" name="Rounded Rectangle 5"/>
+          <p:cNvSpPr/>
+          <p:nvPr/>
+        </p:nvSpPr>
+        <p:spPr>
+          <a:xfrm>
+            <a:off x="7863840" y="1828800"/>
+            <a:ext cx="3685032" cy="4114800"/>
+          </a:xfrm>
+          <a:prstGeom prst="roundRect">
+            <a:avLst>
+              <a:gd name="adj" fmla="val 6000"/>
+            </a:avLst>
+          </a:prstGeom>
+          <a:solidFill>
+            <a:srgbClr val="F4F6F8"/>
+          </a:solidFill>
+          <a:ln>
+            <a:noFill/>
+          </a:ln>
+          <a:effectLst/>
+        </p:spPr>
+        <p:style>
+          <a:lnRef idx="1">
+            <a:schemeClr val="accent1"/>
+          </a:lnRef>
+          <a:fillRef idx="3">
+            <a:schemeClr val="accent1"/>
+          </a:fillRef>
+          <a:effectRef idx="2">
+            <a:schemeClr val="accent1"/>
+          </a:effectRef>
+          <a:fontRef idx="minor">
+            <a:schemeClr val="lt1"/>
+          </a:fontRef>
+        </p:style>
+        <p:txBody>
+          <a:bodyPr rtlCol="0" anchor="ctr"/>
+          <a:lstStyle/>
+          <a:p>
+            <a:pPr algn="ctr"/>
+          </a:p>
+        </p:txBody>
+      </p:sp>
+      <p:sp>
+        <p:nvSpPr>
+          <p:cNvPr id="7" name="TextBox 6"/>
+          <p:cNvSpPr txBox="1"/>
+          <p:nvPr/>
+        </p:nvSpPr>
+        <p:spPr>
+          <a:xfrm>
+            <a:off x="8138160" y="2057400"/>
+            <a:ext cx="3108960" cy="457200"/>
+          </a:xfrm>
+          <a:prstGeom prst="rect">
+            <a:avLst/>
+          </a:prstGeom>
+          <a:noFill/>
+        </p:spPr>
+        <p:txBody>
+          <a:bodyPr wrap="square" lIns="0" rIns="0" tIns="0" bIns="0" anchor="t">
+            <a:spAutoFit/>
+          </a:bodyPr>
+          <a:lstStyle/>
+          <a:p>
+            <a:pPr algn="l">
+              <a:spcAft>
+                <a:spcPts val="600"/>
+              </a:spcAft>
+            </a:pPr>
+            <a:r>
+              <a:rPr sz="1500" b="1" i="0">
+                <a:solidFill>
+                  <a:srgbClr val="12263A"/>
+                </a:solidFill>
+                <a:latin typeface="Cambria"/>
+              </a:rPr>
+              <a:t>SD 1.5 → SDXL</a:t>
+            </a:r>
+          </a:p>
+        </p:txBody>
+      </p:sp>
+      <p:sp>
+        <p:nvSpPr>
+          <p:cNvPr id="8" name="TextBox 7"/>
+          <p:cNvSpPr txBox="1"/>
+          <p:nvPr/>
+        </p:nvSpPr>
+        <p:spPr>
+          <a:xfrm>
+            <a:off x="8138160" y="2606040"/>
+            <a:ext cx="3108960" cy="3108960"/>
+          </a:xfrm>
+          <a:prstGeom prst="rect">
+            <a:avLst/>
+          </a:prstGeom>
+          <a:noFill/>
+        </p:spPr>
+        <p:txBody>
+          <a:bodyPr wrap="square" lIns="0" rIns="0" tIns="0" bIns="0" anchor="t">
+            <a:spAutoFit/>
+          </a:bodyPr>
+          <a:lstStyle/>
+          <a:p>
+            <a:pPr algn="l">
+              <a:spcAft>
+                <a:spcPts val="300"/>
+              </a:spcAft>
+            </a:pPr>
+            <a:r>
+              <a:rPr sz="1250" b="0" i="0">
+                <a:solidFill>
+                  <a:srgbClr val="1A1A1A"/>
+                </a:solidFill>
+                <a:latin typeface="Calibri"/>
+              </a:rPr>
+              <a:t>Same prompts, matched field of view and line density, 250 images per model.</a:t>
+            </a:r>
+          </a:p>
+          <a:p>
+            <a:pPr algn="l">
+              <a:spcAft>
+                <a:spcPts val="300"/>
+              </a:spcAft>
+            </a:pPr>
+            <a:r>
+              <a:rPr sz="1250" b="0" i="0">
+                <a:solidFill>
+                  <a:srgbClr val="1A1A1A"/>
+                </a:solidFill>
+                <a:latin typeface="Calibri"/>
+              </a:rPr>
+              <a:t/>
+            </a:r>
+          </a:p>
+          <a:p>
+            <a:pPr algn="l">
+              <a:spcAft>
+                <a:spcPts val="300"/>
+              </a:spcAft>
+            </a:pPr>
+            <a:r>
+              <a:rPr sz="1250" b="0" i="0">
+                <a:solidFill>
+                  <a:srgbClr val="1A1A1A"/>
+                </a:solidFill>
+                <a:latin typeface="Calibri"/>
+              </a:rPr>
+              <a:t>Orientation: 2.93° → 1.94°   (p = 0.0002, improves)</a:t>
+            </a:r>
+          </a:p>
+          <a:p>
+            <a:pPr algn="l">
+              <a:spcAft>
+                <a:spcPts val="300"/>
+              </a:spcAft>
+            </a:pPr>
+            <a:r>
+              <a:rPr sz="1250" b="0" i="0">
+                <a:solidFill>
+                  <a:srgbClr val="1A1A1A"/>
+                </a:solidFill>
+                <a:latin typeface="Calibri"/>
+              </a:rPr>
+              <a:t/>
+            </a:r>
+          </a:p>
+          <a:p>
+            <a:pPr algn="l">
+              <a:spcAft>
+                <a:spcPts val="300"/>
+              </a:spcAft>
+            </a:pPr>
+            <a:r>
+              <a:rPr sz="1250" b="0" i="0">
+                <a:solidFill>
+                  <a:srgbClr val="1A1A1A"/>
+                </a:solidFill>
+                <a:latin typeface="Calibri"/>
+              </a:rPr>
+              <a:t>Focal coherence: 0.465 → 0.355   (p = 0.55, UNCHANGED)</a:t>
+            </a:r>
+          </a:p>
+          <a:p>
+            <a:pPr algn="l">
+              <a:spcAft>
+                <a:spcPts val="300"/>
+              </a:spcAft>
+            </a:pPr>
+            <a:r>
+              <a:rPr sz="1250" b="0" i="0">
+                <a:solidFill>
+                  <a:srgbClr val="1A1A1A"/>
+                </a:solidFill>
+                <a:latin typeface="Calibri"/>
+              </a:rPr>
+              <a:t/>
+            </a:r>
+          </a:p>
+          <a:p>
+            <a:pPr algn="l">
+              <a:spcAft>
+                <a:spcPts val="300"/>
+              </a:spcAft>
+            </a:pPr>
+            <a:r>
+              <a:rPr sz="1250" b="0" i="0">
+                <a:solidFill>
+                  <a:srgbClr val="1A1A1A"/>
+                </a:solidFill>
+                <a:latin typeface="Calibri"/>
+              </a:rPr>
+              <a:t>A bigger model gets the directions right. It does not learn to commit to one camera.</a:t>
+            </a:r>
+          </a:p>
+        </p:txBody>
+      </p:sp>
+    </p:spTree>
+  </p:cSld>
+  <p:clrMapOvr>
+    <a:masterClrMapping/>
+  </p:clrMapOvr>
+</p:sld>
+</file>
+
+<file path=ppt/slides/slide15.xml><?xml version="1.0" encoding="utf-8"?>
+<p:sld xmlns:a="http://schemas.openxmlformats.org/drawingml/2006/main" xmlns:p="http://schemas.openxmlformats.org/presentationml/2006/main" xmlns:r="http://schemas.openxmlformats.org/officeDocument/2006/relationships">
+  <p:cSld>
+    <p:spTree>
+      <p:nvGrpSpPr>
+        <p:cNvPr id="1" name=""/>
+        <p:cNvGrpSpPr/>
+        <p:nvPr/>
+      </p:nvGrpSpPr>
+      <p:grpSpPr/>
+      <p:sp>
+        <p:nvSpPr>
+          <p:cNvPr id="2" name="Rectangle 1"/>
+          <p:cNvSpPr/>
+          <p:nvPr/>
+        </p:nvSpPr>
+        <p:spPr>
+          <a:xfrm>
+            <a:off x="0" y="0"/>
+            <a:ext cx="12191695" cy="6858000"/>
+          </a:xfrm>
+          <a:prstGeom prst="rect">
+            <a:avLst/>
+          </a:prstGeom>
+          <a:solidFill>
+            <a:srgbClr val="FFFFFF"/>
+          </a:solidFill>
+          <a:ln>
+            <a:noFill/>
+          </a:ln>
+          <a:effectLst/>
+        </p:spPr>
+        <p:style>
+          <a:lnRef idx="1">
+            <a:schemeClr val="accent1"/>
+          </a:lnRef>
+          <a:fillRef idx="3">
+            <a:schemeClr val="accent1"/>
+          </a:fillRef>
+          <a:effectRef idx="2">
+            <a:schemeClr val="accent1"/>
+          </a:effectRef>
+          <a:fontRef idx="minor">
+            <a:schemeClr val="lt1"/>
+          </a:fontRef>
+        </p:style>
+        <p:txBody>
+          <a:bodyPr rtlCol="0" anchor="ctr"/>
+          <a:lstStyle/>
+          <a:p>
+            <a:pPr algn="ctr"/>
+          </a:p>
+        </p:txBody>
+      </p:sp>
+      <p:sp>
+        <p:nvSpPr>
+          <p:cNvPr id="3" name="TextBox 2"/>
+          <p:cNvSpPr txBox="1"/>
+          <p:nvPr/>
+        </p:nvSpPr>
+        <p:spPr>
+          <a:xfrm>
+            <a:off x="640080" y="457200"/>
+            <a:ext cx="10911535" cy="822960"/>
+          </a:xfrm>
+          <a:prstGeom prst="rect">
+            <a:avLst/>
+          </a:prstGeom>
+          <a:noFill/>
+        </p:spPr>
+        <p:txBody>
+          <a:bodyPr wrap="square" lIns="0" rIns="0" tIns="0" bIns="0" anchor="t">
+            <a:spAutoFit/>
+          </a:bodyPr>
+          <a:lstStyle/>
+          <a:p>
+            <a:pPr algn="l">
+              <a:spcAft>
+                <a:spcPts val="600"/>
+              </a:spcAft>
+            </a:pPr>
+            <a:r>
+              <a:rPr sz="3200" b="1" i="0">
+                <a:solidFill>
+                  <a:srgbClr val="12263A"/>
+                </a:solidFill>
+                <a:latin typeface="Cambria"/>
+              </a:rPr>
+              <a:t>Results 5: Is It an Artefact?</a:t>
+            </a:r>
+          </a:p>
+        </p:txBody>
+      </p:sp>
+      <p:sp>
+        <p:nvSpPr>
+          <p:cNvPr id="4" name="TextBox 3"/>
+          <p:cNvSpPr txBox="1"/>
+          <p:nvPr/>
+        </p:nvSpPr>
+        <p:spPr>
+          <a:xfrm>
+            <a:off x="640080" y="1207008"/>
+            <a:ext cx="10911535" cy="411480"/>
+          </a:xfrm>
+          <a:prstGeom prst="rect">
+            <a:avLst/>
+          </a:prstGeom>
+          <a:noFill/>
+        </p:spPr>
+        <p:txBody>
+          <a:bodyPr wrap="square" lIns="0" rIns="0" tIns="0" bIns="0" anchor="t">
+            <a:spAutoFit/>
+          </a:bodyPr>
+          <a:lstStyle/>
+          <a:p>
+            <a:pPr algn="l">
+              <a:spcAft>
+                <a:spcPts val="600"/>
+              </a:spcAft>
+            </a:pPr>
+            <a:r>
+              <a:rPr sz="1400" b="0" i="1">
+                <a:solidFill>
+                  <a:srgbClr val="5A6672"/>
+                </a:solidFill>
+                <a:latin typeface="Calibri"/>
+              </a:rPr>
+              <a:t>Two checks, both suggested by looking closely at single images</a:t>
+            </a:r>
+          </a:p>
+        </p:txBody>
+      </p:sp>
+      <p:sp>
+        <p:nvSpPr>
+          <p:cNvPr id="5" name="Rounded Rectangle 4"/>
+          <p:cNvSpPr/>
+          <p:nvPr/>
+        </p:nvSpPr>
+        <p:spPr>
+          <a:xfrm>
+            <a:off x="640080" y="1783080"/>
+            <a:ext cx="5303520" cy="2240280"/>
+          </a:xfrm>
+          <a:prstGeom prst="roundRect">
+            <a:avLst>
+              <a:gd name="adj" fmla="val 6000"/>
+            </a:avLst>
+          </a:prstGeom>
+          <a:solidFill>
+            <a:srgbClr val="F4F6F8"/>
+          </a:solidFill>
+          <a:ln>
+            <a:noFill/>
+          </a:ln>
+          <a:effectLst/>
+        </p:spPr>
+        <p:style>
+          <a:lnRef idx="1">
+            <a:schemeClr val="accent1"/>
+          </a:lnRef>
+          <a:fillRef idx="3">
+            <a:schemeClr val="accent1"/>
+          </a:fillRef>
+          <a:effectRef idx="2">
+            <a:schemeClr val="accent1"/>
+          </a:effectRef>
+          <a:fontRef idx="minor">
+            <a:schemeClr val="lt1"/>
+          </a:fontRef>
+        </p:style>
+        <p:txBody>
+          <a:bodyPr rtlCol="0" anchor="ctr"/>
+          <a:lstStyle/>
+          <a:p>
+            <a:pPr algn="ctr"/>
+          </a:p>
+        </p:txBody>
+      </p:sp>
+      <p:sp>
+        <p:nvSpPr>
+          <p:cNvPr id="6" name="TextBox 5"/>
+          <p:cNvSpPr txBox="1"/>
+          <p:nvPr/>
+        </p:nvSpPr>
+        <p:spPr>
+          <a:xfrm>
+            <a:off x="914400" y="1965960"/>
+            <a:ext cx="4754880" cy="365760"/>
+          </a:xfrm>
+          <a:prstGeom prst="rect">
+            <a:avLst/>
+          </a:prstGeom>
+          <a:noFill/>
+        </p:spPr>
+        <p:txBody>
+          <a:bodyPr wrap="square" lIns="0" rIns="0" tIns="0" bIns="0" anchor="t">
+            <a:spAutoFit/>
+          </a:bodyPr>
+          <a:lstStyle/>
+          <a:p>
+            <a:pPr algn="l">
+              <a:spcAft>
+                <a:spcPts val="600"/>
+              </a:spcAft>
+            </a:pPr>
+            <a:r>
+              <a:rPr sz="1200" b="1" i="0">
+                <a:solidFill>
+                  <a:srgbClr val="12263A"/>
+                </a:solidFill>
+                <a:latin typeface="Calibri"/>
+              </a:rPr>
+              <a:t>CHECK 1: THE WRONG “VERTICAL”</a:t>
+            </a:r>
+          </a:p>
+        </p:txBody>
+      </p:sp>
+      <p:sp>
+        <p:nvSpPr>
+          <p:cNvPr id="7" name="TextBox 6"/>
+          <p:cNvSpPr txBox="1"/>
+          <p:nvPr/>
+        </p:nvSpPr>
+        <p:spPr>
+          <a:xfrm>
+            <a:off x="914400" y="2377440"/>
+            <a:ext cx="4754880" cy="1554480"/>
+          </a:xfrm>
+          <a:prstGeom prst="rect">
+            <a:avLst/>
+          </a:prstGeom>
+          <a:noFill/>
+        </p:spPr>
+        <p:txBody>
+          <a:bodyPr wrap="square" lIns="0" rIns="0" tIns="0" bIns="0" anchor="t">
+            <a:spAutoFit/>
+          </a:bodyPr>
+          <a:lstStyle/>
+          <a:p>
+            <a:pPr algn="l">
+              <a:spcAft>
+                <a:spcPts val="200"/>
+              </a:spcAft>
+            </a:pPr>
+            <a:r>
+              <a:rPr sz="1250" b="0" i="0">
+                <a:solidFill>
+                  <a:srgbClr val="1A1A1A"/>
+                </a:solidFill>
+                <a:latin typeface="Calibri"/>
+              </a:rPr>
+              <a:t>A corridor's far end, near the image centre, can be picked as the vertical vanishing point by mistake.</a:t>
+            </a:r>
+          </a:p>
+          <a:p>
+            <a:pPr algn="l">
+              <a:spcAft>
+                <a:spcPts val="200"/>
+              </a:spcAft>
+            </a:pPr>
+            <a:r>
+              <a:rPr sz="1250" b="0" i="0">
+                <a:solidFill>
+                  <a:srgbClr val="1A1A1A"/>
+                </a:solidFill>
+                <a:latin typeface="Calibri"/>
+              </a:rPr>
+              <a:t/>
+            </a:r>
+          </a:p>
+          <a:p>
+            <a:pPr algn="l">
+              <a:spcAft>
+                <a:spcPts val="200"/>
+              </a:spcAft>
+            </a:pPr>
+            <a:r>
+              <a:rPr sz="1250" b="0" i="0">
+                <a:solidFill>
+                  <a:srgbClr val="1A1A1A"/>
+                </a:solidFill>
+                <a:latin typeface="Calibri"/>
+              </a:rPr>
+              <a:t>Require the vertical point to be at least one image height away: 0 to 5% of images change, every result holds.</a:t>
+            </a:r>
+          </a:p>
+        </p:txBody>
+      </p:sp>
+      <p:sp>
+        <p:nvSpPr>
+          <p:cNvPr id="8" name="Rounded Rectangle 7"/>
+          <p:cNvSpPr/>
+          <p:nvPr/>
+        </p:nvSpPr>
+        <p:spPr>
+          <a:xfrm>
+            <a:off x="6245352" y="1783080"/>
+            <a:ext cx="5303520" cy="2240280"/>
+          </a:xfrm>
+          <a:prstGeom prst="roundRect">
+            <a:avLst>
+              <a:gd name="adj" fmla="val 6000"/>
+            </a:avLst>
+          </a:prstGeom>
+          <a:solidFill>
+            <a:srgbClr val="12263A"/>
+          </a:solidFill>
+          <a:ln>
+            <a:noFill/>
+          </a:ln>
+          <a:effectLst/>
+        </p:spPr>
+        <p:style>
+          <a:lnRef idx="1">
+            <a:schemeClr val="accent1"/>
+          </a:lnRef>
+          <a:fillRef idx="3">
+            <a:schemeClr val="accent1"/>
+          </a:fillRef>
+          <a:effectRef idx="2">
+            <a:schemeClr val="accent1"/>
+          </a:effectRef>
+          <a:fontRef idx="minor">
+            <a:schemeClr val="lt1"/>
+          </a:fontRef>
+        </p:style>
+        <p:txBody>
+          <a:bodyPr rtlCol="0" anchor="ctr"/>
+          <a:lstStyle/>
+          <a:p>
+            <a:pPr algn="ctr"/>
+          </a:p>
+        </p:txBody>
+      </p:sp>
+      <p:sp>
+        <p:nvSpPr>
+          <p:cNvPr id="9" name="TextBox 8"/>
+          <p:cNvSpPr txBox="1"/>
+          <p:nvPr/>
+        </p:nvSpPr>
+        <p:spPr>
+          <a:xfrm>
+            <a:off x="6519672" y="1965960"/>
+            <a:ext cx="4754880" cy="365760"/>
+          </a:xfrm>
+          <a:prstGeom prst="rect">
+            <a:avLst/>
+          </a:prstGeom>
+          <a:noFill/>
+        </p:spPr>
+        <p:txBody>
+          <a:bodyPr wrap="square" lIns="0" rIns="0" tIns="0" bIns="0" anchor="t">
+            <a:spAutoFit/>
+          </a:bodyPr>
+          <a:lstStyle/>
+          <a:p>
+            <a:pPr algn="l">
+              <a:spcAft>
+                <a:spcPts val="600"/>
+              </a:spcAft>
+            </a:pPr>
+            <a:r>
+              <a:rPr sz="1200" b="1" i="0">
+                <a:solidFill>
+                  <a:srgbClr val="E8A33D"/>
+                </a:solidFill>
+                <a:latin typeface="Calibri"/>
+              </a:rPr>
+              <a:t>CHECK 2: LEVEL CAMERAS</a:t>
+            </a:r>
+          </a:p>
+        </p:txBody>
+      </p:sp>
+      <p:sp>
+        <p:nvSpPr>
+          <p:cNvPr id="10" name="TextBox 9"/>
+          <p:cNvSpPr txBox="1"/>
+          <p:nvPr/>
+        </p:nvSpPr>
+        <p:spPr>
+          <a:xfrm>
+            <a:off x="6519672" y="2377440"/>
+            <a:ext cx="4754880" cy="1554480"/>
+          </a:xfrm>
+          <a:prstGeom prst="rect">
+            <a:avLst/>
+          </a:prstGeom>
+          <a:noFill/>
+        </p:spPr>
+        <p:txBody>
+          <a:bodyPr wrap="square" lIns="0" rIns="0" tIns="0" bIns="0" anchor="t">
+            <a:spAutoFit/>
+          </a:bodyPr>
+          <a:lstStyle/>
+          <a:p>
+            <a:pPr algn="l">
+              <a:spcAft>
+                <a:spcPts val="200"/>
+              </a:spcAft>
+            </a:pPr>
+            <a:r>
+              <a:rPr sz="1250" b="0" i="0">
+                <a:solidFill>
+                  <a:srgbClr val="FFFFFF"/>
+                </a:solidFill>
+                <a:latin typeface="Calibri"/>
+              </a:rPr>
+              <a:t>A level camera makes focal length noisy, and AI images are level far more often (76 to 80% vs 31 to 51% of real photos).</a:t>
+            </a:r>
+          </a:p>
+          <a:p>
+            <a:pPr algn="l">
+              <a:spcAft>
+                <a:spcPts val="200"/>
+              </a:spcAft>
+            </a:pPr>
+            <a:r>
+              <a:rPr sz="1250" b="0" i="0">
+                <a:solidFill>
+                  <a:srgbClr val="FFFFFF"/>
+                </a:solidFill>
+                <a:latin typeface="Calibri"/>
+              </a:rPr>
+              <a:t/>
+            </a:r>
+          </a:p>
+          <a:p>
+            <a:pPr algn="l">
+              <a:spcAft>
+                <a:spcPts val="200"/>
+              </a:spcAft>
+            </a:pPr>
+            <a:r>
+              <a:rPr sz="1250" b="0" i="0">
+                <a:solidFill>
+                  <a:srgbClr val="FFFFFF"/>
+                </a:solidFill>
+                <a:latin typeface="Calibri"/>
+              </a:rPr>
+              <a:t>Keep only clearly tilted cameras: AI is still 2 to 3 times worse.</a:t>
+            </a:r>
+          </a:p>
+        </p:txBody>
+      </p:sp>
+      <p:graphicFrame>
+        <p:nvGraphicFramePr>
+          <p:cNvPr id="11" name="Table 10"/>
+          <p:cNvGraphicFramePr>
+            <a:graphicFrameLocks noGrp="1"/>
+          </p:cNvGraphicFramePr>
+          <p:nvPr/>
+        </p:nvGraphicFramePr>
+        <p:xfrm>
+          <a:off x="640080" y="4251960"/>
+          <a:ext cx="10908792" cy="1463040"/>
+        </p:xfrm>
+        <a:graphic>
+          <a:graphicData uri="http://schemas.openxmlformats.org/drawingml/2006/table">
+            <a:tbl>
+              <a:tblPr firstRow="1" bandRow="1">
+                <a:tableStyleId>{5C22544A-7EE6-4342-B048-85BDC9FD1C3A}</a:tableStyleId>
+              </a:tblPr>
+              <a:tblGrid>
+                <a:gridCol w="4023360"/>
+                <a:gridCol w="1325880"/>
+                <a:gridCol w="1325880"/>
+                <a:gridCol w="1325880"/>
+                <a:gridCol w="1325880"/>
+                <a:gridCol w="1581912"/>
+              </a:tblGrid>
+              <a:tr h="365760">
+                <a:tc>
+                  <a:txBody>
+                    <a:bodyPr/>
+                    <a:lstStyle/>
+                    <a:p>
+                      <a:r>
+                        <a:rPr sz="1100" b="1">
+                          <a:solidFill>
+                            <a:srgbClr val="FFFFFF"/>
+                          </a:solidFill>
+                          <a:latin typeface="Calibri"/>
+                        </a:rPr>
+                        <a:t>Condition</a:t>
+                      </a:r>
+                    </a:p>
+                  </a:txBody>
+                  <a:tcPr anchor="ctr">
+                    <a:solidFill>
+                      <a:srgbClr val="12263A"/>
+                    </a:solidFill>
+                  </a:tcPr>
+                </a:tc>
+                <a:tc>
+                  <a:txBody>
+                    <a:bodyPr/>
+                    <a:lstStyle/>
+                    <a:p>
+                      <a:r>
+                        <a:rPr sz="1100" b="1">
+                          <a:solidFill>
+                            <a:srgbClr val="FFFFFF"/>
+                          </a:solidFill>
+                          <a:latin typeface="Calibri"/>
+                        </a:rPr>
+                        <a:t>York Urban</a:t>
+                      </a:r>
+                    </a:p>
+                  </a:txBody>
+                  <a:tcPr anchor="ctr">
+                    <a:solidFill>
+                      <a:srgbClr val="12263A"/>
+                    </a:solidFill>
+                  </a:tcPr>
+                </a:tc>
+                <a:tc>
+                  <a:txBody>
+                    <a:bodyPr/>
+                    <a:lstStyle/>
+                    <a:p>
+                      <a:r>
+                        <a:rPr sz="1100" b="1">
+                          <a:solidFill>
+                            <a:srgbClr val="FFFFFF"/>
+                          </a:solidFill>
+                          <a:latin typeface="Calibri"/>
+                        </a:rPr>
+                        <a:t>Commons</a:t>
+                      </a:r>
+                    </a:p>
+                  </a:txBody>
+                  <a:tcPr anchor="ctr">
+                    <a:solidFill>
+                      <a:srgbClr val="12263A"/>
+                    </a:solidFill>
+                  </a:tcPr>
+                </a:tc>
+                <a:tc>
+                  <a:txBody>
+                    <a:bodyPr/>
+                    <a:lstStyle/>
+                    <a:p>
+                      <a:r>
+                        <a:rPr sz="1100" b="1">
+                          <a:solidFill>
+                            <a:srgbClr val="FFFFFF"/>
+                          </a:solidFill>
+                          <a:latin typeface="Calibri"/>
+                        </a:rPr>
+                        <a:t>SD 1.5</a:t>
+                      </a:r>
+                    </a:p>
+                  </a:txBody>
+                  <a:tcPr anchor="ctr">
+                    <a:solidFill>
+                      <a:srgbClr val="12263A"/>
+                    </a:solidFill>
+                  </a:tcPr>
+                </a:tc>
+                <a:tc>
+                  <a:txBody>
+                    <a:bodyPr/>
+                    <a:lstStyle/>
+                    <a:p>
+                      <a:r>
+                        <a:rPr sz="1100" b="1">
                           <a:solidFill>
                             <a:srgbClr val="FFFFFF"/>
                           </a:solidFill>
@@ -7310,35 +9037,13 @@
                     <a:lstStyle/>
                     <a:p>
                       <a:r>
-                        <a:rPr sz="1000" b="1">
+                        <a:rPr sz="1100" b="1">
                           <a:solidFill>
                             <a:srgbClr val="FFFFFF"/>
                           </a:solidFill>
                           <a:latin typeface="Calibri"/>
                         </a:rPr>
-                        <a:t>Gemini</a:t>
-                      </a:r>
-                    </a:p>
-                  </a:txBody>
-                  <a:tcPr anchor="ctr">
-                    <a:solidFill>
-                      <a:srgbClr val="12263A"/>
-                    </a:solidFill>
-                  </a:tcPr>
-                </a:tc>
-                <a:tc>
-                  <a:txBody>
-                    <a:bodyPr/>
-                    <a:lstStyle/>
-                    <a:p>
-                      <a:r>
-                        <a:rPr sz="1000" b="1">
-                          <a:solidFill>
-                            <a:srgbClr val="FFFFFF"/>
-                          </a:solidFill>
-                          <a:latin typeface="Calibri"/>
-                        </a:rPr>
-                        <a:t>GPT-image</a:t>
+                        <a:t>Largest p vs real</a:t>
                       </a:r>
                     </a:p>
                   </a:txBody>
@@ -7349,20 +9054,20 @@
                   </a:tcPr>
                 </a:tc>
               </a:tr>
-              <a:tr h="502920">
+              <a:tr h="365760">
                 <a:tc>
                   <a:txBody>
                     <a:bodyPr/>
                     <a:lstStyle/>
                     <a:p>
                       <a:r>
-                        <a:rPr sz="1000">
+                        <a:rPr sz="1100">
                           <a:solidFill>
                             <a:srgbClr val="1A1A1A"/>
                           </a:solidFill>
                           <a:latin typeface="Calibri"/>
                         </a:rPr>
-                        <a:t>Images admitted</a:t>
+                        <a:t>As published</a:t>
                       </a:r>
                     </a:p>
                   </a:txBody>
@@ -7378,13 +9083,13 @@
                     <a:lstStyle/>
                     <a:p>
                       <a:r>
-                        <a:rPr sz="1000">
+                        <a:rPr sz="1100">
                           <a:solidFill>
                             <a:srgbClr val="1A1A1A"/>
                           </a:solidFill>
                           <a:latin typeface="Calibri"/>
                         </a:rPr>
-                        <a:t>72</a:t>
+                        <a:t>0.142</a:t>
                       </a:r>
                     </a:p>
                   </a:txBody>
@@ -7400,13 +9105,13 @@
                     <a:lstStyle/>
                     <a:p>
                       <a:r>
-                        <a:rPr sz="1000">
+                        <a:rPr sz="1100">
                           <a:solidFill>
                             <a:srgbClr val="1A1A1A"/>
                           </a:solidFill>
                           <a:latin typeface="Calibri"/>
                         </a:rPr>
-                        <a:t>121</a:t>
+                        <a:t>0.152</a:t>
                       </a:r>
                     </a:p>
                   </a:txBody>
@@ -7422,13 +9127,13 @@
                     <a:lstStyle/>
                     <a:p>
                       <a:r>
-                        <a:rPr sz="1000">
+                        <a:rPr sz="1100">
                           <a:solidFill>
                             <a:srgbClr val="1A1A1A"/>
                           </a:solidFill>
                           <a:latin typeface="Calibri"/>
                         </a:rPr>
-                        <a:t>92</a:t>
+                        <a:t>0.465</a:t>
                       </a:r>
                     </a:p>
                   </a:txBody>
@@ -7444,13 +9149,13 @@
                     <a:lstStyle/>
                     <a:p>
                       <a:r>
-                        <a:rPr sz="1000">
+                        <a:rPr sz="1100">
                           <a:solidFill>
                             <a:srgbClr val="1A1A1A"/>
                           </a:solidFill>
                           <a:latin typeface="Calibri"/>
                         </a:rPr>
-                        <a:t>112</a:t>
+                        <a:t>0.355</a:t>
                       </a:r>
                     </a:p>
                   </a:txBody>
@@ -7466,13 +9171,171 @@
                     <a:lstStyle/>
                     <a:p>
                       <a:r>
-                        <a:rPr sz="1000">
+                        <a:rPr sz="1100">
                           <a:solidFill>
                             <a:srgbClr val="1A1A1A"/>
                           </a:solidFill>
                           <a:latin typeface="Calibri"/>
                         </a:rPr>
-                        <a:t>—</a:t>
+                        <a:t>0.0001</a:t>
+                      </a:r>
+                    </a:p>
+                  </a:txBody>
+                  <a:tcPr anchor="ctr">
+                    <a:solidFill>
+                      <a:srgbClr val="FFFFFF"/>
+                    </a:solidFill>
+                  </a:tcPr>
+                </a:tc>
+              </a:tr>
+              <a:tr h="365760">
+                <a:tc>
+                  <a:txBody>
+                    <a:bodyPr/>
+                    <a:lstStyle/>
+                    <a:p>
+                      <a:r>
+                        <a:rPr sz="1100">
+                          <a:solidFill>
+                            <a:srgbClr val="1A1A1A"/>
+                          </a:solidFill>
+                          <a:latin typeface="Calibri"/>
+                        </a:rPr>
+                        <a:t>Vertical point ≥ 1 image height from centre</a:t>
+                      </a:r>
+                    </a:p>
+                  </a:txBody>
+                  <a:tcPr anchor="ctr">
+                    <a:solidFill>
+                      <a:srgbClr val="F4F6F8"/>
+                    </a:solidFill>
+                  </a:tcPr>
+                </a:tc>
+                <a:tc>
+                  <a:txBody>
+                    <a:bodyPr/>
+                    <a:lstStyle/>
+                    <a:p>
+                      <a:r>
+                        <a:rPr sz="1100">
+                          <a:solidFill>
+                            <a:srgbClr val="1A1A1A"/>
+                          </a:solidFill>
+                          <a:latin typeface="Calibri"/>
+                        </a:rPr>
+                        <a:t>0.142</a:t>
+                      </a:r>
+                    </a:p>
+                  </a:txBody>
+                  <a:tcPr anchor="ctr">
+                    <a:solidFill>
+                      <a:srgbClr val="F4F6F8"/>
+                    </a:solidFill>
+                  </a:tcPr>
+                </a:tc>
+                <a:tc>
+                  <a:txBody>
+                    <a:bodyPr/>
+                    <a:lstStyle/>
+                    <a:p>
+                      <a:r>
+                        <a:rPr sz="1100">
+                          <a:solidFill>
+                            <a:srgbClr val="1A1A1A"/>
+                          </a:solidFill>
+                          <a:latin typeface="Calibri"/>
+                        </a:rPr>
+                        <a:t>0.149</a:t>
+                      </a:r>
+                    </a:p>
+                  </a:txBody>
+                  <a:tcPr anchor="ctr">
+                    <a:solidFill>
+                      <a:srgbClr val="F4F6F8"/>
+                    </a:solidFill>
+                  </a:tcPr>
+                </a:tc>
+                <a:tc>
+                  <a:txBody>
+                    <a:bodyPr/>
+                    <a:lstStyle/>
+                    <a:p>
+                      <a:r>
+                        <a:rPr sz="1100">
+                          <a:solidFill>
+                            <a:srgbClr val="1A1A1A"/>
+                          </a:solidFill>
+                          <a:latin typeface="Calibri"/>
+                        </a:rPr>
+                        <a:t>0.465</a:t>
+                      </a:r>
+                    </a:p>
+                  </a:txBody>
+                  <a:tcPr anchor="ctr">
+                    <a:solidFill>
+                      <a:srgbClr val="F4F6F8"/>
+                    </a:solidFill>
+                  </a:tcPr>
+                </a:tc>
+                <a:tc>
+                  <a:txBody>
+                    <a:bodyPr/>
+                    <a:lstStyle/>
+                    <a:p>
+                      <a:r>
+                        <a:rPr sz="1100">
+                          <a:solidFill>
+                            <a:srgbClr val="1A1A1A"/>
+                          </a:solidFill>
+                          <a:latin typeface="Calibri"/>
+                        </a:rPr>
+                        <a:t>0.355</a:t>
+                      </a:r>
+                    </a:p>
+                  </a:txBody>
+                  <a:tcPr anchor="ctr">
+                    <a:solidFill>
+                      <a:srgbClr val="F4F6F8"/>
+                    </a:solidFill>
+                  </a:tcPr>
+                </a:tc>
+                <a:tc>
+                  <a:txBody>
+                    <a:bodyPr/>
+                    <a:lstStyle/>
+                    <a:p>
+                      <a:r>
+                        <a:rPr sz="1100">
+                          <a:solidFill>
+                            <a:srgbClr val="1A1A1A"/>
+                          </a:solidFill>
+                          <a:latin typeface="Calibri"/>
+                        </a:rPr>
+                        <a:t>0.0001</a:t>
+                      </a:r>
+                    </a:p>
+                  </a:txBody>
+                  <a:tcPr anchor="ctr">
+                    <a:solidFill>
+                      <a:srgbClr val="F4F6F8"/>
+                    </a:solidFill>
+                  </a:tcPr>
+                </a:tc>
+              </a:tr>
+              <a:tr h="365760">
+                <a:tc>
+                  <a:txBody>
+                    <a:bodyPr/>
+                    <a:lstStyle/>
+                    <a:p>
+                      <a:r>
+                        <a:rPr sz="1100">
+                          <a:solidFill>
+                            <a:srgbClr val="1A1A1A"/>
+                          </a:solidFill>
+                          <a:latin typeface="Calibri"/>
+                        </a:rPr>
+                        <a:t>Clearly tilted cameras only</a:t>
                       </a:r>
                     </a:p>
                   </a:txBody>
@@ -7488,193 +9351,13 @@
                     <a:lstStyle/>
                     <a:p>
                       <a:r>
-                        <a:rPr sz="1000">
+                        <a:rPr sz="1100">
                           <a:solidFill>
                             <a:srgbClr val="1A1A1A"/>
                           </a:solidFill>
                           <a:latin typeface="Calibri"/>
                         </a:rPr>
-                        <a:t>—</a:t>
-                      </a:r>
-                    </a:p>
-                  </a:txBody>
-                  <a:tcPr anchor="ctr">
-                    <a:solidFill>
-                      <a:srgbClr val="FFFFFF"/>
-                    </a:solidFill>
-                  </a:tcPr>
-                </a:tc>
-              </a:tr>
-              <a:tr h="502920">
-                <a:tc>
-                  <a:txBody>
-                    <a:bodyPr/>
-                    <a:lstStyle/>
-                    <a:p>
-                      <a:r>
-                        <a:rPr sz="1000">
-                          <a:solidFill>
-                            <a:srgbClr val="1A1A1A"/>
-                          </a:solidFill>
-                          <a:latin typeface="Calibri"/>
-                        </a:rPr>
-                        <a:t>Log-f spread, median [95% CI]</a:t>
-                      </a:r>
-                    </a:p>
-                  </a:txBody>
-                  <a:tcPr anchor="ctr">
-                    <a:solidFill>
-                      <a:srgbClr val="F4F6F8"/>
-                    </a:solidFill>
-                  </a:tcPr>
-                </a:tc>
-                <a:tc>
-                  <a:txBody>
-                    <a:bodyPr/>
-                    <a:lstStyle/>
-                    <a:p>
-                      <a:r>
-                        <a:rPr sz="1000">
-                          <a:solidFill>
-                            <a:srgbClr val="1A1A1A"/>
-                          </a:solidFill>
-                          <a:latin typeface="Calibri"/>
-                        </a:rPr>
-                        <a:t>0.142 [0.106, 0.221]</a:t>
-                      </a:r>
-                    </a:p>
-                  </a:txBody>
-                  <a:tcPr anchor="ctr">
-                    <a:solidFill>
-                      <a:srgbClr val="F4F6F8"/>
-                    </a:solidFill>
-                  </a:tcPr>
-                </a:tc>
-                <a:tc>
-                  <a:txBody>
-                    <a:bodyPr/>
-                    <a:lstStyle/>
-                    <a:p>
-                      <a:r>
-                        <a:rPr sz="1000">
-                          <a:solidFill>
-                            <a:srgbClr val="1A1A1A"/>
-                          </a:solidFill>
-                          <a:latin typeface="Calibri"/>
-                        </a:rPr>
-                        <a:t>0.152 [0.093, 0.220]</a:t>
-                      </a:r>
-                    </a:p>
-                  </a:txBody>
-                  <a:tcPr anchor="ctr">
-                    <a:solidFill>
-                      <a:srgbClr val="F4F6F8"/>
-                    </a:solidFill>
-                  </a:tcPr>
-                </a:tc>
-                <a:tc>
-                  <a:txBody>
-                    <a:bodyPr/>
-                    <a:lstStyle/>
-                    <a:p>
-                      <a:r>
-                        <a:rPr sz="1000">
-                          <a:solidFill>
-                            <a:srgbClr val="1A1A1A"/>
-                          </a:solidFill>
-                          <a:latin typeface="Calibri"/>
-                        </a:rPr>
-                        <a:t>0.465 [0.324, 0.709]</a:t>
-                      </a:r>
-                    </a:p>
-                  </a:txBody>
-                  <a:tcPr anchor="ctr">
-                    <a:solidFill>
-                      <a:srgbClr val="F4F6F8"/>
-                    </a:solidFill>
-                  </a:tcPr>
-                </a:tc>
-                <a:tc>
-                  <a:txBody>
-                    <a:bodyPr/>
-                    <a:lstStyle/>
-                    <a:p>
-                      <a:r>
-                        <a:rPr sz="1000">
-                          <a:solidFill>
-                            <a:srgbClr val="1A1A1A"/>
-                          </a:solidFill>
-                          <a:latin typeface="Calibri"/>
-                        </a:rPr>
-                        <a:t>0.355 [0.272, 0.529]</a:t>
-                      </a:r>
-                    </a:p>
-                  </a:txBody>
-                  <a:tcPr anchor="ctr">
-                    <a:solidFill>
-                      <a:srgbClr val="F4F6F8"/>
-                    </a:solidFill>
-                  </a:tcPr>
-                </a:tc>
-                <a:tc>
-                  <a:txBody>
-                    <a:bodyPr/>
-                    <a:lstStyle/>
-                    <a:p>
-                      <a:r>
-                        <a:rPr sz="1000">
-                          <a:solidFill>
-                            <a:srgbClr val="1A1A1A"/>
-                          </a:solidFill>
-                          <a:latin typeface="Calibri"/>
-                        </a:rPr>
-                        <a:t>pending</a:t>
-                      </a:r>
-                    </a:p>
-                  </a:txBody>
-                  <a:tcPr anchor="ctr">
-                    <a:solidFill>
-                      <a:srgbClr val="F4F6F8"/>
-                    </a:solidFill>
-                  </a:tcPr>
-                </a:tc>
-                <a:tc>
-                  <a:txBody>
-                    <a:bodyPr/>
-                    <a:lstStyle/>
-                    <a:p>
-                      <a:r>
-                        <a:rPr sz="1000">
-                          <a:solidFill>
-                            <a:srgbClr val="1A1A1A"/>
-                          </a:solidFill>
-                          <a:latin typeface="Calibri"/>
-                        </a:rPr>
-                        <a:t>pending</a:t>
-                      </a:r>
-                    </a:p>
-                  </a:txBody>
-                  <a:tcPr anchor="ctr">
-                    <a:solidFill>
-                      <a:srgbClr val="F4F6F8"/>
-                    </a:solidFill>
-                  </a:tcPr>
-                </a:tc>
-              </a:tr>
-              <a:tr h="502920">
-                <a:tc>
-                  <a:txBody>
-                    <a:bodyPr/>
-                    <a:lstStyle/>
-                    <a:p>
-                      <a:r>
-                        <a:rPr sz="1000">
-                          <a:solidFill>
-                            <a:srgbClr val="1A1A1A"/>
-                          </a:solidFill>
-                          <a:latin typeface="Calibri"/>
-                        </a:rPr>
-                        <a:t>Images with an impossible pair</a:t>
+                        <a:t>0.135</a:t>
                       </a:r>
                     </a:p>
                   </a:txBody>
@@ -7690,13 +9373,13 @@
                     <a:lstStyle/>
                     <a:p>
                       <a:r>
-                        <a:rPr sz="1000">
+                        <a:rPr sz="1100">
                           <a:solidFill>
                             <a:srgbClr val="1A1A1A"/>
                           </a:solidFill>
                           <a:latin typeface="Calibri"/>
                         </a:rPr>
-                        <a:t>28%</a:t>
+                        <a:t>0.135</a:t>
                       </a:r>
                     </a:p>
                   </a:txBody>
@@ -7712,13 +9395,13 @@
                     <a:lstStyle/>
                     <a:p>
                       <a:r>
-                        <a:rPr sz="1000">
+                        <a:rPr sz="1100">
                           <a:solidFill>
                             <a:srgbClr val="1A1A1A"/>
                           </a:solidFill>
                           <a:latin typeface="Calibri"/>
                         </a:rPr>
-                        <a:t>44%</a:t>
+                        <a:t>0.423</a:t>
                       </a:r>
                     </a:p>
                   </a:txBody>
@@ -7734,13 +9417,13 @@
                     <a:lstStyle/>
                     <a:p>
                       <a:r>
-                        <a:rPr sz="1000">
+                        <a:rPr sz="1100">
                           <a:solidFill>
                             <a:srgbClr val="1A1A1A"/>
                           </a:solidFill>
                           <a:latin typeface="Calibri"/>
                         </a:rPr>
-                        <a:t>68%</a:t>
+                        <a:t>0.285</a:t>
                       </a:r>
                     </a:p>
                   </a:txBody>
@@ -7756,57 +9439,13 @@
                     <a:lstStyle/>
                     <a:p>
                       <a:r>
-                        <a:rPr sz="1000">
+                        <a:rPr sz="1100">
                           <a:solidFill>
                             <a:srgbClr val="1A1A1A"/>
                           </a:solidFill>
                           <a:latin typeface="Calibri"/>
                         </a:rPr>
-                        <a:t>58%</a:t>
-                      </a:r>
-                    </a:p>
-                  </a:txBody>
-                  <a:tcPr anchor="ctr">
-                    <a:solidFill>
-                      <a:srgbClr val="FFFFFF"/>
-                    </a:solidFill>
-                  </a:tcPr>
-                </a:tc>
-                <a:tc>
-                  <a:txBody>
-                    <a:bodyPr/>
-                    <a:lstStyle/>
-                    <a:p>
-                      <a:r>
-                        <a:rPr sz="1000">
-                          <a:solidFill>
-                            <a:srgbClr val="1A1A1A"/>
-                          </a:solidFill>
-                          <a:latin typeface="Calibri"/>
-                        </a:rPr>
-                        <a:t>pending</a:t>
-                      </a:r>
-                    </a:p>
-                  </a:txBody>
-                  <a:tcPr anchor="ctr">
-                    <a:solidFill>
-                      <a:srgbClr val="FFFFFF"/>
-                    </a:solidFill>
-                  </a:tcPr>
-                </a:tc>
-                <a:tc>
-                  <a:txBody>
-                    <a:bodyPr/>
-                    <a:lstStyle/>
-                    <a:p>
-                      <a:r>
-                        <a:rPr sz="1000">
-                          <a:solidFill>
-                            <a:srgbClr val="1A1A1A"/>
-                          </a:solidFill>
-                          <a:latin typeface="Calibri"/>
-                        </a:rPr>
-                        <a:t>pending</a:t>
+                        <a:t>0.008</a:t>
                       </a:r>
                     </a:p>
                   </a:txBody>
@@ -7823,14 +9462,14 @@
       </p:graphicFrame>
       <p:sp>
         <p:nvSpPr>
-          <p:cNvPr id="6" name="TextBox 5"/>
+          <p:cNvPr id="12" name="TextBox 11"/>
           <p:cNvSpPr txBox="1"/>
           <p:nvPr/>
         </p:nvSpPr>
         <p:spPr>
           <a:xfrm>
-            <a:off x="640080" y="3858768"/>
-            <a:ext cx="10908792" cy="274320"/>
+            <a:off x="640080" y="5943600"/>
+            <a:ext cx="10908792" cy="457200"/>
           </a:xfrm>
           <a:prstGeom prst="rect">
             <a:avLst/>
@@ -7849,153 +9488,13 @@
               </a:spcAft>
             </a:pPr>
             <a:r>
-              <a:rPr sz="1100" b="0" i="1">
-                <a:solidFill>
-                  <a:srgbClr val="E8A33D"/>
+              <a:rPr sz="1400" b="1" i="1">
+                <a:solidFill>
+                  <a:srgbClr val="1C7293"/>
                 </a:solidFill>
                 <a:latin typeface="Calibri"/>
               </a:rPr>
-              <a:t>Right-hand columns reserved for closed frontier models — same prompts, same pipeline, see the next slide.</a:t>
-            </a:r>
-          </a:p>
-        </p:txBody>
-      </p:sp>
-      <p:sp>
-        <p:nvSpPr>
-          <p:cNvPr id="7" name="Rounded Rectangle 6"/>
-          <p:cNvSpPr/>
-          <p:nvPr/>
-        </p:nvSpPr>
-        <p:spPr>
-          <a:xfrm>
-            <a:off x="640080" y="4224528"/>
-            <a:ext cx="10908792" cy="1005840"/>
-          </a:xfrm>
-          <a:prstGeom prst="roundRect">
-            <a:avLst>
-              <a:gd name="adj" fmla="val 6000"/>
-            </a:avLst>
-          </a:prstGeom>
-          <a:solidFill>
-            <a:srgbClr val="12263A"/>
-          </a:solidFill>
-          <a:ln>
-            <a:noFill/>
-          </a:ln>
-          <a:effectLst/>
-        </p:spPr>
-        <p:style>
-          <a:lnRef idx="1">
-            <a:schemeClr val="accent1"/>
-          </a:lnRef>
-          <a:fillRef idx="3">
-            <a:schemeClr val="accent1"/>
-          </a:fillRef>
-          <a:effectRef idx="2">
-            <a:schemeClr val="accent1"/>
-          </a:effectRef>
-          <a:fontRef idx="minor">
-            <a:schemeClr val="lt1"/>
-          </a:fontRef>
-        </p:style>
-        <p:txBody>
-          <a:bodyPr rtlCol="0" anchor="ctr"/>
-          <a:lstStyle/>
-          <a:p>
-            <a:pPr algn="ctr"/>
-          </a:p>
-        </p:txBody>
-      </p:sp>
-      <p:sp>
-        <p:nvSpPr>
-          <p:cNvPr id="8" name="TextBox 7"/>
-          <p:cNvSpPr txBox="1"/>
-          <p:nvPr/>
-        </p:nvSpPr>
-        <p:spPr>
-          <a:xfrm>
-            <a:off x="914400" y="4370832"/>
-            <a:ext cx="10332720" cy="777240"/>
-          </a:xfrm>
-          <a:prstGeom prst="rect">
-            <a:avLst/>
-          </a:prstGeom>
-          <a:noFill/>
-        </p:spPr>
-        <p:txBody>
-          <a:bodyPr wrap="square" lIns="0" rIns="0" tIns="0" bIns="0" anchor="t">
-            <a:spAutoFit/>
-          </a:bodyPr>
-          <a:lstStyle/>
-          <a:p>
-            <a:pPr algn="l">
-              <a:spcAft>
-                <a:spcPts val="600"/>
-              </a:spcAft>
-            </a:pPr>
-            <a:r>
-              <a:rPr sz="1600" b="1" i="0">
-                <a:solidFill>
-                  <a:srgbClr val="FFFFFF"/>
-                </a:solidFill>
-                <a:latin typeface="Calibri"/>
-              </a:rPr>
-              <a:t>In a real photograph the horizontal directions agree on ONE focal length to within ~15%. In generated images they disagree by 35-60%.  (p ≈ 3×10⁻⁵ against either real reference)</a:t>
-            </a:r>
-          </a:p>
-        </p:txBody>
-      </p:sp>
-      <p:sp>
-        <p:nvSpPr>
-          <p:cNvPr id="9" name="TextBox 8"/>
-          <p:cNvSpPr txBox="1"/>
-          <p:nvPr/>
-        </p:nvSpPr>
-        <p:spPr>
-          <a:xfrm>
-            <a:off x="640080" y="5440680"/>
-            <a:ext cx="10908792" cy="1097280"/>
-          </a:xfrm>
-          <a:prstGeom prst="rect">
-            <a:avLst/>
-          </a:prstGeom>
-          <a:noFill/>
-        </p:spPr>
-        <p:txBody>
-          <a:bodyPr wrap="square" lIns="0" rIns="0" tIns="0" bIns="0">
-            <a:spAutoFit/>
-          </a:bodyPr>
-          <a:lstStyle/>
-          <a:p>
-            <a:pPr>
-              <a:spcAft>
-                <a:spcPts val="600"/>
-              </a:spcAft>
-            </a:pPr>
-            <a:r>
-              <a:rPr sz="1350" b="0">
-                <a:solidFill>
-                  <a:srgbClr val="1A1A1A"/>
-                </a:solidFill>
-                <a:latin typeface="Calibri"/>
-              </a:rPr>
-              <a:t>•  The two real references agree with each other within their confidence intervals — the result does not depend on which real set is used.</a:t>
-            </a:r>
-          </a:p>
-          <a:p>
-            <a:pPr>
-              <a:spcAft>
-                <a:spcPts val="600"/>
-              </a:spcAft>
-            </a:pPr>
-            <a:r>
-              <a:rPr sz="1350" b="0">
-                <a:solidFill>
-                  <a:srgbClr val="1A1A1A"/>
-                </a:solidFill>
-                <a:latin typeface="Calibri"/>
-              </a:rPr>
-              <a:t>•  Both generators sit clearly above both references, with non-overlapping intervals.</a:t>
+              <a:t>Verdict: the main result survives both checks.</a:t>
             </a:r>
           </a:p>
         </p:txBody>
@@ -8008,7 +9507,7 @@
 </p:sld>
 </file>
 
-<file path=ppt/slides/slide14.xml><?xml version="1.0" encoding="utf-8"?>
+<file path=ppt/slides/slide16.xml><?xml version="1.0" encoding="utf-8"?>
 <p:sld xmlns:a="http://schemas.openxmlformats.org/drawingml/2006/main" xmlns:p="http://schemas.openxmlformats.org/presentationml/2006/main" xmlns:r="http://schemas.openxmlformats.org/officeDocument/2006/relationships">
   <p:cSld>
     <p:spTree>
@@ -8096,14 +9595,53 @@
                 </a:solidFill>
                 <a:latin typeface="Cambria"/>
               </a:rPr>
-              <a:t>Results 4: Distributions and Scaling</a:t>
+              <a:t>Results 6: Detection from Residuals Alone</a:t>
+            </a:r>
+          </a:p>
+        </p:txBody>
+      </p:sp>
+      <p:sp>
+        <p:nvSpPr>
+          <p:cNvPr id="4" name="TextBox 3"/>
+          <p:cNvSpPr txBox="1"/>
+          <p:nvPr/>
+        </p:nvSpPr>
+        <p:spPr>
+          <a:xfrm>
+            <a:off x="640080" y="1207008"/>
+            <a:ext cx="10911535" cy="411480"/>
+          </a:xfrm>
+          <a:prstGeom prst="rect">
+            <a:avLst/>
+          </a:prstGeom>
+          <a:noFill/>
+        </p:spPr>
+        <p:txBody>
+          <a:bodyPr wrap="square" lIns="0" rIns="0" tIns="0" bIns="0" anchor="t">
+            <a:spAutoFit/>
+          </a:bodyPr>
+          <a:lstStyle/>
+          <a:p>
+            <a:pPr algn="l">
+              <a:spcAft>
+                <a:spcPts val="600"/>
+              </a:spcAft>
+            </a:pPr>
+            <a:r>
+              <a:rPr sz="1400" b="0" i="1">
+                <a:solidFill>
+                  <a:srgbClr val="5A6672"/>
+                </a:solidFill>
+                <a:latin typeface="Calibri"/>
+              </a:rPr>
+              <a:t>Syllabus Unit 3 classifiers on the residuals, never on pixels</a:t>
             </a:r>
           </a:p>
         </p:txBody>
       </p:sp>
       <p:pic>
         <p:nvPicPr>
-          <p:cNvPr id="4" name="Picture 3" descr="atlanta_scaling.png"/>
+          <p:cNvPr id="5" name="Picture 4" descr="classifier_roc.png"/>
           <p:cNvPicPr>
             <a:picLocks noChangeAspect="1"/>
           </p:cNvPicPr>
@@ -8117,429 +9655,6 @@
         </p:blipFill>
         <p:spPr>
           <a:xfrm>
-            <a:off x="640080" y="1828800"/>
-            <a:ext cx="6949440" cy="2842953"/>
-          </a:xfrm>
-          <a:prstGeom prst="rect">
-            <a:avLst/>
-          </a:prstGeom>
-        </p:spPr>
-      </p:pic>
-      <p:sp>
-        <p:nvSpPr>
-          <p:cNvPr id="5" name="Rounded Rectangle 4"/>
-          <p:cNvSpPr/>
-          <p:nvPr/>
-        </p:nvSpPr>
-        <p:spPr>
-          <a:xfrm>
-            <a:off x="7863840" y="1828800"/>
-            <a:ext cx="3685032" cy="4114800"/>
-          </a:xfrm>
-          <a:prstGeom prst="roundRect">
-            <a:avLst>
-              <a:gd name="adj" fmla="val 6000"/>
-            </a:avLst>
-          </a:prstGeom>
-          <a:solidFill>
-            <a:srgbClr val="F4F6F8"/>
-          </a:solidFill>
-          <a:ln>
-            <a:noFill/>
-          </a:ln>
-          <a:effectLst/>
-        </p:spPr>
-        <p:style>
-          <a:lnRef idx="1">
-            <a:schemeClr val="accent1"/>
-          </a:lnRef>
-          <a:fillRef idx="3">
-            <a:schemeClr val="accent1"/>
-          </a:fillRef>
-          <a:effectRef idx="2">
-            <a:schemeClr val="accent1"/>
-          </a:effectRef>
-          <a:fontRef idx="minor">
-            <a:schemeClr val="lt1"/>
-          </a:fontRef>
-        </p:style>
-        <p:txBody>
-          <a:bodyPr rtlCol="0" anchor="ctr"/>
-          <a:lstStyle/>
-          <a:p>
-            <a:pPr algn="ctr"/>
-          </a:p>
-        </p:txBody>
-      </p:sp>
-      <p:sp>
-        <p:nvSpPr>
-          <p:cNvPr id="6" name="TextBox 5"/>
-          <p:cNvSpPr txBox="1"/>
-          <p:nvPr/>
-        </p:nvSpPr>
-        <p:spPr>
-          <a:xfrm>
-            <a:off x="8138160" y="2057400"/>
-            <a:ext cx="3108960" cy="457200"/>
-          </a:xfrm>
-          <a:prstGeom prst="rect">
-            <a:avLst/>
-          </a:prstGeom>
-          <a:noFill/>
-        </p:spPr>
-        <p:txBody>
-          <a:bodyPr wrap="square" lIns="0" rIns="0" tIns="0" bIns="0" anchor="t">
-            <a:spAutoFit/>
-          </a:bodyPr>
-          <a:lstStyle/>
-          <a:p>
-            <a:pPr algn="l">
-              <a:spcAft>
-                <a:spcPts val="600"/>
-              </a:spcAft>
-            </a:pPr>
-            <a:r>
-              <a:rPr sz="1500" b="1" i="0">
-                <a:solidFill>
-                  <a:srgbClr val="12263A"/>
-                </a:solidFill>
-                <a:latin typeface="Cambria"/>
-              </a:rPr>
-              <a:t>SD 1.5 → SDXL</a:t>
-            </a:r>
-          </a:p>
-        </p:txBody>
-      </p:sp>
-      <p:sp>
-        <p:nvSpPr>
-          <p:cNvPr id="7" name="TextBox 6"/>
-          <p:cNvSpPr txBox="1"/>
-          <p:nvPr/>
-        </p:nvSpPr>
-        <p:spPr>
-          <a:xfrm>
-            <a:off x="8138160" y="2606040"/>
-            <a:ext cx="3108960" cy="3108960"/>
-          </a:xfrm>
-          <a:prstGeom prst="rect">
-            <a:avLst/>
-          </a:prstGeom>
-          <a:noFill/>
-        </p:spPr>
-        <p:txBody>
-          <a:bodyPr wrap="square" lIns="0" rIns="0" tIns="0" bIns="0" anchor="t">
-            <a:spAutoFit/>
-          </a:bodyPr>
-          <a:lstStyle/>
-          <a:p>
-            <a:pPr algn="l">
-              <a:spcAft>
-                <a:spcPts val="300"/>
-              </a:spcAft>
-            </a:pPr>
-            <a:r>
-              <a:rPr sz="1250" b="0" i="0">
-                <a:solidFill>
-                  <a:srgbClr val="1A1A1A"/>
-                </a:solidFill>
-                <a:latin typeface="Calibri"/>
-              </a:rPr>
-              <a:t>Identical prompts, matched field of view and line density, 250 images per model.</a:t>
-            </a:r>
-          </a:p>
-          <a:p>
-            <a:pPr algn="l">
-              <a:spcAft>
-                <a:spcPts val="300"/>
-              </a:spcAft>
-            </a:pPr>
-            <a:r>
-              <a:rPr sz="1250" b="0" i="0">
-                <a:solidFill>
-                  <a:srgbClr val="1A1A1A"/>
-                </a:solidFill>
-                <a:latin typeface="Calibri"/>
-              </a:rPr>
-              <a:t/>
-            </a:r>
-          </a:p>
-          <a:p>
-            <a:pPr algn="l">
-              <a:spcAft>
-                <a:spcPts val="300"/>
-              </a:spcAft>
-            </a:pPr>
-            <a:r>
-              <a:rPr sz="1250" b="0" i="0">
-                <a:solidFill>
-                  <a:srgbClr val="1A1A1A"/>
-                </a:solidFill>
-                <a:latin typeface="Calibri"/>
-              </a:rPr>
-              <a:t>Orientation: 2.93° → 1.94°   (p = 0.0002, improves)</a:t>
-            </a:r>
-          </a:p>
-          <a:p>
-            <a:pPr algn="l">
-              <a:spcAft>
-                <a:spcPts val="300"/>
-              </a:spcAft>
-            </a:pPr>
-            <a:r>
-              <a:rPr sz="1250" b="0" i="0">
-                <a:solidFill>
-                  <a:srgbClr val="1A1A1A"/>
-                </a:solidFill>
-                <a:latin typeface="Calibri"/>
-              </a:rPr>
-              <a:t/>
-            </a:r>
-          </a:p>
-          <a:p>
-            <a:pPr algn="l">
-              <a:spcAft>
-                <a:spcPts val="300"/>
-              </a:spcAft>
-            </a:pPr>
-            <a:r>
-              <a:rPr sz="1250" b="0" i="0">
-                <a:solidFill>
-                  <a:srgbClr val="1A1A1A"/>
-                </a:solidFill>
-                <a:latin typeface="Calibri"/>
-              </a:rPr>
-              <a:t>Focal coherence: 0.465 → 0.355   (p = 0.55, UNCHANGED)</a:t>
-            </a:r>
-          </a:p>
-          <a:p>
-            <a:pPr algn="l">
-              <a:spcAft>
-                <a:spcPts val="300"/>
-              </a:spcAft>
-            </a:pPr>
-            <a:r>
-              <a:rPr sz="1250" b="0" i="0">
-                <a:solidFill>
-                  <a:srgbClr val="1A1A1A"/>
-                </a:solidFill>
-                <a:latin typeface="Calibri"/>
-              </a:rPr>
-              <a:t/>
-            </a:r>
-          </a:p>
-          <a:p>
-            <a:pPr algn="l">
-              <a:spcAft>
-                <a:spcPts val="300"/>
-              </a:spcAft>
-            </a:pPr>
-            <a:r>
-              <a:rPr sz="1250" b="0" i="0">
-                <a:solidFill>
-                  <a:srgbClr val="1A1A1A"/>
-                </a:solidFill>
-                <a:latin typeface="Calibri"/>
-              </a:rPr>
-              <a:t>Scaling improves which way the axes point. It does not teach the model to commit to one camera.</a:t>
-            </a:r>
-          </a:p>
-        </p:txBody>
-      </p:sp>
-      <p:sp>
-        <p:nvSpPr>
-          <p:cNvPr id="8" name="TextBox 7"/>
-          <p:cNvSpPr txBox="1"/>
-          <p:nvPr/>
-        </p:nvSpPr>
-        <p:spPr>
-          <a:xfrm>
-            <a:off x="640080" y="6080760"/>
-            <a:ext cx="6949440" cy="457200"/>
-          </a:xfrm>
-          <a:prstGeom prst="rect">
-            <a:avLst/>
-          </a:prstGeom>
-          <a:noFill/>
-        </p:spPr>
-        <p:txBody>
-          <a:bodyPr wrap="square" lIns="0" rIns="0" tIns="0" bIns="0" anchor="t">
-            <a:spAutoFit/>
-          </a:bodyPr>
-          <a:lstStyle/>
-          <a:p>
-            <a:pPr algn="l">
-              <a:spcAft>
-                <a:spcPts val="600"/>
-              </a:spcAft>
-            </a:pPr>
-            <a:r>
-              <a:rPr sz="1150" b="0" i="1">
-                <a:solidFill>
-                  <a:srgbClr val="5A6672"/>
-                </a:solidFill>
-                <a:latin typeface="Calibri"/>
-              </a:rPr>
-              <a:t>Left: log-f spread distributions.  Right: share of images containing a VP pair for which no camera exists.</a:t>
-            </a:r>
-          </a:p>
-        </p:txBody>
-      </p:sp>
-    </p:spTree>
-  </p:cSld>
-  <p:clrMapOvr>
-    <a:masterClrMapping/>
-  </p:clrMapOvr>
-</p:sld>
-</file>
-
-<file path=ppt/slides/slide15.xml><?xml version="1.0" encoding="utf-8"?>
-<p:sld xmlns:a="http://schemas.openxmlformats.org/drawingml/2006/main" xmlns:p="http://schemas.openxmlformats.org/presentationml/2006/main" xmlns:r="http://schemas.openxmlformats.org/officeDocument/2006/relationships">
-  <p:cSld>
-    <p:spTree>
-      <p:nvGrpSpPr>
-        <p:cNvPr id="1" name=""/>
-        <p:cNvGrpSpPr/>
-        <p:nvPr/>
-      </p:nvGrpSpPr>
-      <p:grpSpPr/>
-      <p:sp>
-        <p:nvSpPr>
-          <p:cNvPr id="2" name="Rectangle 1"/>
-          <p:cNvSpPr/>
-          <p:nvPr/>
-        </p:nvSpPr>
-        <p:spPr>
-          <a:xfrm>
-            <a:off x="0" y="0"/>
-            <a:ext cx="12191695" cy="6858000"/>
-          </a:xfrm>
-          <a:prstGeom prst="rect">
-            <a:avLst/>
-          </a:prstGeom>
-          <a:solidFill>
-            <a:srgbClr val="FFFFFF"/>
-          </a:solidFill>
-          <a:ln>
-            <a:noFill/>
-          </a:ln>
-          <a:effectLst/>
-        </p:spPr>
-        <p:style>
-          <a:lnRef idx="1">
-            <a:schemeClr val="accent1"/>
-          </a:lnRef>
-          <a:fillRef idx="3">
-            <a:schemeClr val="accent1"/>
-          </a:fillRef>
-          <a:effectRef idx="2">
-            <a:schemeClr val="accent1"/>
-          </a:effectRef>
-          <a:fontRef idx="minor">
-            <a:schemeClr val="lt1"/>
-          </a:fontRef>
-        </p:style>
-        <p:txBody>
-          <a:bodyPr rtlCol="0" anchor="ctr"/>
-          <a:lstStyle/>
-          <a:p>
-            <a:pPr algn="ctr"/>
-          </a:p>
-        </p:txBody>
-      </p:sp>
-      <p:sp>
-        <p:nvSpPr>
-          <p:cNvPr id="3" name="TextBox 2"/>
-          <p:cNvSpPr txBox="1"/>
-          <p:nvPr/>
-        </p:nvSpPr>
-        <p:spPr>
-          <a:xfrm>
-            <a:off x="640080" y="457200"/>
-            <a:ext cx="10911535" cy="822960"/>
-          </a:xfrm>
-          <a:prstGeom prst="rect">
-            <a:avLst/>
-          </a:prstGeom>
-          <a:noFill/>
-        </p:spPr>
-        <p:txBody>
-          <a:bodyPr wrap="square" lIns="0" rIns="0" tIns="0" bIns="0" anchor="t">
-            <a:spAutoFit/>
-          </a:bodyPr>
-          <a:lstStyle/>
-          <a:p>
-            <a:pPr algn="l">
-              <a:spcAft>
-                <a:spcPts val="600"/>
-              </a:spcAft>
-            </a:pPr>
-            <a:r>
-              <a:rPr sz="3200" b="1" i="0">
-                <a:solidFill>
-                  <a:srgbClr val="12263A"/>
-                </a:solidFill>
-                <a:latin typeface="Cambria"/>
-              </a:rPr>
-              <a:t>Results 5: Detection from Residuals Alone</a:t>
-            </a:r>
-          </a:p>
-        </p:txBody>
-      </p:sp>
-      <p:sp>
-        <p:nvSpPr>
-          <p:cNvPr id="4" name="TextBox 3"/>
-          <p:cNvSpPr txBox="1"/>
-          <p:nvPr/>
-        </p:nvSpPr>
-        <p:spPr>
-          <a:xfrm>
-            <a:off x="640080" y="1207008"/>
-            <a:ext cx="10911535" cy="411480"/>
-          </a:xfrm>
-          <a:prstGeom prst="rect">
-            <a:avLst/>
-          </a:prstGeom>
-          <a:noFill/>
-        </p:spPr>
-        <p:txBody>
-          <a:bodyPr wrap="square" lIns="0" rIns="0" tIns="0" bIns="0" anchor="t">
-            <a:spAutoFit/>
-          </a:bodyPr>
-          <a:lstStyle/>
-          <a:p>
-            <a:pPr algn="l">
-              <a:spcAft>
-                <a:spcPts val="600"/>
-              </a:spcAft>
-            </a:pPr>
-            <a:r>
-              <a:rPr sz="1400" b="0" i="1">
-                <a:solidFill>
-                  <a:srgbClr val="5A6672"/>
-                </a:solidFill>
-                <a:latin typeface="Calibri"/>
-              </a:rPr>
-              <a:t>Syllabus Unit 3 classifiers on the residual vector — never on pixels</a:t>
-            </a:r>
-          </a:p>
-        </p:txBody>
-      </p:sp>
-      <p:pic>
-        <p:nvPicPr>
-          <p:cNvPr id="5" name="Picture 4" descr="classifier_roc.png"/>
-          <p:cNvPicPr>
-            <a:picLocks noChangeAspect="1"/>
-          </p:cNvPicPr>
-          <p:nvPr/>
-        </p:nvPicPr>
-        <p:blipFill>
-          <a:blip r:embed="rId2"/>
-          <a:stretch>
-            <a:fillRect/>
-          </a:stretch>
-        </p:blipFill>
-        <p:spPr>
-          <a:xfrm>
             <a:off x="640080" y="1874519"/>
             <a:ext cx="5852160" cy="2660073"/>
           </a:xfrm>
@@ -8557,8 +9672,8 @@
           <p:nvPr/>
         </p:nvGraphicFramePr>
         <p:xfrm>
-          <a:off x="6858000" y="2011680"/>
-          <a:ext cx="4690872" cy="2377440"/>
+          <a:off x="6858000" y="1828800"/>
+          <a:ext cx="4690871" cy="2286000"/>
         </p:xfrm>
         <a:graphic>
           <a:graphicData uri="http://schemas.openxmlformats.org/drawingml/2006/table">
@@ -8567,10 +9682,11 @@
                 <a:tableStyleId>{5C22544A-7EE6-4342-B048-85BDC9FD1C3A}</a:tableStyleId>
               </a:tblPr>
               <a:tblGrid>
-                <a:gridCol w="3200400"/>
-                <a:gridCol w="1490472"/>
+                <a:gridCol w="2651760"/>
+                <a:gridCol w="1005840"/>
+                <a:gridCol w="1033271"/>
               </a:tblGrid>
-              <a:tr h="475488">
+              <a:tr h="457200">
                 <a:tc>
                   <a:txBody>
                     <a:bodyPr/>
@@ -8583,7 +9699,7 @@
                           </a:solidFill>
                           <a:latin typeface="Calibri"/>
                         </a:rPr>
-                        <a:t>Task</a:t>
+                        <a:t>Task (best AUC)</a:t>
                       </a:r>
                     </a:p>
                   </a:txBody>
@@ -8605,7 +9721,29 @@
                           </a:solidFill>
                           <a:latin typeface="Calibri"/>
                         </a:rPr>
-                        <a:t>Best AUC</a:t>
+                        <a:t>All</a:t>
+                      </a:r>
+                    </a:p>
+                  </a:txBody>
+                  <a:tcPr anchor="ctr">
+                    <a:solidFill>
+                      <a:srgbClr val="12263A"/>
+                    </a:solidFill>
+                  </a:tcPr>
+                </a:tc>
+                <a:tc>
+                  <a:txBody>
+                    <a:bodyPr/>
+                    <a:lstStyle/>
+                    <a:p>
+                      <a:r>
+                        <a:rPr sz="1200" b="1">
+                          <a:solidFill>
+                            <a:srgbClr val="FFFFFF"/>
+                          </a:solidFill>
+                          <a:latin typeface="Calibri"/>
+                        </a:rPr>
+                        <a:t>Admitted</a:t>
                       </a:r>
                     </a:p>
                   </a:txBody>
@@ -8616,7 +9754,7 @@
                   </a:tcPr>
                 </a:tc>
               </a:tr>
-              <a:tr h="475488">
+              <a:tr h="457200">
                 <a:tc>
                   <a:txBody>
                     <a:bodyPr/>
@@ -8629,7 +9767,7 @@
                           </a:solidFill>
                           <a:latin typeface="Calibri"/>
                         </a:rPr>
-                        <a:t>Curated real vs SDXL</a:t>
+                        <a:t>York Urban vs SDXL</a:t>
                       </a:r>
                     </a:p>
                   </a:txBody>
@@ -8651,7 +9789,7 @@
                           </a:solidFill>
                           <a:latin typeface="Calibri"/>
                         </a:rPr>
-                        <a:t>0.916</a:t>
+                        <a:t>0.875</a:t>
                       </a:r>
                     </a:p>
                   </a:txBody>
@@ -8661,8 +9799,6 @@
                     </a:solidFill>
                   </a:tcPr>
                 </a:tc>
-              </a:tr>
-              <a:tr h="475488">
                 <a:tc>
                   <a:txBody>
                     <a:bodyPr/>
@@ -8675,7 +9811,31 @@
                           </a:solidFill>
                           <a:latin typeface="Calibri"/>
                         </a:rPr>
-                        <a:t>Curated real vs SD 1.5</a:t>
+                        <a:t>0.903</a:t>
+                      </a:r>
+                    </a:p>
+                  </a:txBody>
+                  <a:tcPr anchor="ctr">
+                    <a:solidFill>
+                      <a:srgbClr val="FFFFFF"/>
+                    </a:solidFill>
+                  </a:tcPr>
+                </a:tc>
+              </a:tr>
+              <a:tr h="457200">
+                <a:tc>
+                  <a:txBody>
+                    <a:bodyPr/>
+                    <a:lstStyle/>
+                    <a:p>
+                      <a:r>
+                        <a:rPr sz="1200">
+                          <a:solidFill>
+                            <a:srgbClr val="1A1A1A"/>
+                          </a:solidFill>
+                          <a:latin typeface="Calibri"/>
+                        </a:rPr>
+                        <a:t>York Urban vs SD 1.5</a:t>
                       </a:r>
                     </a:p>
                   </a:txBody>
@@ -8697,7 +9857,7 @@
                           </a:solidFill>
                           <a:latin typeface="Calibri"/>
                         </a:rPr>
-                        <a:t>0.916</a:t>
+                        <a:t>0.919</a:t>
                       </a:r>
                     </a:p>
                   </a:txBody>
@@ -8707,8 +9867,6 @@
                     </a:solidFill>
                   </a:tcPr>
                 </a:tc>
-              </a:tr>
-              <a:tr h="475488">
                 <a:tc>
                   <a:txBody>
                     <a:bodyPr/>
@@ -8721,7 +9879,31 @@
                           </a:solidFill>
                           <a:latin typeface="Calibri"/>
                         </a:rPr>
-                        <a:t>Uncurated real vs SDXL</a:t>
+                        <a:t>0.926</a:t>
+                      </a:r>
+                    </a:p>
+                  </a:txBody>
+                  <a:tcPr anchor="ctr">
+                    <a:solidFill>
+                      <a:srgbClr val="F4F6F8"/>
+                    </a:solidFill>
+                  </a:tcPr>
+                </a:tc>
+              </a:tr>
+              <a:tr h="457200">
+                <a:tc>
+                  <a:txBody>
+                    <a:bodyPr/>
+                    <a:lstStyle/>
+                    <a:p>
+                      <a:r>
+                        <a:rPr sz="1200">
+                          <a:solidFill>
+                            <a:srgbClr val="1A1A1A"/>
+                          </a:solidFill>
+                          <a:latin typeface="Calibri"/>
+                        </a:rPr>
+                        <a:t>Commons vs SDXL</a:t>
                       </a:r>
                     </a:p>
                   </a:txBody>
@@ -8743,7 +9925,7 @@
                           </a:solidFill>
                           <a:latin typeface="Calibri"/>
                         </a:rPr>
-                        <a:t>0.824</a:t>
+                        <a:t>0.807</a:t>
                       </a:r>
                     </a:p>
                   </a:txBody>
@@ -8753,8 +9935,6 @@
                     </a:solidFill>
                   </a:tcPr>
                 </a:tc>
-              </a:tr>
-              <a:tr h="475488">
                 <a:tc>
                   <a:txBody>
                     <a:bodyPr/>
@@ -8767,7 +9947,31 @@
                           </a:solidFill>
                           <a:latin typeface="Calibri"/>
                         </a:rPr>
-                        <a:t>Field-of-view matched</a:t>
+                        <a:t>0.808</a:t>
+                      </a:r>
+                    </a:p>
+                  </a:txBody>
+                  <a:tcPr anchor="ctr">
+                    <a:solidFill>
+                      <a:srgbClr val="FFFFFF"/>
+                    </a:solidFill>
+                  </a:tcPr>
+                </a:tc>
+              </a:tr>
+              <a:tr h="457200">
+                <a:tc>
+                  <a:txBody>
+                    <a:bodyPr/>
+                    <a:lstStyle/>
+                    <a:p>
+                      <a:r>
+                        <a:rPr sz="1200">
+                          <a:solidFill>
+                            <a:srgbClr val="1A1A1A"/>
+                          </a:solidFill>
+                          <a:latin typeface="Calibri"/>
+                        </a:rPr>
+                        <a:t>Field of view matched</a:t>
                       </a:r>
                     </a:p>
                   </a:txBody>
@@ -8789,7 +9993,29 @@
                           </a:solidFill>
                           <a:latin typeface="Calibri"/>
                         </a:rPr>
-                        <a:t>0.810</a:t>
+                        <a:t>0.814</a:t>
+                      </a:r>
+                    </a:p>
+                  </a:txBody>
+                  <a:tcPr anchor="ctr">
+                    <a:solidFill>
+                      <a:srgbClr val="F4F6F8"/>
+                    </a:solidFill>
+                  </a:tcPr>
+                </a:tc>
+                <a:tc>
+                  <a:txBody>
+                    <a:bodyPr/>
+                    <a:lstStyle/>
+                    <a:p>
+                      <a:r>
+                        <a:rPr sz="1200">
+                          <a:solidFill>
+                            <a:srgbClr val="1A1A1A"/>
+                          </a:solidFill>
+                          <a:latin typeface="Calibri"/>
+                        </a:rPr>
+                        <a:t>0.863</a:t>
                       </a:r>
                     </a:p>
                   </a:txBody>
@@ -8812,8 +10038,8 @@
         </p:nvSpPr>
         <p:spPr>
           <a:xfrm>
-            <a:off x="6858000" y="4617720"/>
-            <a:ext cx="4690872" cy="1645920"/>
+            <a:off x="6858000" y="4343400"/>
+            <a:ext cx="4690872" cy="1920240"/>
           </a:xfrm>
           <a:prstGeom prst="roundRect">
             <a:avLst>
@@ -8858,8 +10084,8 @@
         </p:nvSpPr>
         <p:spPr>
           <a:xfrm>
-            <a:off x="7132320" y="4800600"/>
-            <a:ext cx="4114800" cy="1325880"/>
+            <a:off x="7132320" y="4498848"/>
+            <a:ext cx="4114800" cy="1645920"/>
           </a:xfrm>
           <a:prstGeom prst="rect">
             <a:avLst/>
@@ -8878,13 +10104,13 @@
               </a:spcAft>
             </a:pPr>
             <a:r>
-              <a:rPr sz="1250" b="0" i="0">
+              <a:rPr sz="1200" b="0" i="0">
                 <a:solidFill>
                   <a:srgbClr val="1A1A1A"/>
                 </a:solidFill>
                 <a:latin typeface="Calibri"/>
               </a:rPr>
-              <a:t>Sarkar et al. report 0.88-0.94 with LEARNED geometric features.</a:t>
+              <a:t>Sarkar et al. report 0.88 to 0.94 with LEARNED features. Readable residuals reach the same band.</a:t>
             </a:r>
           </a:p>
           <a:p>
@@ -8894,7 +10120,7 @@
               </a:spcAft>
             </a:pPr>
             <a:r>
-              <a:rPr sz="1250" b="0" i="0">
+              <a:rPr sz="1200" b="0" i="0">
                 <a:solidFill>
                   <a:srgbClr val="1A1A1A"/>
                 </a:solidFill>
@@ -8910,616 +10136,13 @@
               </a:spcAft>
             </a:pPr>
             <a:r>
-              <a:rPr sz="1250" b="0" i="0">
+              <a:rPr sz="1200" b="0" i="0">
                 <a:solidFill>
                   <a:srgbClr val="1A1A1A"/>
                 </a:solidFill>
                 <a:latin typeface="Calibri"/>
               </a:rPr>
-              <a:t>Interpretable, unit-bearing residuals reach the same band — interpretability costs little discriminative power.</a:t>
-            </a:r>
-          </a:p>
-        </p:txBody>
-      </p:sp>
-    </p:spTree>
-  </p:cSld>
-  <p:clrMapOvr>
-    <a:masterClrMapping/>
-  </p:clrMapOvr>
-</p:sld>
-</file>
-
-<file path=ppt/slides/slide16.xml><?xml version="1.0" encoding="utf-8"?>
-<p:sld xmlns:a="http://schemas.openxmlformats.org/drawingml/2006/main" xmlns:p="http://schemas.openxmlformats.org/presentationml/2006/main" xmlns:r="http://schemas.openxmlformats.org/officeDocument/2006/relationships">
-  <p:cSld>
-    <p:spTree>
-      <p:nvGrpSpPr>
-        <p:cNvPr id="1" name=""/>
-        <p:cNvGrpSpPr/>
-        <p:nvPr/>
-      </p:nvGrpSpPr>
-      <p:grpSpPr/>
-      <p:sp>
-        <p:nvSpPr>
-          <p:cNvPr id="2" name="Rectangle 1"/>
-          <p:cNvSpPr/>
-          <p:nvPr/>
-        </p:nvSpPr>
-        <p:spPr>
-          <a:xfrm>
-            <a:off x="0" y="0"/>
-            <a:ext cx="12191695" cy="6858000"/>
-          </a:xfrm>
-          <a:prstGeom prst="rect">
-            <a:avLst/>
-          </a:prstGeom>
-          <a:solidFill>
-            <a:srgbClr val="FFFFFF"/>
-          </a:solidFill>
-          <a:ln>
-            <a:noFill/>
-          </a:ln>
-          <a:effectLst/>
-        </p:spPr>
-        <p:style>
-          <a:lnRef idx="1">
-            <a:schemeClr val="accent1"/>
-          </a:lnRef>
-          <a:fillRef idx="3">
-            <a:schemeClr val="accent1"/>
-          </a:fillRef>
-          <a:effectRef idx="2">
-            <a:schemeClr val="accent1"/>
-          </a:effectRef>
-          <a:fontRef idx="minor">
-            <a:schemeClr val="lt1"/>
-          </a:fontRef>
-        </p:style>
-        <p:txBody>
-          <a:bodyPr rtlCol="0" anchor="ctr"/>
-          <a:lstStyle/>
-          <a:p>
-            <a:pPr algn="ctr"/>
-          </a:p>
-        </p:txBody>
-      </p:sp>
-      <p:sp>
-        <p:nvSpPr>
-          <p:cNvPr id="3" name="TextBox 2"/>
-          <p:cNvSpPr txBox="1"/>
-          <p:nvPr/>
-        </p:nvSpPr>
-        <p:spPr>
-          <a:xfrm>
-            <a:off x="640080" y="457200"/>
-            <a:ext cx="10911535" cy="822960"/>
-          </a:xfrm>
-          <a:prstGeom prst="rect">
-            <a:avLst/>
-          </a:prstGeom>
-          <a:noFill/>
-        </p:spPr>
-        <p:txBody>
-          <a:bodyPr wrap="square" lIns="0" rIns="0" tIns="0" bIns="0" anchor="t">
-            <a:spAutoFit/>
-          </a:bodyPr>
-          <a:lstStyle/>
-          <a:p>
-            <a:pPr algn="l">
-              <a:spcAft>
-                <a:spcPts val="600"/>
-              </a:spcAft>
-            </a:pPr>
-            <a:r>
-              <a:rPr sz="3200" b="1" i="0">
-                <a:solidFill>
-                  <a:srgbClr val="12263A"/>
-                </a:solidFill>
-                <a:latin typeface="Cambria"/>
-              </a:rPr>
-              <a:t>Results 6: Frontier Models</a:t>
-            </a:r>
-          </a:p>
-        </p:txBody>
-      </p:sp>
-      <p:sp>
-        <p:nvSpPr>
-          <p:cNvPr id="4" name="TextBox 3"/>
-          <p:cNvSpPr txBox="1"/>
-          <p:nvPr/>
-        </p:nvSpPr>
-        <p:spPr>
-          <a:xfrm>
-            <a:off x="640080" y="1207008"/>
-            <a:ext cx="10911535" cy="411480"/>
-          </a:xfrm>
-          <a:prstGeom prst="rect">
-            <a:avLst/>
-          </a:prstGeom>
-          <a:noFill/>
-        </p:spPr>
-        <p:txBody>
-          <a:bodyPr wrap="square" lIns="0" rIns="0" tIns="0" bIns="0" anchor="t">
-            <a:spAutoFit/>
-          </a:bodyPr>
-          <a:lstStyle/>
-          <a:p>
-            <a:pPr algn="l">
-              <a:spcAft>
-                <a:spcPts val="600"/>
-              </a:spcAft>
-            </a:pPr>
-            <a:r>
-              <a:rPr sz="1400" b="0" i="1">
-                <a:solidFill>
-                  <a:srgbClr val="5A6672"/>
-                </a:solidFill>
-                <a:latin typeface="Calibri"/>
-              </a:rPr>
-              <a:t>Reserved — the direct test of “has the geometric tell disappeared?”</a:t>
-            </a:r>
-          </a:p>
-        </p:txBody>
-      </p:sp>
-      <p:sp>
-        <p:nvSpPr>
-          <p:cNvPr id="5" name="Rounded Rectangle 4"/>
-          <p:cNvSpPr/>
-          <p:nvPr/>
-        </p:nvSpPr>
-        <p:spPr>
-          <a:xfrm>
-            <a:off x="640080" y="1828800"/>
-            <a:ext cx="5394960" cy="3749039"/>
-          </a:xfrm>
-          <a:prstGeom prst="roundRect">
-            <a:avLst>
-              <a:gd name="adj" fmla="val 6000"/>
-            </a:avLst>
-          </a:prstGeom>
-          <a:solidFill>
-            <a:srgbClr val="F4F6F8"/>
-          </a:solidFill>
-          <a:ln>
-            <a:noFill/>
-          </a:ln>
-          <a:effectLst/>
-        </p:spPr>
-        <p:style>
-          <a:lnRef idx="1">
-            <a:schemeClr val="accent1"/>
-          </a:lnRef>
-          <a:fillRef idx="3">
-            <a:schemeClr val="accent1"/>
-          </a:fillRef>
-          <a:effectRef idx="2">
-            <a:schemeClr val="accent1"/>
-          </a:effectRef>
-          <a:fontRef idx="minor">
-            <a:schemeClr val="lt1"/>
-          </a:fontRef>
-        </p:style>
-        <p:txBody>
-          <a:bodyPr rtlCol="0" anchor="ctr"/>
-          <a:lstStyle/>
-          <a:p>
-            <a:pPr algn="ctr"/>
-          </a:p>
-        </p:txBody>
-      </p:sp>
-      <p:sp>
-        <p:nvSpPr>
-          <p:cNvPr id="6" name="TextBox 5"/>
-          <p:cNvSpPr txBox="1"/>
-          <p:nvPr/>
-        </p:nvSpPr>
-        <p:spPr>
-          <a:xfrm>
-            <a:off x="914400" y="2057400"/>
-            <a:ext cx="4846320" cy="365760"/>
-          </a:xfrm>
-          <a:prstGeom prst="rect">
-            <a:avLst/>
-          </a:prstGeom>
-          <a:noFill/>
-        </p:spPr>
-        <p:txBody>
-          <a:bodyPr wrap="square" lIns="0" rIns="0" tIns="0" bIns="0" anchor="t">
-            <a:spAutoFit/>
-          </a:bodyPr>
-          <a:lstStyle/>
-          <a:p>
-            <a:pPr algn="l">
-              <a:spcAft>
-                <a:spcPts val="600"/>
-              </a:spcAft>
-            </a:pPr>
-            <a:r>
-              <a:rPr sz="1200" b="1" i="0">
-                <a:solidFill>
-                  <a:srgbClr val="12263A"/>
-                </a:solidFill>
-                <a:latin typeface="Calibri"/>
-              </a:rPr>
-              <a:t>WHY THIS SLOT EXISTS</a:t>
-            </a:r>
-          </a:p>
-        </p:txBody>
-      </p:sp>
-      <p:sp>
-        <p:nvSpPr>
-          <p:cNvPr id="7" name="TextBox 6"/>
-          <p:cNvSpPr txBox="1"/>
-          <p:nvPr/>
-        </p:nvSpPr>
-        <p:spPr>
-          <a:xfrm>
-            <a:off x="914400" y="2514600"/>
-            <a:ext cx="4846320" cy="2834640"/>
-          </a:xfrm>
-          <a:prstGeom prst="rect">
-            <a:avLst/>
-          </a:prstGeom>
-          <a:noFill/>
-        </p:spPr>
-        <p:txBody>
-          <a:bodyPr wrap="square" lIns="0" rIns="0" tIns="0" bIns="0" anchor="t">
-            <a:spAutoFit/>
-          </a:bodyPr>
-          <a:lstStyle/>
-          <a:p>
-            <a:pPr algn="l">
-              <a:spcAft>
-                <a:spcPts val="400"/>
-              </a:spcAft>
-            </a:pPr>
-            <a:r>
-              <a:rPr sz="1300" b="0" i="0">
-                <a:solidFill>
-                  <a:srgbClr val="1A1A1A"/>
-                </a:solidFill>
-                <a:latin typeface="Calibri"/>
-              </a:rPr>
-              <a:t>SD 1.5 and SDXL are separated by about two years of model development. Across that gap orientation improves and camera coherence does not.</a:t>
-            </a:r>
-          </a:p>
-          <a:p>
-            <a:pPr algn="l">
-              <a:spcAft>
-                <a:spcPts val="400"/>
-              </a:spcAft>
-            </a:pPr>
-            <a:r>
-              <a:rPr sz="1300" b="0" i="0">
-                <a:solidFill>
-                  <a:srgbClr val="1A1A1A"/>
-                </a:solidFill>
-                <a:latin typeface="Calibri"/>
-              </a:rPr>
-              <a:t/>
-            </a:r>
-          </a:p>
-          <a:p>
-            <a:pPr algn="l">
-              <a:spcAft>
-                <a:spcPts val="400"/>
-              </a:spcAft>
-            </a:pPr>
-            <a:r>
-              <a:rPr sz="1300" b="0" i="0">
-                <a:solidFill>
-                  <a:srgbClr val="1A1A1A"/>
-                </a:solidFill>
-                <a:latin typeface="Calibri"/>
-              </a:rPr>
-              <a:t>A current frontier model is therefore the decisive test of the 2026 claim that the geometric tell is gone.</a:t>
-            </a:r>
-          </a:p>
-          <a:p>
-            <a:pPr algn="l">
-              <a:spcAft>
-                <a:spcPts val="400"/>
-              </a:spcAft>
-            </a:pPr>
-            <a:r>
-              <a:rPr sz="1300" b="0" i="0">
-                <a:solidFill>
-                  <a:srgbClr val="1A1A1A"/>
-                </a:solidFill>
-                <a:latin typeface="Calibri"/>
-              </a:rPr>
-              <a:t/>
-            </a:r>
-          </a:p>
-          <a:p>
-            <a:pPr algn="l">
-              <a:spcAft>
-                <a:spcPts val="400"/>
-              </a:spcAft>
-            </a:pPr>
-            <a:r>
-              <a:rPr sz="1300" b="0" i="0">
-                <a:solidFill>
-                  <a:srgbClr val="1A1A1A"/>
-                </a:solidFill>
-                <a:latin typeface="Calibri"/>
-              </a:rPr>
-              <a:t>The pipeline is model-agnostic: no code changes are needed to accept these images.</a:t>
-            </a:r>
-          </a:p>
-        </p:txBody>
-      </p:sp>
-      <p:sp>
-        <p:nvSpPr>
-          <p:cNvPr id="8" name="Rounded Rectangle 7"/>
-          <p:cNvSpPr/>
-          <p:nvPr/>
-        </p:nvSpPr>
-        <p:spPr>
-          <a:xfrm>
-            <a:off x="6245352" y="1828800"/>
-            <a:ext cx="5303520" cy="3749039"/>
-          </a:xfrm>
-          <a:prstGeom prst="roundRect">
-            <a:avLst>
-              <a:gd name="adj" fmla="val 6000"/>
-            </a:avLst>
-          </a:prstGeom>
-          <a:solidFill>
-            <a:srgbClr val="12263A"/>
-          </a:solidFill>
-          <a:ln>
-            <a:noFill/>
-          </a:ln>
-          <a:effectLst/>
-        </p:spPr>
-        <p:style>
-          <a:lnRef idx="1">
-            <a:schemeClr val="accent1"/>
-          </a:lnRef>
-          <a:fillRef idx="3">
-            <a:schemeClr val="accent1"/>
-          </a:fillRef>
-          <a:effectRef idx="2">
-            <a:schemeClr val="accent1"/>
-          </a:effectRef>
-          <a:fontRef idx="minor">
-            <a:schemeClr val="lt1"/>
-          </a:fontRef>
-        </p:style>
-        <p:txBody>
-          <a:bodyPr rtlCol="0" anchor="ctr"/>
-          <a:lstStyle/>
-          <a:p>
-            <a:pPr algn="ctr"/>
-          </a:p>
-        </p:txBody>
-      </p:sp>
-      <p:sp>
-        <p:nvSpPr>
-          <p:cNvPr id="9" name="TextBox 8"/>
-          <p:cNvSpPr txBox="1"/>
-          <p:nvPr/>
-        </p:nvSpPr>
-        <p:spPr>
-          <a:xfrm>
-            <a:off x="6519672" y="2057400"/>
-            <a:ext cx="4754880" cy="365760"/>
-          </a:xfrm>
-          <a:prstGeom prst="rect">
-            <a:avLst/>
-          </a:prstGeom>
-          <a:noFill/>
-        </p:spPr>
-        <p:txBody>
-          <a:bodyPr wrap="square" lIns="0" rIns="0" tIns="0" bIns="0" anchor="t">
-            <a:spAutoFit/>
-          </a:bodyPr>
-          <a:lstStyle/>
-          <a:p>
-            <a:pPr algn="l">
-              <a:spcAft>
-                <a:spcPts val="600"/>
-              </a:spcAft>
-            </a:pPr>
-            <a:r>
-              <a:rPr sz="1200" b="1" i="0">
-                <a:solidFill>
-                  <a:srgbClr val="E8A33D"/>
-                </a:solidFill>
-                <a:latin typeface="Calibri"/>
-              </a:rPr>
-              <a:t>PROCEDURE</a:t>
-            </a:r>
-          </a:p>
-        </p:txBody>
-      </p:sp>
-      <p:sp>
-        <p:nvSpPr>
-          <p:cNvPr id="10" name="TextBox 9"/>
-          <p:cNvSpPr txBox="1"/>
-          <p:nvPr/>
-        </p:nvSpPr>
-        <p:spPr>
-          <a:xfrm>
-            <a:off x="6519672" y="2514600"/>
-            <a:ext cx="4754880" cy="2926080"/>
-          </a:xfrm>
-          <a:prstGeom prst="rect">
-            <a:avLst/>
-          </a:prstGeom>
-          <a:noFill/>
-        </p:spPr>
-        <p:txBody>
-          <a:bodyPr wrap="square" lIns="0" rIns="0" tIns="0" bIns="0">
-            <a:spAutoFit/>
-          </a:bodyPr>
-          <a:lstStyle/>
-          <a:p>
-            <a:pPr>
-              <a:spcAft>
-                <a:spcPts val="600"/>
-              </a:spcAft>
-            </a:pPr>
-            <a:r>
-              <a:rPr sz="1200" b="0">
-                <a:solidFill>
-                  <a:srgbClr val="FFFFFF"/>
-                </a:solidFill>
-                <a:latin typeface="Calibri"/>
-              </a:rPr>
-              <a:t>•  Same 200 prompts, already exported to data/generated/prompts.txt</a:t>
-            </a:r>
-          </a:p>
-          <a:p>
-            <a:pPr>
-              <a:spcAft>
-                <a:spcPts val="600"/>
-              </a:spcAft>
-            </a:pPr>
-            <a:r>
-              <a:rPr sz="1200" b="0">
-                <a:solidFill>
-                  <a:srgbClr val="FFFFFF"/>
-                </a:solidFill>
-                <a:latin typeface="Calibri"/>
-              </a:rPr>
-              <a:t>•  Save as 0000.png, 0001.png … keeping the prompt index, into data/generated/gemini/ and data/generated/gptimage/</a:t>
-            </a:r>
-          </a:p>
-          <a:p>
-            <a:pPr>
-              <a:spcAft>
-                <a:spcPts val="600"/>
-              </a:spcAft>
-            </a:pPr>
-            <a:r>
-              <a:rPr sz="1200" b="0">
-                <a:solidFill>
-                  <a:srgbClr val="FFFFFF"/>
-                </a:solidFill>
-                <a:latin typeface="Calibri"/>
-              </a:rPr>
-              <a:t>•  Record model version and date in a README.txt per folder</a:t>
-            </a:r>
-          </a:p>
-          <a:p>
-            <a:pPr>
-              <a:spcAft>
-                <a:spcPts val="600"/>
-              </a:spcAft>
-            </a:pPr>
-            <a:r>
-              <a:rPr sz="1200" b="0">
-                <a:solidFill>
-                  <a:srgbClr val="FFFFFF"/>
-                </a:solidFill>
-                <a:latin typeface="Calibri"/>
-              </a:rPr>
-              <a:t>•  Run scripts/atlanta_compare.py with the new folders appended to --gen</a:t>
-            </a:r>
-          </a:p>
-          <a:p>
-            <a:pPr>
-              <a:spcAft>
-                <a:spcPts val="600"/>
-              </a:spcAft>
-            </a:pPr>
-            <a:r>
-              <a:rPr sz="1200" b="0">
-                <a:solidFill>
-                  <a:srgbClr val="FFFFFF"/>
-                </a:solidFill>
-                <a:latin typeface="Calibri"/>
-              </a:rPr>
-              <a:t>•  30–50 images per model is enough for the median and its interval</a:t>
-            </a:r>
-          </a:p>
-        </p:txBody>
-      </p:sp>
-      <p:sp>
-        <p:nvSpPr>
-          <p:cNvPr id="11" name="Rounded Rectangle 10"/>
-          <p:cNvSpPr/>
-          <p:nvPr/>
-        </p:nvSpPr>
-        <p:spPr>
-          <a:xfrm>
-            <a:off x="640080" y="5715000"/>
-            <a:ext cx="10908792" cy="914400"/>
-          </a:xfrm>
-          <a:prstGeom prst="roundRect">
-            <a:avLst>
-              <a:gd name="adj" fmla="val 6000"/>
-            </a:avLst>
-          </a:prstGeom>
-          <a:solidFill>
-            <a:srgbClr val="FDF3E2"/>
-          </a:solidFill>
-          <a:ln w="15875">
-            <a:solidFill>
-              <a:srgbClr val="E8A33D"/>
-            </a:solidFill>
-          </a:ln>
-          <a:effectLst/>
-        </p:spPr>
-        <p:style>
-          <a:lnRef idx="1">
-            <a:schemeClr val="accent1"/>
-          </a:lnRef>
-          <a:fillRef idx="3">
-            <a:schemeClr val="accent1"/>
-          </a:fillRef>
-          <a:effectRef idx="2">
-            <a:schemeClr val="accent1"/>
-          </a:effectRef>
-          <a:fontRef idx="minor">
-            <a:schemeClr val="lt1"/>
-          </a:fontRef>
-        </p:style>
-        <p:txBody>
-          <a:bodyPr rtlCol="0" anchor="ctr"/>
-          <a:lstStyle/>
-          <a:p>
-            <a:pPr algn="ctr"/>
-          </a:p>
-        </p:txBody>
-      </p:sp>
-      <p:sp>
-        <p:nvSpPr>
-          <p:cNvPr id="12" name="TextBox 11"/>
-          <p:cNvSpPr txBox="1"/>
-          <p:nvPr/>
-        </p:nvSpPr>
-        <p:spPr>
-          <a:xfrm>
-            <a:off x="868680" y="5916168"/>
-            <a:ext cx="10451592" cy="512064"/>
-          </a:xfrm>
-          <a:prstGeom prst="rect">
-            <a:avLst/>
-          </a:prstGeom>
-          <a:noFill/>
-        </p:spPr>
-        <p:txBody>
-          <a:bodyPr wrap="square" lIns="0" rIns="0" tIns="0" bIns="0" anchor="t">
-            <a:spAutoFit/>
-          </a:bodyPr>
-          <a:lstStyle/>
-          <a:p>
-            <a:pPr algn="l">
-              <a:spcAft>
-                <a:spcPts val="600"/>
-              </a:spcAft>
-            </a:pPr>
-            <a:r>
-              <a:rPr sz="1200" b="0" i="1">
-                <a:solidFill>
-                  <a:srgbClr val="8A5A12"/>
-                </a:solidFill>
-                <a:latin typeface="Calibri"/>
-              </a:rPr>
-              <a:t>[TO ADD] Once the images exist, paste the two new columns into the Results 3 table and replace this slide with the comparison figure produced by atlanta_compare.py.</a:t>
+              <a:t>Top feature: the orthocentre offset, i.e. where the lens centre sits. Invalid focal features were removed; AUC moved by at most 0.04.</a:t>
             </a:r>
           </a:p>
         </p:txBody>
@@ -9620,7 +10243,7 @@
                 </a:solidFill>
                 <a:latin typeface="Cambria"/>
               </a:rPr>
-              <a:t>Demonstration</a:t>
+              <a:t>Results 7: The Newest Models</a:t>
             </a:r>
           </a:p>
         </p:txBody>
@@ -9659,21 +10282,45 @@
                 </a:solidFill>
                 <a:latin typeface="Calibri"/>
               </a:rPr>
-              <a:t>Live: one image in, a diagnosed failure out</a:t>
-            </a:r>
-          </a:p>
-        </p:txBody>
-      </p:sp>
-      <p:sp>
-        <p:nvSpPr>
-          <p:cNvPr id="5" name="Rounded Rectangle 4"/>
+              <a:t>Gemini and ChatGPT on the same prompts as SD 1.5 and SDXL</a:t>
+            </a:r>
+          </a:p>
+        </p:txBody>
+      </p:sp>
+      <p:pic>
+        <p:nvPicPr>
+          <p:cNvPr id="5" name="Picture 4" descr="frontier_dots_slide.png"/>
+          <p:cNvPicPr>
+            <a:picLocks noChangeAspect="1"/>
+          </p:cNvPicPr>
+          <p:nvPr/>
+        </p:nvPicPr>
+        <p:blipFill>
+          <a:blip r:embed="rId2"/>
+          <a:stretch>
+            <a:fillRect/>
+          </a:stretch>
+        </p:blipFill>
+        <p:spPr>
+          <a:xfrm>
+            <a:off x="640080" y="1737360"/>
+            <a:ext cx="5446871" cy="3703320"/>
+          </a:xfrm>
+          <a:prstGeom prst="rect">
+            <a:avLst/>
+          </a:prstGeom>
+        </p:spPr>
+      </p:pic>
+      <p:sp>
+        <p:nvSpPr>
+          <p:cNvPr id="6" name="Rounded Rectangle 5"/>
           <p:cNvSpPr/>
           <p:nvPr/>
         </p:nvSpPr>
         <p:spPr>
           <a:xfrm>
-            <a:off x="640080" y="1828800"/>
-            <a:ext cx="5394960" cy="3931920"/>
+            <a:off x="6263640" y="1783080"/>
+            <a:ext cx="5285232" cy="3657600"/>
           </a:xfrm>
           <a:prstGeom prst="roundRect">
             <a:avLst>
@@ -9712,14 +10359,14 @@
       </p:sp>
       <p:sp>
         <p:nvSpPr>
-          <p:cNvPr id="6" name="TextBox 5"/>
+          <p:cNvPr id="7" name="TextBox 6"/>
           <p:cNvSpPr txBox="1"/>
           <p:nvPr/>
         </p:nvSpPr>
         <p:spPr>
           <a:xfrm>
-            <a:off x="914400" y="2057400"/>
-            <a:ext cx="4846320" cy="411480"/>
+            <a:off x="6537960" y="1965960"/>
+            <a:ext cx="4754880" cy="365760"/>
           </a:xfrm>
           <a:prstGeom prst="rect">
             <a:avLst/>
@@ -9744,46 +10391,7 @@
                 </a:solidFill>
                 <a:latin typeface="Calibri"/>
               </a:rPr>
-              <a:t>COMMAND</a:t>
-            </a:r>
-          </a:p>
-        </p:txBody>
-      </p:sp>
-      <p:sp>
-        <p:nvSpPr>
-          <p:cNvPr id="7" name="TextBox 6"/>
-          <p:cNvSpPr txBox="1"/>
-          <p:nvPr/>
-        </p:nvSpPr>
-        <p:spPr>
-          <a:xfrm>
-            <a:off x="914400" y="2514600"/>
-            <a:ext cx="4846320" cy="457200"/>
-          </a:xfrm>
-          <a:prstGeom prst="rect">
-            <a:avLst/>
-          </a:prstGeom>
-          <a:noFill/>
-        </p:spPr>
-        <p:txBody>
-          <a:bodyPr wrap="square" lIns="0" rIns="0" tIns="0" bIns="0" anchor="t">
-            <a:spAutoFit/>
-          </a:bodyPr>
-          <a:lstStyle/>
-          <a:p>
-            <a:pPr algn="l">
-              <a:spcAft>
-                <a:spcPts val="600"/>
-              </a:spcAft>
-            </a:pPr>
-            <a:r>
-              <a:rPr sz="1250" b="0" i="0">
-                <a:solidFill>
-                  <a:srgbClr val="1C7293"/>
-                </a:solidFill>
-                <a:latin typeface="Courier New"/>
-              </a:rPr>
-              <a:t>python scripts/analyze_image.py &lt;image&gt; --out outputs/</a:t>
+              <a:t>WHAT IT SHOWS</a:t>
             </a:r>
           </a:p>
         </p:txBody>
@@ -9796,47 +10404,8 @@
         </p:nvSpPr>
         <p:spPr>
           <a:xfrm>
-            <a:off x="914400" y="3108960"/>
-            <a:ext cx="4846320" cy="411480"/>
-          </a:xfrm>
-          <a:prstGeom prst="rect">
-            <a:avLst/>
-          </a:prstGeom>
-          <a:noFill/>
-        </p:spPr>
-        <p:txBody>
-          <a:bodyPr wrap="square" lIns="0" rIns="0" tIns="0" bIns="0" anchor="t">
-            <a:spAutoFit/>
-          </a:bodyPr>
-          <a:lstStyle/>
-          <a:p>
-            <a:pPr algn="l">
-              <a:spcAft>
-                <a:spcPts val="600"/>
-              </a:spcAft>
-            </a:pPr>
-            <a:r>
-              <a:rPr sz="1200" b="1" i="0">
-                <a:solidFill>
-                  <a:srgbClr val="12263A"/>
-                </a:solidFill>
-                <a:latin typeface="Calibri"/>
-              </a:rPr>
-              <a:t>OUTPUT</a:t>
-            </a:r>
-          </a:p>
-        </p:txBody>
-      </p:sp>
-      <p:sp>
-        <p:nvSpPr>
-          <p:cNvPr id="9" name="TextBox 8"/>
-          <p:cNvSpPr txBox="1"/>
-          <p:nvPr/>
-        </p:nvSpPr>
-        <p:spPr>
-          <a:xfrm>
-            <a:off x="914400" y="3520440"/>
-            <a:ext cx="4846320" cy="2011680"/>
+            <a:off x="6537960" y="2377440"/>
+            <a:ext cx="4754880" cy="3017520"/>
           </a:xfrm>
           <a:prstGeom prst="rect">
             <a:avLst/>
@@ -9851,63 +10420,79 @@
           <a:p>
             <a:pPr>
               <a:spcAft>
-                <a:spcPts val="700"/>
-              </a:spcAft>
-            </a:pPr>
-            <a:r>
-              <a:rPr sz="1250" b="0">
+                <a:spcPts val="1000"/>
+              </a:spcAft>
+            </a:pPr>
+            <a:r>
+              <a:rPr sz="1400" b="1">
                 <a:solidFill>
                   <a:srgbClr val="1A1A1A"/>
                 </a:solidFill>
                 <a:latin typeface="Calibri"/>
               </a:rPr>
-              <a:t>•  Overlay: segments coloured by VP cluster</a:t>
+              <a:t>•  Both still fail: p ≈ 0.015 against both real sets</a:t>
             </a:r>
           </a:p>
           <a:p>
             <a:pPr>
               <a:spcAft>
-                <a:spcPts val="700"/>
-              </a:spcAft>
-            </a:pPr>
-            <a:r>
-              <a:rPr sz="1250" b="0">
+                <a:spcPts val="1000"/>
+              </a:spcAft>
+            </a:pPr>
+            <a:r>
+              <a:rPr sz="1400" b="0">
                 <a:solidFill>
                   <a:srgbClr val="1A1A1A"/>
                 </a:solidFill>
                 <a:latin typeface="Calibri"/>
               </a:rPr>
-              <a:t>•  Vanishing points and the orthocentre vs image centre</a:t>
+              <a:t>•  Not yet shown to be better than SD 1.5 or SDXL (p = 0.14 to 0.26)</a:t>
             </a:r>
           </a:p>
           <a:p>
             <a:pPr>
               <a:spcAft>
-                <a:spcPts val="700"/>
-              </a:spcAft>
-            </a:pPr>
-            <a:r>
-              <a:rPr sz="1250" b="0">
+                <a:spcPts val="1000"/>
+              </a:spcAft>
+            </a:pPr>
+            <a:r>
+              <a:rPr sz="1400" b="0">
                 <a:solidFill>
                   <a:srgbClr val="1A1A1A"/>
                 </a:solidFill>
                 <a:latin typeface="Calibri"/>
               </a:rPr>
-              <a:t>•  JSON of every residual, and a CSV summary row</a:t>
-            </a:r>
-          </a:p>
-        </p:txBody>
-      </p:sp>
-      <p:sp>
-        <p:nvSpPr>
-          <p:cNvPr id="10" name="Rounded Rectangle 9"/>
+              <a:t>•  Small samples: 31 and 29 usable images</a:t>
+            </a:r>
+          </a:p>
+          <a:p>
+            <a:pPr>
+              <a:spcAft>
+                <a:spcPts val="1000"/>
+              </a:spcAft>
+            </a:pPr>
+            <a:r>
+              <a:rPr sz="1400" b="0">
+                <a:solidFill>
+                  <a:srgbClr val="1A1A1A"/>
+                </a:solidFill>
+                <a:latin typeface="Calibri"/>
+              </a:rPr>
+              <a:t>•  ChatGPT's impossible-pair rate (39%) looks real; its focal spread does not</a:t>
+            </a:r>
+          </a:p>
+        </p:txBody>
+      </p:sp>
+      <p:sp>
+        <p:nvSpPr>
+          <p:cNvPr id="9" name="Rounded Rectangle 8"/>
           <p:cNvSpPr/>
           <p:nvPr/>
         </p:nvSpPr>
         <p:spPr>
           <a:xfrm>
-            <a:off x="6309360" y="1828800"/>
-            <a:ext cx="5239512" cy="1828800"/>
+            <a:off x="640080" y="5577840"/>
+            <a:ext cx="10908792" cy="868680"/>
           </a:xfrm>
           <a:prstGeom prst="roundRect">
             <a:avLst>
@@ -9915,12 +10500,10 @@
             </a:avLst>
           </a:prstGeom>
           <a:solidFill>
-            <a:srgbClr val="FDF3E2"/>
+            <a:srgbClr val="12263A"/>
           </a:solidFill>
-          <a:ln w="15875">
-            <a:solidFill>
-              <a:srgbClr val="E8A33D"/>
-            </a:solidFill>
+          <a:ln>
+            <a:noFill/>
           </a:ln>
           <a:effectLst/>
         </p:spPr>
@@ -9948,14 +10531,14 @@
       </p:sp>
       <p:sp>
         <p:nvSpPr>
-          <p:cNvPr id="11" name="TextBox 10"/>
+          <p:cNvPr id="10" name="TextBox 9"/>
           <p:cNvSpPr txBox="1"/>
           <p:nvPr/>
         </p:nvSpPr>
         <p:spPr>
           <a:xfrm>
-            <a:off x="6537960" y="2029968"/>
-            <a:ext cx="4782312" cy="1426464"/>
+            <a:off x="914400" y="5733288"/>
+            <a:ext cx="10332720" cy="594360"/>
           </a:xfrm>
           <a:prstGeom prst="rect">
             <a:avLst/>
@@ -9974,76 +10557,13 @@
               </a:spcAft>
             </a:pPr>
             <a:r>
-              <a:rPr sz="1200" b="0" i="1">
-                <a:solidFill>
-                  <a:srgbClr val="8A5A12"/>
+              <a:rPr sz="1500" b="1" i="0">
+                <a:solidFill>
+                  <a:srgbClr val="FFFFFF"/>
                 </a:solidFill>
                 <a:latin typeface="Calibri"/>
               </a:rPr>
-              <a:t>[TO ADD] Screenshot of the terminal running analyze_image.py on one generated image, showing the printed residuals.</a:t>
-            </a:r>
-          </a:p>
-        </p:txBody>
-      </p:sp>
-      <p:pic>
-        <p:nvPicPr>
-          <p:cNvPr id="12" name="Picture 11" descr="example_sdxl_0010_three_cameras.png"/>
-          <p:cNvPicPr>
-            <a:picLocks noChangeAspect="1"/>
-          </p:cNvPicPr>
-          <p:nvPr/>
-        </p:nvPicPr>
-        <p:blipFill>
-          <a:blip r:embed="rId2"/>
-          <a:stretch>
-            <a:fillRect/>
-          </a:stretch>
-        </p:blipFill>
-        <p:spPr>
-          <a:xfrm>
-            <a:off x="7360920" y="3840480"/>
-            <a:ext cx="2326005" cy="1691640"/>
-          </a:xfrm>
-          <a:prstGeom prst="rect">
-            <a:avLst/>
-          </a:prstGeom>
-        </p:spPr>
-      </p:pic>
-      <p:sp>
-        <p:nvSpPr>
-          <p:cNvPr id="13" name="TextBox 12"/>
-          <p:cNvSpPr txBox="1"/>
-          <p:nvPr/>
-        </p:nvSpPr>
-        <p:spPr>
-          <a:xfrm>
-            <a:off x="6309360" y="5669280"/>
-            <a:ext cx="5239512" cy="640080"/>
-          </a:xfrm>
-          <a:prstGeom prst="rect">
-            <a:avLst/>
-          </a:prstGeom>
-          <a:noFill/>
-        </p:spPr>
-        <p:txBody>
-          <a:bodyPr wrap="square" lIns="0" rIns="0" tIns="0" bIns="0" anchor="t">
-            <a:spAutoFit/>
-          </a:bodyPr>
-          <a:lstStyle/>
-          <a:p>
-            <a:pPr algn="l">
-              <a:spcAft>
-                <a:spcPts val="600"/>
-              </a:spcAft>
-            </a:pPr>
-            <a:r>
-              <a:rPr sz="1150" b="0" i="1">
-                <a:solidFill>
-                  <a:srgbClr val="5A6672"/>
-                </a:solidFill>
-                <a:latin typeface="Calibri"/>
-              </a:rPr>
-              <a:t>A generated street scene whose three VP pairs imply focal lengths of 1626, 321 and 951 px — three different cameras in one image.</a:t>
+              <a:t>The 2026 claim that the geometric giveaway has disappeared does not hold on this measure.</a:t>
             </a:r>
           </a:p>
         </p:txBody>
@@ -10081,7 +10601,7 @@
             <a:avLst/>
           </a:prstGeom>
           <a:solidFill>
-            <a:srgbClr val="12263A"/>
+            <a:srgbClr val="FFFFFF"/>
           </a:solidFill>
           <a:ln>
             <a:noFill/>
@@ -10140,31 +10660,120 @@
             <a:r>
               <a:rPr sz="3200" b="1" i="0">
                 <a:solidFill>
-                  <a:srgbClr val="FFFFFF"/>
+                  <a:srgbClr val="12263A"/>
                 </a:solidFill>
                 <a:latin typeface="Cambria"/>
               </a:rPr>
-              <a:t>Conclusion</a:t>
-            </a:r>
-          </a:p>
-        </p:txBody>
-      </p:sp>
-      <p:sp>
-        <p:nvSpPr>
-          <p:cNvPr id="4" name="Oval 3"/>
+              <a:t>Demonstration: One Camera or Not?</a:t>
+            </a:r>
+          </a:p>
+        </p:txBody>
+      </p:sp>
+      <p:sp>
+        <p:nvSpPr>
+          <p:cNvPr id="4" name="TextBox 3"/>
+          <p:cNvSpPr txBox="1"/>
+          <p:nvPr/>
+        </p:nvSpPr>
+        <p:spPr>
+          <a:xfrm>
+            <a:off x="640080" y="1207008"/>
+            <a:ext cx="10911535" cy="411480"/>
+          </a:xfrm>
+          <a:prstGeom prst="rect">
+            <a:avLst/>
+          </a:prstGeom>
+          <a:noFill/>
+        </p:spPr>
+        <p:txBody>
+          <a:bodyPr wrap="square" lIns="0" rIns="0" tIns="0" bIns="0" anchor="t">
+            <a:spAutoFit/>
+          </a:bodyPr>
+          <a:lstStyle/>
+          <a:p>
+            <a:pPr algn="l">
+              <a:spcAft>
+                <a:spcPts val="600"/>
+              </a:spcAft>
+            </a:pPr>
+            <a:r>
+              <a:rPr sz="1400" b="0" i="1">
+                <a:solidFill>
+                  <a:srgbClr val="5A6672"/>
+                </a:solidFill>
+                <a:latin typeface="Calibri"/>
+              </a:rPr>
+              <a:t>Live app: any image in, a measured and explained answer out</a:t>
+            </a:r>
+          </a:p>
+        </p:txBody>
+      </p:sp>
+      <p:pic>
+        <p:nvPicPr>
+          <p:cNvPr id="5" name="Picture 4" descr="app_summary.png"/>
+          <p:cNvPicPr>
+            <a:picLocks noChangeAspect="1"/>
+          </p:cNvPicPr>
+          <p:nvPr/>
+        </p:nvPicPr>
+        <p:blipFill>
+          <a:blip r:embed="rId2"/>
+          <a:stretch>
+            <a:fillRect/>
+          </a:stretch>
+        </p:blipFill>
+        <p:spPr>
+          <a:xfrm>
+            <a:off x="640080" y="1737360"/>
+            <a:ext cx="5760720" cy="1688487"/>
+          </a:xfrm>
+          <a:prstGeom prst="rect">
+            <a:avLst/>
+          </a:prstGeom>
+        </p:spPr>
+      </p:pic>
+      <p:pic>
+        <p:nvPicPr>
+          <p:cNvPr id="6" name="Picture 5" descr="app_result_card.png"/>
+          <p:cNvPicPr>
+            <a:picLocks noChangeAspect="1"/>
+          </p:cNvPicPr>
+          <p:nvPr/>
+        </p:nvPicPr>
+        <p:blipFill>
+          <a:blip r:embed="rId3"/>
+          <a:stretch>
+            <a:fillRect/>
+          </a:stretch>
+        </p:blipFill>
+        <p:spPr>
+          <a:xfrm>
+            <a:off x="640080" y="3611880"/>
+            <a:ext cx="5760720" cy="2458238"/>
+          </a:xfrm>
+          <a:prstGeom prst="rect">
+            <a:avLst/>
+          </a:prstGeom>
+        </p:spPr>
+      </p:pic>
+      <p:sp>
+        <p:nvSpPr>
+          <p:cNvPr id="7" name="Rounded Rectangle 6"/>
           <p:cNvSpPr/>
           <p:nvPr/>
         </p:nvSpPr>
         <p:spPr>
           <a:xfrm>
-            <a:off x="685800" y="1984248"/>
-            <a:ext cx="274320" cy="274320"/>
-          </a:xfrm>
-          <a:prstGeom prst="ellipse">
-            <a:avLst/>
+            <a:off x="6629400" y="1737360"/>
+            <a:ext cx="4919472" cy="4709160"/>
+          </a:xfrm>
+          <a:prstGeom prst="roundRect">
+            <a:avLst>
+              <a:gd name="adj" fmla="val 6000"/>
+            </a:avLst>
           </a:prstGeom>
           <a:solidFill>
-            <a:srgbClr val="E8A33D"/>
+            <a:srgbClr val="F4F6F8"/>
           </a:solidFill>
           <a:ln>
             <a:noFill/>
@@ -10195,14 +10804,14 @@
       </p:sp>
       <p:sp>
         <p:nvSpPr>
-          <p:cNvPr id="5" name="TextBox 4"/>
+          <p:cNvPr id="8" name="TextBox 7"/>
           <p:cNvSpPr txBox="1"/>
           <p:nvPr/>
         </p:nvSpPr>
         <p:spPr>
           <a:xfrm>
-            <a:off x="1188720" y="1874519"/>
-            <a:ext cx="10332720" cy="411480"/>
+            <a:off x="6903720" y="1920240"/>
+            <a:ext cx="4389120" cy="365760"/>
           </a:xfrm>
           <a:prstGeom prst="rect">
             <a:avLst/>
@@ -10221,27 +10830,27 @@
               </a:spcAft>
             </a:pPr>
             <a:r>
-              <a:rPr sz="1700" b="1" i="0">
-                <a:solidFill>
-                  <a:srgbClr val="FFFFFF"/>
-                </a:solidFill>
-                <a:latin typeface="Cambria"/>
-              </a:rPr>
-              <a:t>Generators reproduce orientation, not the camera</a:t>
-            </a:r>
-          </a:p>
-        </p:txBody>
-      </p:sp>
-      <p:sp>
-        <p:nvSpPr>
-          <p:cNvPr id="6" name="TextBox 5"/>
+              <a:rPr sz="1200" b="1" i="0">
+                <a:solidFill>
+                  <a:srgbClr val="12263A"/>
+                </a:solidFill>
+                <a:latin typeface="Calibri"/>
+              </a:rPr>
+              <a:t>RUN</a:t>
+            </a:r>
+          </a:p>
+        </p:txBody>
+      </p:sp>
+      <p:sp>
+        <p:nvSpPr>
+          <p:cNvPr id="9" name="TextBox 8"/>
           <p:cNvSpPr txBox="1"/>
           <p:nvPr/>
         </p:nvSpPr>
         <p:spPr>
           <a:xfrm>
-            <a:off x="1188720" y="2331720"/>
-            <a:ext cx="10332720" cy="594360"/>
+            <a:off x="6903720" y="2286000"/>
+            <a:ext cx="4389120" cy="548640"/>
           </a:xfrm>
           <a:prstGeom prst="rect">
             <a:avLst/>
@@ -10256,75 +10865,47 @@
           <a:p>
             <a:pPr algn="l">
               <a:spcAft>
-                <a:spcPts val="600"/>
-              </a:spcAft>
-            </a:pPr>
-            <a:r>
-              <a:rPr sz="1300" b="0" i="0">
-                <a:solidFill>
-                  <a:srgbClr val="B9CDDA"/>
-                </a:solidFill>
-                <a:latin typeface="Calibri"/>
-              </a:rPr>
-              <a:t>Manhattan orthogonality is comparable to real photographs after control; focal and principal-point coherence is 2.5-3× worse.</a:t>
-            </a:r>
-          </a:p>
-        </p:txBody>
-      </p:sp>
-      <p:sp>
-        <p:nvSpPr>
-          <p:cNvPr id="7" name="Oval 6"/>
-          <p:cNvSpPr/>
-          <p:nvPr/>
-        </p:nvSpPr>
-        <p:spPr>
-          <a:xfrm>
-            <a:off x="685800" y="3099815"/>
-            <a:ext cx="274320" cy="274320"/>
-          </a:xfrm>
-          <a:prstGeom prst="ellipse">
-            <a:avLst/>
-          </a:prstGeom>
-          <a:solidFill>
-            <a:srgbClr val="E8A33D"/>
-          </a:solidFill>
-          <a:ln>
-            <a:noFill/>
-          </a:ln>
-          <a:effectLst/>
-        </p:spPr>
-        <p:style>
-          <a:lnRef idx="1">
-            <a:schemeClr val="accent1"/>
-          </a:lnRef>
-          <a:fillRef idx="3">
-            <a:schemeClr val="accent1"/>
-          </a:fillRef>
-          <a:effectRef idx="2">
-            <a:schemeClr val="accent1"/>
-          </a:effectRef>
-          <a:fontRef idx="minor">
-            <a:schemeClr val="lt1"/>
-          </a:fontRef>
-        </p:style>
-        <p:txBody>
-          <a:bodyPr rtlCol="0" anchor="ctr"/>
-          <a:lstStyle/>
-          <a:p>
-            <a:pPr algn="ctr"/>
-          </a:p>
-        </p:txBody>
-      </p:sp>
-      <p:sp>
-        <p:nvSpPr>
-          <p:cNvPr id="8" name="TextBox 7"/>
+                <a:spcPts val="200"/>
+              </a:spcAft>
+            </a:pPr>
+            <a:r>
+              <a:rPr sz="1200" b="0" i="0">
+                <a:solidFill>
+                  <a:srgbClr val="1C7293"/>
+                </a:solidFill>
+                <a:latin typeface="Courier New"/>
+              </a:rPr>
+              <a:t>python -m streamlit run app/streamlit_app.py</a:t>
+            </a:r>
+          </a:p>
+          <a:p>
+            <a:pPr algn="l">
+              <a:spcAft>
+                <a:spcPts val="200"/>
+              </a:spcAft>
+            </a:pPr>
+            <a:r>
+              <a:rPr sz="1200" b="0" i="0">
+                <a:solidFill>
+                  <a:srgbClr val="1C7293"/>
+                </a:solidFill>
+                <a:latin typeface="Courier New"/>
+              </a:rPr>
+              <a:t>localhost:8501/?examples=all</a:t>
+            </a:r>
+          </a:p>
+        </p:txBody>
+      </p:sp>
+      <p:sp>
+        <p:nvSpPr>
+          <p:cNvPr id="10" name="TextBox 9"/>
           <p:cNvSpPr txBox="1"/>
           <p:nvPr/>
         </p:nvSpPr>
         <p:spPr>
           <a:xfrm>
-            <a:off x="1188720" y="2990087"/>
-            <a:ext cx="10332720" cy="411480"/>
+            <a:off x="6903720" y="2971800"/>
+            <a:ext cx="4389120" cy="365760"/>
           </a:xfrm>
           <a:prstGeom prst="rect">
             <a:avLst/>
@@ -10343,27 +10924,146 @@
               </a:spcAft>
             </a:pPr>
             <a:r>
-              <a:rPr sz="1700" b="1" i="0">
-                <a:solidFill>
-                  <a:srgbClr val="FFFFFF"/>
-                </a:solidFill>
-                <a:latin typeface="Cambria"/>
-              </a:rPr>
-              <a:t>The result is robust to the real reference</a:t>
-            </a:r>
-          </a:p>
-        </p:txBody>
-      </p:sp>
-      <p:sp>
-        <p:nvSpPr>
-          <p:cNvPr id="9" name="TextBox 8"/>
+              <a:rPr sz="1200" b="1" i="0">
+                <a:solidFill>
+                  <a:srgbClr val="12263A"/>
+                </a:solidFill>
+                <a:latin typeface="Calibri"/>
+              </a:rPr>
+              <a:t>DEMO ORDER (3 MINUTES)</a:t>
+            </a:r>
+          </a:p>
+        </p:txBody>
+      </p:sp>
+      <p:sp>
+        <p:nvSpPr>
+          <p:cNvPr id="11" name="TextBox 10"/>
           <p:cNvSpPr txBox="1"/>
           <p:nvPr/>
         </p:nvSpPr>
         <p:spPr>
           <a:xfrm>
-            <a:off x="1188720" y="3447287"/>
-            <a:ext cx="10332720" cy="594360"/>
+            <a:off x="6903720" y="3337560"/>
+            <a:ext cx="4389120" cy="2011680"/>
+          </a:xfrm>
+          <a:prstGeom prst="rect">
+            <a:avLst/>
+          </a:prstGeom>
+          <a:noFill/>
+        </p:spPr>
+        <p:txBody>
+          <a:bodyPr wrap="square" lIns="0" rIns="0" tIns="0" bIns="0">
+            <a:spAutoFit/>
+          </a:bodyPr>
+          <a:lstStyle/>
+          <a:p>
+            <a:pPr>
+              <a:spcAft>
+                <a:spcPts val="400"/>
+              </a:spcAft>
+            </a:pPr>
+            <a:r>
+              <a:rPr sz="1250" b="0">
+                <a:solidFill>
+                  <a:srgbClr val="1A1A1A"/>
+                </a:solidFill>
+                <a:latin typeface="Calibri"/>
+              </a:rPr>
+              <a:t>•  Real corridor: 649 and 713 px vs a true 675 px</a:t>
+            </a:r>
+          </a:p>
+          <a:p>
+            <a:pPr>
+              <a:spcAft>
+                <a:spcPts val="400"/>
+              </a:spcAft>
+            </a:pPr>
+            <a:r>
+              <a:rPr sz="1250" b="0">
+                <a:solidFill>
+                  <a:srgbClr val="1A1A1A"/>
+                </a:solidFill>
+                <a:latin typeface="Calibri"/>
+              </a:rPr>
+              <a:t>•  Gemini classroom: directions disagree by 94%</a:t>
+            </a:r>
+          </a:p>
+          <a:p>
+            <a:pPr>
+              <a:spcAft>
+                <a:spcPts val="400"/>
+              </a:spcAft>
+            </a:pPr>
+            <a:r>
+              <a:rPr sz="1250" b="0">
+                <a:solidFill>
+                  <a:srgbClr val="1A1A1A"/>
+                </a:solidFill>
+                <a:latin typeface="Calibri"/>
+              </a:rPr>
+              <a:t>•  ChatGPT lecture hall: “unclear”, the hard case</a:t>
+            </a:r>
+          </a:p>
+          <a:p>
+            <a:pPr>
+              <a:spcAft>
+                <a:spcPts val="400"/>
+              </a:spcAft>
+            </a:pPr>
+            <a:r>
+              <a:rPr sz="1250" b="0">
+                <a:solidFill>
+                  <a:srgbClr val="1A1A1A"/>
+                </a:solidFill>
+                <a:latin typeface="Calibri"/>
+              </a:rPr>
+              <a:t>•  A Gemini image that fools it: a check, not proof</a:t>
+            </a:r>
+          </a:p>
+          <a:p>
+            <a:pPr>
+              <a:spcAft>
+                <a:spcPts val="400"/>
+              </a:spcAft>
+            </a:pPr>
+            <a:r>
+              <a:rPr sz="1250" b="0">
+                <a:solidFill>
+                  <a:srgbClr val="1A1A1A"/>
+                </a:solidFill>
+                <a:latin typeface="Calibri"/>
+              </a:rPr>
+              <a:t>•  An image it cannot measure, and why</a:t>
+            </a:r>
+          </a:p>
+          <a:p>
+            <a:pPr>
+              <a:spcAft>
+                <a:spcPts val="400"/>
+              </a:spcAft>
+            </a:pPr>
+            <a:r>
+              <a:rPr sz="1250" b="0">
+                <a:solidFill>
+                  <a:srgbClr val="1A1A1A"/>
+                </a:solidFill>
+                <a:latin typeface="Calibri"/>
+              </a:rPr>
+              <a:t>•  An image from the audience</a:t>
+            </a:r>
+          </a:p>
+        </p:txBody>
+      </p:sp>
+      <p:sp>
+        <p:nvSpPr>
+          <p:cNvPr id="12" name="TextBox 11"/>
+          <p:cNvSpPr txBox="1"/>
+          <p:nvPr/>
+        </p:nvSpPr>
+        <p:spPr>
+          <a:xfrm>
+            <a:off x="6903720" y="5486400"/>
+            <a:ext cx="4389120" cy="822960"/>
           </a:xfrm>
           <a:prstGeom prst="rect">
             <a:avLst/>
@@ -10382,296 +11082,13 @@
               </a:spcAft>
             </a:pPr>
             <a:r>
-              <a:rPr sz="1300" b="0" i="0">
-                <a:solidFill>
-                  <a:srgbClr val="B9CDDA"/>
+              <a:rPr sz="1200" b="0" i="1">
+                <a:solidFill>
+                  <a:srgbClr val="5A6672"/>
                 </a:solidFill>
                 <a:latin typeface="Calibri"/>
               </a:rPr>
-              <a:t>Both a curated benchmark and uncurated internet photographs give the same conclusion, with non-overlapping confidence intervals.</a:t>
-            </a:r>
-          </a:p>
-        </p:txBody>
-      </p:sp>
-      <p:sp>
-        <p:nvSpPr>
-          <p:cNvPr id="10" name="Oval 9"/>
-          <p:cNvSpPr/>
-          <p:nvPr/>
-        </p:nvSpPr>
-        <p:spPr>
-          <a:xfrm>
-            <a:off x="685800" y="4215384"/>
-            <a:ext cx="274320" cy="274320"/>
-          </a:xfrm>
-          <a:prstGeom prst="ellipse">
-            <a:avLst/>
-          </a:prstGeom>
-          <a:solidFill>
-            <a:srgbClr val="E8A33D"/>
-          </a:solidFill>
-          <a:ln>
-            <a:noFill/>
-          </a:ln>
-          <a:effectLst/>
-        </p:spPr>
-        <p:style>
-          <a:lnRef idx="1">
-            <a:schemeClr val="accent1"/>
-          </a:lnRef>
-          <a:fillRef idx="3">
-            <a:schemeClr val="accent1"/>
-          </a:fillRef>
-          <a:effectRef idx="2">
-            <a:schemeClr val="accent1"/>
-          </a:effectRef>
-          <a:fontRef idx="minor">
-            <a:schemeClr val="lt1"/>
-          </a:fontRef>
-        </p:style>
-        <p:txBody>
-          <a:bodyPr rtlCol="0" anchor="ctr"/>
-          <a:lstStyle/>
-          <a:p>
-            <a:pPr algn="ctr"/>
-          </a:p>
-        </p:txBody>
-      </p:sp>
-      <p:sp>
-        <p:nvSpPr>
-          <p:cNvPr id="11" name="TextBox 10"/>
-          <p:cNvSpPr txBox="1"/>
-          <p:nvPr/>
-        </p:nvSpPr>
-        <p:spPr>
-          <a:xfrm>
-            <a:off x="1188720" y="4105656"/>
-            <a:ext cx="10332720" cy="411480"/>
-          </a:xfrm>
-          <a:prstGeom prst="rect">
-            <a:avLst/>
-          </a:prstGeom>
-          <a:noFill/>
-        </p:spPr>
-        <p:txBody>
-          <a:bodyPr wrap="square" lIns="0" rIns="0" tIns="0" bIns="0" anchor="t">
-            <a:spAutoFit/>
-          </a:bodyPr>
-          <a:lstStyle/>
-          <a:p>
-            <a:pPr algn="l">
-              <a:spcAft>
-                <a:spcPts val="600"/>
-              </a:spcAft>
-            </a:pPr>
-            <a:r>
-              <a:rPr sz="1700" b="1" i="0">
-                <a:solidFill>
-                  <a:srgbClr val="FFFFFF"/>
-                </a:solidFill>
-                <a:latin typeface="Cambria"/>
-              </a:rPr>
-              <a:t>Scale is not closing the gap</a:t>
-            </a:r>
-          </a:p>
-        </p:txBody>
-      </p:sp>
-      <p:sp>
-        <p:nvSpPr>
-          <p:cNvPr id="12" name="TextBox 11"/>
-          <p:cNvSpPr txBox="1"/>
-          <p:nvPr/>
-        </p:nvSpPr>
-        <p:spPr>
-          <a:xfrm>
-            <a:off x="1188720" y="4562856"/>
-            <a:ext cx="10332720" cy="594360"/>
-          </a:xfrm>
-          <a:prstGeom prst="rect">
-            <a:avLst/>
-          </a:prstGeom>
-          <a:noFill/>
-        </p:spPr>
-        <p:txBody>
-          <a:bodyPr wrap="square" lIns="0" rIns="0" tIns="0" bIns="0" anchor="t">
-            <a:spAutoFit/>
-          </a:bodyPr>
-          <a:lstStyle/>
-          <a:p>
-            <a:pPr algn="l">
-              <a:spcAft>
-                <a:spcPts val="600"/>
-              </a:spcAft>
-            </a:pPr>
-            <a:r>
-              <a:rPr sz="1300" b="0" i="0">
-                <a:solidFill>
-                  <a:srgbClr val="B9CDDA"/>
-                </a:solidFill>
-                <a:latin typeface="Calibri"/>
-              </a:rPr>
-              <a:t>SD 1.5 → SDXL improves orientation significantly and leaves camera coherence unchanged.</a:t>
-            </a:r>
-          </a:p>
-        </p:txBody>
-      </p:sp>
-      <p:sp>
-        <p:nvSpPr>
-          <p:cNvPr id="13" name="Oval 12"/>
-          <p:cNvSpPr/>
-          <p:nvPr/>
-        </p:nvSpPr>
-        <p:spPr>
-          <a:xfrm>
-            <a:off x="685800" y="5330952"/>
-            <a:ext cx="274320" cy="274320"/>
-          </a:xfrm>
-          <a:prstGeom prst="ellipse">
-            <a:avLst/>
-          </a:prstGeom>
-          <a:solidFill>
-            <a:srgbClr val="E8A33D"/>
-          </a:solidFill>
-          <a:ln>
-            <a:noFill/>
-          </a:ln>
-          <a:effectLst/>
-        </p:spPr>
-        <p:style>
-          <a:lnRef idx="1">
-            <a:schemeClr val="accent1"/>
-          </a:lnRef>
-          <a:fillRef idx="3">
-            <a:schemeClr val="accent1"/>
-          </a:fillRef>
-          <a:effectRef idx="2">
-            <a:schemeClr val="accent1"/>
-          </a:effectRef>
-          <a:fontRef idx="minor">
-            <a:schemeClr val="lt1"/>
-          </a:fontRef>
-        </p:style>
-        <p:txBody>
-          <a:bodyPr rtlCol="0" anchor="ctr"/>
-          <a:lstStyle/>
-          <a:p>
-            <a:pPr algn="ctr"/>
-          </a:p>
-        </p:txBody>
-      </p:sp>
-      <p:sp>
-        <p:nvSpPr>
-          <p:cNvPr id="14" name="TextBox 13"/>
-          <p:cNvSpPr txBox="1"/>
-          <p:nvPr/>
-        </p:nvSpPr>
-        <p:spPr>
-          <a:xfrm>
-            <a:off x="1188720" y="5221224"/>
-            <a:ext cx="10332720" cy="411480"/>
-          </a:xfrm>
-          <a:prstGeom prst="rect">
-            <a:avLst/>
-          </a:prstGeom>
-          <a:noFill/>
-        </p:spPr>
-        <p:txBody>
-          <a:bodyPr wrap="square" lIns="0" rIns="0" tIns="0" bIns="0" anchor="t">
-            <a:spAutoFit/>
-          </a:bodyPr>
-          <a:lstStyle/>
-          <a:p>
-            <a:pPr algn="l">
-              <a:spcAft>
-                <a:spcPts val="600"/>
-              </a:spcAft>
-            </a:pPr>
-            <a:r>
-              <a:rPr sz="1700" b="1" i="0">
-                <a:solidFill>
-                  <a:srgbClr val="FFFFFF"/>
-                </a:solidFill>
-                <a:latin typeface="Cambria"/>
-              </a:rPr>
-              <a:t>Applicability must be tested, not assumed</a:t>
-            </a:r>
-          </a:p>
-        </p:txBody>
-      </p:sp>
-      <p:sp>
-        <p:nvSpPr>
-          <p:cNvPr id="15" name="TextBox 14"/>
-          <p:cNvSpPr txBox="1"/>
-          <p:nvPr/>
-        </p:nvSpPr>
-        <p:spPr>
-          <a:xfrm>
-            <a:off x="1188720" y="5678424"/>
-            <a:ext cx="10332720" cy="594360"/>
-          </a:xfrm>
-          <a:prstGeom prst="rect">
-            <a:avLst/>
-          </a:prstGeom>
-          <a:noFill/>
-        </p:spPr>
-        <p:txBody>
-          <a:bodyPr wrap="square" lIns="0" rIns="0" tIns="0" bIns="0" anchor="t">
-            <a:spAutoFit/>
-          </a:bodyPr>
-          <a:lstStyle/>
-          <a:p>
-            <a:pPr algn="l">
-              <a:spcAft>
-                <a:spcPts val="600"/>
-              </a:spcAft>
-            </a:pPr>
-            <a:r>
-              <a:rPr sz="1300" b="0" i="0">
-                <a:solidFill>
-                  <a:srgbClr val="B9CDDA"/>
-                </a:solidFill>
-                <a:latin typeface="Calibri"/>
-              </a:rPr>
-              <a:t>The three-VP test is undefined for non-Manhattan scenes; ignoring this reverses the verdict.</a:t>
-            </a:r>
-          </a:p>
-        </p:txBody>
-      </p:sp>
-      <p:sp>
-        <p:nvSpPr>
-          <p:cNvPr id="16" name="TextBox 15"/>
-          <p:cNvSpPr txBox="1"/>
-          <p:nvPr/>
-        </p:nvSpPr>
-        <p:spPr>
-          <a:xfrm>
-            <a:off x="685800" y="6355080"/>
-            <a:ext cx="10908792" cy="365760"/>
-          </a:xfrm>
-          <a:prstGeom prst="rect">
-            <a:avLst/>
-          </a:prstGeom>
-          <a:noFill/>
-        </p:spPr>
-        <p:txBody>
-          <a:bodyPr wrap="square" lIns="0" rIns="0" tIns="0" bIns="0" anchor="t">
-            <a:spAutoFit/>
-          </a:bodyPr>
-          <a:lstStyle/>
-          <a:p>
-            <a:pPr algn="l">
-              <a:spcAft>
-                <a:spcPts val="600"/>
-              </a:spcAft>
-            </a:pPr>
-            <a:r>
-              <a:rPr sz="1400" b="1" i="1">
-                <a:solidFill>
-                  <a:srgbClr val="E8A33D"/>
-                </a:solidFill>
-                <a:latin typeface="Calibri"/>
-              </a:rPr>
-              <a:t>Thesis: a generated image is locally photographic but has no single camera behind it.</a:t>
+              <a:t>Score: AUC 0.80, well calibrated. Flags 78% of AI images, clears 71% of real photos. Built-in examples were held out of training.</a:t>
             </a:r>
           </a:p>
         </p:txBody>
@@ -10709,303 +11126,6 @@
             <a:avLst/>
           </a:prstGeom>
           <a:solidFill>
-            <a:srgbClr val="FFFFFF"/>
-          </a:solidFill>
-          <a:ln>
-            <a:noFill/>
-          </a:ln>
-          <a:effectLst/>
-        </p:spPr>
-        <p:style>
-          <a:lnRef idx="1">
-            <a:schemeClr val="accent1"/>
-          </a:lnRef>
-          <a:fillRef idx="3">
-            <a:schemeClr val="accent1"/>
-          </a:fillRef>
-          <a:effectRef idx="2">
-            <a:schemeClr val="accent1"/>
-          </a:effectRef>
-          <a:fontRef idx="minor">
-            <a:schemeClr val="lt1"/>
-          </a:fontRef>
-        </p:style>
-        <p:txBody>
-          <a:bodyPr rtlCol="0" anchor="ctr"/>
-          <a:lstStyle/>
-          <a:p>
-            <a:pPr algn="ctr"/>
-          </a:p>
-        </p:txBody>
-      </p:sp>
-      <p:sp>
-        <p:nvSpPr>
-          <p:cNvPr id="3" name="TextBox 2"/>
-          <p:cNvSpPr txBox="1"/>
-          <p:nvPr/>
-        </p:nvSpPr>
-        <p:spPr>
-          <a:xfrm>
-            <a:off x="640080" y="457200"/>
-            <a:ext cx="10911535" cy="822960"/>
-          </a:xfrm>
-          <a:prstGeom prst="rect">
-            <a:avLst/>
-          </a:prstGeom>
-          <a:noFill/>
-        </p:spPr>
-        <p:txBody>
-          <a:bodyPr wrap="square" lIns="0" rIns="0" tIns="0" bIns="0" anchor="t">
-            <a:spAutoFit/>
-          </a:bodyPr>
-          <a:lstStyle/>
-          <a:p>
-            <a:pPr algn="l">
-              <a:spcAft>
-                <a:spcPts val="600"/>
-              </a:spcAft>
-            </a:pPr>
-            <a:r>
-              <a:rPr sz="3200" b="1" i="0">
-                <a:solidFill>
-                  <a:srgbClr val="12263A"/>
-                </a:solidFill>
-                <a:latin typeface="Cambria"/>
-              </a:rPr>
-              <a:t>Future Scope</a:t>
-            </a:r>
-          </a:p>
-        </p:txBody>
-      </p:sp>
-      <p:sp>
-        <p:nvSpPr>
-          <p:cNvPr id="4" name="Rounded Rectangle 3"/>
-          <p:cNvSpPr/>
-          <p:nvPr/>
-        </p:nvSpPr>
-        <p:spPr>
-          <a:xfrm>
-            <a:off x="640080" y="1920240"/>
-            <a:ext cx="3520440" cy="1874519"/>
-          </a:xfrm>
-          <a:prstGeom prst="roundRect">
-            <a:avLst>
-              <a:gd name="adj" fmla="val 6000"/>
-            </a:avLst>
-          </a:prstGeom>
-          <a:solidFill>
-            <a:srgbClr val="F4F6F8"/>
-          </a:solidFill>
-          <a:ln>
-            <a:noFill/>
-          </a:ln>
-          <a:effectLst/>
-        </p:spPr>
-        <p:style>
-          <a:lnRef idx="1">
-            <a:schemeClr val="accent1"/>
-          </a:lnRef>
-          <a:fillRef idx="3">
-            <a:schemeClr val="accent1"/>
-          </a:fillRef>
-          <a:effectRef idx="2">
-            <a:schemeClr val="accent1"/>
-          </a:effectRef>
-          <a:fontRef idx="minor">
-            <a:schemeClr val="lt1"/>
-          </a:fontRef>
-        </p:style>
-        <p:txBody>
-          <a:bodyPr rtlCol="0" anchor="ctr"/>
-          <a:lstStyle/>
-          <a:p>
-            <a:pPr algn="ctr"/>
-          </a:p>
-        </p:txBody>
-      </p:sp>
-      <p:sp>
-        <p:nvSpPr>
-          <p:cNvPr id="5" name="Oval 4"/>
-          <p:cNvSpPr/>
-          <p:nvPr/>
-        </p:nvSpPr>
-        <p:spPr>
-          <a:xfrm>
-            <a:off x="914400" y="2176272"/>
-            <a:ext cx="329184" cy="329184"/>
-          </a:xfrm>
-          <a:prstGeom prst="ellipse">
-            <a:avLst/>
-          </a:prstGeom>
-          <a:solidFill>
-            <a:srgbClr val="1C7293"/>
-          </a:solidFill>
-          <a:ln>
-            <a:noFill/>
-          </a:ln>
-          <a:effectLst/>
-        </p:spPr>
-        <p:style>
-          <a:lnRef idx="1">
-            <a:schemeClr val="accent1"/>
-          </a:lnRef>
-          <a:fillRef idx="3">
-            <a:schemeClr val="accent1"/>
-          </a:fillRef>
-          <a:effectRef idx="2">
-            <a:schemeClr val="accent1"/>
-          </a:effectRef>
-          <a:fontRef idx="minor">
-            <a:schemeClr val="lt1"/>
-          </a:fontRef>
-        </p:style>
-        <p:txBody>
-          <a:bodyPr rtlCol="0" anchor="ctr"/>
-          <a:lstStyle/>
-          <a:p>
-            <a:pPr algn="ctr"/>
-          </a:p>
-        </p:txBody>
-      </p:sp>
-      <p:sp>
-        <p:nvSpPr>
-          <p:cNvPr id="6" name="TextBox 5"/>
-          <p:cNvSpPr txBox="1"/>
-          <p:nvPr/>
-        </p:nvSpPr>
-        <p:spPr>
-          <a:xfrm>
-            <a:off x="1389888" y="2194560"/>
-            <a:ext cx="2560320" cy="365760"/>
-          </a:xfrm>
-          <a:prstGeom prst="rect">
-            <a:avLst/>
-          </a:prstGeom>
-          <a:noFill/>
-        </p:spPr>
-        <p:txBody>
-          <a:bodyPr wrap="square" lIns="0" rIns="0" tIns="0" bIns="0" anchor="t">
-            <a:spAutoFit/>
-          </a:bodyPr>
-          <a:lstStyle/>
-          <a:p>
-            <a:pPr algn="l">
-              <a:spcAft>
-                <a:spcPts val="600"/>
-              </a:spcAft>
-            </a:pPr>
-            <a:r>
-              <a:rPr sz="1450" b="1" i="0">
-                <a:solidFill>
-                  <a:srgbClr val="12263A"/>
-                </a:solidFill>
-                <a:latin typeface="Cambria"/>
-              </a:rPr>
-              <a:t>Frontier models</a:t>
-            </a:r>
-          </a:p>
-        </p:txBody>
-      </p:sp>
-      <p:sp>
-        <p:nvSpPr>
-          <p:cNvPr id="7" name="TextBox 6"/>
-          <p:cNvSpPr txBox="1"/>
-          <p:nvPr/>
-        </p:nvSpPr>
-        <p:spPr>
-          <a:xfrm>
-            <a:off x="914400" y="2697480"/>
-            <a:ext cx="2971800" cy="960120"/>
-          </a:xfrm>
-          <a:prstGeom prst="rect">
-            <a:avLst/>
-          </a:prstGeom>
-          <a:noFill/>
-        </p:spPr>
-        <p:txBody>
-          <a:bodyPr wrap="square" lIns="0" rIns="0" tIns="0" bIns="0" anchor="t">
-            <a:spAutoFit/>
-          </a:bodyPr>
-          <a:lstStyle/>
-          <a:p>
-            <a:pPr algn="l">
-              <a:spcAft>
-                <a:spcPts val="600"/>
-              </a:spcAft>
-            </a:pPr>
-            <a:r>
-              <a:rPr sz="1200" b="0" i="0">
-                <a:solidFill>
-                  <a:srgbClr val="5A6672"/>
-                </a:solidFill>
-                <a:latin typeface="Calibri"/>
-              </a:rPr>
-              <a:t>Gemini, GPT-image and FLUX on the same prompt set. Slot reserved on the Results 6 slide; prompts already exported.</a:t>
-            </a:r>
-          </a:p>
-        </p:txBody>
-      </p:sp>
-      <p:sp>
-        <p:nvSpPr>
-          <p:cNvPr id="8" name="Rounded Rectangle 7"/>
-          <p:cNvSpPr/>
-          <p:nvPr/>
-        </p:nvSpPr>
-        <p:spPr>
-          <a:xfrm>
-            <a:off x="4407408" y="1920240"/>
-            <a:ext cx="3520440" cy="1874519"/>
-          </a:xfrm>
-          <a:prstGeom prst="roundRect">
-            <a:avLst>
-              <a:gd name="adj" fmla="val 6000"/>
-            </a:avLst>
-          </a:prstGeom>
-          <a:solidFill>
-            <a:srgbClr val="F4F6F8"/>
-          </a:solidFill>
-          <a:ln>
-            <a:noFill/>
-          </a:ln>
-          <a:effectLst/>
-        </p:spPr>
-        <p:style>
-          <a:lnRef idx="1">
-            <a:schemeClr val="accent1"/>
-          </a:lnRef>
-          <a:fillRef idx="3">
-            <a:schemeClr val="accent1"/>
-          </a:fillRef>
-          <a:effectRef idx="2">
-            <a:schemeClr val="accent1"/>
-          </a:effectRef>
-          <a:fontRef idx="minor">
-            <a:schemeClr val="lt1"/>
-          </a:fontRef>
-        </p:style>
-        <p:txBody>
-          <a:bodyPr rtlCol="0" anchor="ctr"/>
-          <a:lstStyle/>
-          <a:p>
-            <a:pPr algn="ctr"/>
-          </a:p>
-        </p:txBody>
-      </p:sp>
-      <p:sp>
-        <p:nvSpPr>
-          <p:cNvPr id="9" name="Oval 8"/>
-          <p:cNvSpPr/>
-          <p:nvPr/>
-        </p:nvSpPr>
-        <p:spPr>
-          <a:xfrm>
-            <a:off x="4681728" y="2176272"/>
-            <a:ext cx="329184" cy="329184"/>
-          </a:xfrm>
-          <a:prstGeom prst="ellipse">
-            <a:avLst/>
-          </a:prstGeom>
-          <a:solidFill>
             <a:srgbClr val="12263A"/>
           </a:solidFill>
           <a:ln>
@@ -11037,14 +11157,14 @@
       </p:sp>
       <p:sp>
         <p:nvSpPr>
-          <p:cNvPr id="10" name="TextBox 9"/>
+          <p:cNvPr id="3" name="TextBox 2"/>
           <p:cNvSpPr txBox="1"/>
           <p:nvPr/>
         </p:nvSpPr>
         <p:spPr>
           <a:xfrm>
-            <a:off x="5157216" y="2194560"/>
-            <a:ext cx="2560320" cy="365760"/>
+            <a:off x="640080" y="457200"/>
+            <a:ext cx="10911535" cy="822960"/>
           </a:xfrm>
           <a:prstGeom prst="rect">
             <a:avLst/>
@@ -11063,280 +11183,27 @@
               </a:spcAft>
             </a:pPr>
             <a:r>
-              <a:rPr sz="1450" b="1" i="0">
-                <a:solidFill>
-                  <a:srgbClr val="12263A"/>
+              <a:rPr sz="3200" b="1" i="0">
+                <a:solidFill>
+                  <a:srgbClr val="FFFFFF"/>
                 </a:solidFill>
                 <a:latin typeface="Cambria"/>
               </a:rPr>
-              <a:t>Shadow association</a:t>
-            </a:r>
-          </a:p>
-        </p:txBody>
-      </p:sp>
-      <p:sp>
-        <p:nvSpPr>
-          <p:cNvPr id="11" name="TextBox 10"/>
-          <p:cNvSpPr txBox="1"/>
-          <p:nvPr/>
-        </p:nvSpPr>
-        <p:spPr>
-          <a:xfrm>
-            <a:off x="4681728" y="2697480"/>
-            <a:ext cx="2971800" cy="960120"/>
-          </a:xfrm>
-          <a:prstGeom prst="rect">
-            <a:avLst/>
-          </a:prstGeom>
-          <a:noFill/>
-        </p:spPr>
-        <p:txBody>
-          <a:bodyPr wrap="square" lIns="0" rIns="0" tIns="0" bIns="0" anchor="t">
-            <a:spAutoFit/>
-          </a:bodyPr>
-          <a:lstStyle/>
-          <a:p>
-            <a:pPr algn="l">
-              <a:spcAft>
-                <a:spcPts val="600"/>
-              </a:spcAft>
-            </a:pPr>
-            <a:r>
-              <a:rPr sz="1200" b="0" i="0">
-                <a:solidFill>
-                  <a:srgbClr val="5A6672"/>
-                </a:solidFill>
-                <a:latin typeface="Calibri"/>
-              </a:rPr>
-              <a:t>SSIS or SAM 2 for object-shadow pairs; the wedge LP above it is built and validated.</a:t>
-            </a:r>
-          </a:p>
-        </p:txBody>
-      </p:sp>
-      <p:sp>
-        <p:nvSpPr>
-          <p:cNvPr id="12" name="Rounded Rectangle 11"/>
+              <a:t>Conclusion</a:t>
+            </a:r>
+          </a:p>
+        </p:txBody>
+      </p:sp>
+      <p:sp>
+        <p:nvSpPr>
+          <p:cNvPr id="4" name="Oval 3"/>
           <p:cNvSpPr/>
           <p:nvPr/>
         </p:nvSpPr>
         <p:spPr>
           <a:xfrm>
-            <a:off x="8174736" y="1920240"/>
-            <a:ext cx="3520440" cy="1874519"/>
-          </a:xfrm>
-          <a:prstGeom prst="roundRect">
-            <a:avLst>
-              <a:gd name="adj" fmla="val 6000"/>
-            </a:avLst>
-          </a:prstGeom>
-          <a:solidFill>
-            <a:srgbClr val="F4F6F8"/>
-          </a:solidFill>
-          <a:ln>
-            <a:noFill/>
-          </a:ln>
-          <a:effectLst/>
-        </p:spPr>
-        <p:style>
-          <a:lnRef idx="1">
-            <a:schemeClr val="accent1"/>
-          </a:lnRef>
-          <a:fillRef idx="3">
-            <a:schemeClr val="accent1"/>
-          </a:fillRef>
-          <a:effectRef idx="2">
-            <a:schemeClr val="accent1"/>
-          </a:effectRef>
-          <a:fontRef idx="minor">
-            <a:schemeClr val="lt1"/>
-          </a:fontRef>
-        </p:style>
-        <p:txBody>
-          <a:bodyPr rtlCol="0" anchor="ctr"/>
-          <a:lstStyle/>
-          <a:p>
-            <a:pPr algn="ctr"/>
-          </a:p>
-        </p:txBody>
-      </p:sp>
-      <p:sp>
-        <p:nvSpPr>
-          <p:cNvPr id="13" name="Oval 12"/>
-          <p:cNvSpPr/>
-          <p:nvPr/>
-        </p:nvSpPr>
-        <p:spPr>
-          <a:xfrm>
-            <a:off x="8449056" y="2176272"/>
-            <a:ext cx="329184" cy="329184"/>
-          </a:xfrm>
-          <a:prstGeom prst="ellipse">
-            <a:avLst/>
-          </a:prstGeom>
-          <a:solidFill>
-            <a:srgbClr val="1C7293"/>
-          </a:solidFill>
-          <a:ln>
-            <a:noFill/>
-          </a:ln>
-          <a:effectLst/>
-        </p:spPr>
-        <p:style>
-          <a:lnRef idx="1">
-            <a:schemeClr val="accent1"/>
-          </a:lnRef>
-          <a:fillRef idx="3">
-            <a:schemeClr val="accent1"/>
-          </a:fillRef>
-          <a:effectRef idx="2">
-            <a:schemeClr val="accent1"/>
-          </a:effectRef>
-          <a:fontRef idx="minor">
-            <a:schemeClr val="lt1"/>
-          </a:fontRef>
-        </p:style>
-        <p:txBody>
-          <a:bodyPr rtlCol="0" anchor="ctr"/>
-          <a:lstStyle/>
-          <a:p>
-            <a:pPr algn="ctr"/>
-          </a:p>
-        </p:txBody>
-      </p:sp>
-      <p:sp>
-        <p:nvSpPr>
-          <p:cNvPr id="14" name="TextBox 13"/>
-          <p:cNvSpPr txBox="1"/>
-          <p:nvPr/>
-        </p:nvSpPr>
-        <p:spPr>
-          <a:xfrm>
-            <a:off x="8924544" y="2194560"/>
-            <a:ext cx="2560320" cy="365760"/>
-          </a:xfrm>
-          <a:prstGeom prst="rect">
-            <a:avLst/>
-          </a:prstGeom>
-          <a:noFill/>
-        </p:spPr>
-        <p:txBody>
-          <a:bodyPr wrap="square" lIns="0" rIns="0" tIns="0" bIns="0" anchor="t">
-            <a:spAutoFit/>
-          </a:bodyPr>
-          <a:lstStyle/>
-          <a:p>
-            <a:pPr algn="l">
-              <a:spcAft>
-                <a:spcPts val="600"/>
-              </a:spcAft>
-            </a:pPr>
-            <a:r>
-              <a:rPr sz="1450" b="1" i="0">
-                <a:solidFill>
-                  <a:srgbClr val="12263A"/>
-                </a:solidFill>
-                <a:latin typeface="Cambria"/>
-              </a:rPr>
-              <a:t>Remaining levels</a:t>
-            </a:r>
-          </a:p>
-        </p:txBody>
-      </p:sp>
-      <p:sp>
-        <p:nvSpPr>
-          <p:cNvPr id="15" name="TextBox 14"/>
-          <p:cNvSpPr txBox="1"/>
-          <p:nvPr/>
-        </p:nvSpPr>
-        <p:spPr>
-          <a:xfrm>
-            <a:off x="8449056" y="2697480"/>
-            <a:ext cx="2971800" cy="960120"/>
-          </a:xfrm>
-          <a:prstGeom prst="rect">
-            <a:avLst/>
-          </a:prstGeom>
-          <a:noFill/>
-        </p:spPr>
-        <p:txBody>
-          <a:bodyPr wrap="square" lIns="0" rIns="0" tIns="0" bIns="0" anchor="t">
-            <a:spAutoFit/>
-          </a:bodyPr>
-          <a:lstStyle/>
-          <a:p>
-            <a:pPr algn="l">
-              <a:spcAft>
-                <a:spcPts val="600"/>
-              </a:spcAft>
-            </a:pPr>
-            <a:r>
-              <a:rPr sz="1200" b="0" i="0">
-                <a:solidFill>
-                  <a:srgbClr val="5A6672"/>
-                </a:solidFill>
-                <a:latin typeface="Calibri"/>
-              </a:rPr>
-              <a:t>Cross-ratio, conics, reflections and cross-modal normal agreement.</a:t>
-            </a:r>
-          </a:p>
-        </p:txBody>
-      </p:sp>
-      <p:sp>
-        <p:nvSpPr>
-          <p:cNvPr id="16" name="Rounded Rectangle 15"/>
-          <p:cNvSpPr/>
-          <p:nvPr/>
-        </p:nvSpPr>
-        <p:spPr>
-          <a:xfrm>
-            <a:off x="640080" y="4114800"/>
-            <a:ext cx="3520440" cy="1874519"/>
-          </a:xfrm>
-          <a:prstGeom prst="roundRect">
-            <a:avLst>
-              <a:gd name="adj" fmla="val 6000"/>
-            </a:avLst>
-          </a:prstGeom>
-          <a:solidFill>
-            <a:srgbClr val="F4F6F8"/>
-          </a:solidFill>
-          <a:ln>
-            <a:noFill/>
-          </a:ln>
-          <a:effectLst/>
-        </p:spPr>
-        <p:style>
-          <a:lnRef idx="1">
-            <a:schemeClr val="accent1"/>
-          </a:lnRef>
-          <a:fillRef idx="3">
-            <a:schemeClr val="accent1"/>
-          </a:fillRef>
-          <a:effectRef idx="2">
-            <a:schemeClr val="accent1"/>
-          </a:effectRef>
-          <a:fontRef idx="minor">
-            <a:schemeClr val="lt1"/>
-          </a:fontRef>
-        </p:style>
-        <p:txBody>
-          <a:bodyPr rtlCol="0" anchor="ctr"/>
-          <a:lstStyle/>
-          <a:p>
-            <a:pPr algn="ctr"/>
-          </a:p>
-        </p:txBody>
-      </p:sp>
-      <p:sp>
-        <p:nvSpPr>
-          <p:cNvPr id="17" name="Oval 16"/>
-          <p:cNvSpPr/>
-          <p:nvPr/>
-        </p:nvSpPr>
-        <p:spPr>
-          <a:xfrm>
-            <a:off x="914400" y="4370832"/>
-            <a:ext cx="329184" cy="329184"/>
+            <a:off x="685800" y="1828800"/>
+            <a:ext cx="256032" cy="256032"/>
           </a:xfrm>
           <a:prstGeom prst="ellipse">
             <a:avLst/>
@@ -11373,14 +11240,14 @@
       </p:sp>
       <p:sp>
         <p:nvSpPr>
-          <p:cNvPr id="18" name="TextBox 17"/>
+          <p:cNvPr id="5" name="TextBox 4"/>
           <p:cNvSpPr txBox="1"/>
           <p:nvPr/>
         </p:nvSpPr>
         <p:spPr>
           <a:xfrm>
-            <a:off x="1389888" y="4389120"/>
-            <a:ext cx="2560320" cy="365760"/>
+            <a:off x="1188720" y="1737360"/>
+            <a:ext cx="10332720" cy="384048"/>
           </a:xfrm>
           <a:prstGeom prst="rect">
             <a:avLst/>
@@ -11399,27 +11266,27 @@
               </a:spcAft>
             </a:pPr>
             <a:r>
-              <a:rPr sz="1450" b="1" i="0">
-                <a:solidFill>
-                  <a:srgbClr val="12263A"/>
+              <a:rPr sz="1700" b="1" i="0">
+                <a:solidFill>
+                  <a:srgbClr val="FFFFFF"/>
                 </a:solidFill>
                 <a:latin typeface="Cambria"/>
               </a:rPr>
-              <a:t>Mechanism</a:t>
-            </a:r>
-          </a:p>
-        </p:txBody>
-      </p:sp>
-      <p:sp>
-        <p:nvSpPr>
-          <p:cNvPr id="19" name="TextBox 18"/>
+              <a:t>Generators reproduce orientation, not the camera</a:t>
+            </a:r>
+          </a:p>
+        </p:txBody>
+      </p:sp>
+      <p:sp>
+        <p:nvSpPr>
+          <p:cNvPr id="6" name="TextBox 5"/>
           <p:cNvSpPr txBox="1"/>
           <p:nvPr/>
         </p:nvSpPr>
         <p:spPr>
           <a:xfrm>
-            <a:off x="914400" y="4892040"/>
-            <a:ext cx="2971800" cy="960120"/>
+            <a:off x="1188720" y="2148840"/>
+            <a:ext cx="10332720" cy="411480"/>
           </a:xfrm>
           <a:prstGeom prst="rect">
             <a:avLst/>
@@ -11438,35 +11305,33 @@
               </a:spcAft>
             </a:pPr>
             <a:r>
-              <a:rPr sz="1200" b="0" i="0">
-                <a:solidFill>
-                  <a:srgbClr val="5A6672"/>
+              <a:rPr sz="1300" b="0" i="0">
+                <a:solidFill>
+                  <a:srgbClr val="B9CDDA"/>
                 </a:solidFill>
                 <a:latin typeface="Calibri"/>
               </a:rPr>
-              <a:t>Why does scale not fix camera coherence? Aspect ratio is ruled out; resolution and latent receptive field remain.</a:t>
-            </a:r>
-          </a:p>
-        </p:txBody>
-      </p:sp>
-      <p:sp>
-        <p:nvSpPr>
-          <p:cNvPr id="20" name="Rounded Rectangle 19"/>
+              <a:t>Right angles are close to real photos after control; focal agreement is 2.5 to 3 times worse.</a:t>
+            </a:r>
+          </a:p>
+        </p:txBody>
+      </p:sp>
+      <p:sp>
+        <p:nvSpPr>
+          <p:cNvPr id="7" name="Oval 6"/>
           <p:cNvSpPr/>
           <p:nvPr/>
         </p:nvSpPr>
         <p:spPr>
           <a:xfrm>
-            <a:off x="4407408" y="4114800"/>
-            <a:ext cx="3520440" cy="1874519"/>
-          </a:xfrm>
-          <a:prstGeom prst="roundRect">
-            <a:avLst>
-              <a:gd name="adj" fmla="val 6000"/>
-            </a:avLst>
+            <a:off x="685800" y="2724912"/>
+            <a:ext cx="256032" cy="256032"/>
+          </a:xfrm>
+          <a:prstGeom prst="ellipse">
+            <a:avLst/>
           </a:prstGeom>
           <a:solidFill>
-            <a:srgbClr val="F4F6F8"/>
+            <a:srgbClr val="E8A33D"/>
           </a:solidFill>
           <a:ln>
             <a:noFill/>
@@ -11497,20 +11362,98 @@
       </p:sp>
       <p:sp>
         <p:nvSpPr>
-          <p:cNvPr id="21" name="Oval 20"/>
+          <p:cNvPr id="8" name="TextBox 7"/>
+          <p:cNvSpPr txBox="1"/>
+          <p:nvPr/>
+        </p:nvSpPr>
+        <p:spPr>
+          <a:xfrm>
+            <a:off x="1188720" y="2633472"/>
+            <a:ext cx="10332720" cy="384048"/>
+          </a:xfrm>
+          <a:prstGeom prst="rect">
+            <a:avLst/>
+          </a:prstGeom>
+          <a:noFill/>
+        </p:spPr>
+        <p:txBody>
+          <a:bodyPr wrap="square" lIns="0" rIns="0" tIns="0" bIns="0" anchor="t">
+            <a:spAutoFit/>
+          </a:bodyPr>
+          <a:lstStyle/>
+          <a:p>
+            <a:pPr algn="l">
+              <a:spcAft>
+                <a:spcPts val="600"/>
+              </a:spcAft>
+            </a:pPr>
+            <a:r>
+              <a:rPr sz="1700" b="1" i="0">
+                <a:solidFill>
+                  <a:srgbClr val="FFFFFF"/>
+                </a:solidFill>
+                <a:latin typeface="Cambria"/>
+              </a:rPr>
+              <a:t>The result does not depend on the real reference</a:t>
+            </a:r>
+          </a:p>
+        </p:txBody>
+      </p:sp>
+      <p:sp>
+        <p:nvSpPr>
+          <p:cNvPr id="9" name="TextBox 8"/>
+          <p:cNvSpPr txBox="1"/>
+          <p:nvPr/>
+        </p:nvSpPr>
+        <p:spPr>
+          <a:xfrm>
+            <a:off x="1188720" y="3044952"/>
+            <a:ext cx="10332720" cy="411480"/>
+          </a:xfrm>
+          <a:prstGeom prst="rect">
+            <a:avLst/>
+          </a:prstGeom>
+          <a:noFill/>
+        </p:spPr>
+        <p:txBody>
+          <a:bodyPr wrap="square" lIns="0" rIns="0" tIns="0" bIns="0" anchor="t">
+            <a:spAutoFit/>
+          </a:bodyPr>
+          <a:lstStyle/>
+          <a:p>
+            <a:pPr algn="l">
+              <a:spcAft>
+                <a:spcPts val="600"/>
+              </a:spcAft>
+            </a:pPr>
+            <a:r>
+              <a:rPr sz="1300" b="0" i="0">
+                <a:solidFill>
+                  <a:srgbClr val="B9CDDA"/>
+                </a:solidFill>
+                <a:latin typeface="Calibri"/>
+              </a:rPr>
+              <a:t>A hand-picked benchmark and ordinary internet photos give the same answer.</a:t>
+            </a:r>
+          </a:p>
+        </p:txBody>
+      </p:sp>
+      <p:sp>
+        <p:nvSpPr>
+          <p:cNvPr id="10" name="Oval 9"/>
           <p:cNvSpPr/>
           <p:nvPr/>
         </p:nvSpPr>
         <p:spPr>
           <a:xfrm>
-            <a:off x="4681728" y="4370832"/>
-            <a:ext cx="329184" cy="329184"/>
+            <a:off x="685800" y="3621024"/>
+            <a:ext cx="256032" cy="256032"/>
           </a:xfrm>
           <a:prstGeom prst="ellipse">
             <a:avLst/>
           </a:prstGeom>
           <a:solidFill>
-            <a:srgbClr val="12263A"/>
+            <a:srgbClr val="E8A33D"/>
           </a:solidFill>
           <a:ln>
             <a:noFill/>
@@ -11541,14 +11484,14 @@
       </p:sp>
       <p:sp>
         <p:nvSpPr>
-          <p:cNvPr id="22" name="TextBox 21"/>
+          <p:cNvPr id="11" name="TextBox 10"/>
           <p:cNvSpPr txBox="1"/>
           <p:nvPr/>
         </p:nvSpPr>
         <p:spPr>
           <a:xfrm>
-            <a:off x="5157216" y="4389120"/>
-            <a:ext cx="2560320" cy="365760"/>
+            <a:off x="1188720" y="3529584"/>
+            <a:ext cx="10332720" cy="384048"/>
           </a:xfrm>
           <a:prstGeom prst="rect">
             <a:avLst/>
@@ -11567,27 +11510,27 @@
               </a:spcAft>
             </a:pPr>
             <a:r>
-              <a:rPr sz="1450" b="1" i="0">
-                <a:solidFill>
-                  <a:srgbClr val="12263A"/>
+              <a:rPr sz="1700" b="1" i="0">
+                <a:solidFill>
+                  <a:srgbClr val="FFFFFF"/>
                 </a:solidFill>
                 <a:latin typeface="Cambria"/>
               </a:rPr>
-              <a:t>Sheaf formalism</a:t>
-            </a:r>
-          </a:p>
-        </p:txBody>
-      </p:sp>
-      <p:sp>
-        <p:nvSpPr>
-          <p:cNvPr id="23" name="TextBox 22"/>
+              <a:t>Scale is not closing the gap</a:t>
+            </a:r>
+          </a:p>
+        </p:txBody>
+      </p:sp>
+      <p:sp>
+        <p:nvSpPr>
+          <p:cNvPr id="12" name="TextBox 11"/>
           <p:cNvSpPr txBox="1"/>
           <p:nvPr/>
         </p:nvSpPr>
         <p:spPr>
           <a:xfrm>
-            <a:off x="4681728" y="4892040"/>
-            <a:ext cx="2971800" cy="960120"/>
+            <a:off x="1188720" y="3941063"/>
+            <a:ext cx="10332720" cy="411480"/>
           </a:xfrm>
           <a:prstGeom prst="rect">
             <a:avLst/>
@@ -11606,35 +11549,33 @@
               </a:spcAft>
             </a:pPr>
             <a:r>
-              <a:rPr sz="1200" b="0" i="0">
-                <a:solidFill>
-                  <a:srgbClr val="5A6672"/>
+              <a:rPr sz="1300" b="0" i="0">
+                <a:solidFill>
+                  <a:srgbClr val="B9CDDA"/>
                 </a:solidFill>
                 <a:latin typeface="Calibri"/>
               </a:rPr>
-              <a:t>Consistency radius over a cover of local cameras as a principled local-to-global measure.</a:t>
-            </a:r>
-          </a:p>
-        </p:txBody>
-      </p:sp>
-      <p:sp>
-        <p:nvSpPr>
-          <p:cNvPr id="24" name="Rounded Rectangle 23"/>
+              <a:t>SD 1.5 → SDXL improves orientation and leaves camera coherence unchanged.</a:t>
+            </a:r>
+          </a:p>
+        </p:txBody>
+      </p:sp>
+      <p:sp>
+        <p:nvSpPr>
+          <p:cNvPr id="13" name="Oval 12"/>
           <p:cNvSpPr/>
           <p:nvPr/>
         </p:nvSpPr>
         <p:spPr>
           <a:xfrm>
-            <a:off x="8174736" y="4114800"/>
-            <a:ext cx="3520440" cy="1874519"/>
-          </a:xfrm>
-          <a:prstGeom prst="roundRect">
-            <a:avLst>
-              <a:gd name="adj" fmla="val 6000"/>
-            </a:avLst>
+            <a:off x="685800" y="4517136"/>
+            <a:ext cx="256032" cy="256032"/>
+          </a:xfrm>
+          <a:prstGeom prst="ellipse">
+            <a:avLst/>
           </a:prstGeom>
           <a:solidFill>
-            <a:srgbClr val="F4F6F8"/>
+            <a:srgbClr val="E8A33D"/>
           </a:solidFill>
           <a:ln>
             <a:noFill/>
@@ -11665,20 +11606,98 @@
       </p:sp>
       <p:sp>
         <p:nvSpPr>
-          <p:cNvPr id="25" name="Oval 24"/>
+          <p:cNvPr id="14" name="TextBox 13"/>
+          <p:cNvSpPr txBox="1"/>
+          <p:nvPr/>
+        </p:nvSpPr>
+        <p:spPr>
+          <a:xfrm>
+            <a:off x="1188720" y="4425696"/>
+            <a:ext cx="10332720" cy="384048"/>
+          </a:xfrm>
+          <a:prstGeom prst="rect">
+            <a:avLst/>
+          </a:prstGeom>
+          <a:noFill/>
+        </p:spPr>
+        <p:txBody>
+          <a:bodyPr wrap="square" lIns="0" rIns="0" tIns="0" bIns="0" anchor="t">
+            <a:spAutoFit/>
+          </a:bodyPr>
+          <a:lstStyle/>
+          <a:p>
+            <a:pPr algn="l">
+              <a:spcAft>
+                <a:spcPts val="600"/>
+              </a:spcAft>
+            </a:pPr>
+            <a:r>
+              <a:rPr sz="1700" b="1" i="0">
+                <a:solidFill>
+                  <a:srgbClr val="FFFFFF"/>
+                </a:solidFill>
+                <a:latin typeface="Cambria"/>
+              </a:rPr>
+              <a:t>The newest models still fail</a:t>
+            </a:r>
+          </a:p>
+        </p:txBody>
+      </p:sp>
+      <p:sp>
+        <p:nvSpPr>
+          <p:cNvPr id="15" name="TextBox 14"/>
+          <p:cNvSpPr txBox="1"/>
+          <p:nvPr/>
+        </p:nvSpPr>
+        <p:spPr>
+          <a:xfrm>
+            <a:off x="1188720" y="4837176"/>
+            <a:ext cx="10332720" cy="411480"/>
+          </a:xfrm>
+          <a:prstGeom prst="rect">
+            <a:avLst/>
+          </a:prstGeom>
+          <a:noFill/>
+        </p:spPr>
+        <p:txBody>
+          <a:bodyPr wrap="square" lIns="0" rIns="0" tIns="0" bIns="0" anchor="t">
+            <a:spAutoFit/>
+          </a:bodyPr>
+          <a:lstStyle/>
+          <a:p>
+            <a:pPr algn="l">
+              <a:spcAft>
+                <a:spcPts val="600"/>
+              </a:spcAft>
+            </a:pPr>
+            <a:r>
+              <a:rPr sz="1300" b="0" i="0">
+                <a:solidFill>
+                  <a:srgbClr val="B9CDDA"/>
+                </a:solidFill>
+                <a:latin typeface="Calibri"/>
+              </a:rPr>
+              <a:t>Gemini and ChatGPT remain worse than both real sets; whether they improved is not yet known.</a:t>
+            </a:r>
+          </a:p>
+        </p:txBody>
+      </p:sp>
+      <p:sp>
+        <p:nvSpPr>
+          <p:cNvPr id="16" name="Oval 15"/>
           <p:cNvSpPr/>
           <p:nvPr/>
         </p:nvSpPr>
         <p:spPr>
           <a:xfrm>
-            <a:off x="8449056" y="4370832"/>
-            <a:ext cx="329184" cy="329184"/>
+            <a:off x="685800" y="5413248"/>
+            <a:ext cx="256032" cy="256032"/>
           </a:xfrm>
           <a:prstGeom prst="ellipse">
             <a:avLst/>
           </a:prstGeom>
           <a:solidFill>
-            <a:srgbClr val="1C7293"/>
+            <a:srgbClr val="E8A33D"/>
           </a:solidFill>
           <a:ln>
             <a:noFill/>
@@ -11709,14 +11728,14 @@
       </p:sp>
       <p:sp>
         <p:nvSpPr>
-          <p:cNvPr id="26" name="TextBox 25"/>
+          <p:cNvPr id="17" name="TextBox 16"/>
           <p:cNvSpPr txBox="1"/>
           <p:nvPr/>
         </p:nvSpPr>
         <p:spPr>
           <a:xfrm>
-            <a:off x="8924544" y="4389120"/>
-            <a:ext cx="2560320" cy="365760"/>
+            <a:off x="1188720" y="5321808"/>
+            <a:ext cx="10332720" cy="384048"/>
           </a:xfrm>
           <a:prstGeom prst="rect">
             <a:avLst/>
@@ -11735,27 +11754,27 @@
               </a:spcAft>
             </a:pPr>
             <a:r>
-              <a:rPr sz="1450" b="1" i="0">
-                <a:solidFill>
-                  <a:srgbClr val="12263A"/>
+              <a:rPr sz="1700" b="1" i="0">
+                <a:solidFill>
+                  <a:srgbClr val="FFFFFF"/>
                 </a:solidFill>
                 <a:latin typeface="Cambria"/>
               </a:rPr>
-              <a:t>Perception study</a:t>
-            </a:r>
-          </a:p>
-        </p:txBody>
-      </p:sp>
-      <p:sp>
-        <p:nvSpPr>
-          <p:cNvPr id="27" name="TextBox 26"/>
+              <a:t>Applicability must be tested, not assumed</a:t>
+            </a:r>
+          </a:p>
+        </p:txBody>
+      </p:sp>
+      <p:sp>
+        <p:nvSpPr>
+          <p:cNvPr id="18" name="TextBox 17"/>
           <p:cNvSpPr txBox="1"/>
           <p:nvPr/>
         </p:nvSpPr>
         <p:spPr>
           <a:xfrm>
-            <a:off x="8449056" y="4892040"/>
-            <a:ext cx="2971800" cy="960120"/>
+            <a:off x="1188720" y="5733288"/>
+            <a:ext cx="10332720" cy="411480"/>
           </a:xfrm>
           <a:prstGeom prst="rect">
             <a:avLst/>
@@ -11774,13 +11793,52 @@
               </a:spcAft>
             </a:pPr>
             <a:r>
-              <a:rPr sz="1200" b="0" i="0">
-                <a:solidFill>
-                  <a:srgbClr val="5A6672"/>
+              <a:rPr sz="1300" b="0" i="0">
+                <a:solidFill>
+                  <a:srgbClr val="B9CDDA"/>
                 </a:solidFill>
                 <a:latin typeface="Calibri"/>
               </a:rPr>
-              <a:t>Which violations are mathematically severe but visually unnoticed.</a:t>
+              <a:t>The right-angle test does not apply to angled streets; ignoring that flips the verdict.</a:t>
+            </a:r>
+          </a:p>
+        </p:txBody>
+      </p:sp>
+      <p:sp>
+        <p:nvSpPr>
+          <p:cNvPr id="19" name="TextBox 18"/>
+          <p:cNvSpPr txBox="1"/>
+          <p:nvPr/>
+        </p:nvSpPr>
+        <p:spPr>
+          <a:xfrm>
+            <a:off x="685800" y="6355080"/>
+            <a:ext cx="10908792" cy="365760"/>
+          </a:xfrm>
+          <a:prstGeom prst="rect">
+            <a:avLst/>
+          </a:prstGeom>
+          <a:noFill/>
+        </p:spPr>
+        <p:txBody>
+          <a:bodyPr wrap="square" lIns="0" rIns="0" tIns="0" bIns="0" anchor="t">
+            <a:spAutoFit/>
+          </a:bodyPr>
+          <a:lstStyle/>
+          <a:p>
+            <a:pPr algn="l">
+              <a:spcAft>
+                <a:spcPts val="600"/>
+              </a:spcAft>
+            </a:pPr>
+            <a:r>
+              <a:rPr sz="1400" b="1" i="1">
+                <a:solidFill>
+                  <a:srgbClr val="E8A33D"/>
+                </a:solidFill>
+                <a:latin typeface="Calibri"/>
+              </a:rPr>
+              <a:t>Thesis: an AI image looks photographic locally, but there is no single camera behind it.</a:t>
             </a:r>
           </a:p>
         </p:txBody>
@@ -11966,7 +12024,7 @@
                 </a:solidFill>
                 <a:latin typeface="Calibri"/>
               </a:rPr>
-              <a:t>Given a single image, decide whether its geometry is consistent with formation by ONE pinhole camera, express any inconsistency as a residual in interpretable units, calibrate that residual against real photographs, and use the resulting profile to compare generative models.</a:t>
+              <a:t>Given a single image, decide whether its geometry fits ONE pinhole camera. Report any mismatch as a residual in readable units, compare it with real photographs, and use the result to compare image generators.</a:t>
             </a:r>
           </a:p>
         </p:txBody>
@@ -12037,7 +12095,7 @@
                 </a:solidFill>
                 <a:latin typeface="Calibri"/>
               </a:rPr>
-              <a:t>•  Every comparison calibrated against real-photograph distributions</a:t>
+              <a:t>•  Every comparison measured against real photographs</a:t>
             </a:r>
           </a:p>
         </p:txBody>
@@ -12193,7 +12251,7 @@
                 </a:solidFill>
                 <a:latin typeface="Calibri"/>
               </a:rPr>
-              <a:t>Three orthogonal directions fix one focal length and one principal point.</a:t>
+              <a:t>Every part of the image implies the same focal length and lens centre.</a:t>
             </a:r>
           </a:p>
           <a:p>
@@ -12358,6 +12416,1115 @@
                 </a:solidFill>
                 <a:latin typeface="Cambria"/>
               </a:rPr>
+              <a:t>Future Scope</a:t>
+            </a:r>
+          </a:p>
+        </p:txBody>
+      </p:sp>
+      <p:sp>
+        <p:nvSpPr>
+          <p:cNvPr id="4" name="Rounded Rectangle 3"/>
+          <p:cNvSpPr/>
+          <p:nvPr/>
+        </p:nvSpPr>
+        <p:spPr>
+          <a:xfrm>
+            <a:off x="640080" y="1920240"/>
+            <a:ext cx="3520440" cy="1874519"/>
+          </a:xfrm>
+          <a:prstGeom prst="roundRect">
+            <a:avLst>
+              <a:gd name="adj" fmla="val 6000"/>
+            </a:avLst>
+          </a:prstGeom>
+          <a:solidFill>
+            <a:srgbClr val="F4F6F8"/>
+          </a:solidFill>
+          <a:ln>
+            <a:noFill/>
+          </a:ln>
+          <a:effectLst/>
+        </p:spPr>
+        <p:style>
+          <a:lnRef idx="1">
+            <a:schemeClr val="accent1"/>
+          </a:lnRef>
+          <a:fillRef idx="3">
+            <a:schemeClr val="accent1"/>
+          </a:fillRef>
+          <a:effectRef idx="2">
+            <a:schemeClr val="accent1"/>
+          </a:effectRef>
+          <a:fontRef idx="minor">
+            <a:schemeClr val="lt1"/>
+          </a:fontRef>
+        </p:style>
+        <p:txBody>
+          <a:bodyPr rtlCol="0" anchor="ctr"/>
+          <a:lstStyle/>
+          <a:p>
+            <a:pPr algn="ctr"/>
+          </a:p>
+        </p:txBody>
+      </p:sp>
+      <p:sp>
+        <p:nvSpPr>
+          <p:cNvPr id="5" name="Oval 4"/>
+          <p:cNvSpPr/>
+          <p:nvPr/>
+        </p:nvSpPr>
+        <p:spPr>
+          <a:xfrm>
+            <a:off x="914400" y="2176272"/>
+            <a:ext cx="329184" cy="329184"/>
+          </a:xfrm>
+          <a:prstGeom prst="ellipse">
+            <a:avLst/>
+          </a:prstGeom>
+          <a:solidFill>
+            <a:srgbClr val="1C7293"/>
+          </a:solidFill>
+          <a:ln>
+            <a:noFill/>
+          </a:ln>
+          <a:effectLst/>
+        </p:spPr>
+        <p:style>
+          <a:lnRef idx="1">
+            <a:schemeClr val="accent1"/>
+          </a:lnRef>
+          <a:fillRef idx="3">
+            <a:schemeClr val="accent1"/>
+          </a:fillRef>
+          <a:effectRef idx="2">
+            <a:schemeClr val="accent1"/>
+          </a:effectRef>
+          <a:fontRef idx="minor">
+            <a:schemeClr val="lt1"/>
+          </a:fontRef>
+        </p:style>
+        <p:txBody>
+          <a:bodyPr rtlCol="0" anchor="ctr"/>
+          <a:lstStyle/>
+          <a:p>
+            <a:pPr algn="ctr"/>
+          </a:p>
+        </p:txBody>
+      </p:sp>
+      <p:sp>
+        <p:nvSpPr>
+          <p:cNvPr id="6" name="TextBox 5"/>
+          <p:cNvSpPr txBox="1"/>
+          <p:nvPr/>
+        </p:nvSpPr>
+        <p:spPr>
+          <a:xfrm>
+            <a:off x="1389888" y="2194560"/>
+            <a:ext cx="2560320" cy="365760"/>
+          </a:xfrm>
+          <a:prstGeom prst="rect">
+            <a:avLst/>
+          </a:prstGeom>
+          <a:noFill/>
+        </p:spPr>
+        <p:txBody>
+          <a:bodyPr wrap="square" lIns="0" rIns="0" tIns="0" bIns="0" anchor="t">
+            <a:spAutoFit/>
+          </a:bodyPr>
+          <a:lstStyle/>
+          <a:p>
+            <a:pPr algn="l">
+              <a:spcAft>
+                <a:spcPts val="600"/>
+              </a:spcAft>
+            </a:pPr>
+            <a:r>
+              <a:rPr sz="1450" b="1" i="0">
+                <a:solidFill>
+                  <a:srgbClr val="12263A"/>
+                </a:solidFill>
+                <a:latin typeface="Cambria"/>
+              </a:rPr>
+              <a:t>Powered frontier test</a:t>
+            </a:r>
+          </a:p>
+        </p:txBody>
+      </p:sp>
+      <p:sp>
+        <p:nvSpPr>
+          <p:cNvPr id="7" name="TextBox 6"/>
+          <p:cNvSpPr txBox="1"/>
+          <p:nvPr/>
+        </p:nvSpPr>
+        <p:spPr>
+          <a:xfrm>
+            <a:off x="914400" y="2697480"/>
+            <a:ext cx="2971800" cy="960120"/>
+          </a:xfrm>
+          <a:prstGeom prst="rect">
+            <a:avLst/>
+          </a:prstGeom>
+          <a:noFill/>
+        </p:spPr>
+        <p:txBody>
+          <a:bodyPr wrap="square" lIns="0" rIns="0" tIns="0" bIns="0" anchor="t">
+            <a:spAutoFit/>
+          </a:bodyPr>
+          <a:lstStyle/>
+          <a:p>
+            <a:pPr algn="l">
+              <a:spcAft>
+                <a:spcPts val="600"/>
+              </a:spcAft>
+            </a:pPr>
+            <a:r>
+              <a:rPr sz="1200" b="0" i="0">
+                <a:solidFill>
+                  <a:srgbClr val="5A6672"/>
+                </a:solidFill>
+                <a:latin typeface="Calibri"/>
+              </a:rPr>
+              <a:t>250 line-rich prompts per model at full resolution, plus Midjourney. Prompts and instructions are ready.</a:t>
+            </a:r>
+          </a:p>
+        </p:txBody>
+      </p:sp>
+      <p:sp>
+        <p:nvSpPr>
+          <p:cNvPr id="8" name="Rounded Rectangle 7"/>
+          <p:cNvSpPr/>
+          <p:nvPr/>
+        </p:nvSpPr>
+        <p:spPr>
+          <a:xfrm>
+            <a:off x="4407408" y="1920240"/>
+            <a:ext cx="3520440" cy="1874519"/>
+          </a:xfrm>
+          <a:prstGeom prst="roundRect">
+            <a:avLst>
+              <a:gd name="adj" fmla="val 6000"/>
+            </a:avLst>
+          </a:prstGeom>
+          <a:solidFill>
+            <a:srgbClr val="F4F6F8"/>
+          </a:solidFill>
+          <a:ln>
+            <a:noFill/>
+          </a:ln>
+          <a:effectLst/>
+        </p:spPr>
+        <p:style>
+          <a:lnRef idx="1">
+            <a:schemeClr val="accent1"/>
+          </a:lnRef>
+          <a:fillRef idx="3">
+            <a:schemeClr val="accent1"/>
+          </a:fillRef>
+          <a:effectRef idx="2">
+            <a:schemeClr val="accent1"/>
+          </a:effectRef>
+          <a:fontRef idx="minor">
+            <a:schemeClr val="lt1"/>
+          </a:fontRef>
+        </p:style>
+        <p:txBody>
+          <a:bodyPr rtlCol="0" anchor="ctr"/>
+          <a:lstStyle/>
+          <a:p>
+            <a:pPr algn="ctr"/>
+          </a:p>
+        </p:txBody>
+      </p:sp>
+      <p:sp>
+        <p:nvSpPr>
+          <p:cNvPr id="9" name="Oval 8"/>
+          <p:cNvSpPr/>
+          <p:nvPr/>
+        </p:nvSpPr>
+        <p:spPr>
+          <a:xfrm>
+            <a:off x="4681728" y="2176272"/>
+            <a:ext cx="329184" cy="329184"/>
+          </a:xfrm>
+          <a:prstGeom prst="ellipse">
+            <a:avLst/>
+          </a:prstGeom>
+          <a:solidFill>
+            <a:srgbClr val="12263A"/>
+          </a:solidFill>
+          <a:ln>
+            <a:noFill/>
+          </a:ln>
+          <a:effectLst/>
+        </p:spPr>
+        <p:style>
+          <a:lnRef idx="1">
+            <a:schemeClr val="accent1"/>
+          </a:lnRef>
+          <a:fillRef idx="3">
+            <a:schemeClr val="accent1"/>
+          </a:fillRef>
+          <a:effectRef idx="2">
+            <a:schemeClr val="accent1"/>
+          </a:effectRef>
+          <a:fontRef idx="minor">
+            <a:schemeClr val="lt1"/>
+          </a:fontRef>
+        </p:style>
+        <p:txBody>
+          <a:bodyPr rtlCol="0" anchor="ctr"/>
+          <a:lstStyle/>
+          <a:p>
+            <a:pPr algn="ctr"/>
+          </a:p>
+        </p:txBody>
+      </p:sp>
+      <p:sp>
+        <p:nvSpPr>
+          <p:cNvPr id="10" name="TextBox 9"/>
+          <p:cNvSpPr txBox="1"/>
+          <p:nvPr/>
+        </p:nvSpPr>
+        <p:spPr>
+          <a:xfrm>
+            <a:off x="5157216" y="2194560"/>
+            <a:ext cx="2560320" cy="365760"/>
+          </a:xfrm>
+          <a:prstGeom prst="rect">
+            <a:avLst/>
+          </a:prstGeom>
+          <a:noFill/>
+        </p:spPr>
+        <p:txBody>
+          <a:bodyPr wrap="square" lIns="0" rIns="0" tIns="0" bIns="0" anchor="t">
+            <a:spAutoFit/>
+          </a:bodyPr>
+          <a:lstStyle/>
+          <a:p>
+            <a:pPr algn="l">
+              <a:spcAft>
+                <a:spcPts val="600"/>
+              </a:spcAft>
+            </a:pPr>
+            <a:r>
+              <a:rPr sz="1450" b="1" i="0">
+                <a:solidFill>
+                  <a:srgbClr val="12263A"/>
+                </a:solidFill>
+                <a:latin typeface="Cambria"/>
+              </a:rPr>
+              <a:t>Shadow association</a:t>
+            </a:r>
+          </a:p>
+        </p:txBody>
+      </p:sp>
+      <p:sp>
+        <p:nvSpPr>
+          <p:cNvPr id="11" name="TextBox 10"/>
+          <p:cNvSpPr txBox="1"/>
+          <p:nvPr/>
+        </p:nvSpPr>
+        <p:spPr>
+          <a:xfrm>
+            <a:off x="4681728" y="2697480"/>
+            <a:ext cx="2971800" cy="960120"/>
+          </a:xfrm>
+          <a:prstGeom prst="rect">
+            <a:avLst/>
+          </a:prstGeom>
+          <a:noFill/>
+        </p:spPr>
+        <p:txBody>
+          <a:bodyPr wrap="square" lIns="0" rIns="0" tIns="0" bIns="0" anchor="t">
+            <a:spAutoFit/>
+          </a:bodyPr>
+          <a:lstStyle/>
+          <a:p>
+            <a:pPr algn="l">
+              <a:spcAft>
+                <a:spcPts val="600"/>
+              </a:spcAft>
+            </a:pPr>
+            <a:r>
+              <a:rPr sz="1200" b="0" i="0">
+                <a:solidFill>
+                  <a:srgbClr val="5A6672"/>
+                </a:solidFill>
+                <a:latin typeface="Calibri"/>
+              </a:rPr>
+              <a:t>SSIS or SAM 2 to pair shadows with objects; the wedge LP above it is built and validated.</a:t>
+            </a:r>
+          </a:p>
+        </p:txBody>
+      </p:sp>
+      <p:sp>
+        <p:nvSpPr>
+          <p:cNvPr id="12" name="Rounded Rectangle 11"/>
+          <p:cNvSpPr/>
+          <p:nvPr/>
+        </p:nvSpPr>
+        <p:spPr>
+          <a:xfrm>
+            <a:off x="8174736" y="1920240"/>
+            <a:ext cx="3520440" cy="1874519"/>
+          </a:xfrm>
+          <a:prstGeom prst="roundRect">
+            <a:avLst>
+              <a:gd name="adj" fmla="val 6000"/>
+            </a:avLst>
+          </a:prstGeom>
+          <a:solidFill>
+            <a:srgbClr val="F4F6F8"/>
+          </a:solidFill>
+          <a:ln>
+            <a:noFill/>
+          </a:ln>
+          <a:effectLst/>
+        </p:spPr>
+        <p:style>
+          <a:lnRef idx="1">
+            <a:schemeClr val="accent1"/>
+          </a:lnRef>
+          <a:fillRef idx="3">
+            <a:schemeClr val="accent1"/>
+          </a:fillRef>
+          <a:effectRef idx="2">
+            <a:schemeClr val="accent1"/>
+          </a:effectRef>
+          <a:fontRef idx="minor">
+            <a:schemeClr val="lt1"/>
+          </a:fontRef>
+        </p:style>
+        <p:txBody>
+          <a:bodyPr rtlCol="0" anchor="ctr"/>
+          <a:lstStyle/>
+          <a:p>
+            <a:pPr algn="ctr"/>
+          </a:p>
+        </p:txBody>
+      </p:sp>
+      <p:sp>
+        <p:nvSpPr>
+          <p:cNvPr id="13" name="Oval 12"/>
+          <p:cNvSpPr/>
+          <p:nvPr/>
+        </p:nvSpPr>
+        <p:spPr>
+          <a:xfrm>
+            <a:off x="8449056" y="2176272"/>
+            <a:ext cx="329184" cy="329184"/>
+          </a:xfrm>
+          <a:prstGeom prst="ellipse">
+            <a:avLst/>
+          </a:prstGeom>
+          <a:solidFill>
+            <a:srgbClr val="1C7293"/>
+          </a:solidFill>
+          <a:ln>
+            <a:noFill/>
+          </a:ln>
+          <a:effectLst/>
+        </p:spPr>
+        <p:style>
+          <a:lnRef idx="1">
+            <a:schemeClr val="accent1"/>
+          </a:lnRef>
+          <a:fillRef idx="3">
+            <a:schemeClr val="accent1"/>
+          </a:fillRef>
+          <a:effectRef idx="2">
+            <a:schemeClr val="accent1"/>
+          </a:effectRef>
+          <a:fontRef idx="minor">
+            <a:schemeClr val="lt1"/>
+          </a:fontRef>
+        </p:style>
+        <p:txBody>
+          <a:bodyPr rtlCol="0" anchor="ctr"/>
+          <a:lstStyle/>
+          <a:p>
+            <a:pPr algn="ctr"/>
+          </a:p>
+        </p:txBody>
+      </p:sp>
+      <p:sp>
+        <p:nvSpPr>
+          <p:cNvPr id="14" name="TextBox 13"/>
+          <p:cNvSpPr txBox="1"/>
+          <p:nvPr/>
+        </p:nvSpPr>
+        <p:spPr>
+          <a:xfrm>
+            <a:off x="8924544" y="2194560"/>
+            <a:ext cx="2560320" cy="365760"/>
+          </a:xfrm>
+          <a:prstGeom prst="rect">
+            <a:avLst/>
+          </a:prstGeom>
+          <a:noFill/>
+        </p:spPr>
+        <p:txBody>
+          <a:bodyPr wrap="square" lIns="0" rIns="0" tIns="0" bIns="0" anchor="t">
+            <a:spAutoFit/>
+          </a:bodyPr>
+          <a:lstStyle/>
+          <a:p>
+            <a:pPr algn="l">
+              <a:spcAft>
+                <a:spcPts val="600"/>
+              </a:spcAft>
+            </a:pPr>
+            <a:r>
+              <a:rPr sz="1450" b="1" i="0">
+                <a:solidFill>
+                  <a:srgbClr val="12263A"/>
+                </a:solidFill>
+                <a:latin typeface="Cambria"/>
+              </a:rPr>
+              <a:t>Remaining levels</a:t>
+            </a:r>
+          </a:p>
+        </p:txBody>
+      </p:sp>
+      <p:sp>
+        <p:nvSpPr>
+          <p:cNvPr id="15" name="TextBox 14"/>
+          <p:cNvSpPr txBox="1"/>
+          <p:nvPr/>
+        </p:nvSpPr>
+        <p:spPr>
+          <a:xfrm>
+            <a:off x="8449056" y="2697480"/>
+            <a:ext cx="2971800" cy="960120"/>
+          </a:xfrm>
+          <a:prstGeom prst="rect">
+            <a:avLst/>
+          </a:prstGeom>
+          <a:noFill/>
+        </p:spPr>
+        <p:txBody>
+          <a:bodyPr wrap="square" lIns="0" rIns="0" tIns="0" bIns="0" anchor="t">
+            <a:spAutoFit/>
+          </a:bodyPr>
+          <a:lstStyle/>
+          <a:p>
+            <a:pPr algn="l">
+              <a:spcAft>
+                <a:spcPts val="600"/>
+              </a:spcAft>
+            </a:pPr>
+            <a:r>
+              <a:rPr sz="1200" b="0" i="0">
+                <a:solidFill>
+                  <a:srgbClr val="5A6672"/>
+                </a:solidFill>
+                <a:latin typeface="Calibri"/>
+              </a:rPr>
+              <a:t>Horizon, cross-ratio, conics, reflections and agreement with depth networks.</a:t>
+            </a:r>
+          </a:p>
+        </p:txBody>
+      </p:sp>
+      <p:sp>
+        <p:nvSpPr>
+          <p:cNvPr id="16" name="Rounded Rectangle 15"/>
+          <p:cNvSpPr/>
+          <p:nvPr/>
+        </p:nvSpPr>
+        <p:spPr>
+          <a:xfrm>
+            <a:off x="640080" y="4114800"/>
+            <a:ext cx="3520440" cy="1874519"/>
+          </a:xfrm>
+          <a:prstGeom prst="roundRect">
+            <a:avLst>
+              <a:gd name="adj" fmla="val 6000"/>
+            </a:avLst>
+          </a:prstGeom>
+          <a:solidFill>
+            <a:srgbClr val="F4F6F8"/>
+          </a:solidFill>
+          <a:ln>
+            <a:noFill/>
+          </a:ln>
+          <a:effectLst/>
+        </p:spPr>
+        <p:style>
+          <a:lnRef idx="1">
+            <a:schemeClr val="accent1"/>
+          </a:lnRef>
+          <a:fillRef idx="3">
+            <a:schemeClr val="accent1"/>
+          </a:fillRef>
+          <a:effectRef idx="2">
+            <a:schemeClr val="accent1"/>
+          </a:effectRef>
+          <a:fontRef idx="minor">
+            <a:schemeClr val="lt1"/>
+          </a:fontRef>
+        </p:style>
+        <p:txBody>
+          <a:bodyPr rtlCol="0" anchor="ctr"/>
+          <a:lstStyle/>
+          <a:p>
+            <a:pPr algn="ctr"/>
+          </a:p>
+        </p:txBody>
+      </p:sp>
+      <p:sp>
+        <p:nvSpPr>
+          <p:cNvPr id="17" name="Oval 16"/>
+          <p:cNvSpPr/>
+          <p:nvPr/>
+        </p:nvSpPr>
+        <p:spPr>
+          <a:xfrm>
+            <a:off x="914400" y="4370832"/>
+            <a:ext cx="329184" cy="329184"/>
+          </a:xfrm>
+          <a:prstGeom prst="ellipse">
+            <a:avLst/>
+          </a:prstGeom>
+          <a:solidFill>
+            <a:srgbClr val="E8A33D"/>
+          </a:solidFill>
+          <a:ln>
+            <a:noFill/>
+          </a:ln>
+          <a:effectLst/>
+        </p:spPr>
+        <p:style>
+          <a:lnRef idx="1">
+            <a:schemeClr val="accent1"/>
+          </a:lnRef>
+          <a:fillRef idx="3">
+            <a:schemeClr val="accent1"/>
+          </a:fillRef>
+          <a:effectRef idx="2">
+            <a:schemeClr val="accent1"/>
+          </a:effectRef>
+          <a:fontRef idx="minor">
+            <a:schemeClr val="lt1"/>
+          </a:fontRef>
+        </p:style>
+        <p:txBody>
+          <a:bodyPr rtlCol="0" anchor="ctr"/>
+          <a:lstStyle/>
+          <a:p>
+            <a:pPr algn="ctr"/>
+          </a:p>
+        </p:txBody>
+      </p:sp>
+      <p:sp>
+        <p:nvSpPr>
+          <p:cNvPr id="18" name="TextBox 17"/>
+          <p:cNvSpPr txBox="1"/>
+          <p:nvPr/>
+        </p:nvSpPr>
+        <p:spPr>
+          <a:xfrm>
+            <a:off x="1389888" y="4389120"/>
+            <a:ext cx="2560320" cy="365760"/>
+          </a:xfrm>
+          <a:prstGeom prst="rect">
+            <a:avLst/>
+          </a:prstGeom>
+          <a:noFill/>
+        </p:spPr>
+        <p:txBody>
+          <a:bodyPr wrap="square" lIns="0" rIns="0" tIns="0" bIns="0" anchor="t">
+            <a:spAutoFit/>
+          </a:bodyPr>
+          <a:lstStyle/>
+          <a:p>
+            <a:pPr algn="l">
+              <a:spcAft>
+                <a:spcPts val="600"/>
+              </a:spcAft>
+            </a:pPr>
+            <a:r>
+              <a:rPr sz="1450" b="1" i="0">
+                <a:solidFill>
+                  <a:srgbClr val="12263A"/>
+                </a:solidFill>
+                <a:latin typeface="Cambria"/>
+              </a:rPr>
+              <a:t>Mechanism</a:t>
+            </a:r>
+          </a:p>
+        </p:txBody>
+      </p:sp>
+      <p:sp>
+        <p:nvSpPr>
+          <p:cNvPr id="19" name="TextBox 18"/>
+          <p:cNvSpPr txBox="1"/>
+          <p:nvPr/>
+        </p:nvSpPr>
+        <p:spPr>
+          <a:xfrm>
+            <a:off x="914400" y="4892040"/>
+            <a:ext cx="2971800" cy="960120"/>
+          </a:xfrm>
+          <a:prstGeom prst="rect">
+            <a:avLst/>
+          </a:prstGeom>
+          <a:noFill/>
+        </p:spPr>
+        <p:txBody>
+          <a:bodyPr wrap="square" lIns="0" rIns="0" tIns="0" bIns="0" anchor="t">
+            <a:spAutoFit/>
+          </a:bodyPr>
+          <a:lstStyle/>
+          <a:p>
+            <a:pPr algn="l">
+              <a:spcAft>
+                <a:spcPts val="600"/>
+              </a:spcAft>
+            </a:pPr>
+            <a:r>
+              <a:rPr sz="1200" b="0" i="0">
+                <a:solidFill>
+                  <a:srgbClr val="5A6672"/>
+                </a:solidFill>
+                <a:latin typeface="Calibri"/>
+              </a:rPr>
+              <a:t>Why does scale not fix the camera? Aspect ratio is ruled out; resolution and receptive field remain.</a:t>
+            </a:r>
+          </a:p>
+        </p:txBody>
+      </p:sp>
+      <p:sp>
+        <p:nvSpPr>
+          <p:cNvPr id="20" name="Rounded Rectangle 19"/>
+          <p:cNvSpPr/>
+          <p:nvPr/>
+        </p:nvSpPr>
+        <p:spPr>
+          <a:xfrm>
+            <a:off x="4407408" y="4114800"/>
+            <a:ext cx="3520440" cy="1874519"/>
+          </a:xfrm>
+          <a:prstGeom prst="roundRect">
+            <a:avLst>
+              <a:gd name="adj" fmla="val 6000"/>
+            </a:avLst>
+          </a:prstGeom>
+          <a:solidFill>
+            <a:srgbClr val="F4F6F8"/>
+          </a:solidFill>
+          <a:ln>
+            <a:noFill/>
+          </a:ln>
+          <a:effectLst/>
+        </p:spPr>
+        <p:style>
+          <a:lnRef idx="1">
+            <a:schemeClr val="accent1"/>
+          </a:lnRef>
+          <a:fillRef idx="3">
+            <a:schemeClr val="accent1"/>
+          </a:fillRef>
+          <a:effectRef idx="2">
+            <a:schemeClr val="accent1"/>
+          </a:effectRef>
+          <a:fontRef idx="minor">
+            <a:schemeClr val="lt1"/>
+          </a:fontRef>
+        </p:style>
+        <p:txBody>
+          <a:bodyPr rtlCol="0" anchor="ctr"/>
+          <a:lstStyle/>
+          <a:p>
+            <a:pPr algn="ctr"/>
+          </a:p>
+        </p:txBody>
+      </p:sp>
+      <p:sp>
+        <p:nvSpPr>
+          <p:cNvPr id="21" name="Oval 20"/>
+          <p:cNvSpPr/>
+          <p:nvPr/>
+        </p:nvSpPr>
+        <p:spPr>
+          <a:xfrm>
+            <a:off x="4681728" y="4370832"/>
+            <a:ext cx="329184" cy="329184"/>
+          </a:xfrm>
+          <a:prstGeom prst="ellipse">
+            <a:avLst/>
+          </a:prstGeom>
+          <a:solidFill>
+            <a:srgbClr val="12263A"/>
+          </a:solidFill>
+          <a:ln>
+            <a:noFill/>
+          </a:ln>
+          <a:effectLst/>
+        </p:spPr>
+        <p:style>
+          <a:lnRef idx="1">
+            <a:schemeClr val="accent1"/>
+          </a:lnRef>
+          <a:fillRef idx="3">
+            <a:schemeClr val="accent1"/>
+          </a:fillRef>
+          <a:effectRef idx="2">
+            <a:schemeClr val="accent1"/>
+          </a:effectRef>
+          <a:fontRef idx="minor">
+            <a:schemeClr val="lt1"/>
+          </a:fontRef>
+        </p:style>
+        <p:txBody>
+          <a:bodyPr rtlCol="0" anchor="ctr"/>
+          <a:lstStyle/>
+          <a:p>
+            <a:pPr algn="ctr"/>
+          </a:p>
+        </p:txBody>
+      </p:sp>
+      <p:sp>
+        <p:nvSpPr>
+          <p:cNvPr id="22" name="TextBox 21"/>
+          <p:cNvSpPr txBox="1"/>
+          <p:nvPr/>
+        </p:nvSpPr>
+        <p:spPr>
+          <a:xfrm>
+            <a:off x="5157216" y="4389120"/>
+            <a:ext cx="2560320" cy="365760"/>
+          </a:xfrm>
+          <a:prstGeom prst="rect">
+            <a:avLst/>
+          </a:prstGeom>
+          <a:noFill/>
+        </p:spPr>
+        <p:txBody>
+          <a:bodyPr wrap="square" lIns="0" rIns="0" tIns="0" bIns="0" anchor="t">
+            <a:spAutoFit/>
+          </a:bodyPr>
+          <a:lstStyle/>
+          <a:p>
+            <a:pPr algn="l">
+              <a:spcAft>
+                <a:spcPts val="600"/>
+              </a:spcAft>
+            </a:pPr>
+            <a:r>
+              <a:rPr sz="1450" b="1" i="0">
+                <a:solidFill>
+                  <a:srgbClr val="12263A"/>
+                </a:solidFill>
+                <a:latin typeface="Cambria"/>
+              </a:rPr>
+              <a:t>Atlanta-style regional fit</a:t>
+            </a:r>
+          </a:p>
+        </p:txBody>
+      </p:sp>
+      <p:sp>
+        <p:nvSpPr>
+          <p:cNvPr id="23" name="TextBox 22"/>
+          <p:cNvSpPr txBox="1"/>
+          <p:nvPr/>
+        </p:nvSpPr>
+        <p:spPr>
+          <a:xfrm>
+            <a:off x="4681728" y="4892040"/>
+            <a:ext cx="2971800" cy="960120"/>
+          </a:xfrm>
+          <a:prstGeom prst="rect">
+            <a:avLst/>
+          </a:prstGeom>
+          <a:noFill/>
+        </p:spPr>
+        <p:txBody>
+          <a:bodyPr wrap="square" lIns="0" rIns="0" tIns="0" bIns="0" anchor="t">
+            <a:spAutoFit/>
+          </a:bodyPr>
+          <a:lstStyle/>
+          <a:p>
+            <a:pPr algn="l">
+              <a:spcAft>
+                <a:spcPts val="600"/>
+              </a:spcAft>
+            </a:pPr>
+            <a:r>
+              <a:rPr sz="1200" b="0" i="0">
+                <a:solidFill>
+                  <a:srgbClr val="5A6672"/>
+                </a:solidFill>
+                <a:latin typeface="Calibri"/>
+              </a:rPr>
+              <a:t>Redo the regional analysis without assuming every vanishing point pair is at right angles.</a:t>
+            </a:r>
+          </a:p>
+        </p:txBody>
+      </p:sp>
+      <p:sp>
+        <p:nvSpPr>
+          <p:cNvPr id="24" name="Rounded Rectangle 23"/>
+          <p:cNvSpPr/>
+          <p:nvPr/>
+        </p:nvSpPr>
+        <p:spPr>
+          <a:xfrm>
+            <a:off x="8174736" y="4114800"/>
+            <a:ext cx="3520440" cy="1874519"/>
+          </a:xfrm>
+          <a:prstGeom prst="roundRect">
+            <a:avLst>
+              <a:gd name="adj" fmla="val 6000"/>
+            </a:avLst>
+          </a:prstGeom>
+          <a:solidFill>
+            <a:srgbClr val="F4F6F8"/>
+          </a:solidFill>
+          <a:ln>
+            <a:noFill/>
+          </a:ln>
+          <a:effectLst/>
+        </p:spPr>
+        <p:style>
+          <a:lnRef idx="1">
+            <a:schemeClr val="accent1"/>
+          </a:lnRef>
+          <a:fillRef idx="3">
+            <a:schemeClr val="accent1"/>
+          </a:fillRef>
+          <a:effectRef idx="2">
+            <a:schemeClr val="accent1"/>
+          </a:effectRef>
+          <a:fontRef idx="minor">
+            <a:schemeClr val="lt1"/>
+          </a:fontRef>
+        </p:style>
+        <p:txBody>
+          <a:bodyPr rtlCol="0" anchor="ctr"/>
+          <a:lstStyle/>
+          <a:p>
+            <a:pPr algn="ctr"/>
+          </a:p>
+        </p:txBody>
+      </p:sp>
+      <p:sp>
+        <p:nvSpPr>
+          <p:cNvPr id="25" name="Oval 24"/>
+          <p:cNvSpPr/>
+          <p:nvPr/>
+        </p:nvSpPr>
+        <p:spPr>
+          <a:xfrm>
+            <a:off x="8449056" y="4370832"/>
+            <a:ext cx="329184" cy="329184"/>
+          </a:xfrm>
+          <a:prstGeom prst="ellipse">
+            <a:avLst/>
+          </a:prstGeom>
+          <a:solidFill>
+            <a:srgbClr val="1C7293"/>
+          </a:solidFill>
+          <a:ln>
+            <a:noFill/>
+          </a:ln>
+          <a:effectLst/>
+        </p:spPr>
+        <p:style>
+          <a:lnRef idx="1">
+            <a:schemeClr val="accent1"/>
+          </a:lnRef>
+          <a:fillRef idx="3">
+            <a:schemeClr val="accent1"/>
+          </a:fillRef>
+          <a:effectRef idx="2">
+            <a:schemeClr val="accent1"/>
+          </a:effectRef>
+          <a:fontRef idx="minor">
+            <a:schemeClr val="lt1"/>
+          </a:fontRef>
+        </p:style>
+        <p:txBody>
+          <a:bodyPr rtlCol="0" anchor="ctr"/>
+          <a:lstStyle/>
+          <a:p>
+            <a:pPr algn="ctr"/>
+          </a:p>
+        </p:txBody>
+      </p:sp>
+      <p:sp>
+        <p:nvSpPr>
+          <p:cNvPr id="26" name="TextBox 25"/>
+          <p:cNvSpPr txBox="1"/>
+          <p:nvPr/>
+        </p:nvSpPr>
+        <p:spPr>
+          <a:xfrm>
+            <a:off x="8924544" y="4389120"/>
+            <a:ext cx="2560320" cy="365760"/>
+          </a:xfrm>
+          <a:prstGeom prst="rect">
+            <a:avLst/>
+          </a:prstGeom>
+          <a:noFill/>
+        </p:spPr>
+        <p:txBody>
+          <a:bodyPr wrap="square" lIns="0" rIns="0" tIns="0" bIns="0" anchor="t">
+            <a:spAutoFit/>
+          </a:bodyPr>
+          <a:lstStyle/>
+          <a:p>
+            <a:pPr algn="l">
+              <a:spcAft>
+                <a:spcPts val="600"/>
+              </a:spcAft>
+            </a:pPr>
+            <a:r>
+              <a:rPr sz="1450" b="1" i="0">
+                <a:solidFill>
+                  <a:srgbClr val="12263A"/>
+                </a:solidFill>
+                <a:latin typeface="Cambria"/>
+              </a:rPr>
+              <a:t>Perception study</a:t>
+            </a:r>
+          </a:p>
+        </p:txBody>
+      </p:sp>
+      <p:sp>
+        <p:nvSpPr>
+          <p:cNvPr id="27" name="TextBox 26"/>
+          <p:cNvSpPr txBox="1"/>
+          <p:nvPr/>
+        </p:nvSpPr>
+        <p:spPr>
+          <a:xfrm>
+            <a:off x="8449056" y="4892040"/>
+            <a:ext cx="2971800" cy="960120"/>
+          </a:xfrm>
+          <a:prstGeom prst="rect">
+            <a:avLst/>
+          </a:prstGeom>
+          <a:noFill/>
+        </p:spPr>
+        <p:txBody>
+          <a:bodyPr wrap="square" lIns="0" rIns="0" tIns="0" bIns="0" anchor="t">
+            <a:spAutoFit/>
+          </a:bodyPr>
+          <a:lstStyle/>
+          <a:p>
+            <a:pPr algn="l">
+              <a:spcAft>
+                <a:spcPts val="600"/>
+              </a:spcAft>
+            </a:pPr>
+            <a:r>
+              <a:rPr sz="1200" b="0" i="0">
+                <a:solidFill>
+                  <a:srgbClr val="5A6672"/>
+                </a:solidFill>
+                <a:latin typeface="Calibri"/>
+              </a:rPr>
+              <a:t>Which violations are severe in the maths but unnoticed by people.</a:t>
+            </a:r>
+          </a:p>
+        </p:txBody>
+      </p:sp>
+    </p:spTree>
+  </p:cSld>
+  <p:clrMapOvr>
+    <a:masterClrMapping/>
+  </p:clrMapOvr>
+</p:sld>
+</file>
+
+<file path=ppt/slides/slide21.xml><?xml version="1.0" encoding="utf-8"?>
+<p:sld xmlns:a="http://schemas.openxmlformats.org/drawingml/2006/main" xmlns:p="http://schemas.openxmlformats.org/presentationml/2006/main" xmlns:r="http://schemas.openxmlformats.org/officeDocument/2006/relationships">
+  <p:cSld>
+    <p:spTree>
+      <p:nvGrpSpPr>
+        <p:cNvPr id="1" name=""/>
+        <p:cNvGrpSpPr/>
+        <p:nvPr/>
+      </p:nvGrpSpPr>
+      <p:grpSpPr/>
+      <p:sp>
+        <p:nvSpPr>
+          <p:cNvPr id="2" name="Rectangle 1"/>
+          <p:cNvSpPr/>
+          <p:nvPr/>
+        </p:nvSpPr>
+        <p:spPr>
+          <a:xfrm>
+            <a:off x="0" y="0"/>
+            <a:ext cx="12191695" cy="6858000"/>
+          </a:xfrm>
+          <a:prstGeom prst="rect">
+            <a:avLst/>
+          </a:prstGeom>
+          <a:solidFill>
+            <a:srgbClr val="FFFFFF"/>
+          </a:solidFill>
+          <a:ln>
+            <a:noFill/>
+          </a:ln>
+          <a:effectLst/>
+        </p:spPr>
+        <p:style>
+          <a:lnRef idx="1">
+            <a:schemeClr val="accent1"/>
+          </a:lnRef>
+          <a:fillRef idx="3">
+            <a:schemeClr val="accent1"/>
+          </a:fillRef>
+          <a:effectRef idx="2">
+            <a:schemeClr val="accent1"/>
+          </a:effectRef>
+          <a:fontRef idx="minor">
+            <a:schemeClr val="lt1"/>
+          </a:fontRef>
+        </p:style>
+        <p:txBody>
+          <a:bodyPr rtlCol="0" anchor="ctr"/>
+          <a:lstStyle/>
+          <a:p>
+            <a:pPr algn="ctr"/>
+          </a:p>
+        </p:txBody>
+      </p:sp>
+      <p:sp>
+        <p:nvSpPr>
+          <p:cNvPr id="3" name="TextBox 2"/>
+          <p:cNvSpPr txBox="1"/>
+          <p:nvPr/>
+        </p:nvSpPr>
+        <p:spPr>
+          <a:xfrm>
+            <a:off x="640080" y="457200"/>
+            <a:ext cx="10911535" cy="822960"/>
+          </a:xfrm>
+          <a:prstGeom prst="rect">
+            <a:avLst/>
+          </a:prstGeom>
+          <a:noFill/>
+        </p:spPr>
+        <p:txBody>
+          <a:bodyPr wrap="square" lIns="0" rIns="0" tIns="0" bIns="0" anchor="t">
+            <a:spAutoFit/>
+          </a:bodyPr>
+          <a:lstStyle/>
+          <a:p>
+            <a:pPr algn="l">
+              <a:spcAft>
+                <a:spcPts val="600"/>
+              </a:spcAft>
+            </a:pPr>
+            <a:r>
+              <a:rPr sz="3200" b="1" i="0">
+                <a:solidFill>
+                  <a:srgbClr val="12263A"/>
+                </a:solidFill>
+                <a:latin typeface="Cambria"/>
+              </a:rPr>
               <a:t>References</a:t>
             </a:r>
           </a:p>
@@ -12371,8 +13538,8 @@
         </p:nvSpPr>
         <p:spPr>
           <a:xfrm>
-            <a:off x="640080" y="1783080"/>
-            <a:ext cx="10908792" cy="4480560"/>
+            <a:off x="640080" y="1600200"/>
+            <a:ext cx="10908792" cy="4572000"/>
           </a:xfrm>
           <a:prstGeom prst="rect">
             <a:avLst/>
@@ -12391,7 +13558,7 @@
               </a:spcAft>
             </a:pPr>
             <a:r>
-              <a:rPr sz="1200">
+              <a:rPr sz="1350">
                 <a:solidFill>
                   <a:srgbClr val="1A1A1A"/>
                 </a:solidFill>
@@ -12407,7 +13574,7 @@
               </a:spcAft>
             </a:pPr>
             <a:r>
-              <a:rPr sz="1200">
+              <a:rPr sz="1350">
                 <a:solidFill>
                   <a:srgbClr val="1A1A1A"/>
                 </a:solidFill>
@@ -12423,7 +13590,7 @@
               </a:spcAft>
             </a:pPr>
             <a:r>
-              <a:rPr sz="1200">
+              <a:rPr sz="1350">
                 <a:solidFill>
                   <a:srgbClr val="1A1A1A"/>
                 </a:solidFill>
@@ -12439,13 +13606,13 @@
               </a:spcAft>
             </a:pPr>
             <a:r>
-              <a:rPr sz="1200">
+              <a:rPr sz="1350">
                 <a:solidFill>
                   <a:srgbClr val="1A1A1A"/>
                 </a:solidFill>
                 <a:latin typeface="Calibri"/>
               </a:rPr>
-              <a:t>[4] A. Criminisi, I. Reid and A. Zisserman, “Single view metrology,” IJCV, vol. 40, no. 2, pp. 123–148, 2000.</a:t>
+              <a:t>[4] A. Criminisi, I. Reid and A. Zisserman, “Single view metrology,” IJCV, vol. 40, no. 2, pp. 123-148, 2000.</a:t>
             </a:r>
           </a:p>
           <a:p>
@@ -12455,7 +13622,7 @@
               </a:spcAft>
             </a:pPr>
             <a:r>
-              <a:rPr sz="1200">
+              <a:rPr sz="1350">
                 <a:solidFill>
                   <a:srgbClr val="1A1A1A"/>
                 </a:solidFill>
@@ -12471,13 +13638,13 @@
               </a:spcAft>
             </a:pPr>
             <a:r>
-              <a:rPr sz="1200">
+              <a:rPr sz="1350">
                 <a:solidFill>
                   <a:srgbClr val="1A1A1A"/>
                 </a:solidFill>
                 <a:latin typeface="Calibri"/>
               </a:rPr>
-              <a:t>[6] P. Denis, J. H. Elder and F. J. Estrada, “Efficient edge-based methods for estimating Manhattan frames in urban imagery,” ECCV, 2008.</a:t>
+              <a:t>[6] G. Schindler and F. Dellaert, “Atlanta world,” CVPR, 2004.</a:t>
             </a:r>
           </a:p>
           <a:p>
@@ -12487,13 +13654,13 @@
               </a:spcAft>
             </a:pPr>
             <a:r>
-              <a:rPr sz="1200">
+              <a:rPr sz="1350">
                 <a:solidFill>
                   <a:srgbClr val="1A1A1A"/>
                 </a:solidFill>
                 <a:latin typeface="Calibri"/>
               </a:rPr>
-              <a:t>[7] R. Grompone von Gioi et al., “LSD: a fast line segment detector with a false detection control,” IEEE TPAMI, vol. 32, no. 4, 2010.</a:t>
+              <a:t>[7] P. Denis, J. H. Elder and F. J. Estrada, “Efficient edge-based methods for estimating Manhattan frames in urban imagery,” ECCV, 2008.</a:t>
             </a:r>
           </a:p>
           <a:p>
@@ -12503,13 +13670,13 @@
               </a:spcAft>
             </a:pPr>
             <a:r>
-              <a:rPr sz="1200">
+              <a:rPr sz="1350">
                 <a:solidFill>
                   <a:srgbClr val="1A1A1A"/>
                 </a:solidFill>
                 <a:latin typeface="Calibri"/>
               </a:rPr>
-              <a:t>[8] D. Hoiem, A. A. Efros and M. Hebert, “Putting objects in perspective,” IJCV, vol. 80, no. 1, 2008.</a:t>
+              <a:t>[8] R. Grompone von Gioi et al., “LSD: a fast line segment detector with a false detection control,” IEEE TPAMI, vol. 32, no. 4, 2010.</a:t>
             </a:r>
           </a:p>
           <a:p>
@@ -12519,13 +13686,13 @@
               </a:spcAft>
             </a:pPr>
             <a:r>
-              <a:rPr sz="1200">
+              <a:rPr sz="1350">
                 <a:solidFill>
                   <a:srgbClr val="1A1A1A"/>
                 </a:solidFill>
                 <a:latin typeface="Calibri"/>
               </a:rPr>
-              <a:t>[9] L. Jin et al., “Perspective fields for single image camera calibration,” CVPR, 2023.</a:t>
+              <a:t>[9] B. Efron and R. J. Tibshirani, An Introduction to the Bootstrap, Chapman &amp; Hall, 1993.</a:t>
             </a:r>
           </a:p>
           <a:p>
@@ -12535,13 +13702,13 @@
               </a:spcAft>
             </a:pPr>
             <a:r>
-              <a:rPr sz="1200">
+              <a:rPr sz="1350">
                 <a:solidFill>
                   <a:srgbClr val="1A1A1A"/>
                 </a:solidFill>
                 <a:latin typeface="Calibri"/>
               </a:rPr>
-              <a:t>[10] D. Podell et al., “SDXL: improving latent diffusion models for high-resolution image synthesis,” ICLR, 2024.</a:t>
+              <a:t>[10] L. Breiman, “Random forests,” Machine Learning, vol. 45, no. 1, 2001.</a:t>
             </a:r>
           </a:p>
           <a:p>
@@ -12551,13 +13718,29 @@
               </a:spcAft>
             </a:pPr>
             <a:r>
-              <a:rPr sz="1200">
+              <a:rPr sz="1350">
                 <a:solidFill>
                   <a:srgbClr val="1A1A1A"/>
                 </a:solidFill>
                 <a:latin typeface="Calibri"/>
               </a:rPr>
-              <a:t>[11] R. Rombach et al., “High-resolution image synthesis with latent diffusion models,” CVPR, 2022.</a:t>
+              <a:t>[11] D. Podell et al., “SDXL: improving latent diffusion models for high-resolution image synthesis,” ICLR, 2024.</a:t>
+            </a:r>
+          </a:p>
+          <a:p>
+            <a:pPr>
+              <a:spcAft>
+                <a:spcPts val="700"/>
+              </a:spcAft>
+            </a:pPr>
+            <a:r>
+              <a:rPr sz="1350">
+                <a:solidFill>
+                  <a:srgbClr val="1A1A1A"/>
+                </a:solidFill>
+                <a:latin typeface="Calibri"/>
+              </a:rPr>
+              <a:t>[12] R. Rombach et al., “High-resolution image synthesis with latent diffusion models,” CVPR, 2022.</a:t>
             </a:r>
           </a:p>
         </p:txBody>
@@ -12570,7 +13753,7 @@
         </p:nvSpPr>
         <p:spPr>
           <a:xfrm>
-            <a:off x="640080" y="6309360"/>
+            <a:off x="640080" y="6355080"/>
             <a:ext cx="10908792" cy="365760"/>
           </a:xfrm>
           <a:prstGeom prst="rect">
@@ -12865,7 +14048,7 @@
                 </a:solidFill>
                 <a:latin typeface="Calibri"/>
               </a:rPr>
-              <a:t>Pixel and frequency detectors degrade as generators improve. A geometric violation stays a violation however convincing the texture is.</a:t>
+              <a:t>Pixel and frequency detectors get worse as generators improve. A broken geometry rule stays broken however good the texture is.</a:t>
             </a:r>
           </a:p>
         </p:txBody>
@@ -13033,7 +14216,7 @@
                 </a:solidFill>
                 <a:latin typeface="Calibri"/>
               </a:rPr>
-              <a:t>Which constraints a model satisfies is a probe of what it has internalised about 3D structure.</a:t>
+              <a:t>Which rules a model follows tells us what it has learned about 3D space.</a:t>
             </a:r>
           </a:p>
         </p:txBody>
@@ -13201,7 +14384,7 @@
                 </a:solidFill>
                 <a:latin typeface="Calibri"/>
               </a:rPr>
-              <a:t>Visual servoing, navigation and structure-from-motion assume projective consistency. Synthetic training data must be sound.</a:t>
+              <a:t>Visual servoing, navigation and structure from motion assume projective geometry. Synthetic training data must obey it.</a:t>
             </a:r>
           </a:p>
         </p:txBody>
@@ -13286,7 +14469,7 @@
                 </a:solidFill>
                 <a:latin typeface="Calibri"/>
               </a:rPr>
-              <a:t>Background: a generator learns the appearance statistics of photographs. Nothing in its architecture represents an optical centre, a focal length or a principal point — so whether its images obey camera geometry is an open empirical question.</a:t>
+              <a:t>Background: a generator learns what photographs look like from data. Nothing inside it stores an optical centre, a focal length or a principal point. So whether its images obey camera geometry is an open question we can measure.</a:t>
             </a:r>
           </a:p>
         </p:txBody>
@@ -13400,8 +14583,8 @@
         </p:nvSpPr>
         <p:spPr>
           <a:xfrm>
-            <a:off x="640080" y="1828800"/>
-            <a:ext cx="713232" cy="530352"/>
+            <a:off x="640080" y="1783080"/>
+            <a:ext cx="713232" cy="493776"/>
           </a:xfrm>
           <a:prstGeom prst="roundRect">
             <a:avLst>
@@ -13455,8 +14638,8 @@
         </p:nvSpPr>
         <p:spPr>
           <a:xfrm>
-            <a:off x="1508760" y="1883664"/>
-            <a:ext cx="10058400" cy="640080"/>
+            <a:off x="1508760" y="1856231"/>
+            <a:ext cx="10058400" cy="548640"/>
           </a:xfrm>
           <a:prstGeom prst="rect">
             <a:avLst/>
@@ -13481,7 +14664,7 @@
                 </a:solidFill>
                 <a:latin typeface="Calibri"/>
               </a:rPr>
-              <a:t>Build and validate a measurement pipeline for vanishing-point concurrency and single-camera coherence</a:t>
+              <a:t>Build and validate a pipeline for vanishing-point concurrency and single-camera coherence</a:t>
             </a:r>
           </a:p>
         </p:txBody>
@@ -13494,8 +14677,8 @@
         </p:nvSpPr>
         <p:spPr>
           <a:xfrm>
-            <a:off x="640080" y="2587752"/>
-            <a:ext cx="713232" cy="530352"/>
+            <a:off x="640080" y="2459736"/>
+            <a:ext cx="713232" cy="493776"/>
           </a:xfrm>
           <a:prstGeom prst="roundRect">
             <a:avLst>
@@ -13549,8 +14732,8 @@
         </p:nvSpPr>
         <p:spPr>
           <a:xfrm>
-            <a:off x="1508760" y="2642616"/>
-            <a:ext cx="10058400" cy="640080"/>
+            <a:off x="1508760" y="2532888"/>
+            <a:ext cx="10058400" cy="548640"/>
           </a:xfrm>
           <a:prstGeom prst="rect">
             <a:avLst/>
@@ -13575,7 +14758,7 @@
                 </a:solidFill>
                 <a:latin typeface="Calibri"/>
               </a:rPr>
-              <a:t>Establish real-image null distributions on a curated benchmark and an uncurated internet corpus</a:t>
+              <a:t>Measure the normal range of every residual on a hand-picked benchmark and on ordinary internet photos</a:t>
             </a:r>
           </a:p>
         </p:txBody>
@@ -13588,8 +14771,8 @@
         </p:nvSpPr>
         <p:spPr>
           <a:xfrm>
-            <a:off x="640080" y="3346704"/>
-            <a:ext cx="713232" cy="530352"/>
+            <a:off x="640080" y="3136391"/>
+            <a:ext cx="713232" cy="493776"/>
           </a:xfrm>
           <a:prstGeom prst="roundRect">
             <a:avLst>
@@ -13643,8 +14826,8 @@
         </p:nvSpPr>
         <p:spPr>
           <a:xfrm>
-            <a:off x="1508760" y="3401568"/>
-            <a:ext cx="10058400" cy="640080"/>
+            <a:off x="1508760" y="3209544"/>
+            <a:ext cx="10058400" cy="548640"/>
           </a:xfrm>
           <a:prstGeom prst="rect">
             <a:avLst/>
@@ -13669,7 +14852,7 @@
                 </a:solidFill>
                 <a:latin typeface="Calibri"/>
               </a:rPr>
-              <a:t>Generate content-matched image sets from multiple diffusion models with logged parameters</a:t>
+              <a:t>Build generated image sets with matched content from four models, settings logged</a:t>
             </a:r>
           </a:p>
         </p:txBody>
@@ -13682,8 +14865,8 @@
         </p:nvSpPr>
         <p:spPr>
           <a:xfrm>
-            <a:off x="640080" y="4105656"/>
-            <a:ext cx="713232" cy="530352"/>
+            <a:off x="640080" y="3813048"/>
+            <a:ext cx="713232" cy="493776"/>
           </a:xfrm>
           <a:prstGeom prst="roundRect">
             <a:avLst>
@@ -13737,8 +14920,8 @@
         </p:nvSpPr>
         <p:spPr>
           <a:xfrm>
-            <a:off x="1508760" y="4160520"/>
-            <a:ext cx="10058400" cy="640080"/>
+            <a:off x="1508760" y="3886200"/>
+            <a:ext cx="10058400" cy="548640"/>
           </a:xfrm>
           <a:prstGeom prst="rect">
             <a:avLst/>
@@ -13763,7 +14946,7 @@
                 </a:solidFill>
                 <a:latin typeface="Calibri"/>
               </a:rPr>
-              <a:t>Define an applicability rule, independent of the residual, and validate it against ground truth</a:t>
+              <a:t>Define an applicability rule that never looks at the answer, and validate it</a:t>
             </a:r>
           </a:p>
         </p:txBody>
@@ -13776,8 +14959,8 @@
         </p:nvSpPr>
         <p:spPr>
           <a:xfrm>
-            <a:off x="640080" y="4864608"/>
-            <a:ext cx="713232" cy="530352"/>
+            <a:off x="640080" y="4489704"/>
+            <a:ext cx="713232" cy="493776"/>
           </a:xfrm>
           <a:prstGeom prst="roundRect">
             <a:avLst>
@@ -13831,8 +15014,8 @@
         </p:nvSpPr>
         <p:spPr>
           <a:xfrm>
-            <a:off x="1508760" y="4919472"/>
-            <a:ext cx="10058400" cy="640080"/>
+            <a:off x="1508760" y="4562856"/>
+            <a:ext cx="10058400" cy="548640"/>
           </a:xfrm>
           <a:prstGeom prst="rect">
             <a:avLst/>
@@ -13857,7 +15040,7 @@
                 </a:solidFill>
                 <a:latin typeface="Calibri"/>
               </a:rPr>
-              <a:t>Compare generators under matched content and camera configuration; evaluate standard classifiers on the residuals</a:t>
+              <a:t>Compare generators under matched content and camera settings; test standard classifiers</a:t>
             </a:r>
           </a:p>
         </p:txBody>
@@ -13870,8 +15053,8 @@
         </p:nvSpPr>
         <p:spPr>
           <a:xfrm>
-            <a:off x="640080" y="5623559"/>
-            <a:ext cx="713232" cy="530352"/>
+            <a:off x="640080" y="5166360"/>
+            <a:ext cx="713232" cy="493776"/>
           </a:xfrm>
           <a:prstGeom prst="roundRect">
             <a:avLst>
@@ -13925,8 +15108,8 @@
         </p:nvSpPr>
         <p:spPr>
           <a:xfrm>
-            <a:off x="1508760" y="5678423"/>
-            <a:ext cx="10058400" cy="640080"/>
+            <a:off x="1508760" y="5239512"/>
+            <a:ext cx="10058400" cy="548640"/>
           </a:xfrm>
           <a:prstGeom prst="rect">
             <a:avLst/>
@@ -13951,7 +15134,101 @@
                 </a:solidFill>
                 <a:latin typeface="Calibri"/>
               </a:rPr>
-              <a:t>Implement the shadow constraint as a linear program and validate on synthetic scenes</a:t>
+              <a:t>Implement the shadow rule as a linear program and validate it on synthetic scenes</a:t>
+            </a:r>
+          </a:p>
+        </p:txBody>
+      </p:sp>
+      <p:sp>
+        <p:nvSpPr>
+          <p:cNvPr id="16" name="Rounded Rectangle 15"/>
+          <p:cNvSpPr/>
+          <p:nvPr/>
+        </p:nvSpPr>
+        <p:spPr>
+          <a:xfrm>
+            <a:off x="640080" y="5843016"/>
+            <a:ext cx="713232" cy="493776"/>
+          </a:xfrm>
+          <a:prstGeom prst="roundRect">
+            <a:avLst>
+              <a:gd name="adj" fmla="val 20000"/>
+            </a:avLst>
+          </a:prstGeom>
+          <a:solidFill>
+            <a:srgbClr val="1C7293"/>
+          </a:solidFill>
+          <a:ln>
+            <a:noFill/>
+          </a:ln>
+          <a:effectLst/>
+        </p:spPr>
+        <p:style>
+          <a:lnRef idx="1">
+            <a:schemeClr val="accent1"/>
+          </a:lnRef>
+          <a:fillRef idx="3">
+            <a:schemeClr val="accent1"/>
+          </a:fillRef>
+          <a:effectRef idx="2">
+            <a:schemeClr val="accent1"/>
+          </a:effectRef>
+          <a:fontRef idx="minor">
+            <a:schemeClr val="lt1"/>
+          </a:fontRef>
+        </p:style>
+        <p:txBody>
+          <a:bodyPr rtlCol="0" anchor="ctr" lIns="0" rIns="0"/>
+          <a:lstStyle/>
+          <a:p>
+            <a:pPr algn="ctr"/>
+            <a:r>
+              <a:rPr sz="1500" b="1">
+                <a:solidFill>
+                  <a:srgbClr val="FFFFFF"/>
+                </a:solidFill>
+                <a:latin typeface="Cambria"/>
+              </a:rPr>
+              <a:t>O7</a:t>
+            </a:r>
+          </a:p>
+        </p:txBody>
+      </p:sp>
+      <p:sp>
+        <p:nvSpPr>
+          <p:cNvPr id="17" name="TextBox 16"/>
+          <p:cNvSpPr txBox="1"/>
+          <p:nvPr/>
+        </p:nvSpPr>
+        <p:spPr>
+          <a:xfrm>
+            <a:off x="1508760" y="5916168"/>
+            <a:ext cx="10058400" cy="548640"/>
+          </a:xfrm>
+          <a:prstGeom prst="rect">
+            <a:avLst/>
+          </a:prstGeom>
+          <a:noFill/>
+        </p:spPr>
+        <p:txBody>
+          <a:bodyPr wrap="square" lIns="0" rIns="0" tIns="0" bIns="0" anchor="t">
+            <a:spAutoFit/>
+          </a:bodyPr>
+          <a:lstStyle/>
+          <a:p>
+            <a:pPr algn="l">
+              <a:spcAft>
+                <a:spcPts val="600"/>
+              </a:spcAft>
+            </a:pPr>
+            <a:r>
+              <a:rPr sz="1450" b="0" i="0">
+                <a:solidFill>
+                  <a:srgbClr val="1A1A1A"/>
+                </a:solidFill>
+                <a:latin typeface="Calibri"/>
+              </a:rPr>
+              <a:t>Build an app that measures any image, explains the result and gives a calibrated score</a:t>
             </a:r>
           </a:p>
         </p:txBody>
@@ -14106,7 +15383,7 @@
         </p:nvGraphicFramePr>
         <p:xfrm>
           <a:off x="640080" y="1828800"/>
-          <a:ext cx="10908791" cy="3291840"/>
+          <a:ext cx="10908792" cy="3291840"/>
         </p:xfrm>
         <a:graphic>
           <a:graphicData uri="http://schemas.openxmlformats.org/drawingml/2006/table">
@@ -14115,9 +15392,9 @@
                 <a:tableStyleId>{5C22544A-7EE6-4342-B048-85BDC9FD1C3A}</a:tableStyleId>
               </a:tblPr>
               <a:tblGrid>
-                <a:gridCol w="2286000"/>
-                <a:gridCol w="4572000"/>
-                <a:gridCol w="4050791"/>
+                <a:gridCol w="2468880"/>
+                <a:gridCol w="4480560"/>
+                <a:gridCol w="3959352"/>
               </a:tblGrid>
               <a:tr h="548640">
                 <a:tc>
@@ -14222,7 +15499,7 @@
                           </a:solidFill>
                           <a:latin typeface="Calibri"/>
                         </a:rPr>
-                        <a:t>Classifiers on geometric features only (lines, perspective fields, shadows); AUC 0.88-0.94</a:t>
+                        <a:t>Classifiers on geometric features only (lines, perspective fields, shadows); AUC 0.88 to 0.94</a:t>
                       </a:r>
                     </a:p>
                   </a:txBody>
@@ -14244,7 +15521,7 @@
                           </a:solidFill>
                           <a:latin typeface="Calibri"/>
                         </a:rPr>
-                        <a:t>Anchor paper: proves the cue exists, but not which constraint fails</a:t>
+                        <a:t>Anchor paper: proves the cue exists, but not which rule fails</a:t>
                       </a:r>
                     </a:p>
                   </a:txBody>
@@ -14268,7 +15545,7 @@
                           </a:solidFill>
                           <a:latin typeface="Calibri"/>
                         </a:rPr>
-                        <a:t>Kee, O'Brien &amp; Farid, TOG 2013</a:t>
+                        <a:t>Kee, O'Brien and Farid, TOG 2013</a:t>
                       </a:r>
                     </a:p>
                   </a:txBody>
@@ -14312,7 +15589,7 @@
                           </a:solidFill>
                           <a:latin typeface="Calibri"/>
                         </a:rPr>
-                        <a:t>Exact formulation adopted for our L7 implementation</a:t>
+                        <a:t>Exact formulation used for our shadow rule</a:t>
                       </a:r>
                     </a:p>
                   </a:txBody>
@@ -14336,7 +15613,7 @@
                           </a:solidFill>
                           <a:latin typeface="Calibri"/>
                         </a:rPr>
-                        <a:t>Criminisi, Reid &amp; Zisserman, 2000</a:t>
+                        <a:t>Criminisi, Reid and Zisserman, 2000</a:t>
                       </a:r>
                     </a:p>
                   </a:txBody>
@@ -14358,7 +15635,7 @@
                           </a:solidFill>
                           <a:latin typeface="Calibri"/>
                         </a:rPr>
-                        <a:t>Single-view metrology from vanishing points and the absolute conic</a:t>
+                        <a:t>Single-view metrology from vanishing points</a:t>
                       </a:r>
                     </a:p>
                   </a:txBody>
@@ -14380,7 +15657,7 @@
                           </a:solidFill>
                           <a:latin typeface="Calibri"/>
                         </a:rPr>
-                        <a:t>Mathematical basis of the camera-coherence test</a:t>
+                        <a:t>Mathematical basis of the camera test</a:t>
                       </a:r>
                     </a:p>
                   </a:txBody>
@@ -14404,7 +15681,7 @@
                           </a:solidFill>
                           <a:latin typeface="Calibri"/>
                         </a:rPr>
-                        <a:t>Denis, Elder &amp; Estrada, ECCV 2008</a:t>
+                        <a:t>Schindler and Dellaert, CVPR 2004</a:t>
                       </a:r>
                     </a:p>
                   </a:txBody>
@@ -14426,7 +15703,7 @@
                           </a:solidFill>
                           <a:latin typeface="Calibri"/>
                         </a:rPr>
-                        <a:t>York Urban Database: 102 calibrated images, ground-truth vanishing points</a:t>
+                        <a:t>Atlanta world: one vertical, several horizontal directions</a:t>
                       </a:r>
                     </a:p>
                   </a:txBody>
@@ -14448,7 +15725,7 @@
                           </a:solidFill>
                           <a:latin typeface="Calibri"/>
                         </a:rPr>
-                        <a:t>Our curated real reference and validation set</a:t>
+                        <a:t>Why our main measure works on real streets</a:t>
                       </a:r>
                     </a:p>
                   </a:txBody>
@@ -14472,7 +15749,7 @@
                           </a:solidFill>
                           <a:latin typeface="Calibri"/>
                         </a:rPr>
-                        <a:t>Du et al. / Chen et al. / El Banani et al.</a:t>
+                        <a:t>Denis, Elder and Estrada, ECCV 2008</a:t>
                       </a:r>
                     </a:p>
                   </a:txBody>
@@ -14494,7 +15771,7 @@
                           </a:solidFill>
                           <a:latin typeface="Calibri"/>
                         </a:rPr>
-                        <a:t>Depth, normals and intrinsics are linearly decodable from generative models</a:t>
+                        <a:t>York Urban Database: 102 calibrated images with true vanishing points</a:t>
                       </a:r>
                     </a:p>
                   </a:txBody>
@@ -14516,7 +15793,7 @@
                           </a:solidFill>
                           <a:latin typeface="Calibri"/>
                         </a:rPr>
-                        <a:t>Motivates the local-versus-global question</a:t>
+                        <a:t>Our hand-picked real reference and validation set</a:t>
                       </a:r>
                     </a:p>
                   </a:txBody>
@@ -14565,7 +15842,7 @@
                 </a:solidFill>
                 <a:latin typeface="Calibri"/>
               </a:rPr>
-              <a:t>Consensus: generated images violate projective geometry. Open: which constraint, by how much, and measured against which real reference.</a:t>
+              <a:t>Consensus: generated images break projective geometry. Open: which rule, by how much, and measured against which real photographs.</a:t>
             </a:r>
           </a:p>
         </p:txBody>
@@ -14829,7 +16106,7 @@
                 </a:solidFill>
                 <a:latin typeface="Calibri"/>
               </a:rPr>
-              <a:t>Learned classifiers say a violation exists, not which constraint failed or by how much.</a:t>
+              <a:t>Learned classifiers say a violation exists, not which rule failed or by how much.</a:t>
             </a:r>
           </a:p>
         </p:txBody>
@@ -14992,7 +16269,7 @@
                 </a:solidFill>
                 <a:latin typeface="Calibri"/>
               </a:rPr>
-              <a:t>Studies compare against a single curated dataset. The dependence of the conclusion on that choice is unexamined.</a:t>
+              <a:t>Studies compare against one hand-picked dataset. Whether the conclusion depends on that choice is unexamined.</a:t>
             </a:r>
           </a:p>
         </p:txBody>
@@ -15116,7 +16393,7 @@
                 </a:solidFill>
                 <a:latin typeface="Cambria"/>
               </a:rPr>
-              <a:t>Local vs global unquantified</a:t>
+              <a:t>Local vs global unmeasured</a:t>
             </a:r>
           </a:p>
         </p:txBody>
@@ -15155,7 +16432,7 @@
                 </a:solidFill>
                 <a:latin typeface="Calibri"/>
               </a:rPr>
-              <a:t>No study separates failure of scene orientation from failure of camera intrinsics.</a:t>
+              <a:t>No study separates getting the scene's directions wrong from getting the camera wrong.</a:t>
             </a:r>
           </a:p>
         </p:txBody>
@@ -15318,7 +16595,7 @@
                 </a:solidFill>
                 <a:latin typeface="Calibri"/>
               </a:rPr>
-              <a:t>The three-VP test is undefined for non-Manhattan scenes, yet is applied to them regardless.</a:t>
+              <a:t>The three-vanishing-point test does not apply to non-box-shaped scenes, yet it is applied to them anyway.</a:t>
             </a:r>
           </a:p>
         </p:txBody>
@@ -15357,7 +16634,7 @@
                 </a:solidFill>
                 <a:latin typeface="Calibri"/>
               </a:rPr>
-              <a:t>This project addresses gaps 1-3 and resolves gap 4 as a methodological contribution.</a:t>
+              <a:t>This project addresses gaps 1 to 3, and solves gap 4 as part of the method.</a:t>
             </a:r>
           </a:p>
         </p:txBody>
@@ -15521,10 +16798,10 @@
                 <a:tableStyleId>{5C22544A-7EE6-4342-B048-85BDC9FD1C3A}</a:tableStyleId>
               </a:tblPr>
               <a:tblGrid>
-                <a:gridCol w="1371600"/>
+                <a:gridCol w="1554480"/>
                 <a:gridCol w="4754880"/>
-                <a:gridCol w="2468880"/>
-                <a:gridCol w="2313432"/>
+                <a:gridCol w="2377440"/>
+                <a:gridCol w="2221992"/>
               </a:tblGrid>
               <a:tr h="502920">
                 <a:tc>
@@ -15561,7 +16838,7 @@
                           </a:solidFill>
                           <a:latin typeface="Calibri"/>
                         </a:rPr>
-                        <a:t>Constraint</a:t>
+                        <a:t>Rule</a:t>
                       </a:r>
                     </a:p>
                   </a:txBody>
@@ -15651,7 +16928,7 @@
                           </a:solidFill>
                           <a:latin typeface="Calibri"/>
                         </a:rPr>
-                        <a:t>3D-parallel lines meet at one vanishing point</a:t>
+                        <a:t>Lines parallel in 3D meet at one vanishing point</a:t>
                       </a:r>
                     </a:p>
                   </a:txBody>
@@ -15673,7 +16950,7 @@
                           </a:solidFill>
                           <a:latin typeface="Calibri"/>
                         </a:rPr>
-                        <a:t>Angular deviation (deg)</a:t>
+                        <a:t>Angle (deg)</a:t>
                       </a:r>
                     </a:p>
                   </a:txBody>
@@ -15695,7 +16972,7 @@
                           </a:solidFill>
                           <a:latin typeface="Calibri"/>
                         </a:rPr>
-                        <a:t>Implemented</a:t>
+                        <a:t>Built</a:t>
                       </a:r>
                     </a:p>
                   </a:txBody>
@@ -15741,7 +17018,7 @@
                           </a:solidFill>
                           <a:latin typeface="Calibri"/>
                         </a:rPr>
-                        <a:t>Three orthogonal directions fix one focal length and principal point</a:t>
+                        <a:t>Three directions at right angles fix one focal length and principal point</a:t>
                       </a:r>
                     </a:p>
                   </a:txBody>
@@ -15785,7 +17062,7 @@
                           </a:solidFill>
                           <a:latin typeface="Calibri"/>
                         </a:rPr>
-                        <a:t>Implemented</a:t>
+                        <a:t>Built (secondary)</a:t>
                       </a:r>
                     </a:p>
                   </a:txBody>
@@ -15831,7 +17108,7 @@
                           </a:solidFill>
                           <a:latin typeface="Calibri"/>
                         </a:rPr>
-                        <a:t>Every horizontal VP implies the same focal length with the vertical</a:t>
+                        <a:t>Every horizontal direction gives the same focal length with the vertical</a:t>
                       </a:r>
                     </a:p>
                   </a:txBody>
@@ -15875,7 +17152,7 @@
                           </a:solidFill>
                           <a:latin typeface="Calibri"/>
                         </a:rPr>
-                        <a:t>PRIMARY statistic</a:t>
+                        <a:t>PRIMARY measure</a:t>
                       </a:r>
                     </a:p>
                   </a:txBody>
@@ -15921,7 +17198,7 @@
                           </a:solidFill>
                           <a:latin typeface="Calibri"/>
                         </a:rPr>
-                        <a:t>All cast shadows consistent with one light source</a:t>
+                        <a:t>All cast shadows agree with one light source</a:t>
                       </a:r>
                     </a:p>
                   </a:txBody>
@@ -15989,7 +17266,7 @@
                           </a:solidFill>
                           <a:latin typeface="Calibri"/>
                         </a:rPr>
-                        <a:t>L1, L4-L6, L8-L9</a:t>
+                        <a:t>L1, L4 to L6, L8, L9</a:t>
                       </a:r>
                     </a:p>
                   </a:txBody>
@@ -16055,7 +17332,7 @@
                           </a:solidFill>
                           <a:latin typeface="Calibri"/>
                         </a:rPr>
-                        <a:t>Specified, future work</a:t>
+                        <a:t>Future work</a:t>
                       </a:r>
                     </a:p>
                   </a:txBody>
@@ -16150,7 +17427,7 @@
                 </a:solidFill>
                 <a:latin typeface="Calibri"/>
               </a:rPr>
-              <a:t>Key design decision: the vanishing-point estimator is given NO Manhattan or orthogonality prior. The camera test asks whether the recovered directions are orthogonal — an estimator that assumed this would make the test vacuous.</a:t>
+              <a:t>Key design decision: the vanishing-point finder is never told to look for right angles. The camera test asks whether the directions are at right angles, so building that in would make the test meaningless.</a:t>
             </a:r>
           </a:p>
         </p:txBody>
@@ -16849,7 +18126,7 @@
                 </a:solidFill>
                 <a:latin typeface="Calibri"/>
               </a:rPr>
-              <a:t>Compare vs real</a:t>
+              <a:t>Compare with real</a:t>
             </a:r>
           </a:p>
           <a:p>
@@ -16861,7 +18138,7 @@
                 </a:solidFill>
                 <a:latin typeface="Calibri"/>
               </a:rPr>
-              <a:t>null distribution</a:t>
+              <a:t>photographs</a:t>
             </a:r>
           </a:p>
         </p:txBody>
@@ -16900,7 +18177,7 @@
                 </a:solidFill>
                 <a:latin typeface="Calibri"/>
               </a:rPr>
-              <a:t>Rejected images are reported as a selection rate — “how often is a single camera even identifiable?” is itself a result about the generator.</a:t>
+              <a:t>Images that fail the rule are reported as a selection rate: how often one camera can even be identified is itself a result about the generator.</a:t>
             </a:r>
           </a:p>
         </p:txBody>
@@ -17024,7 +18301,7 @@
                 </a:solidFill>
                 <a:latin typeface="Calibri"/>
               </a:rPr>
-              <a:t>•  3 VP families, each ≥ 8% of line length</a:t>
+              <a:t>•  3 line families, each ≥ 8% of the line length</a:t>
             </a:r>
           </a:p>
           <a:p>
@@ -17040,7 +18317,7 @@
                 </a:solidFill>
                 <a:latin typeface="Calibri"/>
               </a:rPr>
-              <a:t>•  each localised &lt; 1° (bootstrap)</a:t>
+              <a:t>•  each vanishing point pinned to &lt; 1° (bootstrap)</a:t>
             </a:r>
           </a:p>
           <a:p>
@@ -17056,7 +18333,7 @@
                 </a:solidFill>
                 <a:latin typeface="Calibri"/>
               </a:rPr>
-              <a:t>•  VP separation ≥ 10° and ≥ 5× its uncertainty</a:t>
+              <a:t>•  each pair ≥ 10° apart and ≥ 5× its uncertainty</a:t>
             </a:r>
           </a:p>
           <a:p>
@@ -17072,7 +18349,7 @@
                 </a:solidFill>
                 <a:latin typeface="Calibri"/>
               </a:rPr>
-              <a:t>•  inliers span ≥ 12% of the diagonal</a:t>
+              <a:t>•  each family spread over ≥ 12% of the diagonal</a:t>
             </a:r>
           </a:p>
         </p:txBody>
@@ -17196,7 +18473,7 @@
                 </a:solidFill>
                 <a:latin typeface="Calibri"/>
               </a:rPr>
-              <a:t>•  Orthogonality, focal length and orthocentre are EXCLUDED</a:t>
+              <a:t>•  Right angles, focal length and the orthocentre are EXCLUDED</a:t>
             </a:r>
           </a:p>
           <a:p>
@@ -17212,7 +18489,7 @@
                 </a:solidFill>
                 <a:latin typeface="Calibri"/>
               </a:rPr>
-              <a:t>•  Validated: selected images have 90% of VPs within 5° of ground truth (vs 57% rejected)</a:t>
+              <a:t>•  Admitted images: 90% of vanishing points within 5° of the truth (57% for rejected)</a:t>
             </a:r>
           </a:p>
           <a:p>
@@ -17443,7 +18720,7 @@
           <a:p>
             <a:pPr>
               <a:spcAft>
-                <a:spcPts val="700"/>
+                <a:spcPts val="600"/>
               </a:spcAft>
             </a:pPr>
             <a:r>
@@ -17459,7 +18736,7 @@
           <a:p>
             <a:pPr>
               <a:spcAft>
-                <a:spcPts val="700"/>
+                <a:spcPts val="600"/>
               </a:spcAft>
             </a:pPr>
             <a:r>
@@ -17475,7 +18752,7 @@
           <a:p>
             <a:pPr>
               <a:spcAft>
-                <a:spcPts val="700"/>
+                <a:spcPts val="600"/>
               </a:spcAft>
             </a:pPr>
             <a:r>
@@ -17485,13 +18762,13 @@
                 </a:solidFill>
                 <a:latin typeface="Calibri"/>
               </a:rPr>
-              <a:t>•  NumPy / SciPy (LP, least squares)</a:t>
+              <a:t>•  NumPy, SciPy (LP, least squares)</a:t>
             </a:r>
           </a:p>
           <a:p>
             <a:pPr>
               <a:spcAft>
-                <a:spcPts val="700"/>
+                <a:spcPts val="600"/>
               </a:spcAft>
             </a:pPr>
             <a:r>
@@ -17507,7 +18784,7 @@
           <a:p>
             <a:pPr>
               <a:spcAft>
-                <a:spcPts val="700"/>
+                <a:spcPts val="600"/>
               </a:spcAft>
             </a:pPr>
             <a:r>
@@ -17523,7 +18800,7 @@
           <a:p>
             <a:pPr>
               <a:spcAft>
-                <a:spcPts val="700"/>
+                <a:spcPts val="600"/>
               </a:spcAft>
             </a:pPr>
             <a:r>
@@ -17539,7 +18816,23 @@
           <a:p>
             <a:pPr>
               <a:spcAft>
-                <a:spcPts val="700"/>
+                <a:spcPts val="600"/>
+              </a:spcAft>
+            </a:pPr>
+            <a:r>
+              <a:rPr sz="1250" b="0">
+                <a:solidFill>
+                  <a:srgbClr val="FFFFFF"/>
+                </a:solidFill>
+                <a:latin typeface="Calibri"/>
+              </a:rPr>
+              <a:t>•  Streamlit 1.58 (demo app)</a:t>
+            </a:r>
+          </a:p>
+          <a:p>
+            <a:pPr>
+              <a:spcAft>
+                <a:spcPts val="600"/>
               </a:spcAft>
             </a:pPr>
             <a:r>
@@ -17663,7 +18956,7 @@
           <a:p>
             <a:pPr>
               <a:spcAft>
-                <a:spcPts val="700"/>
+                <a:spcPts val="600"/>
               </a:spcAft>
             </a:pPr>
             <a:r>
@@ -17673,13 +18966,13 @@
                 </a:solidFill>
                 <a:latin typeface="Calibri"/>
               </a:rPr>
-              <a:t>•  lines — LSD detection</a:t>
+              <a:t>•  lines: LSD detection</a:t>
             </a:r>
           </a:p>
           <a:p>
             <a:pPr>
               <a:spcAft>
-                <a:spcPts val="700"/>
+                <a:spcPts val="600"/>
               </a:spcAft>
             </a:pPr>
             <a:r>
@@ -17689,13 +18982,13 @@
                 </a:solidFill>
                 <a:latin typeface="Calibri"/>
               </a:rPr>
-              <a:t>•  vp — RANSAC + refinement</a:t>
+              <a:t>•  vp: RANSAC + refinement</a:t>
             </a:r>
           </a:p>
           <a:p>
             <a:pPr>
               <a:spcAft>
-                <a:spcPts val="700"/>
+                <a:spcPts val="600"/>
               </a:spcAft>
             </a:pPr>
             <a:r>
@@ -17705,13 +18998,13 @@
                 </a:solidFill>
                 <a:latin typeface="Calibri"/>
               </a:rPr>
-              <a:t>•  camera — L3, Atlanta test</a:t>
+              <a:t>•  selection: applicability rule</a:t>
             </a:r>
           </a:p>
           <a:p>
             <a:pPr>
               <a:spcAft>
-                <a:spcPts val="700"/>
+                <a:spcPts val="600"/>
               </a:spcAft>
             </a:pPr>
             <a:r>
@@ -17721,13 +19014,13 @@
                 </a:solidFill>
                 <a:latin typeface="Calibri"/>
               </a:rPr>
-              <a:t>•  selection — applicability rule</a:t>
+              <a:t>•  camera: focal length, Atlanta test</a:t>
             </a:r>
           </a:p>
           <a:p>
             <a:pPr>
               <a:spcAft>
-                <a:spcPts val="700"/>
+                <a:spcPts val="600"/>
               </a:spcAft>
             </a:pPr>
             <a:r>
@@ -17737,13 +19030,13 @@
                 </a:solidFill>
                 <a:latin typeface="Calibri"/>
               </a:rPr>
-              <a:t>•  regional — windowed cameras</a:t>
+              <a:t>•  explain: one image, end to end</a:t>
             </a:r>
           </a:p>
           <a:p>
             <a:pPr>
               <a:spcAft>
-                <a:spcPts val="700"/>
+                <a:spcPts val="600"/>
               </a:spcAft>
             </a:pPr>
             <a:r>
@@ -17753,13 +19046,13 @@
                 </a:solidFill>
                 <a:latin typeface="Calibri"/>
               </a:rPr>
-              <a:t>•  shadows — wedge LP</a:t>
+              <a:t>•  stats: confidence intervals</a:t>
             </a:r>
           </a:p>
           <a:p>
             <a:pPr>
               <a:spcAft>
-                <a:spcPts val="700"/>
+                <a:spcPts val="600"/>
               </a:spcAft>
             </a:pPr>
             <a:r>
@@ -17769,7 +19062,23 @@
                 </a:solidFill>
                 <a:latin typeface="Calibri"/>
               </a:rPr>
-              <a:t>•  synth — scenes + injectors</a:t>
+              <a:t>•  appmodel: the app's score</a:t>
+            </a:r>
+          </a:p>
+          <a:p>
+            <a:pPr>
+              <a:spcAft>
+                <a:spcPts val="600"/>
+              </a:spcAft>
+            </a:pPr>
+            <a:r>
+              <a:rPr sz="1250" b="0">
+                <a:solidFill>
+                  <a:srgbClr val="1A1A1A"/>
+                </a:solidFill>
+                <a:latin typeface="Calibri"/>
+              </a:rPr>
+              <a:t>•  shadows, synth: L7 and tests</a:t>
             </a:r>
           </a:p>
         </p:txBody>
@@ -17854,7 +19163,7 @@
                 </a:solidFill>
                 <a:latin typeface="Calibri"/>
               </a:rPr>
-              <a:t>VALIDATION (18 TESTS)</a:t>
+              <a:t>VALIDATION (25 TESTS)</a:t>
             </a:r>
           </a:p>
         </p:txBody>
@@ -17925,7 +19234,7 @@
                 </a:solidFill>
                 <a:latin typeface="Calibri"/>
               </a:rPr>
-              <a:t>•  Each residual must respond to ITS OWN constraint and stay flat for others</a:t>
+              <a:t>•  Each residual must react to its OWN rule and stay flat for the others</a:t>
             </a:r>
           </a:p>
           <a:p>
@@ -17941,7 +19250,7 @@
                 </a:solidFill>
                 <a:latin typeface="Calibri"/>
               </a:rPr>
-              <a:t>•  Residuals must rise monotonically with injected violation</a:t>
+              <a:t>•  Residuals must rise steadily with the injected violation</a:t>
             </a:r>
           </a:p>
         </p:txBody>

--- a/docs/report/CA3_Presentation_Geometric_Consistency.pptx
+++ b/docs/report/CA3_Presentation_Geometric_Consistency.pptx
@@ -26,6 +26,8 @@
     <p:sldId id="274" r:id="rId26"/>
     <p:sldId id="275" r:id="rId27"/>
     <p:sldId id="276" r:id="rId28"/>
+    <p:sldId id="277" r:id="rId29"/>
+    <p:sldId id="278" r:id="rId30"/>
   </p:sldIdLst>
   <p:sldSz cx="12191695" cy="6858000" type="screen4x3"/>
   <p:notesSz cx="6858000" cy="9144000"/>
@@ -1082,7 +1084,7 @@
           <a:lstStyle/>
           <a:p>
             <a:r>
-              <a:t>Gemini (nano banana, via Antigravity) and ChatGPT images were made in September 2026 from the first prompt set, so they are compared with the SD and SDXL images from that same set. Next step: 250 line-rich prompts per model at full resolution.</a:t>
+              <a:t>Gemini (nano banana, via Antigravity) and ChatGPT images were made in September 2026 from the first prompt set, so they are compared with the SD and SDXL images from that same set. Next step: 250 line-rich prompts per model at full resolution. The detection AUCs in the last bullet are the demo app's cross-validated scores for real photos against each generator.</a:t>
             </a:r>
           </a:p>
         </p:txBody>
@@ -1152,7 +1154,7 @@
           <a:lstStyle/>
           <a:p>
             <a:r>
-              <a:t>The app runs the same code as the report. Bookmark the examples link before presenting. If someone uploads a landscape or a portrait, it will say it cannot measure it: that is the applicability rule working, not a bug.</a:t>
+              <a:t>Walk through it left to right, then right to left. The diamond is the applicability rule: an image without lines in three directions gets no score instead of a guess. The random forest only sees the ten numbers, so a high score always means the geometry is off, never texture or a watermark. Calibration turns the vote into a probability, re-based so that real and AI were equally likely before looking.</a:t>
             </a:r>
           </a:p>
         </p:txBody>
@@ -1222,7 +1224,7 @@
           <a:lstStyle/>
           <a:p>
             <a:r>
-              <a:t>If asked for one sentence, use the line at the bottom.</a:t>
+              <a:t>Swapping the classifier does not help: the random forest is already the best, so the limit is in the ten measurements, not the model. More real photos and more ChatGPT images are the honest way up. Numbers: results/app_model_report.md and results/app_model_comparison.md.</a:t>
             </a:r>
           </a:p>
         </p:txBody>
@@ -1362,7 +1364,7 @@
           <a:lstStyle/>
           <a:p>
             <a:r>
-              <a:t>The powered frontier test is the highest-value next step and needs no new code.</a:t>
+              <a:t>The app runs the same code as the report. Bookmark the examples link before presenting. If someone uploads a landscape or a portrait, it will say it cannot measure it: that is the applicability rule working, not a bug.</a:t>
             </a:r>
           </a:p>
         </p:txBody>
@@ -1388,6 +1390,146 @@
 </file>
 
 <file path=ppt/notesSlides/notesSlide21.xml><?xml version="1.0" encoding="utf-8"?>
+<p:notes xmlns:a="http://schemas.openxmlformats.org/drawingml/2006/main" xmlns:p="http://schemas.openxmlformats.org/presentationml/2006/main" xmlns:r="http://schemas.openxmlformats.org/officeDocument/2006/relationships">
+  <p:cSld>
+    <p:spTree>
+      <p:nvGrpSpPr>
+        <p:cNvPr id="1" name=""/>
+        <p:cNvGrpSpPr/>
+        <p:nvPr/>
+      </p:nvGrpSpPr>
+      <p:grpSpPr>
+        <a:xfrm>
+          <a:off x="0" y="0"/>
+          <a:ext cx="0" cy="0"/>
+          <a:chOff x="0" y="0"/>
+          <a:chExt cx="0" cy="0"/>
+        </a:xfrm>
+      </p:grpSpPr>
+      <p:sp>
+        <p:nvSpPr>
+          <p:cNvPr id="2" name="Slide Image Placeholder 1"/>
+          <p:cNvSpPr>
+            <a:spLocks noGrp="1"/>
+          </p:cNvSpPr>
+          <p:nvPr>
+            <p:ph type="sldImg" idx="2"/>
+          </p:nvPr>
+        </p:nvSpPr>
+        <p:spPr/>
+      </p:sp>
+      <p:sp>
+        <p:nvSpPr>
+          <p:cNvPr id="3" name="Notes Placeholder 2"/>
+          <p:cNvSpPr>
+            <a:spLocks noGrp="1"/>
+          </p:cNvSpPr>
+          <p:nvPr>
+            <p:ph type="body" idx="3" sz="quarter"/>
+          </p:nvPr>
+        </p:nvSpPr>
+        <p:spPr/>
+        <p:txBody>
+          <a:bodyPr/>
+          <a:lstStyle/>
+          <a:p>
+            <a:r>
+              <a:t>If asked for one sentence, use the line at the bottom.</a:t>
+            </a:r>
+          </a:p>
+        </p:txBody>
+      </p:sp>
+      <p:sp>
+        <p:nvSpPr>
+          <p:cNvPr id="4" name="Slide Number Placeholder 3"/>
+          <p:cNvSpPr>
+            <a:spLocks noGrp="1"/>
+          </p:cNvSpPr>
+          <p:nvPr>
+            <p:ph type="sldNum" idx="5" sz="quarter"/>
+          </p:nvPr>
+        </p:nvSpPr>
+        <p:spPr/>
+      </p:sp>
+    </p:spTree>
+  </p:cSld>
+  <p:clrMapOvr>
+    <a:masterClrMapping/>
+  </p:clrMapOvr>
+</p:notes>
+</file>
+
+<file path=ppt/notesSlides/notesSlide22.xml><?xml version="1.0" encoding="utf-8"?>
+<p:notes xmlns:a="http://schemas.openxmlformats.org/drawingml/2006/main" xmlns:p="http://schemas.openxmlformats.org/presentationml/2006/main" xmlns:r="http://schemas.openxmlformats.org/officeDocument/2006/relationships">
+  <p:cSld>
+    <p:spTree>
+      <p:nvGrpSpPr>
+        <p:cNvPr id="1" name=""/>
+        <p:cNvGrpSpPr/>
+        <p:nvPr/>
+      </p:nvGrpSpPr>
+      <p:grpSpPr>
+        <a:xfrm>
+          <a:off x="0" y="0"/>
+          <a:ext cx="0" cy="0"/>
+          <a:chOff x="0" y="0"/>
+          <a:chExt cx="0" cy="0"/>
+        </a:xfrm>
+      </p:grpSpPr>
+      <p:sp>
+        <p:nvSpPr>
+          <p:cNvPr id="2" name="Slide Image Placeholder 1"/>
+          <p:cNvSpPr>
+            <a:spLocks noGrp="1"/>
+          </p:cNvSpPr>
+          <p:nvPr>
+            <p:ph type="sldImg" idx="2"/>
+          </p:nvPr>
+        </p:nvSpPr>
+        <p:spPr/>
+      </p:sp>
+      <p:sp>
+        <p:nvSpPr>
+          <p:cNvPr id="3" name="Notes Placeholder 2"/>
+          <p:cNvSpPr>
+            <a:spLocks noGrp="1"/>
+          </p:cNvSpPr>
+          <p:nvPr>
+            <p:ph type="body" idx="3" sz="quarter"/>
+          </p:nvPr>
+        </p:nvSpPr>
+        <p:spPr/>
+        <p:txBody>
+          <a:bodyPr/>
+          <a:lstStyle/>
+          <a:p>
+            <a:r>
+              <a:t>The powered frontier test is the highest-value next step and needs no new code.</a:t>
+            </a:r>
+          </a:p>
+        </p:txBody>
+      </p:sp>
+      <p:sp>
+        <p:nvSpPr>
+          <p:cNvPr id="4" name="Slide Number Placeholder 3"/>
+          <p:cNvSpPr>
+            <a:spLocks noGrp="1"/>
+          </p:cNvSpPr>
+          <p:nvPr>
+            <p:ph type="sldNum" idx="5" sz="quarter"/>
+          </p:nvPr>
+        </p:nvSpPr>
+        <p:spPr/>
+      </p:sp>
+    </p:spTree>
+  </p:cSld>
+  <p:clrMapOvr>
+    <a:masterClrMapping/>
+  </p:clrMapOvr>
+</p:notes>
+</file>
+
+<file path=ppt/notesSlides/notesSlide23.xml><?xml version="1.0" encoding="utf-8"?>
 <p:notes xmlns:a="http://schemas.openxmlformats.org/drawingml/2006/main" xmlns:p="http://schemas.openxmlformats.org/presentationml/2006/main" xmlns:r="http://schemas.openxmlformats.org/officeDocument/2006/relationships">
   <p:cSld>
     <p:spTree>
@@ -5156,6 +5298,22 @@
                 <a:latin typeface="Calibri"/>
               </a:rPr>
               <a:t>Academic Year 2026-27</a:t>
+            </a:r>
+          </a:p>
+          <a:p>
+            <a:pPr algn="l">
+              <a:spcAft>
+                <a:spcPts val="400"/>
+              </a:spcAft>
+            </a:pPr>
+            <a:r>
+              <a:rPr sz="1300" b="0" i="0">
+                <a:solidFill>
+                  <a:srgbClr val="D6E2EA"/>
+                </a:solidFill>
+                <a:latin typeface="Calibri"/>
+              </a:rPr>
+              <a:t>Code and data: github.com/shmizi/perspective-can-t-lie</a:t>
             </a:r>
           </a:p>
         </p:txBody>
@@ -10481,6 +10639,22 @@
               <a:t>•  ChatGPT's impossible-pair rate (39%) looks real; its focal spread does not</a:t>
             </a:r>
           </a:p>
+          <a:p>
+            <a:pPr>
+              <a:spcAft>
+                <a:spcPts val="1000"/>
+              </a:spcAft>
+            </a:pPr>
+            <a:r>
+              <a:rPr sz="1400" b="0">
+                <a:solidFill>
+                  <a:srgbClr val="1A1A1A"/>
+                </a:solidFill>
+                <a:latin typeface="Calibri"/>
+              </a:rPr>
+              <a:t>•  Hardest to detect: ChatGPT AUC 0.59, Gemini 0.76 (SD models 0.81 to 0.84)</a:t>
+            </a:r>
+          </a:p>
         </p:txBody>
       </p:sp>
       <p:sp>
@@ -10664,7 +10838,7 @@
                 </a:solidFill>
                 <a:latin typeface="Cambria"/>
               </a:rPr>
-              <a:t>Demonstration: One Camera or Not?</a:t>
+              <a:t>How the App Decides</a:t>
             </a:r>
           </a:p>
         </p:txBody>
@@ -10703,14 +10877,14 @@
                 </a:solidFill>
                 <a:latin typeface="Calibri"/>
               </a:rPr>
-              <a:t>Live app: any image in, a measured and explained answer out</a:t>
+              <a:t>Geometry in, a calibrated score out. The model never sees the pixels.</a:t>
             </a:r>
           </a:p>
         </p:txBody>
       </p:sp>
       <p:pic>
         <p:nvPicPr>
-          <p:cNvPr id="5" name="Picture 4" descr="app_summary.png"/>
+          <p:cNvPr id="5" name="Picture 4" descr="app_workflow_slide.png"/>
           <p:cNvPicPr>
             <a:picLocks noChangeAspect="1"/>
           </p:cNvPicPr>
@@ -10724,94 +10898,24 @@
         </p:blipFill>
         <p:spPr>
           <a:xfrm>
-            <a:off x="640080" y="1737360"/>
-            <a:ext cx="5760720" cy="1688487"/>
+            <a:off x="640080" y="1691640"/>
+            <a:ext cx="10908792" cy="4531344"/>
           </a:xfrm>
           <a:prstGeom prst="rect">
             <a:avLst/>
           </a:prstGeom>
         </p:spPr>
       </p:pic>
-      <p:pic>
-        <p:nvPicPr>
-          <p:cNvPr id="6" name="Picture 5" descr="app_result_card.png"/>
-          <p:cNvPicPr>
-            <a:picLocks noChangeAspect="1"/>
-          </p:cNvPicPr>
-          <p:nvPr/>
-        </p:nvPicPr>
-        <p:blipFill>
-          <a:blip r:embed="rId3"/>
-          <a:stretch>
-            <a:fillRect/>
-          </a:stretch>
-        </p:blipFill>
-        <p:spPr>
-          <a:xfrm>
-            <a:off x="640080" y="3611880"/>
-            <a:ext cx="5760720" cy="2458238"/>
-          </a:xfrm>
-          <a:prstGeom prst="rect">
-            <a:avLst/>
-          </a:prstGeom>
-        </p:spPr>
-      </p:pic>
-      <p:sp>
-        <p:nvSpPr>
-          <p:cNvPr id="7" name="Rounded Rectangle 6"/>
-          <p:cNvSpPr/>
-          <p:nvPr/>
-        </p:nvSpPr>
-        <p:spPr>
-          <a:xfrm>
-            <a:off x="6629400" y="1737360"/>
-            <a:ext cx="4919472" cy="4709160"/>
-          </a:xfrm>
-          <a:prstGeom prst="roundRect">
-            <a:avLst>
-              <a:gd name="adj" fmla="val 6000"/>
-            </a:avLst>
-          </a:prstGeom>
-          <a:solidFill>
-            <a:srgbClr val="F4F6F8"/>
-          </a:solidFill>
-          <a:ln>
-            <a:noFill/>
-          </a:ln>
-          <a:effectLst/>
-        </p:spPr>
-        <p:style>
-          <a:lnRef idx="1">
-            <a:schemeClr val="accent1"/>
-          </a:lnRef>
-          <a:fillRef idx="3">
-            <a:schemeClr val="accent1"/>
-          </a:fillRef>
-          <a:effectRef idx="2">
-            <a:schemeClr val="accent1"/>
-          </a:effectRef>
-          <a:fontRef idx="minor">
-            <a:schemeClr val="lt1"/>
-          </a:fontRef>
-        </p:style>
-        <p:txBody>
-          <a:bodyPr rtlCol="0" anchor="ctr"/>
-          <a:lstStyle/>
-          <a:p>
-            <a:pPr algn="ctr"/>
-          </a:p>
-        </p:txBody>
-      </p:sp>
-      <p:sp>
-        <p:nvSpPr>
-          <p:cNvPr id="8" name="TextBox 7"/>
+      <p:sp>
+        <p:nvSpPr>
+          <p:cNvPr id="6" name="TextBox 5"/>
           <p:cNvSpPr txBox="1"/>
           <p:nvPr/>
         </p:nvSpPr>
         <p:spPr>
           <a:xfrm>
-            <a:off x="6903720" y="1920240"/>
-            <a:ext cx="4389120" cy="365760"/>
+            <a:off x="640080" y="6309360"/>
+            <a:ext cx="10908792" cy="365760"/>
           </a:xfrm>
           <a:prstGeom prst="rect">
             <a:avLst/>
@@ -10830,265 +10934,13 @@
               </a:spcAft>
             </a:pPr>
             <a:r>
-              <a:rPr sz="1200" b="1" i="0">
-                <a:solidFill>
-                  <a:srgbClr val="12263A"/>
+              <a:rPr sz="1300" b="0" i="1">
+                <a:solidFill>
+                  <a:srgbClr val="5A6672"/>
                 </a:solidFill>
                 <a:latin typeface="Calibri"/>
               </a:rPr>
-              <a:t>RUN</a:t>
-            </a:r>
-          </a:p>
-        </p:txBody>
-      </p:sp>
-      <p:sp>
-        <p:nvSpPr>
-          <p:cNvPr id="9" name="TextBox 8"/>
-          <p:cNvSpPr txBox="1"/>
-          <p:nvPr/>
-        </p:nvSpPr>
-        <p:spPr>
-          <a:xfrm>
-            <a:off x="6903720" y="2286000"/>
-            <a:ext cx="4389120" cy="548640"/>
-          </a:xfrm>
-          <a:prstGeom prst="rect">
-            <a:avLst/>
-          </a:prstGeom>
-          <a:noFill/>
-        </p:spPr>
-        <p:txBody>
-          <a:bodyPr wrap="square" lIns="0" rIns="0" tIns="0" bIns="0" anchor="t">
-            <a:spAutoFit/>
-          </a:bodyPr>
-          <a:lstStyle/>
-          <a:p>
-            <a:pPr algn="l">
-              <a:spcAft>
-                <a:spcPts val="200"/>
-              </a:spcAft>
-            </a:pPr>
-            <a:r>
-              <a:rPr sz="1200" b="0" i="0">
-                <a:solidFill>
-                  <a:srgbClr val="1C7293"/>
-                </a:solidFill>
-                <a:latin typeface="Courier New"/>
-              </a:rPr>
-              <a:t>python -m streamlit run app/streamlit_app.py</a:t>
-            </a:r>
-          </a:p>
-          <a:p>
-            <a:pPr algn="l">
-              <a:spcAft>
-                <a:spcPts val="200"/>
-              </a:spcAft>
-            </a:pPr>
-            <a:r>
-              <a:rPr sz="1200" b="0" i="0">
-                <a:solidFill>
-                  <a:srgbClr val="1C7293"/>
-                </a:solidFill>
-                <a:latin typeface="Courier New"/>
-              </a:rPr>
-              <a:t>localhost:8501/?examples=all</a:t>
-            </a:r>
-          </a:p>
-        </p:txBody>
-      </p:sp>
-      <p:sp>
-        <p:nvSpPr>
-          <p:cNvPr id="10" name="TextBox 9"/>
-          <p:cNvSpPr txBox="1"/>
-          <p:nvPr/>
-        </p:nvSpPr>
-        <p:spPr>
-          <a:xfrm>
-            <a:off x="6903720" y="2971800"/>
-            <a:ext cx="4389120" cy="365760"/>
-          </a:xfrm>
-          <a:prstGeom prst="rect">
-            <a:avLst/>
-          </a:prstGeom>
-          <a:noFill/>
-        </p:spPr>
-        <p:txBody>
-          <a:bodyPr wrap="square" lIns="0" rIns="0" tIns="0" bIns="0" anchor="t">
-            <a:spAutoFit/>
-          </a:bodyPr>
-          <a:lstStyle/>
-          <a:p>
-            <a:pPr algn="l">
-              <a:spcAft>
-                <a:spcPts val="600"/>
-              </a:spcAft>
-            </a:pPr>
-            <a:r>
-              <a:rPr sz="1200" b="1" i="0">
-                <a:solidFill>
-                  <a:srgbClr val="12263A"/>
-                </a:solidFill>
-                <a:latin typeface="Calibri"/>
-              </a:rPr>
-              <a:t>DEMO ORDER (3 MINUTES)</a:t>
-            </a:r>
-          </a:p>
-        </p:txBody>
-      </p:sp>
-      <p:sp>
-        <p:nvSpPr>
-          <p:cNvPr id="11" name="TextBox 10"/>
-          <p:cNvSpPr txBox="1"/>
-          <p:nvPr/>
-        </p:nvSpPr>
-        <p:spPr>
-          <a:xfrm>
-            <a:off x="6903720" y="3337560"/>
-            <a:ext cx="4389120" cy="2011680"/>
-          </a:xfrm>
-          <a:prstGeom prst="rect">
-            <a:avLst/>
-          </a:prstGeom>
-          <a:noFill/>
-        </p:spPr>
-        <p:txBody>
-          <a:bodyPr wrap="square" lIns="0" rIns="0" tIns="0" bIns="0">
-            <a:spAutoFit/>
-          </a:bodyPr>
-          <a:lstStyle/>
-          <a:p>
-            <a:pPr>
-              <a:spcAft>
-                <a:spcPts val="400"/>
-              </a:spcAft>
-            </a:pPr>
-            <a:r>
-              <a:rPr sz="1250" b="0">
-                <a:solidFill>
-                  <a:srgbClr val="1A1A1A"/>
-                </a:solidFill>
-                <a:latin typeface="Calibri"/>
-              </a:rPr>
-              <a:t>•  Real corridor: 649 and 713 px vs a true 675 px</a:t>
-            </a:r>
-          </a:p>
-          <a:p>
-            <a:pPr>
-              <a:spcAft>
-                <a:spcPts val="400"/>
-              </a:spcAft>
-            </a:pPr>
-            <a:r>
-              <a:rPr sz="1250" b="0">
-                <a:solidFill>
-                  <a:srgbClr val="1A1A1A"/>
-                </a:solidFill>
-                <a:latin typeface="Calibri"/>
-              </a:rPr>
-              <a:t>•  Gemini classroom: directions disagree by 94%</a:t>
-            </a:r>
-          </a:p>
-          <a:p>
-            <a:pPr>
-              <a:spcAft>
-                <a:spcPts val="400"/>
-              </a:spcAft>
-            </a:pPr>
-            <a:r>
-              <a:rPr sz="1250" b="0">
-                <a:solidFill>
-                  <a:srgbClr val="1A1A1A"/>
-                </a:solidFill>
-                <a:latin typeface="Calibri"/>
-              </a:rPr>
-              <a:t>•  ChatGPT lecture hall: “unclear”, the hard case</a:t>
-            </a:r>
-          </a:p>
-          <a:p>
-            <a:pPr>
-              <a:spcAft>
-                <a:spcPts val="400"/>
-              </a:spcAft>
-            </a:pPr>
-            <a:r>
-              <a:rPr sz="1250" b="0">
-                <a:solidFill>
-                  <a:srgbClr val="1A1A1A"/>
-                </a:solidFill>
-                <a:latin typeface="Calibri"/>
-              </a:rPr>
-              <a:t>•  A Gemini image that fools it: a check, not proof</a:t>
-            </a:r>
-          </a:p>
-          <a:p>
-            <a:pPr>
-              <a:spcAft>
-                <a:spcPts val="400"/>
-              </a:spcAft>
-            </a:pPr>
-            <a:r>
-              <a:rPr sz="1250" b="0">
-                <a:solidFill>
-                  <a:srgbClr val="1A1A1A"/>
-                </a:solidFill>
-                <a:latin typeface="Calibri"/>
-              </a:rPr>
-              <a:t>•  An image it cannot measure, and why</a:t>
-            </a:r>
-          </a:p>
-          <a:p>
-            <a:pPr>
-              <a:spcAft>
-                <a:spcPts val="400"/>
-              </a:spcAft>
-            </a:pPr>
-            <a:r>
-              <a:rPr sz="1250" b="0">
-                <a:solidFill>
-                  <a:srgbClr val="1A1A1A"/>
-                </a:solidFill>
-                <a:latin typeface="Calibri"/>
-              </a:rPr>
-              <a:t>•  An image from the audience</a:t>
-            </a:r>
-          </a:p>
-        </p:txBody>
-      </p:sp>
-      <p:sp>
-        <p:nvSpPr>
-          <p:cNvPr id="12" name="TextBox 11"/>
-          <p:cNvSpPr txBox="1"/>
-          <p:nvPr/>
-        </p:nvSpPr>
-        <p:spPr>
-          <a:xfrm>
-            <a:off x="6903720" y="5486400"/>
-            <a:ext cx="4389120" cy="822960"/>
-          </a:xfrm>
-          <a:prstGeom prst="rect">
-            <a:avLst/>
-          </a:prstGeom>
-          <a:noFill/>
-        </p:spPr>
-        <p:txBody>
-          <a:bodyPr wrap="square" lIns="0" rIns="0" tIns="0" bIns="0" anchor="t">
-            <a:spAutoFit/>
-          </a:bodyPr>
-          <a:lstStyle/>
-          <a:p>
-            <a:pPr algn="l">
-              <a:spcAft>
-                <a:spcPts val="600"/>
-              </a:spcAft>
-            </a:pPr>
-            <a:r>
-              <a:rPr sz="1200" b="0" i="1">
-                <a:solidFill>
-                  <a:srgbClr val="5A6672"/>
-                </a:solidFill>
-                <a:latin typeface="Calibri"/>
-              </a:rPr>
-              <a:t>Score: AUC 0.80, well calibrated. Flags 78% of AI images, clears 71% of real photos. Built-in examples were held out of training.</a:t>
+              <a:t>Same measurement code as the report. The built-in demo examples were held out of training.</a:t>
             </a:r>
           </a:p>
         </p:txBody>
@@ -11126,6 +10978,1072 @@
             <a:avLst/>
           </a:prstGeom>
           <a:solidFill>
+            <a:srgbClr val="FFFFFF"/>
+          </a:solidFill>
+          <a:ln>
+            <a:noFill/>
+          </a:ln>
+          <a:effectLst/>
+        </p:spPr>
+        <p:style>
+          <a:lnRef idx="1">
+            <a:schemeClr val="accent1"/>
+          </a:lnRef>
+          <a:fillRef idx="3">
+            <a:schemeClr val="accent1"/>
+          </a:fillRef>
+          <a:effectRef idx="2">
+            <a:schemeClr val="accent1"/>
+          </a:effectRef>
+          <a:fontRef idx="minor">
+            <a:schemeClr val="lt1"/>
+          </a:fontRef>
+        </p:style>
+        <p:txBody>
+          <a:bodyPr rtlCol="0" anchor="ctr"/>
+          <a:lstStyle/>
+          <a:p>
+            <a:pPr algn="ctr"/>
+          </a:p>
+        </p:txBody>
+      </p:sp>
+      <p:sp>
+        <p:nvSpPr>
+          <p:cNvPr id="3" name="TextBox 2"/>
+          <p:cNvSpPr txBox="1"/>
+          <p:nvPr/>
+        </p:nvSpPr>
+        <p:spPr>
+          <a:xfrm>
+            <a:off x="640080" y="457200"/>
+            <a:ext cx="10911535" cy="822960"/>
+          </a:xfrm>
+          <a:prstGeom prst="rect">
+            <a:avLst/>
+          </a:prstGeom>
+          <a:noFill/>
+        </p:spPr>
+        <p:txBody>
+          <a:bodyPr wrap="square" lIns="0" rIns="0" tIns="0" bIns="0" anchor="t">
+            <a:spAutoFit/>
+          </a:bodyPr>
+          <a:lstStyle/>
+          <a:p>
+            <a:pPr algn="l">
+              <a:spcAft>
+                <a:spcPts val="600"/>
+              </a:spcAft>
+            </a:pPr>
+            <a:r>
+              <a:rPr sz="3200" b="1" i="0">
+                <a:solidFill>
+                  <a:srgbClr val="12263A"/>
+                </a:solidFill>
+                <a:latin typeface="Cambria"/>
+              </a:rPr>
+              <a:t>How Far to Trust the Score</a:t>
+            </a:r>
+          </a:p>
+        </p:txBody>
+      </p:sp>
+      <p:sp>
+        <p:nvSpPr>
+          <p:cNvPr id="4" name="TextBox 3"/>
+          <p:cNvSpPr txBox="1"/>
+          <p:nvPr/>
+        </p:nvSpPr>
+        <p:spPr>
+          <a:xfrm>
+            <a:off x="640080" y="1207008"/>
+            <a:ext cx="10911535" cy="411480"/>
+          </a:xfrm>
+          <a:prstGeom prst="rect">
+            <a:avLst/>
+          </a:prstGeom>
+          <a:noFill/>
+        </p:spPr>
+        <p:txBody>
+          <a:bodyPr wrap="square" lIns="0" rIns="0" tIns="0" bIns="0" anchor="t">
+            <a:spAutoFit/>
+          </a:bodyPr>
+          <a:lstStyle/>
+          <a:p>
+            <a:pPr algn="l">
+              <a:spcAft>
+                <a:spcPts val="600"/>
+              </a:spcAft>
+            </a:pPr>
+            <a:r>
+              <a:rPr sz="1400" b="0" i="1">
+                <a:solidFill>
+                  <a:srgbClr val="5A6672"/>
+                </a:solidFill>
+                <a:latin typeface="Calibri"/>
+              </a:rPr>
+              <a:t>Cross-validated on 191 real photos and 434 AI images</a:t>
+            </a:r>
+          </a:p>
+        </p:txBody>
+      </p:sp>
+      <p:sp>
+        <p:nvSpPr>
+          <p:cNvPr id="5" name="TextBox 4"/>
+          <p:cNvSpPr txBox="1"/>
+          <p:nvPr/>
+        </p:nvSpPr>
+        <p:spPr>
+          <a:xfrm>
+            <a:off x="640080" y="1783080"/>
+            <a:ext cx="2377440" cy="685800"/>
+          </a:xfrm>
+          <a:prstGeom prst="rect">
+            <a:avLst/>
+          </a:prstGeom>
+          <a:noFill/>
+        </p:spPr>
+        <p:txBody>
+          <a:bodyPr wrap="square" lIns="0" rIns="0" tIns="0" bIns="0" anchor="t">
+            <a:spAutoFit/>
+          </a:bodyPr>
+          <a:lstStyle/>
+          <a:p>
+            <a:pPr algn="ctr">
+              <a:spcAft>
+                <a:spcPts val="600"/>
+              </a:spcAft>
+            </a:pPr>
+            <a:r>
+              <a:rPr sz="4000" b="1" i="0">
+                <a:solidFill>
+                  <a:srgbClr val="1C7293"/>
+                </a:solidFill>
+                <a:latin typeface="Cambria"/>
+              </a:rPr>
+              <a:t>0.80</a:t>
+            </a:r>
+          </a:p>
+        </p:txBody>
+      </p:sp>
+      <p:sp>
+        <p:nvSpPr>
+          <p:cNvPr id="6" name="TextBox 5"/>
+          <p:cNvSpPr txBox="1"/>
+          <p:nvPr/>
+        </p:nvSpPr>
+        <p:spPr>
+          <a:xfrm>
+            <a:off x="640080" y="2441448"/>
+            <a:ext cx="2377440" cy="640080"/>
+          </a:xfrm>
+          <a:prstGeom prst="rect">
+            <a:avLst/>
+          </a:prstGeom>
+          <a:noFill/>
+        </p:spPr>
+        <p:txBody>
+          <a:bodyPr wrap="square" lIns="0" rIns="0" tIns="0" bIns="0" anchor="t">
+            <a:spAutoFit/>
+          </a:bodyPr>
+          <a:lstStyle/>
+          <a:p>
+            <a:pPr algn="ctr">
+              <a:spcAft>
+                <a:spcPts val="600"/>
+              </a:spcAft>
+            </a:pPr>
+            <a:r>
+              <a:rPr sz="1150" b="0" i="0">
+                <a:solidFill>
+                  <a:srgbClr val="5A6672"/>
+                </a:solidFill>
+                <a:latin typeface="Calibri"/>
+              </a:rPr>
+              <a:t>AUC overall</a:t>
+            </a:r>
+          </a:p>
+        </p:txBody>
+      </p:sp>
+      <p:sp>
+        <p:nvSpPr>
+          <p:cNvPr id="7" name="TextBox 6"/>
+          <p:cNvSpPr txBox="1"/>
+          <p:nvPr/>
+        </p:nvSpPr>
+        <p:spPr>
+          <a:xfrm>
+            <a:off x="3108960" y="1783080"/>
+            <a:ext cx="2377440" cy="685800"/>
+          </a:xfrm>
+          <a:prstGeom prst="rect">
+            <a:avLst/>
+          </a:prstGeom>
+          <a:noFill/>
+        </p:spPr>
+        <p:txBody>
+          <a:bodyPr wrap="square" lIns="0" rIns="0" tIns="0" bIns="0" anchor="t">
+            <a:spAutoFit/>
+          </a:bodyPr>
+          <a:lstStyle/>
+          <a:p>
+            <a:pPr algn="ctr">
+              <a:spcAft>
+                <a:spcPts val="600"/>
+              </a:spcAft>
+            </a:pPr>
+            <a:r>
+              <a:rPr sz="4000" b="1" i="0">
+                <a:solidFill>
+                  <a:srgbClr val="E8A33D"/>
+                </a:solidFill>
+                <a:latin typeface="Cambria"/>
+              </a:rPr>
+              <a:t>78%</a:t>
+            </a:r>
+          </a:p>
+        </p:txBody>
+      </p:sp>
+      <p:sp>
+        <p:nvSpPr>
+          <p:cNvPr id="8" name="TextBox 7"/>
+          <p:cNvSpPr txBox="1"/>
+          <p:nvPr/>
+        </p:nvSpPr>
+        <p:spPr>
+          <a:xfrm>
+            <a:off x="3108960" y="2441448"/>
+            <a:ext cx="2377440" cy="640080"/>
+          </a:xfrm>
+          <a:prstGeom prst="rect">
+            <a:avLst/>
+          </a:prstGeom>
+          <a:noFill/>
+        </p:spPr>
+        <p:txBody>
+          <a:bodyPr wrap="square" lIns="0" rIns="0" tIns="0" bIns="0" anchor="t">
+            <a:spAutoFit/>
+          </a:bodyPr>
+          <a:lstStyle/>
+          <a:p>
+            <a:pPr algn="ctr">
+              <a:spcAft>
+                <a:spcPts val="600"/>
+              </a:spcAft>
+            </a:pPr>
+            <a:r>
+              <a:rPr sz="1150" b="0" i="0">
+                <a:solidFill>
+                  <a:srgbClr val="5A6672"/>
+                </a:solidFill>
+                <a:latin typeface="Calibri"/>
+              </a:rPr>
+              <a:t>of AI images flagged at 50%</a:t>
+            </a:r>
+          </a:p>
+        </p:txBody>
+      </p:sp>
+      <p:sp>
+        <p:nvSpPr>
+          <p:cNvPr id="9" name="TextBox 8"/>
+          <p:cNvSpPr txBox="1"/>
+          <p:nvPr/>
+        </p:nvSpPr>
+        <p:spPr>
+          <a:xfrm>
+            <a:off x="5577840" y="1783080"/>
+            <a:ext cx="2377440" cy="685800"/>
+          </a:xfrm>
+          <a:prstGeom prst="rect">
+            <a:avLst/>
+          </a:prstGeom>
+          <a:noFill/>
+        </p:spPr>
+        <p:txBody>
+          <a:bodyPr wrap="square" lIns="0" rIns="0" tIns="0" bIns="0" anchor="t">
+            <a:spAutoFit/>
+          </a:bodyPr>
+          <a:lstStyle/>
+          <a:p>
+            <a:pPr algn="ctr">
+              <a:spcAft>
+                <a:spcPts val="600"/>
+              </a:spcAft>
+            </a:pPr>
+            <a:r>
+              <a:rPr sz="4000" b="1" i="0">
+                <a:solidFill>
+                  <a:srgbClr val="1C7293"/>
+                </a:solidFill>
+                <a:latin typeface="Cambria"/>
+              </a:rPr>
+              <a:t>71%</a:t>
+            </a:r>
+          </a:p>
+        </p:txBody>
+      </p:sp>
+      <p:sp>
+        <p:nvSpPr>
+          <p:cNvPr id="10" name="TextBox 9"/>
+          <p:cNvSpPr txBox="1"/>
+          <p:nvPr/>
+        </p:nvSpPr>
+        <p:spPr>
+          <a:xfrm>
+            <a:off x="5577840" y="2441448"/>
+            <a:ext cx="2377440" cy="640080"/>
+          </a:xfrm>
+          <a:prstGeom prst="rect">
+            <a:avLst/>
+          </a:prstGeom>
+          <a:noFill/>
+        </p:spPr>
+        <p:txBody>
+          <a:bodyPr wrap="square" lIns="0" rIns="0" tIns="0" bIns="0" anchor="t">
+            <a:spAutoFit/>
+          </a:bodyPr>
+          <a:lstStyle/>
+          <a:p>
+            <a:pPr algn="ctr">
+              <a:spcAft>
+                <a:spcPts val="600"/>
+              </a:spcAft>
+            </a:pPr>
+            <a:r>
+              <a:rPr sz="1150" b="0" i="0">
+                <a:solidFill>
+                  <a:srgbClr val="5A6672"/>
+                </a:solidFill>
+                <a:latin typeface="Calibri"/>
+              </a:rPr>
+              <a:t>of real photos cleared at 50%</a:t>
+            </a:r>
+          </a:p>
+        </p:txBody>
+      </p:sp>
+      <p:graphicFrame>
+        <p:nvGraphicFramePr>
+          <p:cNvPr id="11" name="Table 10"/>
+          <p:cNvGraphicFramePr>
+            <a:graphicFrameLocks noGrp="1"/>
+          </p:cNvGraphicFramePr>
+          <p:nvPr/>
+        </p:nvGraphicFramePr>
+        <p:xfrm>
+          <a:off x="640080" y="3246120"/>
+          <a:ext cx="5394960" cy="2103120"/>
+        </p:xfrm>
+        <a:graphic>
+          <a:graphicData uri="http://schemas.openxmlformats.org/drawingml/2006/table">
+            <a:tbl>
+              <a:tblPr firstRow="1" bandRow="1">
+                <a:tableStyleId>{5C22544A-7EE6-4342-B048-85BDC9FD1C3A}</a:tableStyleId>
+              </a:tblPr>
+              <a:tblGrid>
+                <a:gridCol w="1920240"/>
+                <a:gridCol w="1737360"/>
+                <a:gridCol w="1737360"/>
+              </a:tblGrid>
+              <a:tr h="420624">
+                <a:tc>
+                  <a:txBody>
+                    <a:bodyPr/>
+                    <a:lstStyle/>
+                    <a:p>
+                      <a:r>
+                        <a:rPr sz="1300" b="1">
+                          <a:solidFill>
+                            <a:srgbClr val="FFFFFF"/>
+                          </a:solidFill>
+                          <a:latin typeface="Calibri"/>
+                        </a:rPr>
+                        <a:t>Generator</a:t>
+                      </a:r>
+                    </a:p>
+                  </a:txBody>
+                  <a:tcPr anchor="ctr">
+                    <a:solidFill>
+                      <a:srgbClr val="12263A"/>
+                    </a:solidFill>
+                  </a:tcPr>
+                </a:tc>
+                <a:tc>
+                  <a:txBody>
+                    <a:bodyPr/>
+                    <a:lstStyle/>
+                    <a:p>
+                      <a:r>
+                        <a:rPr sz="1300" b="1">
+                          <a:solidFill>
+                            <a:srgbClr val="FFFFFF"/>
+                          </a:solidFill>
+                          <a:latin typeface="Calibri"/>
+                        </a:rPr>
+                        <a:t>Seen in training</a:t>
+                      </a:r>
+                    </a:p>
+                  </a:txBody>
+                  <a:tcPr anchor="ctr">
+                    <a:solidFill>
+                      <a:srgbClr val="12263A"/>
+                    </a:solidFill>
+                  </a:tcPr>
+                </a:tc>
+                <a:tc>
+                  <a:txBody>
+                    <a:bodyPr/>
+                    <a:lstStyle/>
+                    <a:p>
+                      <a:r>
+                        <a:rPr sz="1300" b="1">
+                          <a:solidFill>
+                            <a:srgbClr val="FFFFFF"/>
+                          </a:solidFill>
+                          <a:latin typeface="Calibri"/>
+                        </a:rPr>
+                        <a:t>Never seen</a:t>
+                      </a:r>
+                    </a:p>
+                  </a:txBody>
+                  <a:tcPr anchor="ctr">
+                    <a:solidFill>
+                      <a:srgbClr val="12263A"/>
+                    </a:solidFill>
+                  </a:tcPr>
+                </a:tc>
+              </a:tr>
+              <a:tr h="420624">
+                <a:tc>
+                  <a:txBody>
+                    <a:bodyPr/>
+                    <a:lstStyle/>
+                    <a:p>
+                      <a:r>
+                        <a:rPr sz="1300">
+                          <a:solidFill>
+                            <a:srgbClr val="1A1A1A"/>
+                          </a:solidFill>
+                          <a:latin typeface="Calibri"/>
+                        </a:rPr>
+                        <a:t>SD 1.5</a:t>
+                      </a:r>
+                    </a:p>
+                  </a:txBody>
+                  <a:tcPr anchor="ctr">
+                    <a:solidFill>
+                      <a:srgbClr val="FFFFFF"/>
+                    </a:solidFill>
+                  </a:tcPr>
+                </a:tc>
+                <a:tc>
+                  <a:txBody>
+                    <a:bodyPr/>
+                    <a:lstStyle/>
+                    <a:p>
+                      <a:r>
+                        <a:rPr sz="1300">
+                          <a:solidFill>
+                            <a:srgbClr val="1A1A1A"/>
+                          </a:solidFill>
+                          <a:latin typeface="Calibri"/>
+                        </a:rPr>
+                        <a:t>0.84</a:t>
+                      </a:r>
+                    </a:p>
+                  </a:txBody>
+                  <a:tcPr anchor="ctr">
+                    <a:solidFill>
+                      <a:srgbClr val="FFFFFF"/>
+                    </a:solidFill>
+                  </a:tcPr>
+                </a:tc>
+                <a:tc>
+                  <a:txBody>
+                    <a:bodyPr/>
+                    <a:lstStyle/>
+                    <a:p>
+                      <a:r>
+                        <a:rPr sz="1300">
+                          <a:solidFill>
+                            <a:srgbClr val="1A1A1A"/>
+                          </a:solidFill>
+                          <a:latin typeface="Calibri"/>
+                        </a:rPr>
+                        <a:t>0.82</a:t>
+                      </a:r>
+                    </a:p>
+                  </a:txBody>
+                  <a:tcPr anchor="ctr">
+                    <a:solidFill>
+                      <a:srgbClr val="FFFFFF"/>
+                    </a:solidFill>
+                  </a:tcPr>
+                </a:tc>
+              </a:tr>
+              <a:tr h="420624">
+                <a:tc>
+                  <a:txBody>
+                    <a:bodyPr/>
+                    <a:lstStyle/>
+                    <a:p>
+                      <a:r>
+                        <a:rPr sz="1300">
+                          <a:solidFill>
+                            <a:srgbClr val="1A1A1A"/>
+                          </a:solidFill>
+                          <a:latin typeface="Calibri"/>
+                        </a:rPr>
+                        <a:t>SDXL</a:t>
+                      </a:r>
+                    </a:p>
+                  </a:txBody>
+                  <a:tcPr anchor="ctr">
+                    <a:solidFill>
+                      <a:srgbClr val="F4F6F8"/>
+                    </a:solidFill>
+                  </a:tcPr>
+                </a:tc>
+                <a:tc>
+                  <a:txBody>
+                    <a:bodyPr/>
+                    <a:lstStyle/>
+                    <a:p>
+                      <a:r>
+                        <a:rPr sz="1300">
+                          <a:solidFill>
+                            <a:srgbClr val="1A1A1A"/>
+                          </a:solidFill>
+                          <a:latin typeface="Calibri"/>
+                        </a:rPr>
+                        <a:t>0.81</a:t>
+                      </a:r>
+                    </a:p>
+                  </a:txBody>
+                  <a:tcPr anchor="ctr">
+                    <a:solidFill>
+                      <a:srgbClr val="F4F6F8"/>
+                    </a:solidFill>
+                  </a:tcPr>
+                </a:tc>
+                <a:tc>
+                  <a:txBody>
+                    <a:bodyPr/>
+                    <a:lstStyle/>
+                    <a:p>
+                      <a:r>
+                        <a:rPr sz="1300">
+                          <a:solidFill>
+                            <a:srgbClr val="1A1A1A"/>
+                          </a:solidFill>
+                          <a:latin typeface="Calibri"/>
+                        </a:rPr>
+                        <a:t>0.77</a:t>
+                      </a:r>
+                    </a:p>
+                  </a:txBody>
+                  <a:tcPr anchor="ctr">
+                    <a:solidFill>
+                      <a:srgbClr val="F4F6F8"/>
+                    </a:solidFill>
+                  </a:tcPr>
+                </a:tc>
+              </a:tr>
+              <a:tr h="420624">
+                <a:tc>
+                  <a:txBody>
+                    <a:bodyPr/>
+                    <a:lstStyle/>
+                    <a:p>
+                      <a:r>
+                        <a:rPr sz="1300">
+                          <a:solidFill>
+                            <a:srgbClr val="1A1A1A"/>
+                          </a:solidFill>
+                          <a:latin typeface="Calibri"/>
+                        </a:rPr>
+                        <a:t>Gemini</a:t>
+                      </a:r>
+                    </a:p>
+                  </a:txBody>
+                  <a:tcPr anchor="ctr">
+                    <a:solidFill>
+                      <a:srgbClr val="FFFFFF"/>
+                    </a:solidFill>
+                  </a:tcPr>
+                </a:tc>
+                <a:tc>
+                  <a:txBody>
+                    <a:bodyPr/>
+                    <a:lstStyle/>
+                    <a:p>
+                      <a:r>
+                        <a:rPr sz="1300">
+                          <a:solidFill>
+                            <a:srgbClr val="1A1A1A"/>
+                          </a:solidFill>
+                          <a:latin typeface="Calibri"/>
+                        </a:rPr>
+                        <a:t>0.76</a:t>
+                      </a:r>
+                    </a:p>
+                  </a:txBody>
+                  <a:tcPr anchor="ctr">
+                    <a:solidFill>
+                      <a:srgbClr val="FFFFFF"/>
+                    </a:solidFill>
+                  </a:tcPr>
+                </a:tc>
+                <a:tc>
+                  <a:txBody>
+                    <a:bodyPr/>
+                    <a:lstStyle/>
+                    <a:p>
+                      <a:r>
+                        <a:rPr sz="1300">
+                          <a:solidFill>
+                            <a:srgbClr val="1A1A1A"/>
+                          </a:solidFill>
+                          <a:latin typeface="Calibri"/>
+                        </a:rPr>
+                        <a:t>0.77</a:t>
+                      </a:r>
+                    </a:p>
+                  </a:txBody>
+                  <a:tcPr anchor="ctr">
+                    <a:solidFill>
+                      <a:srgbClr val="FFFFFF"/>
+                    </a:solidFill>
+                  </a:tcPr>
+                </a:tc>
+              </a:tr>
+              <a:tr h="420624">
+                <a:tc>
+                  <a:txBody>
+                    <a:bodyPr/>
+                    <a:lstStyle/>
+                    <a:p>
+                      <a:r>
+                        <a:rPr sz="1300">
+                          <a:solidFill>
+                            <a:srgbClr val="1A1A1A"/>
+                          </a:solidFill>
+                          <a:latin typeface="Calibri"/>
+                        </a:rPr>
+                        <a:t>ChatGPT</a:t>
+                      </a:r>
+                    </a:p>
+                  </a:txBody>
+                  <a:tcPr anchor="ctr">
+                    <a:solidFill>
+                      <a:srgbClr val="F4F6F8"/>
+                    </a:solidFill>
+                  </a:tcPr>
+                </a:tc>
+                <a:tc>
+                  <a:txBody>
+                    <a:bodyPr/>
+                    <a:lstStyle/>
+                    <a:p>
+                      <a:r>
+                        <a:rPr sz="1300">
+                          <a:solidFill>
+                            <a:srgbClr val="1A1A1A"/>
+                          </a:solidFill>
+                          <a:latin typeface="Calibri"/>
+                        </a:rPr>
+                        <a:t>0.59</a:t>
+                      </a:r>
+                    </a:p>
+                  </a:txBody>
+                  <a:tcPr anchor="ctr">
+                    <a:solidFill>
+                      <a:srgbClr val="F4F6F8"/>
+                    </a:solidFill>
+                  </a:tcPr>
+                </a:tc>
+                <a:tc>
+                  <a:txBody>
+                    <a:bodyPr/>
+                    <a:lstStyle/>
+                    <a:p>
+                      <a:r>
+                        <a:rPr sz="1300">
+                          <a:solidFill>
+                            <a:srgbClr val="1A1A1A"/>
+                          </a:solidFill>
+                          <a:latin typeface="Calibri"/>
+                        </a:rPr>
+                        <a:t>0.63</a:t>
+                      </a:r>
+                    </a:p>
+                  </a:txBody>
+                  <a:tcPr anchor="ctr">
+                    <a:solidFill>
+                      <a:srgbClr val="F4F6F8"/>
+                    </a:solidFill>
+                  </a:tcPr>
+                </a:tc>
+              </a:tr>
+            </a:tbl>
+          </a:graphicData>
+        </a:graphic>
+      </p:graphicFrame>
+      <p:graphicFrame>
+        <p:nvGraphicFramePr>
+          <p:cNvPr id="12" name="Table 11"/>
+          <p:cNvGraphicFramePr>
+            <a:graphicFrameLocks noGrp="1"/>
+          </p:cNvGraphicFramePr>
+          <p:nvPr/>
+        </p:nvGraphicFramePr>
+        <p:xfrm>
+          <a:off x="6355080" y="3246120"/>
+          <a:ext cx="5193792" cy="2103120"/>
+        </p:xfrm>
+        <a:graphic>
+          <a:graphicData uri="http://schemas.openxmlformats.org/drawingml/2006/table">
+            <a:tbl>
+              <a:tblPr firstRow="1" bandRow="1">
+                <a:tableStyleId>{5C22544A-7EE6-4342-B048-85BDC9FD1C3A}</a:tableStyleId>
+              </a:tblPr>
+              <a:tblGrid>
+                <a:gridCol w="3931920"/>
+                <a:gridCol w="1261872"/>
+              </a:tblGrid>
+              <a:tr h="420624">
+                <a:tc>
+                  <a:txBody>
+                    <a:bodyPr/>
+                    <a:lstStyle/>
+                    <a:p>
+                      <a:r>
+                        <a:rPr sz="1300" b="1">
+                          <a:solidFill>
+                            <a:srgbClr val="FFFFFF"/>
+                          </a:solidFill>
+                          <a:latin typeface="Calibri"/>
+                        </a:rPr>
+                        <a:t>Classifier, same 10 features</a:t>
+                      </a:r>
+                    </a:p>
+                  </a:txBody>
+                  <a:tcPr anchor="ctr">
+                    <a:solidFill>
+                      <a:srgbClr val="12263A"/>
+                    </a:solidFill>
+                  </a:tcPr>
+                </a:tc>
+                <a:tc>
+                  <a:txBody>
+                    <a:bodyPr/>
+                    <a:lstStyle/>
+                    <a:p>
+                      <a:r>
+                        <a:rPr sz="1300" b="1">
+                          <a:solidFill>
+                            <a:srgbClr val="FFFFFF"/>
+                          </a:solidFill>
+                          <a:latin typeface="Calibri"/>
+                        </a:rPr>
+                        <a:t>AUC</a:t>
+                      </a:r>
+                    </a:p>
+                  </a:txBody>
+                  <a:tcPr anchor="ctr">
+                    <a:solidFill>
+                      <a:srgbClr val="12263A"/>
+                    </a:solidFill>
+                  </a:tcPr>
+                </a:tc>
+              </a:tr>
+              <a:tr h="420624">
+                <a:tc>
+                  <a:txBody>
+                    <a:bodyPr/>
+                    <a:lstStyle/>
+                    <a:p>
+                      <a:r>
+                        <a:rPr sz="1300">
+                          <a:solidFill>
+                            <a:srgbClr val="1A1A1A"/>
+                          </a:solidFill>
+                          <a:latin typeface="Calibri"/>
+                        </a:rPr>
+                        <a:t>Random forest (the app)</a:t>
+                      </a:r>
+                    </a:p>
+                  </a:txBody>
+                  <a:tcPr anchor="ctr">
+                    <a:solidFill>
+                      <a:srgbClr val="FFFFFF"/>
+                    </a:solidFill>
+                  </a:tcPr>
+                </a:tc>
+                <a:tc>
+                  <a:txBody>
+                    <a:bodyPr/>
+                    <a:lstStyle/>
+                    <a:p>
+                      <a:r>
+                        <a:rPr sz="1300">
+                          <a:solidFill>
+                            <a:srgbClr val="1A1A1A"/>
+                          </a:solidFill>
+                          <a:latin typeface="Calibri"/>
+                        </a:rPr>
+                        <a:t>0.80</a:t>
+                      </a:r>
+                    </a:p>
+                  </a:txBody>
+                  <a:tcPr anchor="ctr">
+                    <a:solidFill>
+                      <a:srgbClr val="FFFFFF"/>
+                    </a:solidFill>
+                  </a:tcPr>
+                </a:tc>
+              </a:tr>
+              <a:tr h="420624">
+                <a:tc>
+                  <a:txBody>
+                    <a:bodyPr/>
+                    <a:lstStyle/>
+                    <a:p>
+                      <a:r>
+                        <a:rPr sz="1300">
+                          <a:solidFill>
+                            <a:srgbClr val="1A1A1A"/>
+                          </a:solidFill>
+                          <a:latin typeface="Calibri"/>
+                        </a:rPr>
+                        <a:t>Extra trees</a:t>
+                      </a:r>
+                    </a:p>
+                  </a:txBody>
+                  <a:tcPr anchor="ctr">
+                    <a:solidFill>
+                      <a:srgbClr val="F4F6F8"/>
+                    </a:solidFill>
+                  </a:tcPr>
+                </a:tc>
+                <a:tc>
+                  <a:txBody>
+                    <a:bodyPr/>
+                    <a:lstStyle/>
+                    <a:p>
+                      <a:r>
+                        <a:rPr sz="1300">
+                          <a:solidFill>
+                            <a:srgbClr val="1A1A1A"/>
+                          </a:solidFill>
+                          <a:latin typeface="Calibri"/>
+                        </a:rPr>
+                        <a:t>0.78</a:t>
+                      </a:r>
+                    </a:p>
+                  </a:txBody>
+                  <a:tcPr anchor="ctr">
+                    <a:solidFill>
+                      <a:srgbClr val="F4F6F8"/>
+                    </a:solidFill>
+                  </a:tcPr>
+                </a:tc>
+              </a:tr>
+              <a:tr h="420624">
+                <a:tc>
+                  <a:txBody>
+                    <a:bodyPr/>
+                    <a:lstStyle/>
+                    <a:p>
+                      <a:r>
+                        <a:rPr sz="1300">
+                          <a:solidFill>
+                            <a:srgbClr val="1A1A1A"/>
+                          </a:solidFill>
+                          <a:latin typeface="Calibri"/>
+                        </a:rPr>
+                        <a:t>Gradient boosting</a:t>
+                      </a:r>
+                    </a:p>
+                  </a:txBody>
+                  <a:tcPr anchor="ctr">
+                    <a:solidFill>
+                      <a:srgbClr val="FFFFFF"/>
+                    </a:solidFill>
+                  </a:tcPr>
+                </a:tc>
+                <a:tc>
+                  <a:txBody>
+                    <a:bodyPr/>
+                    <a:lstStyle/>
+                    <a:p>
+                      <a:r>
+                        <a:rPr sz="1300">
+                          <a:solidFill>
+                            <a:srgbClr val="1A1A1A"/>
+                          </a:solidFill>
+                          <a:latin typeface="Calibri"/>
+                        </a:rPr>
+                        <a:t>0.78</a:t>
+                      </a:r>
+                    </a:p>
+                  </a:txBody>
+                  <a:tcPr anchor="ctr">
+                    <a:solidFill>
+                      <a:srgbClr val="FFFFFF"/>
+                    </a:solidFill>
+                  </a:tcPr>
+                </a:tc>
+              </a:tr>
+              <a:tr h="420624">
+                <a:tc>
+                  <a:txBody>
+                    <a:bodyPr/>
+                    <a:lstStyle/>
+                    <a:p>
+                      <a:r>
+                        <a:rPr sz="1300">
+                          <a:solidFill>
+                            <a:srgbClr val="1A1A1A"/>
+                          </a:solidFill>
+                          <a:latin typeface="Calibri"/>
+                        </a:rPr>
+                        <a:t>Logistic regression</a:t>
+                      </a:r>
+                    </a:p>
+                  </a:txBody>
+                  <a:tcPr anchor="ctr">
+                    <a:solidFill>
+                      <a:srgbClr val="F4F6F8"/>
+                    </a:solidFill>
+                  </a:tcPr>
+                </a:tc>
+                <a:tc>
+                  <a:txBody>
+                    <a:bodyPr/>
+                    <a:lstStyle/>
+                    <a:p>
+                      <a:r>
+                        <a:rPr sz="1300">
+                          <a:solidFill>
+                            <a:srgbClr val="1A1A1A"/>
+                          </a:solidFill>
+                          <a:latin typeface="Calibri"/>
+                        </a:rPr>
+                        <a:t>0.77</a:t>
+                      </a:r>
+                    </a:p>
+                  </a:txBody>
+                  <a:tcPr anchor="ctr">
+                    <a:solidFill>
+                      <a:srgbClr val="F4F6F8"/>
+                    </a:solidFill>
+                  </a:tcPr>
+                </a:tc>
+              </a:tr>
+            </a:tbl>
+          </a:graphicData>
+        </a:graphic>
+      </p:graphicFrame>
+      <p:sp>
+        <p:nvSpPr>
+          <p:cNvPr id="13" name="Rounded Rectangle 12"/>
+          <p:cNvSpPr/>
+          <p:nvPr/>
+        </p:nvSpPr>
+        <p:spPr>
+          <a:xfrm>
+            <a:off x="8229600" y="1737360"/>
+            <a:ext cx="3319272" cy="1325880"/>
+          </a:xfrm>
+          <a:prstGeom prst="roundRect">
+            <a:avLst>
+              <a:gd name="adj" fmla="val 6000"/>
+            </a:avLst>
+          </a:prstGeom>
+          <a:solidFill>
+            <a:srgbClr val="F4F6F8"/>
+          </a:solidFill>
+          <a:ln>
+            <a:noFill/>
+          </a:ln>
+          <a:effectLst/>
+        </p:spPr>
+        <p:style>
+          <a:lnRef idx="1">
+            <a:schemeClr val="accent1"/>
+          </a:lnRef>
+          <a:fillRef idx="3">
+            <a:schemeClr val="accent1"/>
+          </a:fillRef>
+          <a:effectRef idx="2">
+            <a:schemeClr val="accent1"/>
+          </a:effectRef>
+          <a:fontRef idx="minor">
+            <a:schemeClr val="lt1"/>
+          </a:fontRef>
+        </p:style>
+        <p:txBody>
+          <a:bodyPr rtlCol="0" anchor="ctr"/>
+          <a:lstStyle/>
+          <a:p>
+            <a:pPr algn="ctr"/>
+          </a:p>
+        </p:txBody>
+      </p:sp>
+      <p:sp>
+        <p:nvSpPr>
+          <p:cNvPr id="14" name="TextBox 13"/>
+          <p:cNvSpPr txBox="1"/>
+          <p:nvPr/>
+        </p:nvSpPr>
+        <p:spPr>
+          <a:xfrm>
+            <a:off x="8458200" y="1828800"/>
+            <a:ext cx="2880360" cy="1143000"/>
+          </a:xfrm>
+          <a:prstGeom prst="rect">
+            <a:avLst/>
+          </a:prstGeom>
+          <a:noFill/>
+        </p:spPr>
+        <p:txBody>
+          <a:bodyPr wrap="square" lIns="0" rIns="0" tIns="0" bIns="0" anchor="ctr">
+            <a:spAutoFit/>
+          </a:bodyPr>
+          <a:lstStyle/>
+          <a:p>
+            <a:pPr algn="l">
+              <a:spcAft>
+                <a:spcPts val="600"/>
+              </a:spcAft>
+            </a:pPr>
+            <a:r>
+              <a:rPr sz="1250" b="0" i="0">
+                <a:solidFill>
+                  <a:srgbClr val="5A6672"/>
+                </a:solidFill>
+                <a:latin typeface="Calibri"/>
+              </a:rPr>
+              <a:t>Never seen: trained without that generator, then tested on it. ChatGPT is the hard case, and has the fewest images (35).</a:t>
+            </a:r>
+          </a:p>
+        </p:txBody>
+      </p:sp>
+      <p:sp>
+        <p:nvSpPr>
+          <p:cNvPr id="15" name="Rounded Rectangle 14"/>
+          <p:cNvSpPr/>
+          <p:nvPr/>
+        </p:nvSpPr>
+        <p:spPr>
+          <a:xfrm>
+            <a:off x="640080" y="5532120"/>
+            <a:ext cx="10908792" cy="914400"/>
+          </a:xfrm>
+          <a:prstGeom prst="roundRect">
+            <a:avLst>
+              <a:gd name="adj" fmla="val 6000"/>
+            </a:avLst>
+          </a:prstGeom>
+          <a:solidFill>
             <a:srgbClr val="12263A"/>
           </a:solidFill>
           <a:ln>
@@ -11157,14 +12075,14 @@
       </p:sp>
       <p:sp>
         <p:nvSpPr>
-          <p:cNvPr id="3" name="TextBox 2"/>
+          <p:cNvPr id="16" name="TextBox 15"/>
           <p:cNvSpPr txBox="1"/>
           <p:nvPr/>
         </p:nvSpPr>
         <p:spPr>
           <a:xfrm>
-            <a:off x="640080" y="457200"/>
-            <a:ext cx="10911535" cy="822960"/>
+            <a:off x="914400" y="5577840"/>
+            <a:ext cx="10424160" cy="822960"/>
           </a:xfrm>
           <a:prstGeom prst="rect">
             <a:avLst/>
@@ -11172,7 +12090,7 @@
           <a:noFill/>
         </p:spPr>
         <p:txBody>
-          <a:bodyPr wrap="square" lIns="0" rIns="0" tIns="0" bIns="0" anchor="t">
+          <a:bodyPr wrap="square" lIns="0" rIns="0" tIns="0" bIns="0" anchor="ctr">
             <a:spAutoFit/>
           </a:bodyPr>
           <a:lstStyle/>
@@ -11183,662 +12101,13 @@
               </a:spcAft>
             </a:pPr>
             <a:r>
-              <a:rPr sz="3200" b="1" i="0">
+              <a:rPr sz="1400" b="1" i="0">
                 <a:solidFill>
                   <a:srgbClr val="FFFFFF"/>
                 </a:solidFill>
-                <a:latin typeface="Cambria"/>
-              </a:rPr>
-              <a:t>Conclusion</a:t>
-            </a:r>
-          </a:p>
-        </p:txBody>
-      </p:sp>
-      <p:sp>
-        <p:nvSpPr>
-          <p:cNvPr id="4" name="Oval 3"/>
-          <p:cNvSpPr/>
-          <p:nvPr/>
-        </p:nvSpPr>
-        <p:spPr>
-          <a:xfrm>
-            <a:off x="685800" y="1828800"/>
-            <a:ext cx="256032" cy="256032"/>
-          </a:xfrm>
-          <a:prstGeom prst="ellipse">
-            <a:avLst/>
-          </a:prstGeom>
-          <a:solidFill>
-            <a:srgbClr val="E8A33D"/>
-          </a:solidFill>
-          <a:ln>
-            <a:noFill/>
-          </a:ln>
-          <a:effectLst/>
-        </p:spPr>
-        <p:style>
-          <a:lnRef idx="1">
-            <a:schemeClr val="accent1"/>
-          </a:lnRef>
-          <a:fillRef idx="3">
-            <a:schemeClr val="accent1"/>
-          </a:fillRef>
-          <a:effectRef idx="2">
-            <a:schemeClr val="accent1"/>
-          </a:effectRef>
-          <a:fontRef idx="minor">
-            <a:schemeClr val="lt1"/>
-          </a:fontRef>
-        </p:style>
-        <p:txBody>
-          <a:bodyPr rtlCol="0" anchor="ctr"/>
-          <a:lstStyle/>
-          <a:p>
-            <a:pPr algn="ctr"/>
-          </a:p>
-        </p:txBody>
-      </p:sp>
-      <p:sp>
-        <p:nvSpPr>
-          <p:cNvPr id="5" name="TextBox 4"/>
-          <p:cNvSpPr txBox="1"/>
-          <p:nvPr/>
-        </p:nvSpPr>
-        <p:spPr>
-          <a:xfrm>
-            <a:off x="1188720" y="1737360"/>
-            <a:ext cx="10332720" cy="384048"/>
-          </a:xfrm>
-          <a:prstGeom prst="rect">
-            <a:avLst/>
-          </a:prstGeom>
-          <a:noFill/>
-        </p:spPr>
-        <p:txBody>
-          <a:bodyPr wrap="square" lIns="0" rIns="0" tIns="0" bIns="0" anchor="t">
-            <a:spAutoFit/>
-          </a:bodyPr>
-          <a:lstStyle/>
-          <a:p>
-            <a:pPr algn="l">
-              <a:spcAft>
-                <a:spcPts val="600"/>
-              </a:spcAft>
-            </a:pPr>
-            <a:r>
-              <a:rPr sz="1700" b="1" i="0">
-                <a:solidFill>
-                  <a:srgbClr val="FFFFFF"/>
-                </a:solidFill>
-                <a:latin typeface="Cambria"/>
-              </a:rPr>
-              <a:t>Generators reproduce orientation, not the camera</a:t>
-            </a:r>
-          </a:p>
-        </p:txBody>
-      </p:sp>
-      <p:sp>
-        <p:nvSpPr>
-          <p:cNvPr id="6" name="TextBox 5"/>
-          <p:cNvSpPr txBox="1"/>
-          <p:nvPr/>
-        </p:nvSpPr>
-        <p:spPr>
-          <a:xfrm>
-            <a:off x="1188720" y="2148840"/>
-            <a:ext cx="10332720" cy="411480"/>
-          </a:xfrm>
-          <a:prstGeom prst="rect">
-            <a:avLst/>
-          </a:prstGeom>
-          <a:noFill/>
-        </p:spPr>
-        <p:txBody>
-          <a:bodyPr wrap="square" lIns="0" rIns="0" tIns="0" bIns="0" anchor="t">
-            <a:spAutoFit/>
-          </a:bodyPr>
-          <a:lstStyle/>
-          <a:p>
-            <a:pPr algn="l">
-              <a:spcAft>
-                <a:spcPts val="600"/>
-              </a:spcAft>
-            </a:pPr>
-            <a:r>
-              <a:rPr sz="1300" b="0" i="0">
-                <a:solidFill>
-                  <a:srgbClr val="B9CDDA"/>
-                </a:solidFill>
                 <a:latin typeface="Calibri"/>
               </a:rPr>
-              <a:t>Right angles are close to real photos after control; focal agreement is 2.5 to 3 times worse.</a:t>
-            </a:r>
-          </a:p>
-        </p:txBody>
-      </p:sp>
-      <p:sp>
-        <p:nvSpPr>
-          <p:cNvPr id="7" name="Oval 6"/>
-          <p:cNvSpPr/>
-          <p:nvPr/>
-        </p:nvSpPr>
-        <p:spPr>
-          <a:xfrm>
-            <a:off x="685800" y="2724912"/>
-            <a:ext cx="256032" cy="256032"/>
-          </a:xfrm>
-          <a:prstGeom prst="ellipse">
-            <a:avLst/>
-          </a:prstGeom>
-          <a:solidFill>
-            <a:srgbClr val="E8A33D"/>
-          </a:solidFill>
-          <a:ln>
-            <a:noFill/>
-          </a:ln>
-          <a:effectLst/>
-        </p:spPr>
-        <p:style>
-          <a:lnRef idx="1">
-            <a:schemeClr val="accent1"/>
-          </a:lnRef>
-          <a:fillRef idx="3">
-            <a:schemeClr val="accent1"/>
-          </a:fillRef>
-          <a:effectRef idx="2">
-            <a:schemeClr val="accent1"/>
-          </a:effectRef>
-          <a:fontRef idx="minor">
-            <a:schemeClr val="lt1"/>
-          </a:fontRef>
-        </p:style>
-        <p:txBody>
-          <a:bodyPr rtlCol="0" anchor="ctr"/>
-          <a:lstStyle/>
-          <a:p>
-            <a:pPr algn="ctr"/>
-          </a:p>
-        </p:txBody>
-      </p:sp>
-      <p:sp>
-        <p:nvSpPr>
-          <p:cNvPr id="8" name="TextBox 7"/>
-          <p:cNvSpPr txBox="1"/>
-          <p:nvPr/>
-        </p:nvSpPr>
-        <p:spPr>
-          <a:xfrm>
-            <a:off x="1188720" y="2633472"/>
-            <a:ext cx="10332720" cy="384048"/>
-          </a:xfrm>
-          <a:prstGeom prst="rect">
-            <a:avLst/>
-          </a:prstGeom>
-          <a:noFill/>
-        </p:spPr>
-        <p:txBody>
-          <a:bodyPr wrap="square" lIns="0" rIns="0" tIns="0" bIns="0" anchor="t">
-            <a:spAutoFit/>
-          </a:bodyPr>
-          <a:lstStyle/>
-          <a:p>
-            <a:pPr algn="l">
-              <a:spcAft>
-                <a:spcPts val="600"/>
-              </a:spcAft>
-            </a:pPr>
-            <a:r>
-              <a:rPr sz="1700" b="1" i="0">
-                <a:solidFill>
-                  <a:srgbClr val="FFFFFF"/>
-                </a:solidFill>
-                <a:latin typeface="Cambria"/>
-              </a:rPr>
-              <a:t>The result does not depend on the real reference</a:t>
-            </a:r>
-          </a:p>
-        </p:txBody>
-      </p:sp>
-      <p:sp>
-        <p:nvSpPr>
-          <p:cNvPr id="9" name="TextBox 8"/>
-          <p:cNvSpPr txBox="1"/>
-          <p:nvPr/>
-        </p:nvSpPr>
-        <p:spPr>
-          <a:xfrm>
-            <a:off x="1188720" y="3044952"/>
-            <a:ext cx="10332720" cy="411480"/>
-          </a:xfrm>
-          <a:prstGeom prst="rect">
-            <a:avLst/>
-          </a:prstGeom>
-          <a:noFill/>
-        </p:spPr>
-        <p:txBody>
-          <a:bodyPr wrap="square" lIns="0" rIns="0" tIns="0" bIns="0" anchor="t">
-            <a:spAutoFit/>
-          </a:bodyPr>
-          <a:lstStyle/>
-          <a:p>
-            <a:pPr algn="l">
-              <a:spcAft>
-                <a:spcPts val="600"/>
-              </a:spcAft>
-            </a:pPr>
-            <a:r>
-              <a:rPr sz="1300" b="0" i="0">
-                <a:solidFill>
-                  <a:srgbClr val="B9CDDA"/>
-                </a:solidFill>
-                <a:latin typeface="Calibri"/>
-              </a:rPr>
-              <a:t>A hand-picked benchmark and ordinary internet photos give the same answer.</a:t>
-            </a:r>
-          </a:p>
-        </p:txBody>
-      </p:sp>
-      <p:sp>
-        <p:nvSpPr>
-          <p:cNvPr id="10" name="Oval 9"/>
-          <p:cNvSpPr/>
-          <p:nvPr/>
-        </p:nvSpPr>
-        <p:spPr>
-          <a:xfrm>
-            <a:off x="685800" y="3621024"/>
-            <a:ext cx="256032" cy="256032"/>
-          </a:xfrm>
-          <a:prstGeom prst="ellipse">
-            <a:avLst/>
-          </a:prstGeom>
-          <a:solidFill>
-            <a:srgbClr val="E8A33D"/>
-          </a:solidFill>
-          <a:ln>
-            <a:noFill/>
-          </a:ln>
-          <a:effectLst/>
-        </p:spPr>
-        <p:style>
-          <a:lnRef idx="1">
-            <a:schemeClr val="accent1"/>
-          </a:lnRef>
-          <a:fillRef idx="3">
-            <a:schemeClr val="accent1"/>
-          </a:fillRef>
-          <a:effectRef idx="2">
-            <a:schemeClr val="accent1"/>
-          </a:effectRef>
-          <a:fontRef idx="minor">
-            <a:schemeClr val="lt1"/>
-          </a:fontRef>
-        </p:style>
-        <p:txBody>
-          <a:bodyPr rtlCol="0" anchor="ctr"/>
-          <a:lstStyle/>
-          <a:p>
-            <a:pPr algn="ctr"/>
-          </a:p>
-        </p:txBody>
-      </p:sp>
-      <p:sp>
-        <p:nvSpPr>
-          <p:cNvPr id="11" name="TextBox 10"/>
-          <p:cNvSpPr txBox="1"/>
-          <p:nvPr/>
-        </p:nvSpPr>
-        <p:spPr>
-          <a:xfrm>
-            <a:off x="1188720" y="3529584"/>
-            <a:ext cx="10332720" cy="384048"/>
-          </a:xfrm>
-          <a:prstGeom prst="rect">
-            <a:avLst/>
-          </a:prstGeom>
-          <a:noFill/>
-        </p:spPr>
-        <p:txBody>
-          <a:bodyPr wrap="square" lIns="0" rIns="0" tIns="0" bIns="0" anchor="t">
-            <a:spAutoFit/>
-          </a:bodyPr>
-          <a:lstStyle/>
-          <a:p>
-            <a:pPr algn="l">
-              <a:spcAft>
-                <a:spcPts val="600"/>
-              </a:spcAft>
-            </a:pPr>
-            <a:r>
-              <a:rPr sz="1700" b="1" i="0">
-                <a:solidFill>
-                  <a:srgbClr val="FFFFFF"/>
-                </a:solidFill>
-                <a:latin typeface="Cambria"/>
-              </a:rPr>
-              <a:t>Scale is not closing the gap</a:t>
-            </a:r>
-          </a:p>
-        </p:txBody>
-      </p:sp>
-      <p:sp>
-        <p:nvSpPr>
-          <p:cNvPr id="12" name="TextBox 11"/>
-          <p:cNvSpPr txBox="1"/>
-          <p:nvPr/>
-        </p:nvSpPr>
-        <p:spPr>
-          <a:xfrm>
-            <a:off x="1188720" y="3941063"/>
-            <a:ext cx="10332720" cy="411480"/>
-          </a:xfrm>
-          <a:prstGeom prst="rect">
-            <a:avLst/>
-          </a:prstGeom>
-          <a:noFill/>
-        </p:spPr>
-        <p:txBody>
-          <a:bodyPr wrap="square" lIns="0" rIns="0" tIns="0" bIns="0" anchor="t">
-            <a:spAutoFit/>
-          </a:bodyPr>
-          <a:lstStyle/>
-          <a:p>
-            <a:pPr algn="l">
-              <a:spcAft>
-                <a:spcPts val="600"/>
-              </a:spcAft>
-            </a:pPr>
-            <a:r>
-              <a:rPr sz="1300" b="0" i="0">
-                <a:solidFill>
-                  <a:srgbClr val="B9CDDA"/>
-                </a:solidFill>
-                <a:latin typeface="Calibri"/>
-              </a:rPr>
-              <a:t>SD 1.5 → SDXL improves orientation and leaves camera coherence unchanged.</a:t>
-            </a:r>
-          </a:p>
-        </p:txBody>
-      </p:sp>
-      <p:sp>
-        <p:nvSpPr>
-          <p:cNvPr id="13" name="Oval 12"/>
-          <p:cNvSpPr/>
-          <p:nvPr/>
-        </p:nvSpPr>
-        <p:spPr>
-          <a:xfrm>
-            <a:off x="685800" y="4517136"/>
-            <a:ext cx="256032" cy="256032"/>
-          </a:xfrm>
-          <a:prstGeom prst="ellipse">
-            <a:avLst/>
-          </a:prstGeom>
-          <a:solidFill>
-            <a:srgbClr val="E8A33D"/>
-          </a:solidFill>
-          <a:ln>
-            <a:noFill/>
-          </a:ln>
-          <a:effectLst/>
-        </p:spPr>
-        <p:style>
-          <a:lnRef idx="1">
-            <a:schemeClr val="accent1"/>
-          </a:lnRef>
-          <a:fillRef idx="3">
-            <a:schemeClr val="accent1"/>
-          </a:fillRef>
-          <a:effectRef idx="2">
-            <a:schemeClr val="accent1"/>
-          </a:effectRef>
-          <a:fontRef idx="minor">
-            <a:schemeClr val="lt1"/>
-          </a:fontRef>
-        </p:style>
-        <p:txBody>
-          <a:bodyPr rtlCol="0" anchor="ctr"/>
-          <a:lstStyle/>
-          <a:p>
-            <a:pPr algn="ctr"/>
-          </a:p>
-        </p:txBody>
-      </p:sp>
-      <p:sp>
-        <p:nvSpPr>
-          <p:cNvPr id="14" name="TextBox 13"/>
-          <p:cNvSpPr txBox="1"/>
-          <p:nvPr/>
-        </p:nvSpPr>
-        <p:spPr>
-          <a:xfrm>
-            <a:off x="1188720" y="4425696"/>
-            <a:ext cx="10332720" cy="384048"/>
-          </a:xfrm>
-          <a:prstGeom prst="rect">
-            <a:avLst/>
-          </a:prstGeom>
-          <a:noFill/>
-        </p:spPr>
-        <p:txBody>
-          <a:bodyPr wrap="square" lIns="0" rIns="0" tIns="0" bIns="0" anchor="t">
-            <a:spAutoFit/>
-          </a:bodyPr>
-          <a:lstStyle/>
-          <a:p>
-            <a:pPr algn="l">
-              <a:spcAft>
-                <a:spcPts val="600"/>
-              </a:spcAft>
-            </a:pPr>
-            <a:r>
-              <a:rPr sz="1700" b="1" i="0">
-                <a:solidFill>
-                  <a:srgbClr val="FFFFFF"/>
-                </a:solidFill>
-                <a:latin typeface="Cambria"/>
-              </a:rPr>
-              <a:t>The newest models still fail</a:t>
-            </a:r>
-          </a:p>
-        </p:txBody>
-      </p:sp>
-      <p:sp>
-        <p:nvSpPr>
-          <p:cNvPr id="15" name="TextBox 14"/>
-          <p:cNvSpPr txBox="1"/>
-          <p:nvPr/>
-        </p:nvSpPr>
-        <p:spPr>
-          <a:xfrm>
-            <a:off x="1188720" y="4837176"/>
-            <a:ext cx="10332720" cy="411480"/>
-          </a:xfrm>
-          <a:prstGeom prst="rect">
-            <a:avLst/>
-          </a:prstGeom>
-          <a:noFill/>
-        </p:spPr>
-        <p:txBody>
-          <a:bodyPr wrap="square" lIns="0" rIns="0" tIns="0" bIns="0" anchor="t">
-            <a:spAutoFit/>
-          </a:bodyPr>
-          <a:lstStyle/>
-          <a:p>
-            <a:pPr algn="l">
-              <a:spcAft>
-                <a:spcPts val="600"/>
-              </a:spcAft>
-            </a:pPr>
-            <a:r>
-              <a:rPr sz="1300" b="0" i="0">
-                <a:solidFill>
-                  <a:srgbClr val="B9CDDA"/>
-                </a:solidFill>
-                <a:latin typeface="Calibri"/>
-              </a:rPr>
-              <a:t>Gemini and ChatGPT remain worse than both real sets; whether they improved is not yet known.</a:t>
-            </a:r>
-          </a:p>
-        </p:txBody>
-      </p:sp>
-      <p:sp>
-        <p:nvSpPr>
-          <p:cNvPr id="16" name="Oval 15"/>
-          <p:cNvSpPr/>
-          <p:nvPr/>
-        </p:nvSpPr>
-        <p:spPr>
-          <a:xfrm>
-            <a:off x="685800" y="5413248"/>
-            <a:ext cx="256032" cy="256032"/>
-          </a:xfrm>
-          <a:prstGeom prst="ellipse">
-            <a:avLst/>
-          </a:prstGeom>
-          <a:solidFill>
-            <a:srgbClr val="E8A33D"/>
-          </a:solidFill>
-          <a:ln>
-            <a:noFill/>
-          </a:ln>
-          <a:effectLst/>
-        </p:spPr>
-        <p:style>
-          <a:lnRef idx="1">
-            <a:schemeClr val="accent1"/>
-          </a:lnRef>
-          <a:fillRef idx="3">
-            <a:schemeClr val="accent1"/>
-          </a:fillRef>
-          <a:effectRef idx="2">
-            <a:schemeClr val="accent1"/>
-          </a:effectRef>
-          <a:fontRef idx="minor">
-            <a:schemeClr val="lt1"/>
-          </a:fontRef>
-        </p:style>
-        <p:txBody>
-          <a:bodyPr rtlCol="0" anchor="ctr"/>
-          <a:lstStyle/>
-          <a:p>
-            <a:pPr algn="ctr"/>
-          </a:p>
-        </p:txBody>
-      </p:sp>
-      <p:sp>
-        <p:nvSpPr>
-          <p:cNvPr id="17" name="TextBox 16"/>
-          <p:cNvSpPr txBox="1"/>
-          <p:nvPr/>
-        </p:nvSpPr>
-        <p:spPr>
-          <a:xfrm>
-            <a:off x="1188720" y="5321808"/>
-            <a:ext cx="10332720" cy="384048"/>
-          </a:xfrm>
-          <a:prstGeom prst="rect">
-            <a:avLst/>
-          </a:prstGeom>
-          <a:noFill/>
-        </p:spPr>
-        <p:txBody>
-          <a:bodyPr wrap="square" lIns="0" rIns="0" tIns="0" bIns="0" anchor="t">
-            <a:spAutoFit/>
-          </a:bodyPr>
-          <a:lstStyle/>
-          <a:p>
-            <a:pPr algn="l">
-              <a:spcAft>
-                <a:spcPts val="600"/>
-              </a:spcAft>
-            </a:pPr>
-            <a:r>
-              <a:rPr sz="1700" b="1" i="0">
-                <a:solidFill>
-                  <a:srgbClr val="FFFFFF"/>
-                </a:solidFill>
-                <a:latin typeface="Cambria"/>
-              </a:rPr>
-              <a:t>Applicability must be tested, not assumed</a:t>
-            </a:r>
-          </a:p>
-        </p:txBody>
-      </p:sp>
-      <p:sp>
-        <p:nvSpPr>
-          <p:cNvPr id="18" name="TextBox 17"/>
-          <p:cNvSpPr txBox="1"/>
-          <p:nvPr/>
-        </p:nvSpPr>
-        <p:spPr>
-          <a:xfrm>
-            <a:off x="1188720" y="5733288"/>
-            <a:ext cx="10332720" cy="411480"/>
-          </a:xfrm>
-          <a:prstGeom prst="rect">
-            <a:avLst/>
-          </a:prstGeom>
-          <a:noFill/>
-        </p:spPr>
-        <p:txBody>
-          <a:bodyPr wrap="square" lIns="0" rIns="0" tIns="0" bIns="0" anchor="t">
-            <a:spAutoFit/>
-          </a:bodyPr>
-          <a:lstStyle/>
-          <a:p>
-            <a:pPr algn="l">
-              <a:spcAft>
-                <a:spcPts val="600"/>
-              </a:spcAft>
-            </a:pPr>
-            <a:r>
-              <a:rPr sz="1300" b="0" i="0">
-                <a:solidFill>
-                  <a:srgbClr val="B9CDDA"/>
-                </a:solidFill>
-                <a:latin typeface="Calibri"/>
-              </a:rPr>
-              <a:t>The right-angle test does not apply to angled streets; ignoring that flips the verdict.</a:t>
-            </a:r>
-          </a:p>
-        </p:txBody>
-      </p:sp>
-      <p:sp>
-        <p:nvSpPr>
-          <p:cNvPr id="19" name="TextBox 18"/>
-          <p:cNvSpPr txBox="1"/>
-          <p:nvPr/>
-        </p:nvSpPr>
-        <p:spPr>
-          <a:xfrm>
-            <a:off x="685800" y="6355080"/>
-            <a:ext cx="10908792" cy="365760"/>
-          </a:xfrm>
-          <a:prstGeom prst="rect">
-            <a:avLst/>
-          </a:prstGeom>
-          <a:noFill/>
-        </p:spPr>
-        <p:txBody>
-          <a:bodyPr wrap="square" lIns="0" rIns="0" tIns="0" bIns="0" anchor="t">
-            <a:spAutoFit/>
-          </a:bodyPr>
-          <a:lstStyle/>
-          <a:p>
-            <a:pPr algn="l">
-              <a:spcAft>
-                <a:spcPts val="600"/>
-              </a:spcAft>
-            </a:pPr>
-            <a:r>
-              <a:rPr sz="1400" b="1" i="1">
-                <a:solidFill>
-                  <a:srgbClr val="E8A33D"/>
-                </a:solidFill>
-                <a:latin typeface="Calibri"/>
-              </a:rPr>
-              <a:t>Thesis: an AI image looks photographic locally, but there is no single camera behind it.</a:t>
+              <a:t>Left out on purpose: image shape. Every AI image here is 4:3, so width ÷ height alone scores 0.62 and lifts the total to 0.85. That is a dataset shortcut, not geometry.</a:t>
             </a:r>
           </a:p>
         </p:txBody>
@@ -12416,21 +12685,108 @@
                 </a:solidFill>
                 <a:latin typeface="Cambria"/>
               </a:rPr>
-              <a:t>Future Scope</a:t>
-            </a:r>
-          </a:p>
-        </p:txBody>
-      </p:sp>
-      <p:sp>
-        <p:nvSpPr>
-          <p:cNvPr id="4" name="Rounded Rectangle 3"/>
+              <a:t>Demonstration: One Camera or Not?</a:t>
+            </a:r>
+          </a:p>
+        </p:txBody>
+      </p:sp>
+      <p:sp>
+        <p:nvSpPr>
+          <p:cNvPr id="4" name="TextBox 3"/>
+          <p:cNvSpPr txBox="1"/>
+          <p:nvPr/>
+        </p:nvSpPr>
+        <p:spPr>
+          <a:xfrm>
+            <a:off x="640080" y="1207008"/>
+            <a:ext cx="10911535" cy="411480"/>
+          </a:xfrm>
+          <a:prstGeom prst="rect">
+            <a:avLst/>
+          </a:prstGeom>
+          <a:noFill/>
+        </p:spPr>
+        <p:txBody>
+          <a:bodyPr wrap="square" lIns="0" rIns="0" tIns="0" bIns="0" anchor="t">
+            <a:spAutoFit/>
+          </a:bodyPr>
+          <a:lstStyle/>
+          <a:p>
+            <a:pPr algn="l">
+              <a:spcAft>
+                <a:spcPts val="600"/>
+              </a:spcAft>
+            </a:pPr>
+            <a:r>
+              <a:rPr sz="1400" b="0" i="1">
+                <a:solidFill>
+                  <a:srgbClr val="5A6672"/>
+                </a:solidFill>
+                <a:latin typeface="Calibri"/>
+              </a:rPr>
+              <a:t>Live app: any image in, a measured and explained answer out</a:t>
+            </a:r>
+          </a:p>
+        </p:txBody>
+      </p:sp>
+      <p:pic>
+        <p:nvPicPr>
+          <p:cNvPr id="5" name="Picture 4" descr="app_summary.png"/>
+          <p:cNvPicPr>
+            <a:picLocks noChangeAspect="1"/>
+          </p:cNvPicPr>
+          <p:nvPr/>
+        </p:nvPicPr>
+        <p:blipFill>
+          <a:blip r:embed="rId2"/>
+          <a:stretch>
+            <a:fillRect/>
+          </a:stretch>
+        </p:blipFill>
+        <p:spPr>
+          <a:xfrm>
+            <a:off x="640080" y="1737360"/>
+            <a:ext cx="5760720" cy="1688487"/>
+          </a:xfrm>
+          <a:prstGeom prst="rect">
+            <a:avLst/>
+          </a:prstGeom>
+        </p:spPr>
+      </p:pic>
+      <p:pic>
+        <p:nvPicPr>
+          <p:cNvPr id="6" name="Picture 5" descr="app_result_card.png"/>
+          <p:cNvPicPr>
+            <a:picLocks noChangeAspect="1"/>
+          </p:cNvPicPr>
+          <p:nvPr/>
+        </p:nvPicPr>
+        <p:blipFill>
+          <a:blip r:embed="rId3"/>
+          <a:stretch>
+            <a:fillRect/>
+          </a:stretch>
+        </p:blipFill>
+        <p:spPr>
+          <a:xfrm>
+            <a:off x="640080" y="3611880"/>
+            <a:ext cx="5760720" cy="2458238"/>
+          </a:xfrm>
+          <a:prstGeom prst="rect">
+            <a:avLst/>
+          </a:prstGeom>
+        </p:spPr>
+      </p:pic>
+      <p:sp>
+        <p:nvSpPr>
+          <p:cNvPr id="7" name="Rounded Rectangle 6"/>
           <p:cNvSpPr/>
           <p:nvPr/>
         </p:nvSpPr>
         <p:spPr>
           <a:xfrm>
-            <a:off x="640080" y="1920240"/>
-            <a:ext cx="3520440" cy="1874519"/>
+            <a:off x="6629400" y="1737360"/>
+            <a:ext cx="4919472" cy="4709160"/>
           </a:xfrm>
           <a:prstGeom prst="roundRect">
             <a:avLst>
@@ -12469,58 +12825,14 @@
       </p:sp>
       <p:sp>
         <p:nvSpPr>
-          <p:cNvPr id="5" name="Oval 4"/>
-          <p:cNvSpPr/>
-          <p:nvPr/>
-        </p:nvSpPr>
-        <p:spPr>
-          <a:xfrm>
-            <a:off x="914400" y="2176272"/>
-            <a:ext cx="329184" cy="329184"/>
-          </a:xfrm>
-          <a:prstGeom prst="ellipse">
-            <a:avLst/>
-          </a:prstGeom>
-          <a:solidFill>
-            <a:srgbClr val="1C7293"/>
-          </a:solidFill>
-          <a:ln>
-            <a:noFill/>
-          </a:ln>
-          <a:effectLst/>
-        </p:spPr>
-        <p:style>
-          <a:lnRef idx="1">
-            <a:schemeClr val="accent1"/>
-          </a:lnRef>
-          <a:fillRef idx="3">
-            <a:schemeClr val="accent1"/>
-          </a:fillRef>
-          <a:effectRef idx="2">
-            <a:schemeClr val="accent1"/>
-          </a:effectRef>
-          <a:fontRef idx="minor">
-            <a:schemeClr val="lt1"/>
-          </a:fontRef>
-        </p:style>
-        <p:txBody>
-          <a:bodyPr rtlCol="0" anchor="ctr"/>
-          <a:lstStyle/>
-          <a:p>
-            <a:pPr algn="ctr"/>
-          </a:p>
-        </p:txBody>
-      </p:sp>
-      <p:sp>
-        <p:nvSpPr>
-          <p:cNvPr id="6" name="TextBox 5"/>
+          <p:cNvPr id="8" name="TextBox 7"/>
           <p:cNvSpPr txBox="1"/>
           <p:nvPr/>
         </p:nvSpPr>
         <p:spPr>
           <a:xfrm>
-            <a:off x="1389888" y="2194560"/>
-            <a:ext cx="2560320" cy="365760"/>
+            <a:off x="6903720" y="1920240"/>
+            <a:ext cx="4389120" cy="365760"/>
           </a:xfrm>
           <a:prstGeom prst="rect">
             <a:avLst/>
@@ -12539,27 +12851,27 @@
               </a:spcAft>
             </a:pPr>
             <a:r>
-              <a:rPr sz="1450" b="1" i="0">
+              <a:rPr sz="1200" b="1" i="0">
                 <a:solidFill>
                   <a:srgbClr val="12263A"/>
                 </a:solidFill>
-                <a:latin typeface="Cambria"/>
-              </a:rPr>
-              <a:t>Powered frontier test</a:t>
-            </a:r>
-          </a:p>
-        </p:txBody>
-      </p:sp>
-      <p:sp>
-        <p:nvSpPr>
-          <p:cNvPr id="7" name="TextBox 6"/>
+                <a:latin typeface="Calibri"/>
+              </a:rPr>
+              <a:t>RUN</a:t>
+            </a:r>
+          </a:p>
+        </p:txBody>
+      </p:sp>
+      <p:sp>
+        <p:nvSpPr>
+          <p:cNvPr id="9" name="TextBox 8"/>
           <p:cNvSpPr txBox="1"/>
           <p:nvPr/>
         </p:nvSpPr>
         <p:spPr>
           <a:xfrm>
-            <a:off x="914400" y="2697480"/>
-            <a:ext cx="2971800" cy="960120"/>
+            <a:off x="6903720" y="2286000"/>
+            <a:ext cx="4389120" cy="548640"/>
           </a:xfrm>
           <a:prstGeom prst="rect">
             <a:avLst/>
@@ -12574,108 +12886,34 @@
           <a:p>
             <a:pPr algn="l">
               <a:spcAft>
-                <a:spcPts val="600"/>
+                <a:spcPts val="200"/>
               </a:spcAft>
             </a:pPr>
             <a:r>
               <a:rPr sz="1200" b="0" i="0">
                 <a:solidFill>
-                  <a:srgbClr val="5A6672"/>
-                </a:solidFill>
-                <a:latin typeface="Calibri"/>
-              </a:rPr>
-              <a:t>250 line-rich prompts per model at full resolution, plus Midjourney. Prompts and instructions are ready.</a:t>
-            </a:r>
-          </a:p>
-        </p:txBody>
-      </p:sp>
-      <p:sp>
-        <p:nvSpPr>
-          <p:cNvPr id="8" name="Rounded Rectangle 7"/>
-          <p:cNvSpPr/>
-          <p:nvPr/>
-        </p:nvSpPr>
-        <p:spPr>
-          <a:xfrm>
-            <a:off x="4407408" y="1920240"/>
-            <a:ext cx="3520440" cy="1874519"/>
-          </a:xfrm>
-          <a:prstGeom prst="roundRect">
-            <a:avLst>
-              <a:gd name="adj" fmla="val 6000"/>
-            </a:avLst>
-          </a:prstGeom>
-          <a:solidFill>
-            <a:srgbClr val="F4F6F8"/>
-          </a:solidFill>
-          <a:ln>
-            <a:noFill/>
-          </a:ln>
-          <a:effectLst/>
-        </p:spPr>
-        <p:style>
-          <a:lnRef idx="1">
-            <a:schemeClr val="accent1"/>
-          </a:lnRef>
-          <a:fillRef idx="3">
-            <a:schemeClr val="accent1"/>
-          </a:fillRef>
-          <a:effectRef idx="2">
-            <a:schemeClr val="accent1"/>
-          </a:effectRef>
-          <a:fontRef idx="minor">
-            <a:schemeClr val="lt1"/>
-          </a:fontRef>
-        </p:style>
-        <p:txBody>
-          <a:bodyPr rtlCol="0" anchor="ctr"/>
-          <a:lstStyle/>
-          <a:p>
-            <a:pPr algn="ctr"/>
-          </a:p>
-        </p:txBody>
-      </p:sp>
-      <p:sp>
-        <p:nvSpPr>
-          <p:cNvPr id="9" name="Oval 8"/>
-          <p:cNvSpPr/>
-          <p:nvPr/>
-        </p:nvSpPr>
-        <p:spPr>
-          <a:xfrm>
-            <a:off x="4681728" y="2176272"/>
-            <a:ext cx="329184" cy="329184"/>
-          </a:xfrm>
-          <a:prstGeom prst="ellipse">
-            <a:avLst/>
-          </a:prstGeom>
-          <a:solidFill>
-            <a:srgbClr val="12263A"/>
-          </a:solidFill>
-          <a:ln>
-            <a:noFill/>
-          </a:ln>
-          <a:effectLst/>
-        </p:spPr>
-        <p:style>
-          <a:lnRef idx="1">
-            <a:schemeClr val="accent1"/>
-          </a:lnRef>
-          <a:fillRef idx="3">
-            <a:schemeClr val="accent1"/>
-          </a:fillRef>
-          <a:effectRef idx="2">
-            <a:schemeClr val="accent1"/>
-          </a:effectRef>
-          <a:fontRef idx="minor">
-            <a:schemeClr val="lt1"/>
-          </a:fontRef>
-        </p:style>
-        <p:txBody>
-          <a:bodyPr rtlCol="0" anchor="ctr"/>
-          <a:lstStyle/>
-          <a:p>
-            <a:pPr algn="ctr"/>
+                  <a:srgbClr val="1C7293"/>
+                </a:solidFill>
+                <a:latin typeface="Courier New"/>
+              </a:rPr>
+              <a:t>python -m streamlit run app/streamlit_app.py</a:t>
+            </a:r>
+          </a:p>
+          <a:p>
+            <a:pPr algn="l">
+              <a:spcAft>
+                <a:spcPts val="200"/>
+              </a:spcAft>
+            </a:pPr>
+            <a:r>
+              <a:rPr sz="1200" b="0" i="0">
+                <a:solidFill>
+                  <a:srgbClr val="1C7293"/>
+                </a:solidFill>
+                <a:latin typeface="Courier New"/>
+              </a:rPr>
+              <a:t>localhost:8501/?examples=all</a:t>
+            </a:r>
           </a:p>
         </p:txBody>
       </p:sp>
@@ -12687,8 +12925,8 @@
         </p:nvSpPr>
         <p:spPr>
           <a:xfrm>
-            <a:off x="5157216" y="2194560"/>
-            <a:ext cx="2560320" cy="365760"/>
+            <a:off x="6903720" y="2971800"/>
+            <a:ext cx="4389120" cy="365760"/>
           </a:xfrm>
           <a:prstGeom prst="rect">
             <a:avLst/>
@@ -12707,13 +12945,13 @@
               </a:spcAft>
             </a:pPr>
             <a:r>
-              <a:rPr sz="1450" b="1" i="0">
+              <a:rPr sz="1200" b="1" i="0">
                 <a:solidFill>
                   <a:srgbClr val="12263A"/>
                 </a:solidFill>
-                <a:latin typeface="Cambria"/>
-              </a:rPr>
-              <a:t>Shadow association</a:t>
+                <a:latin typeface="Calibri"/>
+              </a:rPr>
+              <a:t>DEMO ORDER (3 MINUTES)</a:t>
             </a:r>
           </a:p>
         </p:txBody>
@@ -12726,8 +12964,127 @@
         </p:nvSpPr>
         <p:spPr>
           <a:xfrm>
-            <a:off x="4681728" y="2697480"/>
-            <a:ext cx="2971800" cy="960120"/>
+            <a:off x="6903720" y="3337560"/>
+            <a:ext cx="4389120" cy="2011680"/>
+          </a:xfrm>
+          <a:prstGeom prst="rect">
+            <a:avLst/>
+          </a:prstGeom>
+          <a:noFill/>
+        </p:spPr>
+        <p:txBody>
+          <a:bodyPr wrap="square" lIns="0" rIns="0" tIns="0" bIns="0">
+            <a:spAutoFit/>
+          </a:bodyPr>
+          <a:lstStyle/>
+          <a:p>
+            <a:pPr>
+              <a:spcAft>
+                <a:spcPts val="400"/>
+              </a:spcAft>
+            </a:pPr>
+            <a:r>
+              <a:rPr sz="1250" b="0">
+                <a:solidFill>
+                  <a:srgbClr val="1A1A1A"/>
+                </a:solidFill>
+                <a:latin typeface="Calibri"/>
+              </a:rPr>
+              <a:t>•  Real corridor: 649 and 713 px vs a true 675 px</a:t>
+            </a:r>
+          </a:p>
+          <a:p>
+            <a:pPr>
+              <a:spcAft>
+                <a:spcPts val="400"/>
+              </a:spcAft>
+            </a:pPr>
+            <a:r>
+              <a:rPr sz="1250" b="0">
+                <a:solidFill>
+                  <a:srgbClr val="1A1A1A"/>
+                </a:solidFill>
+                <a:latin typeface="Calibri"/>
+              </a:rPr>
+              <a:t>•  Gemini classroom: directions disagree by 94%</a:t>
+            </a:r>
+          </a:p>
+          <a:p>
+            <a:pPr>
+              <a:spcAft>
+                <a:spcPts val="400"/>
+              </a:spcAft>
+            </a:pPr>
+            <a:r>
+              <a:rPr sz="1250" b="0">
+                <a:solidFill>
+                  <a:srgbClr val="1A1A1A"/>
+                </a:solidFill>
+                <a:latin typeface="Calibri"/>
+              </a:rPr>
+              <a:t>•  ChatGPT lecture hall: “unclear”, the hard case</a:t>
+            </a:r>
+          </a:p>
+          <a:p>
+            <a:pPr>
+              <a:spcAft>
+                <a:spcPts val="400"/>
+              </a:spcAft>
+            </a:pPr>
+            <a:r>
+              <a:rPr sz="1250" b="0">
+                <a:solidFill>
+                  <a:srgbClr val="1A1A1A"/>
+                </a:solidFill>
+                <a:latin typeface="Calibri"/>
+              </a:rPr>
+              <a:t>•  A Gemini image that fools it: a check, not proof</a:t>
+            </a:r>
+          </a:p>
+          <a:p>
+            <a:pPr>
+              <a:spcAft>
+                <a:spcPts val="400"/>
+              </a:spcAft>
+            </a:pPr>
+            <a:r>
+              <a:rPr sz="1250" b="0">
+                <a:solidFill>
+                  <a:srgbClr val="1A1A1A"/>
+                </a:solidFill>
+                <a:latin typeface="Calibri"/>
+              </a:rPr>
+              <a:t>•  An image it cannot measure, and why</a:t>
+            </a:r>
+          </a:p>
+          <a:p>
+            <a:pPr>
+              <a:spcAft>
+                <a:spcPts val="400"/>
+              </a:spcAft>
+            </a:pPr>
+            <a:r>
+              <a:rPr sz="1250" b="0">
+                <a:solidFill>
+                  <a:srgbClr val="1A1A1A"/>
+                </a:solidFill>
+                <a:latin typeface="Calibri"/>
+              </a:rPr>
+              <a:t>•  An image from the audience</a:t>
+            </a:r>
+          </a:p>
+        </p:txBody>
+      </p:sp>
+      <p:sp>
+        <p:nvSpPr>
+          <p:cNvPr id="12" name="TextBox 11"/>
+          <p:cNvSpPr txBox="1"/>
+          <p:nvPr/>
+        </p:nvSpPr>
+        <p:spPr>
+          <a:xfrm>
+            <a:off x="6903720" y="5486400"/>
+            <a:ext cx="4389120" cy="822960"/>
           </a:xfrm>
           <a:prstGeom prst="rect">
             <a:avLst/>
@@ -12746,685 +13103,13 @@
               </a:spcAft>
             </a:pPr>
             <a:r>
-              <a:rPr sz="1200" b="0" i="0">
+              <a:rPr sz="1200" b="0" i="1">
                 <a:solidFill>
                   <a:srgbClr val="5A6672"/>
                 </a:solidFill>
                 <a:latin typeface="Calibri"/>
               </a:rPr>
-              <a:t>SSIS or SAM 2 to pair shadows with objects; the wedge LP above it is built and validated.</a:t>
-            </a:r>
-          </a:p>
-        </p:txBody>
-      </p:sp>
-      <p:sp>
-        <p:nvSpPr>
-          <p:cNvPr id="12" name="Rounded Rectangle 11"/>
-          <p:cNvSpPr/>
-          <p:nvPr/>
-        </p:nvSpPr>
-        <p:spPr>
-          <a:xfrm>
-            <a:off x="8174736" y="1920240"/>
-            <a:ext cx="3520440" cy="1874519"/>
-          </a:xfrm>
-          <a:prstGeom prst="roundRect">
-            <a:avLst>
-              <a:gd name="adj" fmla="val 6000"/>
-            </a:avLst>
-          </a:prstGeom>
-          <a:solidFill>
-            <a:srgbClr val="F4F6F8"/>
-          </a:solidFill>
-          <a:ln>
-            <a:noFill/>
-          </a:ln>
-          <a:effectLst/>
-        </p:spPr>
-        <p:style>
-          <a:lnRef idx="1">
-            <a:schemeClr val="accent1"/>
-          </a:lnRef>
-          <a:fillRef idx="3">
-            <a:schemeClr val="accent1"/>
-          </a:fillRef>
-          <a:effectRef idx="2">
-            <a:schemeClr val="accent1"/>
-          </a:effectRef>
-          <a:fontRef idx="minor">
-            <a:schemeClr val="lt1"/>
-          </a:fontRef>
-        </p:style>
-        <p:txBody>
-          <a:bodyPr rtlCol="0" anchor="ctr"/>
-          <a:lstStyle/>
-          <a:p>
-            <a:pPr algn="ctr"/>
-          </a:p>
-        </p:txBody>
-      </p:sp>
-      <p:sp>
-        <p:nvSpPr>
-          <p:cNvPr id="13" name="Oval 12"/>
-          <p:cNvSpPr/>
-          <p:nvPr/>
-        </p:nvSpPr>
-        <p:spPr>
-          <a:xfrm>
-            <a:off x="8449056" y="2176272"/>
-            <a:ext cx="329184" cy="329184"/>
-          </a:xfrm>
-          <a:prstGeom prst="ellipse">
-            <a:avLst/>
-          </a:prstGeom>
-          <a:solidFill>
-            <a:srgbClr val="1C7293"/>
-          </a:solidFill>
-          <a:ln>
-            <a:noFill/>
-          </a:ln>
-          <a:effectLst/>
-        </p:spPr>
-        <p:style>
-          <a:lnRef idx="1">
-            <a:schemeClr val="accent1"/>
-          </a:lnRef>
-          <a:fillRef idx="3">
-            <a:schemeClr val="accent1"/>
-          </a:fillRef>
-          <a:effectRef idx="2">
-            <a:schemeClr val="accent1"/>
-          </a:effectRef>
-          <a:fontRef idx="minor">
-            <a:schemeClr val="lt1"/>
-          </a:fontRef>
-        </p:style>
-        <p:txBody>
-          <a:bodyPr rtlCol="0" anchor="ctr"/>
-          <a:lstStyle/>
-          <a:p>
-            <a:pPr algn="ctr"/>
-          </a:p>
-        </p:txBody>
-      </p:sp>
-      <p:sp>
-        <p:nvSpPr>
-          <p:cNvPr id="14" name="TextBox 13"/>
-          <p:cNvSpPr txBox="1"/>
-          <p:nvPr/>
-        </p:nvSpPr>
-        <p:spPr>
-          <a:xfrm>
-            <a:off x="8924544" y="2194560"/>
-            <a:ext cx="2560320" cy="365760"/>
-          </a:xfrm>
-          <a:prstGeom prst="rect">
-            <a:avLst/>
-          </a:prstGeom>
-          <a:noFill/>
-        </p:spPr>
-        <p:txBody>
-          <a:bodyPr wrap="square" lIns="0" rIns="0" tIns="0" bIns="0" anchor="t">
-            <a:spAutoFit/>
-          </a:bodyPr>
-          <a:lstStyle/>
-          <a:p>
-            <a:pPr algn="l">
-              <a:spcAft>
-                <a:spcPts val="600"/>
-              </a:spcAft>
-            </a:pPr>
-            <a:r>
-              <a:rPr sz="1450" b="1" i="0">
-                <a:solidFill>
-                  <a:srgbClr val="12263A"/>
-                </a:solidFill>
-                <a:latin typeface="Cambria"/>
-              </a:rPr>
-              <a:t>Remaining levels</a:t>
-            </a:r>
-          </a:p>
-        </p:txBody>
-      </p:sp>
-      <p:sp>
-        <p:nvSpPr>
-          <p:cNvPr id="15" name="TextBox 14"/>
-          <p:cNvSpPr txBox="1"/>
-          <p:nvPr/>
-        </p:nvSpPr>
-        <p:spPr>
-          <a:xfrm>
-            <a:off x="8449056" y="2697480"/>
-            <a:ext cx="2971800" cy="960120"/>
-          </a:xfrm>
-          <a:prstGeom prst="rect">
-            <a:avLst/>
-          </a:prstGeom>
-          <a:noFill/>
-        </p:spPr>
-        <p:txBody>
-          <a:bodyPr wrap="square" lIns="0" rIns="0" tIns="0" bIns="0" anchor="t">
-            <a:spAutoFit/>
-          </a:bodyPr>
-          <a:lstStyle/>
-          <a:p>
-            <a:pPr algn="l">
-              <a:spcAft>
-                <a:spcPts val="600"/>
-              </a:spcAft>
-            </a:pPr>
-            <a:r>
-              <a:rPr sz="1200" b="0" i="0">
-                <a:solidFill>
-                  <a:srgbClr val="5A6672"/>
-                </a:solidFill>
-                <a:latin typeface="Calibri"/>
-              </a:rPr>
-              <a:t>Horizon, cross-ratio, conics, reflections and agreement with depth networks.</a:t>
-            </a:r>
-          </a:p>
-        </p:txBody>
-      </p:sp>
-      <p:sp>
-        <p:nvSpPr>
-          <p:cNvPr id="16" name="Rounded Rectangle 15"/>
-          <p:cNvSpPr/>
-          <p:nvPr/>
-        </p:nvSpPr>
-        <p:spPr>
-          <a:xfrm>
-            <a:off x="640080" y="4114800"/>
-            <a:ext cx="3520440" cy="1874519"/>
-          </a:xfrm>
-          <a:prstGeom prst="roundRect">
-            <a:avLst>
-              <a:gd name="adj" fmla="val 6000"/>
-            </a:avLst>
-          </a:prstGeom>
-          <a:solidFill>
-            <a:srgbClr val="F4F6F8"/>
-          </a:solidFill>
-          <a:ln>
-            <a:noFill/>
-          </a:ln>
-          <a:effectLst/>
-        </p:spPr>
-        <p:style>
-          <a:lnRef idx="1">
-            <a:schemeClr val="accent1"/>
-          </a:lnRef>
-          <a:fillRef idx="3">
-            <a:schemeClr val="accent1"/>
-          </a:fillRef>
-          <a:effectRef idx="2">
-            <a:schemeClr val="accent1"/>
-          </a:effectRef>
-          <a:fontRef idx="minor">
-            <a:schemeClr val="lt1"/>
-          </a:fontRef>
-        </p:style>
-        <p:txBody>
-          <a:bodyPr rtlCol="0" anchor="ctr"/>
-          <a:lstStyle/>
-          <a:p>
-            <a:pPr algn="ctr"/>
-          </a:p>
-        </p:txBody>
-      </p:sp>
-      <p:sp>
-        <p:nvSpPr>
-          <p:cNvPr id="17" name="Oval 16"/>
-          <p:cNvSpPr/>
-          <p:nvPr/>
-        </p:nvSpPr>
-        <p:spPr>
-          <a:xfrm>
-            <a:off x="914400" y="4370832"/>
-            <a:ext cx="329184" cy="329184"/>
-          </a:xfrm>
-          <a:prstGeom prst="ellipse">
-            <a:avLst/>
-          </a:prstGeom>
-          <a:solidFill>
-            <a:srgbClr val="E8A33D"/>
-          </a:solidFill>
-          <a:ln>
-            <a:noFill/>
-          </a:ln>
-          <a:effectLst/>
-        </p:spPr>
-        <p:style>
-          <a:lnRef idx="1">
-            <a:schemeClr val="accent1"/>
-          </a:lnRef>
-          <a:fillRef idx="3">
-            <a:schemeClr val="accent1"/>
-          </a:fillRef>
-          <a:effectRef idx="2">
-            <a:schemeClr val="accent1"/>
-          </a:effectRef>
-          <a:fontRef idx="minor">
-            <a:schemeClr val="lt1"/>
-          </a:fontRef>
-        </p:style>
-        <p:txBody>
-          <a:bodyPr rtlCol="0" anchor="ctr"/>
-          <a:lstStyle/>
-          <a:p>
-            <a:pPr algn="ctr"/>
-          </a:p>
-        </p:txBody>
-      </p:sp>
-      <p:sp>
-        <p:nvSpPr>
-          <p:cNvPr id="18" name="TextBox 17"/>
-          <p:cNvSpPr txBox="1"/>
-          <p:nvPr/>
-        </p:nvSpPr>
-        <p:spPr>
-          <a:xfrm>
-            <a:off x="1389888" y="4389120"/>
-            <a:ext cx="2560320" cy="365760"/>
-          </a:xfrm>
-          <a:prstGeom prst="rect">
-            <a:avLst/>
-          </a:prstGeom>
-          <a:noFill/>
-        </p:spPr>
-        <p:txBody>
-          <a:bodyPr wrap="square" lIns="0" rIns="0" tIns="0" bIns="0" anchor="t">
-            <a:spAutoFit/>
-          </a:bodyPr>
-          <a:lstStyle/>
-          <a:p>
-            <a:pPr algn="l">
-              <a:spcAft>
-                <a:spcPts val="600"/>
-              </a:spcAft>
-            </a:pPr>
-            <a:r>
-              <a:rPr sz="1450" b="1" i="0">
-                <a:solidFill>
-                  <a:srgbClr val="12263A"/>
-                </a:solidFill>
-                <a:latin typeface="Cambria"/>
-              </a:rPr>
-              <a:t>Mechanism</a:t>
-            </a:r>
-          </a:p>
-        </p:txBody>
-      </p:sp>
-      <p:sp>
-        <p:nvSpPr>
-          <p:cNvPr id="19" name="TextBox 18"/>
-          <p:cNvSpPr txBox="1"/>
-          <p:nvPr/>
-        </p:nvSpPr>
-        <p:spPr>
-          <a:xfrm>
-            <a:off x="914400" y="4892040"/>
-            <a:ext cx="2971800" cy="960120"/>
-          </a:xfrm>
-          <a:prstGeom prst="rect">
-            <a:avLst/>
-          </a:prstGeom>
-          <a:noFill/>
-        </p:spPr>
-        <p:txBody>
-          <a:bodyPr wrap="square" lIns="0" rIns="0" tIns="0" bIns="0" anchor="t">
-            <a:spAutoFit/>
-          </a:bodyPr>
-          <a:lstStyle/>
-          <a:p>
-            <a:pPr algn="l">
-              <a:spcAft>
-                <a:spcPts val="600"/>
-              </a:spcAft>
-            </a:pPr>
-            <a:r>
-              <a:rPr sz="1200" b="0" i="0">
-                <a:solidFill>
-                  <a:srgbClr val="5A6672"/>
-                </a:solidFill>
-                <a:latin typeface="Calibri"/>
-              </a:rPr>
-              <a:t>Why does scale not fix the camera? Aspect ratio is ruled out; resolution and receptive field remain.</a:t>
-            </a:r>
-          </a:p>
-        </p:txBody>
-      </p:sp>
-      <p:sp>
-        <p:nvSpPr>
-          <p:cNvPr id="20" name="Rounded Rectangle 19"/>
-          <p:cNvSpPr/>
-          <p:nvPr/>
-        </p:nvSpPr>
-        <p:spPr>
-          <a:xfrm>
-            <a:off x="4407408" y="4114800"/>
-            <a:ext cx="3520440" cy="1874519"/>
-          </a:xfrm>
-          <a:prstGeom prst="roundRect">
-            <a:avLst>
-              <a:gd name="adj" fmla="val 6000"/>
-            </a:avLst>
-          </a:prstGeom>
-          <a:solidFill>
-            <a:srgbClr val="F4F6F8"/>
-          </a:solidFill>
-          <a:ln>
-            <a:noFill/>
-          </a:ln>
-          <a:effectLst/>
-        </p:spPr>
-        <p:style>
-          <a:lnRef idx="1">
-            <a:schemeClr val="accent1"/>
-          </a:lnRef>
-          <a:fillRef idx="3">
-            <a:schemeClr val="accent1"/>
-          </a:fillRef>
-          <a:effectRef idx="2">
-            <a:schemeClr val="accent1"/>
-          </a:effectRef>
-          <a:fontRef idx="minor">
-            <a:schemeClr val="lt1"/>
-          </a:fontRef>
-        </p:style>
-        <p:txBody>
-          <a:bodyPr rtlCol="0" anchor="ctr"/>
-          <a:lstStyle/>
-          <a:p>
-            <a:pPr algn="ctr"/>
-          </a:p>
-        </p:txBody>
-      </p:sp>
-      <p:sp>
-        <p:nvSpPr>
-          <p:cNvPr id="21" name="Oval 20"/>
-          <p:cNvSpPr/>
-          <p:nvPr/>
-        </p:nvSpPr>
-        <p:spPr>
-          <a:xfrm>
-            <a:off x="4681728" y="4370832"/>
-            <a:ext cx="329184" cy="329184"/>
-          </a:xfrm>
-          <a:prstGeom prst="ellipse">
-            <a:avLst/>
-          </a:prstGeom>
-          <a:solidFill>
-            <a:srgbClr val="12263A"/>
-          </a:solidFill>
-          <a:ln>
-            <a:noFill/>
-          </a:ln>
-          <a:effectLst/>
-        </p:spPr>
-        <p:style>
-          <a:lnRef idx="1">
-            <a:schemeClr val="accent1"/>
-          </a:lnRef>
-          <a:fillRef idx="3">
-            <a:schemeClr val="accent1"/>
-          </a:fillRef>
-          <a:effectRef idx="2">
-            <a:schemeClr val="accent1"/>
-          </a:effectRef>
-          <a:fontRef idx="minor">
-            <a:schemeClr val="lt1"/>
-          </a:fontRef>
-        </p:style>
-        <p:txBody>
-          <a:bodyPr rtlCol="0" anchor="ctr"/>
-          <a:lstStyle/>
-          <a:p>
-            <a:pPr algn="ctr"/>
-          </a:p>
-        </p:txBody>
-      </p:sp>
-      <p:sp>
-        <p:nvSpPr>
-          <p:cNvPr id="22" name="TextBox 21"/>
-          <p:cNvSpPr txBox="1"/>
-          <p:nvPr/>
-        </p:nvSpPr>
-        <p:spPr>
-          <a:xfrm>
-            <a:off x="5157216" y="4389120"/>
-            <a:ext cx="2560320" cy="365760"/>
-          </a:xfrm>
-          <a:prstGeom prst="rect">
-            <a:avLst/>
-          </a:prstGeom>
-          <a:noFill/>
-        </p:spPr>
-        <p:txBody>
-          <a:bodyPr wrap="square" lIns="0" rIns="0" tIns="0" bIns="0" anchor="t">
-            <a:spAutoFit/>
-          </a:bodyPr>
-          <a:lstStyle/>
-          <a:p>
-            <a:pPr algn="l">
-              <a:spcAft>
-                <a:spcPts val="600"/>
-              </a:spcAft>
-            </a:pPr>
-            <a:r>
-              <a:rPr sz="1450" b="1" i="0">
-                <a:solidFill>
-                  <a:srgbClr val="12263A"/>
-                </a:solidFill>
-                <a:latin typeface="Cambria"/>
-              </a:rPr>
-              <a:t>Atlanta-style regional fit</a:t>
-            </a:r>
-          </a:p>
-        </p:txBody>
-      </p:sp>
-      <p:sp>
-        <p:nvSpPr>
-          <p:cNvPr id="23" name="TextBox 22"/>
-          <p:cNvSpPr txBox="1"/>
-          <p:nvPr/>
-        </p:nvSpPr>
-        <p:spPr>
-          <a:xfrm>
-            <a:off x="4681728" y="4892040"/>
-            <a:ext cx="2971800" cy="960120"/>
-          </a:xfrm>
-          <a:prstGeom prst="rect">
-            <a:avLst/>
-          </a:prstGeom>
-          <a:noFill/>
-        </p:spPr>
-        <p:txBody>
-          <a:bodyPr wrap="square" lIns="0" rIns="0" tIns="0" bIns="0" anchor="t">
-            <a:spAutoFit/>
-          </a:bodyPr>
-          <a:lstStyle/>
-          <a:p>
-            <a:pPr algn="l">
-              <a:spcAft>
-                <a:spcPts val="600"/>
-              </a:spcAft>
-            </a:pPr>
-            <a:r>
-              <a:rPr sz="1200" b="0" i="0">
-                <a:solidFill>
-                  <a:srgbClr val="5A6672"/>
-                </a:solidFill>
-                <a:latin typeface="Calibri"/>
-              </a:rPr>
-              <a:t>Redo the regional analysis without assuming every vanishing point pair is at right angles.</a:t>
-            </a:r>
-          </a:p>
-        </p:txBody>
-      </p:sp>
-      <p:sp>
-        <p:nvSpPr>
-          <p:cNvPr id="24" name="Rounded Rectangle 23"/>
-          <p:cNvSpPr/>
-          <p:nvPr/>
-        </p:nvSpPr>
-        <p:spPr>
-          <a:xfrm>
-            <a:off x="8174736" y="4114800"/>
-            <a:ext cx="3520440" cy="1874519"/>
-          </a:xfrm>
-          <a:prstGeom prst="roundRect">
-            <a:avLst>
-              <a:gd name="adj" fmla="val 6000"/>
-            </a:avLst>
-          </a:prstGeom>
-          <a:solidFill>
-            <a:srgbClr val="F4F6F8"/>
-          </a:solidFill>
-          <a:ln>
-            <a:noFill/>
-          </a:ln>
-          <a:effectLst/>
-        </p:spPr>
-        <p:style>
-          <a:lnRef idx="1">
-            <a:schemeClr val="accent1"/>
-          </a:lnRef>
-          <a:fillRef idx="3">
-            <a:schemeClr val="accent1"/>
-          </a:fillRef>
-          <a:effectRef idx="2">
-            <a:schemeClr val="accent1"/>
-          </a:effectRef>
-          <a:fontRef idx="minor">
-            <a:schemeClr val="lt1"/>
-          </a:fontRef>
-        </p:style>
-        <p:txBody>
-          <a:bodyPr rtlCol="0" anchor="ctr"/>
-          <a:lstStyle/>
-          <a:p>
-            <a:pPr algn="ctr"/>
-          </a:p>
-        </p:txBody>
-      </p:sp>
-      <p:sp>
-        <p:nvSpPr>
-          <p:cNvPr id="25" name="Oval 24"/>
-          <p:cNvSpPr/>
-          <p:nvPr/>
-        </p:nvSpPr>
-        <p:spPr>
-          <a:xfrm>
-            <a:off x="8449056" y="4370832"/>
-            <a:ext cx="329184" cy="329184"/>
-          </a:xfrm>
-          <a:prstGeom prst="ellipse">
-            <a:avLst/>
-          </a:prstGeom>
-          <a:solidFill>
-            <a:srgbClr val="1C7293"/>
-          </a:solidFill>
-          <a:ln>
-            <a:noFill/>
-          </a:ln>
-          <a:effectLst/>
-        </p:spPr>
-        <p:style>
-          <a:lnRef idx="1">
-            <a:schemeClr val="accent1"/>
-          </a:lnRef>
-          <a:fillRef idx="3">
-            <a:schemeClr val="accent1"/>
-          </a:fillRef>
-          <a:effectRef idx="2">
-            <a:schemeClr val="accent1"/>
-          </a:effectRef>
-          <a:fontRef idx="minor">
-            <a:schemeClr val="lt1"/>
-          </a:fontRef>
-        </p:style>
-        <p:txBody>
-          <a:bodyPr rtlCol="0" anchor="ctr"/>
-          <a:lstStyle/>
-          <a:p>
-            <a:pPr algn="ctr"/>
-          </a:p>
-        </p:txBody>
-      </p:sp>
-      <p:sp>
-        <p:nvSpPr>
-          <p:cNvPr id="26" name="TextBox 25"/>
-          <p:cNvSpPr txBox="1"/>
-          <p:nvPr/>
-        </p:nvSpPr>
-        <p:spPr>
-          <a:xfrm>
-            <a:off x="8924544" y="4389120"/>
-            <a:ext cx="2560320" cy="365760"/>
-          </a:xfrm>
-          <a:prstGeom prst="rect">
-            <a:avLst/>
-          </a:prstGeom>
-          <a:noFill/>
-        </p:spPr>
-        <p:txBody>
-          <a:bodyPr wrap="square" lIns="0" rIns="0" tIns="0" bIns="0" anchor="t">
-            <a:spAutoFit/>
-          </a:bodyPr>
-          <a:lstStyle/>
-          <a:p>
-            <a:pPr algn="l">
-              <a:spcAft>
-                <a:spcPts val="600"/>
-              </a:spcAft>
-            </a:pPr>
-            <a:r>
-              <a:rPr sz="1450" b="1" i="0">
-                <a:solidFill>
-                  <a:srgbClr val="12263A"/>
-                </a:solidFill>
-                <a:latin typeface="Cambria"/>
-              </a:rPr>
-              <a:t>Perception study</a:t>
-            </a:r>
-          </a:p>
-        </p:txBody>
-      </p:sp>
-      <p:sp>
-        <p:nvSpPr>
-          <p:cNvPr id="27" name="TextBox 26"/>
-          <p:cNvSpPr txBox="1"/>
-          <p:nvPr/>
-        </p:nvSpPr>
-        <p:spPr>
-          <a:xfrm>
-            <a:off x="8449056" y="4892040"/>
-            <a:ext cx="2971800" cy="960120"/>
-          </a:xfrm>
-          <a:prstGeom prst="rect">
-            <a:avLst/>
-          </a:prstGeom>
-          <a:noFill/>
-        </p:spPr>
-        <p:txBody>
-          <a:bodyPr wrap="square" lIns="0" rIns="0" tIns="0" bIns="0" anchor="t">
-            <a:spAutoFit/>
-          </a:bodyPr>
-          <a:lstStyle/>
-          <a:p>
-            <a:pPr algn="l">
-              <a:spcAft>
-                <a:spcPts val="600"/>
-              </a:spcAft>
-            </a:pPr>
-            <a:r>
-              <a:rPr sz="1200" b="0" i="0">
-                <a:solidFill>
-                  <a:srgbClr val="5A6672"/>
-                </a:solidFill>
-                <a:latin typeface="Calibri"/>
-              </a:rPr>
-              <a:t>Which violations are severe in the maths but unnoticed by people.</a:t>
+              <a:t>Score: AUC 0.80, well calibrated. Flags 78% of AI images, clears 71% of real photos. Built-in examples were held out of training.</a:t>
             </a:r>
           </a:p>
         </p:txBody>
@@ -13438,6 +13123,1865 @@
 </file>
 
 <file path=ppt/slides/slide21.xml><?xml version="1.0" encoding="utf-8"?>
+<p:sld xmlns:a="http://schemas.openxmlformats.org/drawingml/2006/main" xmlns:p="http://schemas.openxmlformats.org/presentationml/2006/main" xmlns:r="http://schemas.openxmlformats.org/officeDocument/2006/relationships">
+  <p:cSld>
+    <p:spTree>
+      <p:nvGrpSpPr>
+        <p:cNvPr id="1" name=""/>
+        <p:cNvGrpSpPr/>
+        <p:nvPr/>
+      </p:nvGrpSpPr>
+      <p:grpSpPr/>
+      <p:sp>
+        <p:nvSpPr>
+          <p:cNvPr id="2" name="Rectangle 1"/>
+          <p:cNvSpPr/>
+          <p:nvPr/>
+        </p:nvSpPr>
+        <p:spPr>
+          <a:xfrm>
+            <a:off x="0" y="0"/>
+            <a:ext cx="12191695" cy="6858000"/>
+          </a:xfrm>
+          <a:prstGeom prst="rect">
+            <a:avLst/>
+          </a:prstGeom>
+          <a:solidFill>
+            <a:srgbClr val="12263A"/>
+          </a:solidFill>
+          <a:ln>
+            <a:noFill/>
+          </a:ln>
+          <a:effectLst/>
+        </p:spPr>
+        <p:style>
+          <a:lnRef idx="1">
+            <a:schemeClr val="accent1"/>
+          </a:lnRef>
+          <a:fillRef idx="3">
+            <a:schemeClr val="accent1"/>
+          </a:fillRef>
+          <a:effectRef idx="2">
+            <a:schemeClr val="accent1"/>
+          </a:effectRef>
+          <a:fontRef idx="minor">
+            <a:schemeClr val="lt1"/>
+          </a:fontRef>
+        </p:style>
+        <p:txBody>
+          <a:bodyPr rtlCol="0" anchor="ctr"/>
+          <a:lstStyle/>
+          <a:p>
+            <a:pPr algn="ctr"/>
+          </a:p>
+        </p:txBody>
+      </p:sp>
+      <p:sp>
+        <p:nvSpPr>
+          <p:cNvPr id="3" name="TextBox 2"/>
+          <p:cNvSpPr txBox="1"/>
+          <p:nvPr/>
+        </p:nvSpPr>
+        <p:spPr>
+          <a:xfrm>
+            <a:off x="640080" y="457200"/>
+            <a:ext cx="10911535" cy="822960"/>
+          </a:xfrm>
+          <a:prstGeom prst="rect">
+            <a:avLst/>
+          </a:prstGeom>
+          <a:noFill/>
+        </p:spPr>
+        <p:txBody>
+          <a:bodyPr wrap="square" lIns="0" rIns="0" tIns="0" bIns="0" anchor="t">
+            <a:spAutoFit/>
+          </a:bodyPr>
+          <a:lstStyle/>
+          <a:p>
+            <a:pPr algn="l">
+              <a:spcAft>
+                <a:spcPts val="600"/>
+              </a:spcAft>
+            </a:pPr>
+            <a:r>
+              <a:rPr sz="3200" b="1" i="0">
+                <a:solidFill>
+                  <a:srgbClr val="FFFFFF"/>
+                </a:solidFill>
+                <a:latin typeface="Cambria"/>
+              </a:rPr>
+              <a:t>Conclusion</a:t>
+            </a:r>
+          </a:p>
+        </p:txBody>
+      </p:sp>
+      <p:sp>
+        <p:nvSpPr>
+          <p:cNvPr id="4" name="Oval 3"/>
+          <p:cNvSpPr/>
+          <p:nvPr/>
+        </p:nvSpPr>
+        <p:spPr>
+          <a:xfrm>
+            <a:off x="685800" y="1828800"/>
+            <a:ext cx="256032" cy="256032"/>
+          </a:xfrm>
+          <a:prstGeom prst="ellipse">
+            <a:avLst/>
+          </a:prstGeom>
+          <a:solidFill>
+            <a:srgbClr val="E8A33D"/>
+          </a:solidFill>
+          <a:ln>
+            <a:noFill/>
+          </a:ln>
+          <a:effectLst/>
+        </p:spPr>
+        <p:style>
+          <a:lnRef idx="1">
+            <a:schemeClr val="accent1"/>
+          </a:lnRef>
+          <a:fillRef idx="3">
+            <a:schemeClr val="accent1"/>
+          </a:fillRef>
+          <a:effectRef idx="2">
+            <a:schemeClr val="accent1"/>
+          </a:effectRef>
+          <a:fontRef idx="minor">
+            <a:schemeClr val="lt1"/>
+          </a:fontRef>
+        </p:style>
+        <p:txBody>
+          <a:bodyPr rtlCol="0" anchor="ctr"/>
+          <a:lstStyle/>
+          <a:p>
+            <a:pPr algn="ctr"/>
+          </a:p>
+        </p:txBody>
+      </p:sp>
+      <p:sp>
+        <p:nvSpPr>
+          <p:cNvPr id="5" name="TextBox 4"/>
+          <p:cNvSpPr txBox="1"/>
+          <p:nvPr/>
+        </p:nvSpPr>
+        <p:spPr>
+          <a:xfrm>
+            <a:off x="1188720" y="1737360"/>
+            <a:ext cx="10332720" cy="384048"/>
+          </a:xfrm>
+          <a:prstGeom prst="rect">
+            <a:avLst/>
+          </a:prstGeom>
+          <a:noFill/>
+        </p:spPr>
+        <p:txBody>
+          <a:bodyPr wrap="square" lIns="0" rIns="0" tIns="0" bIns="0" anchor="t">
+            <a:spAutoFit/>
+          </a:bodyPr>
+          <a:lstStyle/>
+          <a:p>
+            <a:pPr algn="l">
+              <a:spcAft>
+                <a:spcPts val="600"/>
+              </a:spcAft>
+            </a:pPr>
+            <a:r>
+              <a:rPr sz="1700" b="1" i="0">
+                <a:solidFill>
+                  <a:srgbClr val="FFFFFF"/>
+                </a:solidFill>
+                <a:latin typeface="Cambria"/>
+              </a:rPr>
+              <a:t>Generators reproduce orientation, not the camera</a:t>
+            </a:r>
+          </a:p>
+        </p:txBody>
+      </p:sp>
+      <p:sp>
+        <p:nvSpPr>
+          <p:cNvPr id="6" name="TextBox 5"/>
+          <p:cNvSpPr txBox="1"/>
+          <p:nvPr/>
+        </p:nvSpPr>
+        <p:spPr>
+          <a:xfrm>
+            <a:off x="1188720" y="2148840"/>
+            <a:ext cx="10332720" cy="411480"/>
+          </a:xfrm>
+          <a:prstGeom prst="rect">
+            <a:avLst/>
+          </a:prstGeom>
+          <a:noFill/>
+        </p:spPr>
+        <p:txBody>
+          <a:bodyPr wrap="square" lIns="0" rIns="0" tIns="0" bIns="0" anchor="t">
+            <a:spAutoFit/>
+          </a:bodyPr>
+          <a:lstStyle/>
+          <a:p>
+            <a:pPr algn="l">
+              <a:spcAft>
+                <a:spcPts val="600"/>
+              </a:spcAft>
+            </a:pPr>
+            <a:r>
+              <a:rPr sz="1300" b="0" i="0">
+                <a:solidFill>
+                  <a:srgbClr val="B9CDDA"/>
+                </a:solidFill>
+                <a:latin typeface="Calibri"/>
+              </a:rPr>
+              <a:t>Right angles are close to real photos after control; focal agreement is 2.5 to 3 times worse.</a:t>
+            </a:r>
+          </a:p>
+        </p:txBody>
+      </p:sp>
+      <p:sp>
+        <p:nvSpPr>
+          <p:cNvPr id="7" name="Oval 6"/>
+          <p:cNvSpPr/>
+          <p:nvPr/>
+        </p:nvSpPr>
+        <p:spPr>
+          <a:xfrm>
+            <a:off x="685800" y="2724912"/>
+            <a:ext cx="256032" cy="256032"/>
+          </a:xfrm>
+          <a:prstGeom prst="ellipse">
+            <a:avLst/>
+          </a:prstGeom>
+          <a:solidFill>
+            <a:srgbClr val="E8A33D"/>
+          </a:solidFill>
+          <a:ln>
+            <a:noFill/>
+          </a:ln>
+          <a:effectLst/>
+        </p:spPr>
+        <p:style>
+          <a:lnRef idx="1">
+            <a:schemeClr val="accent1"/>
+          </a:lnRef>
+          <a:fillRef idx="3">
+            <a:schemeClr val="accent1"/>
+          </a:fillRef>
+          <a:effectRef idx="2">
+            <a:schemeClr val="accent1"/>
+          </a:effectRef>
+          <a:fontRef idx="minor">
+            <a:schemeClr val="lt1"/>
+          </a:fontRef>
+        </p:style>
+        <p:txBody>
+          <a:bodyPr rtlCol="0" anchor="ctr"/>
+          <a:lstStyle/>
+          <a:p>
+            <a:pPr algn="ctr"/>
+          </a:p>
+        </p:txBody>
+      </p:sp>
+      <p:sp>
+        <p:nvSpPr>
+          <p:cNvPr id="8" name="TextBox 7"/>
+          <p:cNvSpPr txBox="1"/>
+          <p:nvPr/>
+        </p:nvSpPr>
+        <p:spPr>
+          <a:xfrm>
+            <a:off x="1188720" y="2633472"/>
+            <a:ext cx="10332720" cy="384048"/>
+          </a:xfrm>
+          <a:prstGeom prst="rect">
+            <a:avLst/>
+          </a:prstGeom>
+          <a:noFill/>
+        </p:spPr>
+        <p:txBody>
+          <a:bodyPr wrap="square" lIns="0" rIns="0" tIns="0" bIns="0" anchor="t">
+            <a:spAutoFit/>
+          </a:bodyPr>
+          <a:lstStyle/>
+          <a:p>
+            <a:pPr algn="l">
+              <a:spcAft>
+                <a:spcPts val="600"/>
+              </a:spcAft>
+            </a:pPr>
+            <a:r>
+              <a:rPr sz="1700" b="1" i="0">
+                <a:solidFill>
+                  <a:srgbClr val="FFFFFF"/>
+                </a:solidFill>
+                <a:latin typeface="Cambria"/>
+              </a:rPr>
+              <a:t>The result does not depend on the real reference</a:t>
+            </a:r>
+          </a:p>
+        </p:txBody>
+      </p:sp>
+      <p:sp>
+        <p:nvSpPr>
+          <p:cNvPr id="9" name="TextBox 8"/>
+          <p:cNvSpPr txBox="1"/>
+          <p:nvPr/>
+        </p:nvSpPr>
+        <p:spPr>
+          <a:xfrm>
+            <a:off x="1188720" y="3044952"/>
+            <a:ext cx="10332720" cy="411480"/>
+          </a:xfrm>
+          <a:prstGeom prst="rect">
+            <a:avLst/>
+          </a:prstGeom>
+          <a:noFill/>
+        </p:spPr>
+        <p:txBody>
+          <a:bodyPr wrap="square" lIns="0" rIns="0" tIns="0" bIns="0" anchor="t">
+            <a:spAutoFit/>
+          </a:bodyPr>
+          <a:lstStyle/>
+          <a:p>
+            <a:pPr algn="l">
+              <a:spcAft>
+                <a:spcPts val="600"/>
+              </a:spcAft>
+            </a:pPr>
+            <a:r>
+              <a:rPr sz="1300" b="0" i="0">
+                <a:solidFill>
+                  <a:srgbClr val="B9CDDA"/>
+                </a:solidFill>
+                <a:latin typeface="Calibri"/>
+              </a:rPr>
+              <a:t>A hand-picked benchmark and ordinary internet photos give the same answer.</a:t>
+            </a:r>
+          </a:p>
+        </p:txBody>
+      </p:sp>
+      <p:sp>
+        <p:nvSpPr>
+          <p:cNvPr id="10" name="Oval 9"/>
+          <p:cNvSpPr/>
+          <p:nvPr/>
+        </p:nvSpPr>
+        <p:spPr>
+          <a:xfrm>
+            <a:off x="685800" y="3621024"/>
+            <a:ext cx="256032" cy="256032"/>
+          </a:xfrm>
+          <a:prstGeom prst="ellipse">
+            <a:avLst/>
+          </a:prstGeom>
+          <a:solidFill>
+            <a:srgbClr val="E8A33D"/>
+          </a:solidFill>
+          <a:ln>
+            <a:noFill/>
+          </a:ln>
+          <a:effectLst/>
+        </p:spPr>
+        <p:style>
+          <a:lnRef idx="1">
+            <a:schemeClr val="accent1"/>
+          </a:lnRef>
+          <a:fillRef idx="3">
+            <a:schemeClr val="accent1"/>
+          </a:fillRef>
+          <a:effectRef idx="2">
+            <a:schemeClr val="accent1"/>
+          </a:effectRef>
+          <a:fontRef idx="minor">
+            <a:schemeClr val="lt1"/>
+          </a:fontRef>
+        </p:style>
+        <p:txBody>
+          <a:bodyPr rtlCol="0" anchor="ctr"/>
+          <a:lstStyle/>
+          <a:p>
+            <a:pPr algn="ctr"/>
+          </a:p>
+        </p:txBody>
+      </p:sp>
+      <p:sp>
+        <p:nvSpPr>
+          <p:cNvPr id="11" name="TextBox 10"/>
+          <p:cNvSpPr txBox="1"/>
+          <p:nvPr/>
+        </p:nvSpPr>
+        <p:spPr>
+          <a:xfrm>
+            <a:off x="1188720" y="3529584"/>
+            <a:ext cx="10332720" cy="384048"/>
+          </a:xfrm>
+          <a:prstGeom prst="rect">
+            <a:avLst/>
+          </a:prstGeom>
+          <a:noFill/>
+        </p:spPr>
+        <p:txBody>
+          <a:bodyPr wrap="square" lIns="0" rIns="0" tIns="0" bIns="0" anchor="t">
+            <a:spAutoFit/>
+          </a:bodyPr>
+          <a:lstStyle/>
+          <a:p>
+            <a:pPr algn="l">
+              <a:spcAft>
+                <a:spcPts val="600"/>
+              </a:spcAft>
+            </a:pPr>
+            <a:r>
+              <a:rPr sz="1700" b="1" i="0">
+                <a:solidFill>
+                  <a:srgbClr val="FFFFFF"/>
+                </a:solidFill>
+                <a:latin typeface="Cambria"/>
+              </a:rPr>
+              <a:t>Scale is not closing the gap</a:t>
+            </a:r>
+          </a:p>
+        </p:txBody>
+      </p:sp>
+      <p:sp>
+        <p:nvSpPr>
+          <p:cNvPr id="12" name="TextBox 11"/>
+          <p:cNvSpPr txBox="1"/>
+          <p:nvPr/>
+        </p:nvSpPr>
+        <p:spPr>
+          <a:xfrm>
+            <a:off x="1188720" y="3941063"/>
+            <a:ext cx="10332720" cy="411480"/>
+          </a:xfrm>
+          <a:prstGeom prst="rect">
+            <a:avLst/>
+          </a:prstGeom>
+          <a:noFill/>
+        </p:spPr>
+        <p:txBody>
+          <a:bodyPr wrap="square" lIns="0" rIns="0" tIns="0" bIns="0" anchor="t">
+            <a:spAutoFit/>
+          </a:bodyPr>
+          <a:lstStyle/>
+          <a:p>
+            <a:pPr algn="l">
+              <a:spcAft>
+                <a:spcPts val="600"/>
+              </a:spcAft>
+            </a:pPr>
+            <a:r>
+              <a:rPr sz="1300" b="0" i="0">
+                <a:solidFill>
+                  <a:srgbClr val="B9CDDA"/>
+                </a:solidFill>
+                <a:latin typeface="Calibri"/>
+              </a:rPr>
+              <a:t>SD 1.5 → SDXL improves orientation and leaves camera coherence unchanged.</a:t>
+            </a:r>
+          </a:p>
+        </p:txBody>
+      </p:sp>
+      <p:sp>
+        <p:nvSpPr>
+          <p:cNvPr id="13" name="Oval 12"/>
+          <p:cNvSpPr/>
+          <p:nvPr/>
+        </p:nvSpPr>
+        <p:spPr>
+          <a:xfrm>
+            <a:off x="685800" y="4517136"/>
+            <a:ext cx="256032" cy="256032"/>
+          </a:xfrm>
+          <a:prstGeom prst="ellipse">
+            <a:avLst/>
+          </a:prstGeom>
+          <a:solidFill>
+            <a:srgbClr val="E8A33D"/>
+          </a:solidFill>
+          <a:ln>
+            <a:noFill/>
+          </a:ln>
+          <a:effectLst/>
+        </p:spPr>
+        <p:style>
+          <a:lnRef idx="1">
+            <a:schemeClr val="accent1"/>
+          </a:lnRef>
+          <a:fillRef idx="3">
+            <a:schemeClr val="accent1"/>
+          </a:fillRef>
+          <a:effectRef idx="2">
+            <a:schemeClr val="accent1"/>
+          </a:effectRef>
+          <a:fontRef idx="minor">
+            <a:schemeClr val="lt1"/>
+          </a:fontRef>
+        </p:style>
+        <p:txBody>
+          <a:bodyPr rtlCol="0" anchor="ctr"/>
+          <a:lstStyle/>
+          <a:p>
+            <a:pPr algn="ctr"/>
+          </a:p>
+        </p:txBody>
+      </p:sp>
+      <p:sp>
+        <p:nvSpPr>
+          <p:cNvPr id="14" name="TextBox 13"/>
+          <p:cNvSpPr txBox="1"/>
+          <p:nvPr/>
+        </p:nvSpPr>
+        <p:spPr>
+          <a:xfrm>
+            <a:off x="1188720" y="4425696"/>
+            <a:ext cx="10332720" cy="384048"/>
+          </a:xfrm>
+          <a:prstGeom prst="rect">
+            <a:avLst/>
+          </a:prstGeom>
+          <a:noFill/>
+        </p:spPr>
+        <p:txBody>
+          <a:bodyPr wrap="square" lIns="0" rIns="0" tIns="0" bIns="0" anchor="t">
+            <a:spAutoFit/>
+          </a:bodyPr>
+          <a:lstStyle/>
+          <a:p>
+            <a:pPr algn="l">
+              <a:spcAft>
+                <a:spcPts val="600"/>
+              </a:spcAft>
+            </a:pPr>
+            <a:r>
+              <a:rPr sz="1700" b="1" i="0">
+                <a:solidFill>
+                  <a:srgbClr val="FFFFFF"/>
+                </a:solidFill>
+                <a:latin typeface="Cambria"/>
+              </a:rPr>
+              <a:t>The newest models still fail</a:t>
+            </a:r>
+          </a:p>
+        </p:txBody>
+      </p:sp>
+      <p:sp>
+        <p:nvSpPr>
+          <p:cNvPr id="15" name="TextBox 14"/>
+          <p:cNvSpPr txBox="1"/>
+          <p:nvPr/>
+        </p:nvSpPr>
+        <p:spPr>
+          <a:xfrm>
+            <a:off x="1188720" y="4837176"/>
+            <a:ext cx="10332720" cy="411480"/>
+          </a:xfrm>
+          <a:prstGeom prst="rect">
+            <a:avLst/>
+          </a:prstGeom>
+          <a:noFill/>
+        </p:spPr>
+        <p:txBody>
+          <a:bodyPr wrap="square" lIns="0" rIns="0" tIns="0" bIns="0" anchor="t">
+            <a:spAutoFit/>
+          </a:bodyPr>
+          <a:lstStyle/>
+          <a:p>
+            <a:pPr algn="l">
+              <a:spcAft>
+                <a:spcPts val="600"/>
+              </a:spcAft>
+            </a:pPr>
+            <a:r>
+              <a:rPr sz="1300" b="0" i="0">
+                <a:solidFill>
+                  <a:srgbClr val="B9CDDA"/>
+                </a:solidFill>
+                <a:latin typeface="Calibri"/>
+              </a:rPr>
+              <a:t>Gemini and ChatGPT remain worse than both real sets; whether they improved is not yet known.</a:t>
+            </a:r>
+          </a:p>
+        </p:txBody>
+      </p:sp>
+      <p:sp>
+        <p:nvSpPr>
+          <p:cNvPr id="16" name="Oval 15"/>
+          <p:cNvSpPr/>
+          <p:nvPr/>
+        </p:nvSpPr>
+        <p:spPr>
+          <a:xfrm>
+            <a:off x="685800" y="5413248"/>
+            <a:ext cx="256032" cy="256032"/>
+          </a:xfrm>
+          <a:prstGeom prst="ellipse">
+            <a:avLst/>
+          </a:prstGeom>
+          <a:solidFill>
+            <a:srgbClr val="E8A33D"/>
+          </a:solidFill>
+          <a:ln>
+            <a:noFill/>
+          </a:ln>
+          <a:effectLst/>
+        </p:spPr>
+        <p:style>
+          <a:lnRef idx="1">
+            <a:schemeClr val="accent1"/>
+          </a:lnRef>
+          <a:fillRef idx="3">
+            <a:schemeClr val="accent1"/>
+          </a:fillRef>
+          <a:effectRef idx="2">
+            <a:schemeClr val="accent1"/>
+          </a:effectRef>
+          <a:fontRef idx="minor">
+            <a:schemeClr val="lt1"/>
+          </a:fontRef>
+        </p:style>
+        <p:txBody>
+          <a:bodyPr rtlCol="0" anchor="ctr"/>
+          <a:lstStyle/>
+          <a:p>
+            <a:pPr algn="ctr"/>
+          </a:p>
+        </p:txBody>
+      </p:sp>
+      <p:sp>
+        <p:nvSpPr>
+          <p:cNvPr id="17" name="TextBox 16"/>
+          <p:cNvSpPr txBox="1"/>
+          <p:nvPr/>
+        </p:nvSpPr>
+        <p:spPr>
+          <a:xfrm>
+            <a:off x="1188720" y="5321808"/>
+            <a:ext cx="10332720" cy="384048"/>
+          </a:xfrm>
+          <a:prstGeom prst="rect">
+            <a:avLst/>
+          </a:prstGeom>
+          <a:noFill/>
+        </p:spPr>
+        <p:txBody>
+          <a:bodyPr wrap="square" lIns="0" rIns="0" tIns="0" bIns="0" anchor="t">
+            <a:spAutoFit/>
+          </a:bodyPr>
+          <a:lstStyle/>
+          <a:p>
+            <a:pPr algn="l">
+              <a:spcAft>
+                <a:spcPts val="600"/>
+              </a:spcAft>
+            </a:pPr>
+            <a:r>
+              <a:rPr sz="1700" b="1" i="0">
+                <a:solidFill>
+                  <a:srgbClr val="FFFFFF"/>
+                </a:solidFill>
+                <a:latin typeface="Cambria"/>
+              </a:rPr>
+              <a:t>Applicability must be tested, not assumed</a:t>
+            </a:r>
+          </a:p>
+        </p:txBody>
+      </p:sp>
+      <p:sp>
+        <p:nvSpPr>
+          <p:cNvPr id="18" name="TextBox 17"/>
+          <p:cNvSpPr txBox="1"/>
+          <p:nvPr/>
+        </p:nvSpPr>
+        <p:spPr>
+          <a:xfrm>
+            <a:off x="1188720" y="5733288"/>
+            <a:ext cx="10332720" cy="411480"/>
+          </a:xfrm>
+          <a:prstGeom prst="rect">
+            <a:avLst/>
+          </a:prstGeom>
+          <a:noFill/>
+        </p:spPr>
+        <p:txBody>
+          <a:bodyPr wrap="square" lIns="0" rIns="0" tIns="0" bIns="0" anchor="t">
+            <a:spAutoFit/>
+          </a:bodyPr>
+          <a:lstStyle/>
+          <a:p>
+            <a:pPr algn="l">
+              <a:spcAft>
+                <a:spcPts val="600"/>
+              </a:spcAft>
+            </a:pPr>
+            <a:r>
+              <a:rPr sz="1300" b="0" i="0">
+                <a:solidFill>
+                  <a:srgbClr val="B9CDDA"/>
+                </a:solidFill>
+                <a:latin typeface="Calibri"/>
+              </a:rPr>
+              <a:t>The right-angle test does not apply to angled streets; ignoring that flips the verdict.</a:t>
+            </a:r>
+          </a:p>
+        </p:txBody>
+      </p:sp>
+      <p:sp>
+        <p:nvSpPr>
+          <p:cNvPr id="19" name="TextBox 18"/>
+          <p:cNvSpPr txBox="1"/>
+          <p:nvPr/>
+        </p:nvSpPr>
+        <p:spPr>
+          <a:xfrm>
+            <a:off x="685800" y="6355080"/>
+            <a:ext cx="10908792" cy="365760"/>
+          </a:xfrm>
+          <a:prstGeom prst="rect">
+            <a:avLst/>
+          </a:prstGeom>
+          <a:noFill/>
+        </p:spPr>
+        <p:txBody>
+          <a:bodyPr wrap="square" lIns="0" rIns="0" tIns="0" bIns="0" anchor="t">
+            <a:spAutoFit/>
+          </a:bodyPr>
+          <a:lstStyle/>
+          <a:p>
+            <a:pPr algn="l">
+              <a:spcAft>
+                <a:spcPts val="600"/>
+              </a:spcAft>
+            </a:pPr>
+            <a:r>
+              <a:rPr sz="1400" b="1" i="1">
+                <a:solidFill>
+                  <a:srgbClr val="E8A33D"/>
+                </a:solidFill>
+                <a:latin typeface="Calibri"/>
+              </a:rPr>
+              <a:t>Thesis: an AI image looks photographic locally, but there is no single camera behind it.</a:t>
+            </a:r>
+          </a:p>
+        </p:txBody>
+      </p:sp>
+    </p:spTree>
+  </p:cSld>
+  <p:clrMapOvr>
+    <a:masterClrMapping/>
+  </p:clrMapOvr>
+</p:sld>
+</file>
+
+<file path=ppt/slides/slide22.xml><?xml version="1.0" encoding="utf-8"?>
+<p:sld xmlns:a="http://schemas.openxmlformats.org/drawingml/2006/main" xmlns:p="http://schemas.openxmlformats.org/presentationml/2006/main" xmlns:r="http://schemas.openxmlformats.org/officeDocument/2006/relationships">
+  <p:cSld>
+    <p:spTree>
+      <p:nvGrpSpPr>
+        <p:cNvPr id="1" name=""/>
+        <p:cNvGrpSpPr/>
+        <p:nvPr/>
+      </p:nvGrpSpPr>
+      <p:grpSpPr/>
+      <p:sp>
+        <p:nvSpPr>
+          <p:cNvPr id="2" name="Rectangle 1"/>
+          <p:cNvSpPr/>
+          <p:nvPr/>
+        </p:nvSpPr>
+        <p:spPr>
+          <a:xfrm>
+            <a:off x="0" y="0"/>
+            <a:ext cx="12191695" cy="6858000"/>
+          </a:xfrm>
+          <a:prstGeom prst="rect">
+            <a:avLst/>
+          </a:prstGeom>
+          <a:solidFill>
+            <a:srgbClr val="FFFFFF"/>
+          </a:solidFill>
+          <a:ln>
+            <a:noFill/>
+          </a:ln>
+          <a:effectLst/>
+        </p:spPr>
+        <p:style>
+          <a:lnRef idx="1">
+            <a:schemeClr val="accent1"/>
+          </a:lnRef>
+          <a:fillRef idx="3">
+            <a:schemeClr val="accent1"/>
+          </a:fillRef>
+          <a:effectRef idx="2">
+            <a:schemeClr val="accent1"/>
+          </a:effectRef>
+          <a:fontRef idx="minor">
+            <a:schemeClr val="lt1"/>
+          </a:fontRef>
+        </p:style>
+        <p:txBody>
+          <a:bodyPr rtlCol="0" anchor="ctr"/>
+          <a:lstStyle/>
+          <a:p>
+            <a:pPr algn="ctr"/>
+          </a:p>
+        </p:txBody>
+      </p:sp>
+      <p:sp>
+        <p:nvSpPr>
+          <p:cNvPr id="3" name="TextBox 2"/>
+          <p:cNvSpPr txBox="1"/>
+          <p:nvPr/>
+        </p:nvSpPr>
+        <p:spPr>
+          <a:xfrm>
+            <a:off x="640080" y="457200"/>
+            <a:ext cx="10911535" cy="822960"/>
+          </a:xfrm>
+          <a:prstGeom prst="rect">
+            <a:avLst/>
+          </a:prstGeom>
+          <a:noFill/>
+        </p:spPr>
+        <p:txBody>
+          <a:bodyPr wrap="square" lIns="0" rIns="0" tIns="0" bIns="0" anchor="t">
+            <a:spAutoFit/>
+          </a:bodyPr>
+          <a:lstStyle/>
+          <a:p>
+            <a:pPr algn="l">
+              <a:spcAft>
+                <a:spcPts val="600"/>
+              </a:spcAft>
+            </a:pPr>
+            <a:r>
+              <a:rPr sz="3200" b="1" i="0">
+                <a:solidFill>
+                  <a:srgbClr val="12263A"/>
+                </a:solidFill>
+                <a:latin typeface="Cambria"/>
+              </a:rPr>
+              <a:t>Future Scope</a:t>
+            </a:r>
+          </a:p>
+        </p:txBody>
+      </p:sp>
+      <p:sp>
+        <p:nvSpPr>
+          <p:cNvPr id="4" name="Rounded Rectangle 3"/>
+          <p:cNvSpPr/>
+          <p:nvPr/>
+        </p:nvSpPr>
+        <p:spPr>
+          <a:xfrm>
+            <a:off x="640080" y="1920240"/>
+            <a:ext cx="3520440" cy="1874519"/>
+          </a:xfrm>
+          <a:prstGeom prst="roundRect">
+            <a:avLst>
+              <a:gd name="adj" fmla="val 6000"/>
+            </a:avLst>
+          </a:prstGeom>
+          <a:solidFill>
+            <a:srgbClr val="F4F6F8"/>
+          </a:solidFill>
+          <a:ln>
+            <a:noFill/>
+          </a:ln>
+          <a:effectLst/>
+        </p:spPr>
+        <p:style>
+          <a:lnRef idx="1">
+            <a:schemeClr val="accent1"/>
+          </a:lnRef>
+          <a:fillRef idx="3">
+            <a:schemeClr val="accent1"/>
+          </a:fillRef>
+          <a:effectRef idx="2">
+            <a:schemeClr val="accent1"/>
+          </a:effectRef>
+          <a:fontRef idx="minor">
+            <a:schemeClr val="lt1"/>
+          </a:fontRef>
+        </p:style>
+        <p:txBody>
+          <a:bodyPr rtlCol="0" anchor="ctr"/>
+          <a:lstStyle/>
+          <a:p>
+            <a:pPr algn="ctr"/>
+          </a:p>
+        </p:txBody>
+      </p:sp>
+      <p:sp>
+        <p:nvSpPr>
+          <p:cNvPr id="5" name="Oval 4"/>
+          <p:cNvSpPr/>
+          <p:nvPr/>
+        </p:nvSpPr>
+        <p:spPr>
+          <a:xfrm>
+            <a:off x="914400" y="2176272"/>
+            <a:ext cx="329184" cy="329184"/>
+          </a:xfrm>
+          <a:prstGeom prst="ellipse">
+            <a:avLst/>
+          </a:prstGeom>
+          <a:solidFill>
+            <a:srgbClr val="1C7293"/>
+          </a:solidFill>
+          <a:ln>
+            <a:noFill/>
+          </a:ln>
+          <a:effectLst/>
+        </p:spPr>
+        <p:style>
+          <a:lnRef idx="1">
+            <a:schemeClr val="accent1"/>
+          </a:lnRef>
+          <a:fillRef idx="3">
+            <a:schemeClr val="accent1"/>
+          </a:fillRef>
+          <a:effectRef idx="2">
+            <a:schemeClr val="accent1"/>
+          </a:effectRef>
+          <a:fontRef idx="minor">
+            <a:schemeClr val="lt1"/>
+          </a:fontRef>
+        </p:style>
+        <p:txBody>
+          <a:bodyPr rtlCol="0" anchor="ctr"/>
+          <a:lstStyle/>
+          <a:p>
+            <a:pPr algn="ctr"/>
+          </a:p>
+        </p:txBody>
+      </p:sp>
+      <p:sp>
+        <p:nvSpPr>
+          <p:cNvPr id="6" name="TextBox 5"/>
+          <p:cNvSpPr txBox="1"/>
+          <p:nvPr/>
+        </p:nvSpPr>
+        <p:spPr>
+          <a:xfrm>
+            <a:off x="1389888" y="2194560"/>
+            <a:ext cx="2560320" cy="365760"/>
+          </a:xfrm>
+          <a:prstGeom prst="rect">
+            <a:avLst/>
+          </a:prstGeom>
+          <a:noFill/>
+        </p:spPr>
+        <p:txBody>
+          <a:bodyPr wrap="square" lIns="0" rIns="0" tIns="0" bIns="0" anchor="t">
+            <a:spAutoFit/>
+          </a:bodyPr>
+          <a:lstStyle/>
+          <a:p>
+            <a:pPr algn="l">
+              <a:spcAft>
+                <a:spcPts val="600"/>
+              </a:spcAft>
+            </a:pPr>
+            <a:r>
+              <a:rPr sz="1450" b="1" i="0">
+                <a:solidFill>
+                  <a:srgbClr val="12263A"/>
+                </a:solidFill>
+                <a:latin typeface="Cambria"/>
+              </a:rPr>
+              <a:t>Powered frontier test</a:t>
+            </a:r>
+          </a:p>
+        </p:txBody>
+      </p:sp>
+      <p:sp>
+        <p:nvSpPr>
+          <p:cNvPr id="7" name="TextBox 6"/>
+          <p:cNvSpPr txBox="1"/>
+          <p:nvPr/>
+        </p:nvSpPr>
+        <p:spPr>
+          <a:xfrm>
+            <a:off x="914400" y="2697480"/>
+            <a:ext cx="2971800" cy="960120"/>
+          </a:xfrm>
+          <a:prstGeom prst="rect">
+            <a:avLst/>
+          </a:prstGeom>
+          <a:noFill/>
+        </p:spPr>
+        <p:txBody>
+          <a:bodyPr wrap="square" lIns="0" rIns="0" tIns="0" bIns="0" anchor="t">
+            <a:spAutoFit/>
+          </a:bodyPr>
+          <a:lstStyle/>
+          <a:p>
+            <a:pPr algn="l">
+              <a:spcAft>
+                <a:spcPts val="600"/>
+              </a:spcAft>
+            </a:pPr>
+            <a:r>
+              <a:rPr sz="1200" b="0" i="0">
+                <a:solidFill>
+                  <a:srgbClr val="5A6672"/>
+                </a:solidFill>
+                <a:latin typeface="Calibri"/>
+              </a:rPr>
+              <a:t>250 line-rich prompts per model, plus Flux and Midjourney. Flux is set up to run 4-bit on our 8 GB GPU.</a:t>
+            </a:r>
+          </a:p>
+        </p:txBody>
+      </p:sp>
+      <p:sp>
+        <p:nvSpPr>
+          <p:cNvPr id="8" name="Rounded Rectangle 7"/>
+          <p:cNvSpPr/>
+          <p:nvPr/>
+        </p:nvSpPr>
+        <p:spPr>
+          <a:xfrm>
+            <a:off x="4407408" y="1920240"/>
+            <a:ext cx="3520440" cy="1874519"/>
+          </a:xfrm>
+          <a:prstGeom prst="roundRect">
+            <a:avLst>
+              <a:gd name="adj" fmla="val 6000"/>
+            </a:avLst>
+          </a:prstGeom>
+          <a:solidFill>
+            <a:srgbClr val="F4F6F8"/>
+          </a:solidFill>
+          <a:ln>
+            <a:noFill/>
+          </a:ln>
+          <a:effectLst/>
+        </p:spPr>
+        <p:style>
+          <a:lnRef idx="1">
+            <a:schemeClr val="accent1"/>
+          </a:lnRef>
+          <a:fillRef idx="3">
+            <a:schemeClr val="accent1"/>
+          </a:fillRef>
+          <a:effectRef idx="2">
+            <a:schemeClr val="accent1"/>
+          </a:effectRef>
+          <a:fontRef idx="minor">
+            <a:schemeClr val="lt1"/>
+          </a:fontRef>
+        </p:style>
+        <p:txBody>
+          <a:bodyPr rtlCol="0" anchor="ctr"/>
+          <a:lstStyle/>
+          <a:p>
+            <a:pPr algn="ctr"/>
+          </a:p>
+        </p:txBody>
+      </p:sp>
+      <p:sp>
+        <p:nvSpPr>
+          <p:cNvPr id="9" name="Oval 8"/>
+          <p:cNvSpPr/>
+          <p:nvPr/>
+        </p:nvSpPr>
+        <p:spPr>
+          <a:xfrm>
+            <a:off x="4681728" y="2176272"/>
+            <a:ext cx="329184" cy="329184"/>
+          </a:xfrm>
+          <a:prstGeom prst="ellipse">
+            <a:avLst/>
+          </a:prstGeom>
+          <a:solidFill>
+            <a:srgbClr val="12263A"/>
+          </a:solidFill>
+          <a:ln>
+            <a:noFill/>
+          </a:ln>
+          <a:effectLst/>
+        </p:spPr>
+        <p:style>
+          <a:lnRef idx="1">
+            <a:schemeClr val="accent1"/>
+          </a:lnRef>
+          <a:fillRef idx="3">
+            <a:schemeClr val="accent1"/>
+          </a:fillRef>
+          <a:effectRef idx="2">
+            <a:schemeClr val="accent1"/>
+          </a:effectRef>
+          <a:fontRef idx="minor">
+            <a:schemeClr val="lt1"/>
+          </a:fontRef>
+        </p:style>
+        <p:txBody>
+          <a:bodyPr rtlCol="0" anchor="ctr"/>
+          <a:lstStyle/>
+          <a:p>
+            <a:pPr algn="ctr"/>
+          </a:p>
+        </p:txBody>
+      </p:sp>
+      <p:sp>
+        <p:nvSpPr>
+          <p:cNvPr id="10" name="TextBox 9"/>
+          <p:cNvSpPr txBox="1"/>
+          <p:nvPr/>
+        </p:nvSpPr>
+        <p:spPr>
+          <a:xfrm>
+            <a:off x="5157216" y="2194560"/>
+            <a:ext cx="2560320" cy="365760"/>
+          </a:xfrm>
+          <a:prstGeom prst="rect">
+            <a:avLst/>
+          </a:prstGeom>
+          <a:noFill/>
+        </p:spPr>
+        <p:txBody>
+          <a:bodyPr wrap="square" lIns="0" rIns="0" tIns="0" bIns="0" anchor="t">
+            <a:spAutoFit/>
+          </a:bodyPr>
+          <a:lstStyle/>
+          <a:p>
+            <a:pPr algn="l">
+              <a:spcAft>
+                <a:spcPts val="600"/>
+              </a:spcAft>
+            </a:pPr>
+            <a:r>
+              <a:rPr sz="1450" b="1" i="0">
+                <a:solidFill>
+                  <a:srgbClr val="12263A"/>
+                </a:solidFill>
+                <a:latin typeface="Cambria"/>
+              </a:rPr>
+              <a:t>Shadow association</a:t>
+            </a:r>
+          </a:p>
+        </p:txBody>
+      </p:sp>
+      <p:sp>
+        <p:nvSpPr>
+          <p:cNvPr id="11" name="TextBox 10"/>
+          <p:cNvSpPr txBox="1"/>
+          <p:nvPr/>
+        </p:nvSpPr>
+        <p:spPr>
+          <a:xfrm>
+            <a:off x="4681728" y="2697480"/>
+            <a:ext cx="2971800" cy="960120"/>
+          </a:xfrm>
+          <a:prstGeom prst="rect">
+            <a:avLst/>
+          </a:prstGeom>
+          <a:noFill/>
+        </p:spPr>
+        <p:txBody>
+          <a:bodyPr wrap="square" lIns="0" rIns="0" tIns="0" bIns="0" anchor="t">
+            <a:spAutoFit/>
+          </a:bodyPr>
+          <a:lstStyle/>
+          <a:p>
+            <a:pPr algn="l">
+              <a:spcAft>
+                <a:spcPts val="600"/>
+              </a:spcAft>
+            </a:pPr>
+            <a:r>
+              <a:rPr sz="1200" b="0" i="0">
+                <a:solidFill>
+                  <a:srgbClr val="5A6672"/>
+                </a:solidFill>
+                <a:latin typeface="Calibri"/>
+              </a:rPr>
+              <a:t>SSIS or SAM 2 to pair shadows with objects; the wedge LP above it is built and validated.</a:t>
+            </a:r>
+          </a:p>
+        </p:txBody>
+      </p:sp>
+      <p:sp>
+        <p:nvSpPr>
+          <p:cNvPr id="12" name="Rounded Rectangle 11"/>
+          <p:cNvSpPr/>
+          <p:nvPr/>
+        </p:nvSpPr>
+        <p:spPr>
+          <a:xfrm>
+            <a:off x="8174736" y="1920240"/>
+            <a:ext cx="3520440" cy="1874519"/>
+          </a:xfrm>
+          <a:prstGeom prst="roundRect">
+            <a:avLst>
+              <a:gd name="adj" fmla="val 6000"/>
+            </a:avLst>
+          </a:prstGeom>
+          <a:solidFill>
+            <a:srgbClr val="F4F6F8"/>
+          </a:solidFill>
+          <a:ln>
+            <a:noFill/>
+          </a:ln>
+          <a:effectLst/>
+        </p:spPr>
+        <p:style>
+          <a:lnRef idx="1">
+            <a:schemeClr val="accent1"/>
+          </a:lnRef>
+          <a:fillRef idx="3">
+            <a:schemeClr val="accent1"/>
+          </a:fillRef>
+          <a:effectRef idx="2">
+            <a:schemeClr val="accent1"/>
+          </a:effectRef>
+          <a:fontRef idx="minor">
+            <a:schemeClr val="lt1"/>
+          </a:fontRef>
+        </p:style>
+        <p:txBody>
+          <a:bodyPr rtlCol="0" anchor="ctr"/>
+          <a:lstStyle/>
+          <a:p>
+            <a:pPr algn="ctr"/>
+          </a:p>
+        </p:txBody>
+      </p:sp>
+      <p:sp>
+        <p:nvSpPr>
+          <p:cNvPr id="13" name="Oval 12"/>
+          <p:cNvSpPr/>
+          <p:nvPr/>
+        </p:nvSpPr>
+        <p:spPr>
+          <a:xfrm>
+            <a:off x="8449056" y="2176272"/>
+            <a:ext cx="329184" cy="329184"/>
+          </a:xfrm>
+          <a:prstGeom prst="ellipse">
+            <a:avLst/>
+          </a:prstGeom>
+          <a:solidFill>
+            <a:srgbClr val="1C7293"/>
+          </a:solidFill>
+          <a:ln>
+            <a:noFill/>
+          </a:ln>
+          <a:effectLst/>
+        </p:spPr>
+        <p:style>
+          <a:lnRef idx="1">
+            <a:schemeClr val="accent1"/>
+          </a:lnRef>
+          <a:fillRef idx="3">
+            <a:schemeClr val="accent1"/>
+          </a:fillRef>
+          <a:effectRef idx="2">
+            <a:schemeClr val="accent1"/>
+          </a:effectRef>
+          <a:fontRef idx="minor">
+            <a:schemeClr val="lt1"/>
+          </a:fontRef>
+        </p:style>
+        <p:txBody>
+          <a:bodyPr rtlCol="0" anchor="ctr"/>
+          <a:lstStyle/>
+          <a:p>
+            <a:pPr algn="ctr"/>
+          </a:p>
+        </p:txBody>
+      </p:sp>
+      <p:sp>
+        <p:nvSpPr>
+          <p:cNvPr id="14" name="TextBox 13"/>
+          <p:cNvSpPr txBox="1"/>
+          <p:nvPr/>
+        </p:nvSpPr>
+        <p:spPr>
+          <a:xfrm>
+            <a:off x="8924544" y="2194560"/>
+            <a:ext cx="2560320" cy="365760"/>
+          </a:xfrm>
+          <a:prstGeom prst="rect">
+            <a:avLst/>
+          </a:prstGeom>
+          <a:noFill/>
+        </p:spPr>
+        <p:txBody>
+          <a:bodyPr wrap="square" lIns="0" rIns="0" tIns="0" bIns="0" anchor="t">
+            <a:spAutoFit/>
+          </a:bodyPr>
+          <a:lstStyle/>
+          <a:p>
+            <a:pPr algn="l">
+              <a:spcAft>
+                <a:spcPts val="600"/>
+              </a:spcAft>
+            </a:pPr>
+            <a:r>
+              <a:rPr sz="1450" b="1" i="0">
+                <a:solidFill>
+                  <a:srgbClr val="12263A"/>
+                </a:solidFill>
+                <a:latin typeface="Cambria"/>
+              </a:rPr>
+              <a:t>Remaining levels</a:t>
+            </a:r>
+          </a:p>
+        </p:txBody>
+      </p:sp>
+      <p:sp>
+        <p:nvSpPr>
+          <p:cNvPr id="15" name="TextBox 14"/>
+          <p:cNvSpPr txBox="1"/>
+          <p:nvPr/>
+        </p:nvSpPr>
+        <p:spPr>
+          <a:xfrm>
+            <a:off x="8449056" y="2697480"/>
+            <a:ext cx="2971800" cy="960120"/>
+          </a:xfrm>
+          <a:prstGeom prst="rect">
+            <a:avLst/>
+          </a:prstGeom>
+          <a:noFill/>
+        </p:spPr>
+        <p:txBody>
+          <a:bodyPr wrap="square" lIns="0" rIns="0" tIns="0" bIns="0" anchor="t">
+            <a:spAutoFit/>
+          </a:bodyPr>
+          <a:lstStyle/>
+          <a:p>
+            <a:pPr algn="l">
+              <a:spcAft>
+                <a:spcPts val="600"/>
+              </a:spcAft>
+            </a:pPr>
+            <a:r>
+              <a:rPr sz="1200" b="0" i="0">
+                <a:solidFill>
+                  <a:srgbClr val="5A6672"/>
+                </a:solidFill>
+                <a:latin typeface="Calibri"/>
+              </a:rPr>
+              <a:t>Horizon, cross-ratio, conics, reflections and agreement with depth networks.</a:t>
+            </a:r>
+          </a:p>
+        </p:txBody>
+      </p:sp>
+      <p:sp>
+        <p:nvSpPr>
+          <p:cNvPr id="16" name="Rounded Rectangle 15"/>
+          <p:cNvSpPr/>
+          <p:nvPr/>
+        </p:nvSpPr>
+        <p:spPr>
+          <a:xfrm>
+            <a:off x="640080" y="4114800"/>
+            <a:ext cx="3520440" cy="1874519"/>
+          </a:xfrm>
+          <a:prstGeom prst="roundRect">
+            <a:avLst>
+              <a:gd name="adj" fmla="val 6000"/>
+            </a:avLst>
+          </a:prstGeom>
+          <a:solidFill>
+            <a:srgbClr val="F4F6F8"/>
+          </a:solidFill>
+          <a:ln>
+            <a:noFill/>
+          </a:ln>
+          <a:effectLst/>
+        </p:spPr>
+        <p:style>
+          <a:lnRef idx="1">
+            <a:schemeClr val="accent1"/>
+          </a:lnRef>
+          <a:fillRef idx="3">
+            <a:schemeClr val="accent1"/>
+          </a:fillRef>
+          <a:effectRef idx="2">
+            <a:schemeClr val="accent1"/>
+          </a:effectRef>
+          <a:fontRef idx="minor">
+            <a:schemeClr val="lt1"/>
+          </a:fontRef>
+        </p:style>
+        <p:txBody>
+          <a:bodyPr rtlCol="0" anchor="ctr"/>
+          <a:lstStyle/>
+          <a:p>
+            <a:pPr algn="ctr"/>
+          </a:p>
+        </p:txBody>
+      </p:sp>
+      <p:sp>
+        <p:nvSpPr>
+          <p:cNvPr id="17" name="Oval 16"/>
+          <p:cNvSpPr/>
+          <p:nvPr/>
+        </p:nvSpPr>
+        <p:spPr>
+          <a:xfrm>
+            <a:off x="914400" y="4370832"/>
+            <a:ext cx="329184" cy="329184"/>
+          </a:xfrm>
+          <a:prstGeom prst="ellipse">
+            <a:avLst/>
+          </a:prstGeom>
+          <a:solidFill>
+            <a:srgbClr val="E8A33D"/>
+          </a:solidFill>
+          <a:ln>
+            <a:noFill/>
+          </a:ln>
+          <a:effectLst/>
+        </p:spPr>
+        <p:style>
+          <a:lnRef idx="1">
+            <a:schemeClr val="accent1"/>
+          </a:lnRef>
+          <a:fillRef idx="3">
+            <a:schemeClr val="accent1"/>
+          </a:fillRef>
+          <a:effectRef idx="2">
+            <a:schemeClr val="accent1"/>
+          </a:effectRef>
+          <a:fontRef idx="minor">
+            <a:schemeClr val="lt1"/>
+          </a:fontRef>
+        </p:style>
+        <p:txBody>
+          <a:bodyPr rtlCol="0" anchor="ctr"/>
+          <a:lstStyle/>
+          <a:p>
+            <a:pPr algn="ctr"/>
+          </a:p>
+        </p:txBody>
+      </p:sp>
+      <p:sp>
+        <p:nvSpPr>
+          <p:cNvPr id="18" name="TextBox 17"/>
+          <p:cNvSpPr txBox="1"/>
+          <p:nvPr/>
+        </p:nvSpPr>
+        <p:spPr>
+          <a:xfrm>
+            <a:off x="1389888" y="4389120"/>
+            <a:ext cx="2560320" cy="365760"/>
+          </a:xfrm>
+          <a:prstGeom prst="rect">
+            <a:avLst/>
+          </a:prstGeom>
+          <a:noFill/>
+        </p:spPr>
+        <p:txBody>
+          <a:bodyPr wrap="square" lIns="0" rIns="0" tIns="0" bIns="0" anchor="t">
+            <a:spAutoFit/>
+          </a:bodyPr>
+          <a:lstStyle/>
+          <a:p>
+            <a:pPr algn="l">
+              <a:spcAft>
+                <a:spcPts val="600"/>
+              </a:spcAft>
+            </a:pPr>
+            <a:r>
+              <a:rPr sz="1450" b="1" i="0">
+                <a:solidFill>
+                  <a:srgbClr val="12263A"/>
+                </a:solidFill>
+                <a:latin typeface="Cambria"/>
+              </a:rPr>
+              <a:t>Mechanism</a:t>
+            </a:r>
+          </a:p>
+        </p:txBody>
+      </p:sp>
+      <p:sp>
+        <p:nvSpPr>
+          <p:cNvPr id="19" name="TextBox 18"/>
+          <p:cNvSpPr txBox="1"/>
+          <p:nvPr/>
+        </p:nvSpPr>
+        <p:spPr>
+          <a:xfrm>
+            <a:off x="914400" y="4892040"/>
+            <a:ext cx="2971800" cy="960120"/>
+          </a:xfrm>
+          <a:prstGeom prst="rect">
+            <a:avLst/>
+          </a:prstGeom>
+          <a:noFill/>
+        </p:spPr>
+        <p:txBody>
+          <a:bodyPr wrap="square" lIns="0" rIns="0" tIns="0" bIns="0" anchor="t">
+            <a:spAutoFit/>
+          </a:bodyPr>
+          <a:lstStyle/>
+          <a:p>
+            <a:pPr algn="l">
+              <a:spcAft>
+                <a:spcPts val="600"/>
+              </a:spcAft>
+            </a:pPr>
+            <a:r>
+              <a:rPr sz="1200" b="0" i="0">
+                <a:solidFill>
+                  <a:srgbClr val="5A6672"/>
+                </a:solidFill>
+                <a:latin typeface="Calibri"/>
+              </a:rPr>
+              <a:t>Why does scale not fix the camera? Aspect ratio is ruled out; resolution and receptive field remain.</a:t>
+            </a:r>
+          </a:p>
+        </p:txBody>
+      </p:sp>
+      <p:sp>
+        <p:nvSpPr>
+          <p:cNvPr id="20" name="Rounded Rectangle 19"/>
+          <p:cNvSpPr/>
+          <p:nvPr/>
+        </p:nvSpPr>
+        <p:spPr>
+          <a:xfrm>
+            <a:off x="4407408" y="4114800"/>
+            <a:ext cx="3520440" cy="1874519"/>
+          </a:xfrm>
+          <a:prstGeom prst="roundRect">
+            <a:avLst>
+              <a:gd name="adj" fmla="val 6000"/>
+            </a:avLst>
+          </a:prstGeom>
+          <a:solidFill>
+            <a:srgbClr val="F4F6F8"/>
+          </a:solidFill>
+          <a:ln>
+            <a:noFill/>
+          </a:ln>
+          <a:effectLst/>
+        </p:spPr>
+        <p:style>
+          <a:lnRef idx="1">
+            <a:schemeClr val="accent1"/>
+          </a:lnRef>
+          <a:fillRef idx="3">
+            <a:schemeClr val="accent1"/>
+          </a:fillRef>
+          <a:effectRef idx="2">
+            <a:schemeClr val="accent1"/>
+          </a:effectRef>
+          <a:fontRef idx="minor">
+            <a:schemeClr val="lt1"/>
+          </a:fontRef>
+        </p:style>
+        <p:txBody>
+          <a:bodyPr rtlCol="0" anchor="ctr"/>
+          <a:lstStyle/>
+          <a:p>
+            <a:pPr algn="ctr"/>
+          </a:p>
+        </p:txBody>
+      </p:sp>
+      <p:sp>
+        <p:nvSpPr>
+          <p:cNvPr id="21" name="Oval 20"/>
+          <p:cNvSpPr/>
+          <p:nvPr/>
+        </p:nvSpPr>
+        <p:spPr>
+          <a:xfrm>
+            <a:off x="4681728" y="4370832"/>
+            <a:ext cx="329184" cy="329184"/>
+          </a:xfrm>
+          <a:prstGeom prst="ellipse">
+            <a:avLst/>
+          </a:prstGeom>
+          <a:solidFill>
+            <a:srgbClr val="12263A"/>
+          </a:solidFill>
+          <a:ln>
+            <a:noFill/>
+          </a:ln>
+          <a:effectLst/>
+        </p:spPr>
+        <p:style>
+          <a:lnRef idx="1">
+            <a:schemeClr val="accent1"/>
+          </a:lnRef>
+          <a:fillRef idx="3">
+            <a:schemeClr val="accent1"/>
+          </a:fillRef>
+          <a:effectRef idx="2">
+            <a:schemeClr val="accent1"/>
+          </a:effectRef>
+          <a:fontRef idx="minor">
+            <a:schemeClr val="lt1"/>
+          </a:fontRef>
+        </p:style>
+        <p:txBody>
+          <a:bodyPr rtlCol="0" anchor="ctr"/>
+          <a:lstStyle/>
+          <a:p>
+            <a:pPr algn="ctr"/>
+          </a:p>
+        </p:txBody>
+      </p:sp>
+      <p:sp>
+        <p:nvSpPr>
+          <p:cNvPr id="22" name="TextBox 21"/>
+          <p:cNvSpPr txBox="1"/>
+          <p:nvPr/>
+        </p:nvSpPr>
+        <p:spPr>
+          <a:xfrm>
+            <a:off x="5157216" y="4389120"/>
+            <a:ext cx="2560320" cy="365760"/>
+          </a:xfrm>
+          <a:prstGeom prst="rect">
+            <a:avLst/>
+          </a:prstGeom>
+          <a:noFill/>
+        </p:spPr>
+        <p:txBody>
+          <a:bodyPr wrap="square" lIns="0" rIns="0" tIns="0" bIns="0" anchor="t">
+            <a:spAutoFit/>
+          </a:bodyPr>
+          <a:lstStyle/>
+          <a:p>
+            <a:pPr algn="l">
+              <a:spcAft>
+                <a:spcPts val="600"/>
+              </a:spcAft>
+            </a:pPr>
+            <a:r>
+              <a:rPr sz="1450" b="1" i="0">
+                <a:solidFill>
+                  <a:srgbClr val="12263A"/>
+                </a:solidFill>
+                <a:latin typeface="Cambria"/>
+              </a:rPr>
+              <a:t>Atlanta-style regional fit</a:t>
+            </a:r>
+          </a:p>
+        </p:txBody>
+      </p:sp>
+      <p:sp>
+        <p:nvSpPr>
+          <p:cNvPr id="23" name="TextBox 22"/>
+          <p:cNvSpPr txBox="1"/>
+          <p:nvPr/>
+        </p:nvSpPr>
+        <p:spPr>
+          <a:xfrm>
+            <a:off x="4681728" y="4892040"/>
+            <a:ext cx="2971800" cy="960120"/>
+          </a:xfrm>
+          <a:prstGeom prst="rect">
+            <a:avLst/>
+          </a:prstGeom>
+          <a:noFill/>
+        </p:spPr>
+        <p:txBody>
+          <a:bodyPr wrap="square" lIns="0" rIns="0" tIns="0" bIns="0" anchor="t">
+            <a:spAutoFit/>
+          </a:bodyPr>
+          <a:lstStyle/>
+          <a:p>
+            <a:pPr algn="l">
+              <a:spcAft>
+                <a:spcPts val="600"/>
+              </a:spcAft>
+            </a:pPr>
+            <a:r>
+              <a:rPr sz="1200" b="0" i="0">
+                <a:solidFill>
+                  <a:srgbClr val="5A6672"/>
+                </a:solidFill>
+                <a:latin typeface="Calibri"/>
+              </a:rPr>
+              <a:t>Redo the regional analysis without assuming every vanishing point pair is at right angles.</a:t>
+            </a:r>
+          </a:p>
+        </p:txBody>
+      </p:sp>
+      <p:sp>
+        <p:nvSpPr>
+          <p:cNvPr id="24" name="Rounded Rectangle 23"/>
+          <p:cNvSpPr/>
+          <p:nvPr/>
+        </p:nvSpPr>
+        <p:spPr>
+          <a:xfrm>
+            <a:off x="8174736" y="4114800"/>
+            <a:ext cx="3520440" cy="1874519"/>
+          </a:xfrm>
+          <a:prstGeom prst="roundRect">
+            <a:avLst>
+              <a:gd name="adj" fmla="val 6000"/>
+            </a:avLst>
+          </a:prstGeom>
+          <a:solidFill>
+            <a:srgbClr val="F4F6F8"/>
+          </a:solidFill>
+          <a:ln>
+            <a:noFill/>
+          </a:ln>
+          <a:effectLst/>
+        </p:spPr>
+        <p:style>
+          <a:lnRef idx="1">
+            <a:schemeClr val="accent1"/>
+          </a:lnRef>
+          <a:fillRef idx="3">
+            <a:schemeClr val="accent1"/>
+          </a:fillRef>
+          <a:effectRef idx="2">
+            <a:schemeClr val="accent1"/>
+          </a:effectRef>
+          <a:fontRef idx="minor">
+            <a:schemeClr val="lt1"/>
+          </a:fontRef>
+        </p:style>
+        <p:txBody>
+          <a:bodyPr rtlCol="0" anchor="ctr"/>
+          <a:lstStyle/>
+          <a:p>
+            <a:pPr algn="ctr"/>
+          </a:p>
+        </p:txBody>
+      </p:sp>
+      <p:sp>
+        <p:nvSpPr>
+          <p:cNvPr id="25" name="Oval 24"/>
+          <p:cNvSpPr/>
+          <p:nvPr/>
+        </p:nvSpPr>
+        <p:spPr>
+          <a:xfrm>
+            <a:off x="8449056" y="4370832"/>
+            <a:ext cx="329184" cy="329184"/>
+          </a:xfrm>
+          <a:prstGeom prst="ellipse">
+            <a:avLst/>
+          </a:prstGeom>
+          <a:solidFill>
+            <a:srgbClr val="1C7293"/>
+          </a:solidFill>
+          <a:ln>
+            <a:noFill/>
+          </a:ln>
+          <a:effectLst/>
+        </p:spPr>
+        <p:style>
+          <a:lnRef idx="1">
+            <a:schemeClr val="accent1"/>
+          </a:lnRef>
+          <a:fillRef idx="3">
+            <a:schemeClr val="accent1"/>
+          </a:fillRef>
+          <a:effectRef idx="2">
+            <a:schemeClr val="accent1"/>
+          </a:effectRef>
+          <a:fontRef idx="minor">
+            <a:schemeClr val="lt1"/>
+          </a:fontRef>
+        </p:style>
+        <p:txBody>
+          <a:bodyPr rtlCol="0" anchor="ctr"/>
+          <a:lstStyle/>
+          <a:p>
+            <a:pPr algn="ctr"/>
+          </a:p>
+        </p:txBody>
+      </p:sp>
+      <p:sp>
+        <p:nvSpPr>
+          <p:cNvPr id="26" name="TextBox 25"/>
+          <p:cNvSpPr txBox="1"/>
+          <p:nvPr/>
+        </p:nvSpPr>
+        <p:spPr>
+          <a:xfrm>
+            <a:off x="8924544" y="4389120"/>
+            <a:ext cx="2560320" cy="365760"/>
+          </a:xfrm>
+          <a:prstGeom prst="rect">
+            <a:avLst/>
+          </a:prstGeom>
+          <a:noFill/>
+        </p:spPr>
+        <p:txBody>
+          <a:bodyPr wrap="square" lIns="0" rIns="0" tIns="0" bIns="0" anchor="t">
+            <a:spAutoFit/>
+          </a:bodyPr>
+          <a:lstStyle/>
+          <a:p>
+            <a:pPr algn="l">
+              <a:spcAft>
+                <a:spcPts val="600"/>
+              </a:spcAft>
+            </a:pPr>
+            <a:r>
+              <a:rPr sz="1450" b="1" i="0">
+                <a:solidFill>
+                  <a:srgbClr val="12263A"/>
+                </a:solidFill>
+                <a:latin typeface="Cambria"/>
+              </a:rPr>
+              <a:t>Perception study</a:t>
+            </a:r>
+          </a:p>
+        </p:txBody>
+      </p:sp>
+      <p:sp>
+        <p:nvSpPr>
+          <p:cNvPr id="27" name="TextBox 26"/>
+          <p:cNvSpPr txBox="1"/>
+          <p:nvPr/>
+        </p:nvSpPr>
+        <p:spPr>
+          <a:xfrm>
+            <a:off x="8449056" y="4892040"/>
+            <a:ext cx="2971800" cy="960120"/>
+          </a:xfrm>
+          <a:prstGeom prst="rect">
+            <a:avLst/>
+          </a:prstGeom>
+          <a:noFill/>
+        </p:spPr>
+        <p:txBody>
+          <a:bodyPr wrap="square" lIns="0" rIns="0" tIns="0" bIns="0" anchor="t">
+            <a:spAutoFit/>
+          </a:bodyPr>
+          <a:lstStyle/>
+          <a:p>
+            <a:pPr algn="l">
+              <a:spcAft>
+                <a:spcPts val="600"/>
+              </a:spcAft>
+            </a:pPr>
+            <a:r>
+              <a:rPr sz="1200" b="0" i="0">
+                <a:solidFill>
+                  <a:srgbClr val="5A6672"/>
+                </a:solidFill>
+                <a:latin typeface="Calibri"/>
+              </a:rPr>
+              <a:t>Which violations are severe in the maths but unnoticed by people.</a:t>
+            </a:r>
+          </a:p>
+        </p:txBody>
+      </p:sp>
+    </p:spTree>
+  </p:cSld>
+  <p:clrMapOvr>
+    <a:masterClrMapping/>
+  </p:clrMapOvr>
+</p:sld>
+</file>
+
+<file path=ppt/slides/slide23.xml><?xml version="1.0" encoding="utf-8"?>
 <p:sld xmlns:a="http://schemas.openxmlformats.org/drawingml/2006/main" xmlns:p="http://schemas.openxmlformats.org/presentationml/2006/main" xmlns:r="http://schemas.openxmlformats.org/officeDocument/2006/relationships">
   <p:cSld>
     <p:spTree>
